--- a/SI/Programação para Internet/Módulo 2 - JavaScript/Aula03 - Implementado o CRUD/Implementando CRUD.pptx
+++ b/SI/Programação para Internet/Módulo 2 - JavaScript/Aula03 - Implementado o CRUD/Implementando CRUD.pptx
@@ -16,16 +16,18 @@
     <p:sldId id="275" r:id="rId10"/>
     <p:sldId id="276" r:id="rId11"/>
     <p:sldId id="277" r:id="rId12"/>
-    <p:sldId id="278" r:id="rId13"/>
-    <p:sldId id="272" r:id="rId14"/>
-    <p:sldId id="273" r:id="rId15"/>
-    <p:sldId id="274" r:id="rId16"/>
-    <p:sldId id="261" r:id="rId17"/>
-    <p:sldId id="262" r:id="rId18"/>
-    <p:sldId id="263" r:id="rId19"/>
-    <p:sldId id="265" r:id="rId20"/>
-    <p:sldId id="267" r:id="rId21"/>
-    <p:sldId id="266" r:id="rId22"/>
+    <p:sldId id="279" r:id="rId13"/>
+    <p:sldId id="278" r:id="rId14"/>
+    <p:sldId id="280" r:id="rId15"/>
+    <p:sldId id="272" r:id="rId16"/>
+    <p:sldId id="273" r:id="rId17"/>
+    <p:sldId id="274" r:id="rId18"/>
+    <p:sldId id="261" r:id="rId19"/>
+    <p:sldId id="262" r:id="rId20"/>
+    <p:sldId id="263" r:id="rId21"/>
+    <p:sldId id="265" r:id="rId22"/>
+    <p:sldId id="267" r:id="rId23"/>
+    <p:sldId id="266" r:id="rId24"/>
   </p:sldIdLst>
   <p:sldSz cx="12192000" cy="6858000"/>
   <p:notesSz cx="6858000" cy="9144000"/>
@@ -712,7 +714,7 @@
           <a:p>
             <a:fld id="{CDD55C27-F8C6-4481-8569-CAC50CAE9F1F}" type="datetimeFigureOut">
               <a:rPr lang="pt-BR" smtClean="0"/>
-              <a:t>31/08/2026</a:t>
+              <a:t>01/09/2026</a:t>
             </a:fld>
             <a:endParaRPr lang="pt-BR"/>
           </a:p>
@@ -849,7 +851,7 @@
           <a:p>
             <a:fld id="{CDD55C27-F8C6-4481-8569-CAC50CAE9F1F}" type="datetimeFigureOut">
               <a:rPr lang="pt-BR" smtClean="0"/>
-              <a:t>31/08/2026</a:t>
+              <a:t>01/09/2026</a:t>
             </a:fld>
             <a:endParaRPr lang="pt-BR"/>
           </a:p>
@@ -1569,7 +1571,7 @@
           <a:p>
             <a:fld id="{CDD55C27-F8C6-4481-8569-CAC50CAE9F1F}" type="datetimeFigureOut">
               <a:rPr lang="pt-BR" smtClean="0"/>
-              <a:t>31/08/2026</a:t>
+              <a:t>01/09/2026</a:t>
             </a:fld>
             <a:endParaRPr lang="pt-BR"/>
           </a:p>
@@ -1749,7 +1751,7 @@
           <a:p>
             <a:fld id="{CDD55C27-F8C6-4481-8569-CAC50CAE9F1F}" type="datetimeFigureOut">
               <a:rPr lang="pt-BR" smtClean="0"/>
-              <a:t>31/08/2026</a:t>
+              <a:t>01/09/2026</a:t>
             </a:fld>
             <a:endParaRPr lang="pt-BR"/>
           </a:p>
@@ -1929,7 +1931,7 @@
           <a:p>
             <a:fld id="{CDD55C27-F8C6-4481-8569-CAC50CAE9F1F}" type="datetimeFigureOut">
               <a:rPr lang="pt-BR" smtClean="0"/>
-              <a:t>31/08/2026</a:t>
+              <a:t>01/09/2026</a:t>
             </a:fld>
             <a:endParaRPr lang="pt-BR"/>
           </a:p>
@@ -2140,7 +2142,7 @@
           <a:p>
             <a:fld id="{CDD55C27-F8C6-4481-8569-CAC50CAE9F1F}" type="datetimeFigureOut">
               <a:rPr lang="pt-BR" smtClean="0"/>
-              <a:t>31/08/2026</a:t>
+              <a:t>01/09/2026</a:t>
             </a:fld>
             <a:endParaRPr lang="pt-BR"/>
           </a:p>
@@ -2595,7 +2597,7 @@
           <a:p>
             <a:fld id="{CDD55C27-F8C6-4481-8569-CAC50CAE9F1F}" type="datetimeFigureOut">
               <a:rPr lang="pt-BR" smtClean="0"/>
-              <a:t>31/08/2026</a:t>
+              <a:t>01/09/2026</a:t>
             </a:fld>
             <a:endParaRPr lang="pt-BR"/>
           </a:p>
@@ -3300,214 +3302,12 @@
           </a:p>
         </p:txBody>
       </p:sp>
-      <p:sp>
-        <p:nvSpPr>
-          <p:cNvPr id="4" name="Espaço Reservado para Conteúdo 5">
-            <a:extLst>
-              <a:ext uri="{FF2B5EF4-FFF2-40B4-BE49-F238E27FC236}">
-                <a16:creationId xmlns:a16="http://schemas.microsoft.com/office/drawing/2014/main" id="{3290F7B8-7F16-99CB-32B3-DFD2C0FCCBDF}"/>
-              </a:ext>
-            </a:extLst>
-          </p:cNvPr>
-          <p:cNvSpPr txBox="1">
-            <a:spLocks/>
-          </p:cNvSpPr>
-          <p:nvPr/>
-        </p:nvSpPr>
-        <p:spPr>
-          <a:xfrm>
-            <a:off x="592347" y="1890767"/>
-            <a:ext cx="3815751" cy="366590"/>
-          </a:xfrm>
-          <a:prstGeom prst="rect">
-            <a:avLst/>
-          </a:prstGeom>
-        </p:spPr>
-        <p:txBody>
-          <a:bodyPr/>
-          <a:lstStyle>
-            <a:lvl1pPr marL="0" indent="0" algn="just" defTabSz="914400" rtl="0" eaLnBrk="1" latinLnBrk="0" hangingPunct="1">
-              <a:lnSpc>
-                <a:spcPct val="150000"/>
-              </a:lnSpc>
-              <a:spcBef>
-                <a:spcPts val="0"/>
-              </a:spcBef>
-              <a:buFont typeface="Arial" panose="020B0604020202020204" pitchFamily="34" charset="0"/>
-              <a:buNone/>
-              <a:defRPr sz="2000" kern="1200">
-                <a:solidFill>
-                  <a:schemeClr val="tx1"/>
-                </a:solidFill>
-                <a:latin typeface="Times New Roman" panose="02020603050405020304" pitchFamily="18" charset="0"/>
-                <a:ea typeface="+mn-ea"/>
-                <a:cs typeface="Times New Roman" panose="02020603050405020304" pitchFamily="18" charset="0"/>
-              </a:defRPr>
-            </a:lvl1pPr>
-            <a:lvl2pPr marL="457200" indent="0" algn="just" defTabSz="914400" rtl="0" eaLnBrk="1" latinLnBrk="0" hangingPunct="1">
-              <a:lnSpc>
-                <a:spcPct val="150000"/>
-              </a:lnSpc>
-              <a:spcBef>
-                <a:spcPts val="0"/>
-              </a:spcBef>
-              <a:buFont typeface="Arial" panose="020B0604020202020204" pitchFamily="34" charset="0"/>
-              <a:buNone/>
-              <a:defRPr sz="1600" kern="1200">
-                <a:solidFill>
-                  <a:schemeClr val="tx1"/>
-                </a:solidFill>
-                <a:latin typeface="Times New Roman" panose="02020603050405020304" pitchFamily="18" charset="0"/>
-                <a:ea typeface="+mn-ea"/>
-                <a:cs typeface="Times New Roman" panose="02020603050405020304" pitchFamily="18" charset="0"/>
-              </a:defRPr>
-            </a:lvl2pPr>
-            <a:lvl3pPr marL="914400" indent="0" algn="just" defTabSz="914400" rtl="0" eaLnBrk="1" latinLnBrk="0" hangingPunct="1">
-              <a:lnSpc>
-                <a:spcPct val="150000"/>
-              </a:lnSpc>
-              <a:spcBef>
-                <a:spcPts val="0"/>
-              </a:spcBef>
-              <a:buFont typeface="Arial" panose="020B0604020202020204" pitchFamily="34" charset="0"/>
-              <a:buNone/>
-              <a:defRPr sz="1400" kern="1200">
-                <a:solidFill>
-                  <a:schemeClr val="tx1"/>
-                </a:solidFill>
-                <a:latin typeface="Times New Roman" panose="02020603050405020304" pitchFamily="18" charset="0"/>
-                <a:ea typeface="+mn-ea"/>
-                <a:cs typeface="Times New Roman" panose="02020603050405020304" pitchFamily="18" charset="0"/>
-              </a:defRPr>
-            </a:lvl3pPr>
-            <a:lvl4pPr marL="1371600" indent="0" algn="just" defTabSz="914400" rtl="0" eaLnBrk="1" latinLnBrk="0" hangingPunct="1">
-              <a:lnSpc>
-                <a:spcPct val="150000"/>
-              </a:lnSpc>
-              <a:spcBef>
-                <a:spcPts val="0"/>
-              </a:spcBef>
-              <a:buFont typeface="Arial" panose="020B0604020202020204" pitchFamily="34" charset="0"/>
-              <a:buNone/>
-              <a:defRPr sz="1200" kern="1200">
-                <a:solidFill>
-                  <a:schemeClr val="tx1"/>
-                </a:solidFill>
-                <a:latin typeface="Times New Roman" panose="02020603050405020304" pitchFamily="18" charset="0"/>
-                <a:ea typeface="+mn-ea"/>
-                <a:cs typeface="Times New Roman" panose="02020603050405020304" pitchFamily="18" charset="0"/>
-              </a:defRPr>
-            </a:lvl4pPr>
-            <a:lvl5pPr marL="1828800" indent="0" algn="just" defTabSz="914400" rtl="0" eaLnBrk="1" latinLnBrk="0" hangingPunct="1">
-              <a:lnSpc>
-                <a:spcPct val="150000"/>
-              </a:lnSpc>
-              <a:spcBef>
-                <a:spcPts val="0"/>
-              </a:spcBef>
-              <a:buFont typeface="Arial" panose="020B0604020202020204" pitchFamily="34" charset="0"/>
-              <a:buNone/>
-              <a:defRPr sz="1000" kern="1200">
-                <a:solidFill>
-                  <a:schemeClr val="tx1"/>
-                </a:solidFill>
-                <a:latin typeface="Times New Roman" panose="02020603050405020304" pitchFamily="18" charset="0"/>
-                <a:ea typeface="+mn-ea"/>
-                <a:cs typeface="Times New Roman" panose="02020603050405020304" pitchFamily="18" charset="0"/>
-              </a:defRPr>
-            </a:lvl5pPr>
-            <a:lvl6pPr marL="2514600" indent="-228600" algn="l" defTabSz="914400" rtl="0" eaLnBrk="1" latinLnBrk="0" hangingPunct="1">
-              <a:lnSpc>
-                <a:spcPct val="90000"/>
-              </a:lnSpc>
-              <a:spcBef>
-                <a:spcPts val="500"/>
-              </a:spcBef>
-              <a:buFont typeface="Arial" panose="020B0604020202020204" pitchFamily="34" charset="0"/>
-              <a:buChar char="•"/>
-              <a:defRPr sz="1800" kern="1200">
-                <a:solidFill>
-                  <a:schemeClr val="tx1"/>
-                </a:solidFill>
-                <a:latin typeface="+mn-lt"/>
-                <a:ea typeface="+mn-ea"/>
-                <a:cs typeface="+mn-cs"/>
-              </a:defRPr>
-            </a:lvl6pPr>
-            <a:lvl7pPr marL="2971800" indent="-228600" algn="l" defTabSz="914400" rtl="0" eaLnBrk="1" latinLnBrk="0" hangingPunct="1">
-              <a:lnSpc>
-                <a:spcPct val="90000"/>
-              </a:lnSpc>
-              <a:spcBef>
-                <a:spcPts val="500"/>
-              </a:spcBef>
-              <a:buFont typeface="Arial" panose="020B0604020202020204" pitchFamily="34" charset="0"/>
-              <a:buChar char="•"/>
-              <a:defRPr sz="1800" kern="1200">
-                <a:solidFill>
-                  <a:schemeClr val="tx1"/>
-                </a:solidFill>
-                <a:latin typeface="+mn-lt"/>
-                <a:ea typeface="+mn-ea"/>
-                <a:cs typeface="+mn-cs"/>
-              </a:defRPr>
-            </a:lvl7pPr>
-            <a:lvl8pPr marL="3429000" indent="-228600" algn="l" defTabSz="914400" rtl="0" eaLnBrk="1" latinLnBrk="0" hangingPunct="1">
-              <a:lnSpc>
-                <a:spcPct val="90000"/>
-              </a:lnSpc>
-              <a:spcBef>
-                <a:spcPts val="500"/>
-              </a:spcBef>
-              <a:buFont typeface="Arial" panose="020B0604020202020204" pitchFamily="34" charset="0"/>
-              <a:buChar char="•"/>
-              <a:defRPr sz="1800" kern="1200">
-                <a:solidFill>
-                  <a:schemeClr val="tx1"/>
-                </a:solidFill>
-                <a:latin typeface="+mn-lt"/>
-                <a:ea typeface="+mn-ea"/>
-                <a:cs typeface="+mn-cs"/>
-              </a:defRPr>
-            </a:lvl8pPr>
-            <a:lvl9pPr marL="3886200" indent="-228600" algn="l" defTabSz="914400" rtl="0" eaLnBrk="1" latinLnBrk="0" hangingPunct="1">
-              <a:lnSpc>
-                <a:spcPct val="90000"/>
-              </a:lnSpc>
-              <a:spcBef>
-                <a:spcPts val="500"/>
-              </a:spcBef>
-              <a:buFont typeface="Arial" panose="020B0604020202020204" pitchFamily="34" charset="0"/>
-              <a:buChar char="•"/>
-              <a:defRPr sz="1800" kern="1200">
-                <a:solidFill>
-                  <a:schemeClr val="tx1"/>
-                </a:solidFill>
-                <a:latin typeface="+mn-lt"/>
-                <a:ea typeface="+mn-ea"/>
-                <a:cs typeface="+mn-cs"/>
-              </a:defRPr>
-            </a:lvl9pPr>
-          </a:lstStyle>
-          <a:p>
-            <a:pPr>
-              <a:lnSpc>
-                <a:spcPct val="100000"/>
-              </a:lnSpc>
-            </a:pPr>
-            <a:r>
-              <a:rPr lang="pt-BR" dirty="0"/>
-              <a:t>Dentro da pasta do projeto:</a:t>
-            </a:r>
-          </a:p>
-        </p:txBody>
-      </p:sp>
       <p:grpSp>
         <p:nvGrpSpPr>
-          <p:cNvPr id="5" name="Agrupar 4">
-            <a:extLst>
-              <a:ext uri="{FF2B5EF4-FFF2-40B4-BE49-F238E27FC236}">
-                <a16:creationId xmlns:a16="http://schemas.microsoft.com/office/drawing/2014/main" id="{CC8B7FA4-5037-B67A-64A5-F1AA40011401}"/>
+          <p:cNvPr id="8" name="Agrupar 7">
+            <a:extLst>
+              <a:ext uri="{FF2B5EF4-FFF2-40B4-BE49-F238E27FC236}">
+                <a16:creationId xmlns:a16="http://schemas.microsoft.com/office/drawing/2014/main" id="{B6832F4C-E25F-4917-82C9-763B1C3B2A50}"/>
               </a:ext>
             </a:extLst>
           </p:cNvPr>
@@ -3516,218 +3316,18 @@
         </p:nvGrpSpPr>
         <p:grpSpPr>
           <a:xfrm>
-            <a:off x="749184" y="2456193"/>
-            <a:ext cx="8907433" cy="1805256"/>
-            <a:chOff x="749185" y="2527734"/>
-            <a:chExt cx="5284556" cy="1805256"/>
+            <a:off x="1413954" y="1701522"/>
+            <a:ext cx="4208253" cy="2754394"/>
+            <a:chOff x="592347" y="1691931"/>
+            <a:chExt cx="4208253" cy="2754394"/>
           </a:xfrm>
         </p:grpSpPr>
         <p:sp>
           <p:nvSpPr>
-            <p:cNvPr id="6" name="Shape 20">
+            <p:cNvPr id="4" name="Espaço Reservado para Conteúdo 5">
               <a:extLst>
                 <a:ext uri="{FF2B5EF4-FFF2-40B4-BE49-F238E27FC236}">
-                  <a16:creationId xmlns:a16="http://schemas.microsoft.com/office/drawing/2014/main" id="{2FC2A2B6-4E61-EECC-C271-E93C0C8586EE}"/>
-                </a:ext>
-              </a:extLst>
-            </p:cNvPr>
-            <p:cNvSpPr/>
-            <p:nvPr/>
-          </p:nvSpPr>
-          <p:spPr>
-            <a:xfrm>
-              <a:off x="749185" y="2527734"/>
-              <a:ext cx="5284556" cy="1805256"/>
-            </a:xfrm>
-            <a:prstGeom prst="roundRect">
-              <a:avLst>
-                <a:gd name="adj" fmla="val 8081"/>
-              </a:avLst>
-            </a:prstGeom>
-            <a:solidFill>
-              <a:srgbClr val="F2F2F2"/>
-            </a:solidFill>
-            <a:ln/>
-          </p:spPr>
-          <p:txBody>
-            <a:bodyPr/>
-            <a:lstStyle/>
-            <a:p>
-              <a:endParaRPr lang="pt-BR"/>
-            </a:p>
-          </p:txBody>
-        </p:sp>
-        <p:sp>
-          <p:nvSpPr>
-            <p:cNvPr id="7" name="Text 21">
-              <a:extLst>
-                <a:ext uri="{FF2B5EF4-FFF2-40B4-BE49-F238E27FC236}">
-                  <a16:creationId xmlns:a16="http://schemas.microsoft.com/office/drawing/2014/main" id="{DB9E0A09-415B-32F3-A09C-62522C6558CB}"/>
-                </a:ext>
-              </a:extLst>
-            </p:cNvPr>
-            <p:cNvSpPr/>
-            <p:nvPr/>
-          </p:nvSpPr>
-          <p:spPr>
-            <a:xfrm>
-              <a:off x="896521" y="2710750"/>
-              <a:ext cx="4989884" cy="1439225"/>
-            </a:xfrm>
-            <a:prstGeom prst="rect">
-              <a:avLst/>
-            </a:prstGeom>
-            <a:noFill/>
-            <a:ln/>
-          </p:spPr>
-          <p:txBody>
-            <a:bodyPr wrap="square" lIns="0" tIns="0" rIns="0" bIns="0" rtlCol="0" anchor="t">
-              <a:noAutofit/>
-            </a:bodyPr>
-            <a:lstStyle/>
-            <a:p>
-              <a:pPr marL="0" indent="0" algn="l">
-                <a:buNone/>
-              </a:pPr>
-              <a:r>
-                <a:rPr lang="en-US" kern="0" spc="-19" dirty="0">
-                  <a:solidFill>
-                    <a:srgbClr val="D73A49"/>
-                  </a:solidFill>
-                  <a:latin typeface="Consolas" pitchFamily="34" charset="0"/>
-                  <a:ea typeface="Consolas" pitchFamily="34" charset="-122"/>
-                  <a:cs typeface="Consolas" pitchFamily="34" charset="-120"/>
-                </a:rPr>
-                <a:t>tech-store/</a:t>
-              </a:r>
-            </a:p>
-            <a:p>
-              <a:pPr marL="0" indent="0" algn="l">
-                <a:buNone/>
-              </a:pPr>
-              <a:r>
-                <a:rPr lang="en-US" kern="0" spc="-19" dirty="0">
-                  <a:solidFill>
-                    <a:srgbClr val="D73A49"/>
-                  </a:solidFill>
-                  <a:latin typeface="Consolas" pitchFamily="34" charset="0"/>
-                  <a:ea typeface="Consolas" pitchFamily="34" charset="-122"/>
-                  <a:cs typeface="Consolas" pitchFamily="34" charset="-120"/>
-                </a:rPr>
-                <a:t>├── index.html</a:t>
-              </a:r>
-            </a:p>
-            <a:p>
-              <a:pPr marL="0" indent="0" algn="l">
-                <a:buNone/>
-              </a:pPr>
-              <a:r>
-                <a:rPr lang="en-US" kern="0" spc="-19" dirty="0">
-                  <a:solidFill>
-                    <a:srgbClr val="D73A49"/>
-                  </a:solidFill>
-                  <a:latin typeface="Consolas" pitchFamily="34" charset="0"/>
-                  <a:ea typeface="Consolas" pitchFamily="34" charset="-122"/>
-                  <a:cs typeface="Consolas" pitchFamily="34" charset="-120"/>
-                </a:rPr>
-                <a:t>├── </a:t>
-              </a:r>
-              <a:r>
-                <a:rPr lang="en-US" kern="0" spc="-19" dirty="0" err="1">
-                  <a:solidFill>
-                    <a:srgbClr val="D73A49"/>
-                  </a:solidFill>
-                  <a:latin typeface="Consolas" pitchFamily="34" charset="0"/>
-                  <a:ea typeface="Consolas" pitchFamily="34" charset="-122"/>
-                  <a:cs typeface="Consolas" pitchFamily="34" charset="-120"/>
-                </a:rPr>
-                <a:t>css</a:t>
-              </a:r>
-              <a:r>
-                <a:rPr lang="en-US" kern="0" spc="-19" dirty="0">
-                  <a:solidFill>
-                    <a:srgbClr val="D73A49"/>
-                  </a:solidFill>
-                  <a:latin typeface="Consolas" pitchFamily="34" charset="0"/>
-                  <a:ea typeface="Consolas" pitchFamily="34" charset="-122"/>
-                  <a:cs typeface="Consolas" pitchFamily="34" charset="-120"/>
-                </a:rPr>
-                <a:t>/</a:t>
-              </a:r>
-            </a:p>
-            <a:p>
-              <a:pPr marL="0" indent="0" algn="l">
-                <a:buNone/>
-              </a:pPr>
-              <a:r>
-                <a:rPr lang="en-US" kern="0" spc="-19" dirty="0">
-                  <a:solidFill>
-                    <a:srgbClr val="D73A49"/>
-                  </a:solidFill>
-                  <a:latin typeface="Consolas" pitchFamily="34" charset="0"/>
-                  <a:ea typeface="Consolas" pitchFamily="34" charset="-122"/>
-                  <a:cs typeface="Consolas" pitchFamily="34" charset="-120"/>
-                </a:rPr>
-                <a:t>│      └── style.css</a:t>
-              </a:r>
-            </a:p>
-            <a:p>
-              <a:pPr marL="0" indent="0" algn="l">
-                <a:buNone/>
-              </a:pPr>
-              <a:r>
-                <a:rPr lang="en-US" kern="0" spc="-19" dirty="0">
-                  <a:solidFill>
-                    <a:srgbClr val="D73A49"/>
-                  </a:solidFill>
-                  <a:latin typeface="Consolas" pitchFamily="34" charset="0"/>
-                  <a:ea typeface="Consolas" pitchFamily="34" charset="-122"/>
-                  <a:cs typeface="Consolas" pitchFamily="34" charset="-120"/>
-                </a:rPr>
-                <a:t>└── </a:t>
-              </a:r>
-              <a:r>
-                <a:rPr lang="en-US" kern="0" spc="-19" dirty="0" err="1">
-                  <a:solidFill>
-                    <a:srgbClr val="D73A49"/>
-                  </a:solidFill>
-                  <a:latin typeface="Consolas" pitchFamily="34" charset="0"/>
-                  <a:ea typeface="Consolas" pitchFamily="34" charset="-122"/>
-                  <a:cs typeface="Consolas" pitchFamily="34" charset="-120"/>
-                </a:rPr>
-                <a:t>db.json</a:t>
-              </a:r>
-              <a:endParaRPr lang="en-US" dirty="0"/>
-            </a:p>
-          </p:txBody>
-        </p:sp>
-      </p:grpSp>
-      <p:grpSp>
-        <p:nvGrpSpPr>
-          <p:cNvPr id="15" name="Agrupar 14">
-            <a:extLst>
-              <a:ext uri="{FF2B5EF4-FFF2-40B4-BE49-F238E27FC236}">
-                <a16:creationId xmlns:a16="http://schemas.microsoft.com/office/drawing/2014/main" id="{54B90C01-25E1-5695-0428-4DC67F43ADB8}"/>
-              </a:ext>
-            </a:extLst>
-          </p:cNvPr>
-          <p:cNvGrpSpPr/>
-          <p:nvPr/>
-        </p:nvGrpSpPr>
-        <p:grpSpPr>
-          <a:xfrm>
-            <a:off x="592347" y="4460285"/>
-            <a:ext cx="9064270" cy="2087164"/>
-            <a:chOff x="589474" y="3302621"/>
-            <a:chExt cx="9064270" cy="2087164"/>
-          </a:xfrm>
-        </p:grpSpPr>
-        <p:sp>
-          <p:nvSpPr>
-            <p:cNvPr id="3" name="Espaço Reservado para Conteúdo 5">
-              <a:extLst>
-                <a:ext uri="{FF2B5EF4-FFF2-40B4-BE49-F238E27FC236}">
-                  <a16:creationId xmlns:a16="http://schemas.microsoft.com/office/drawing/2014/main" id="{E4EE7C42-64C6-0016-943B-6F122075F4B5}"/>
+                  <a16:creationId xmlns:a16="http://schemas.microsoft.com/office/drawing/2014/main" id="{3290F7B8-7F16-99CB-32B3-DFD2C0FCCBDF}"/>
                 </a:ext>
               </a:extLst>
             </p:cNvPr>
@@ -3738,8 +3338,8 @@
           </p:nvSpPr>
           <p:spPr>
             <a:xfrm>
-              <a:off x="589474" y="3302621"/>
-              <a:ext cx="6584830" cy="366590"/>
+              <a:off x="592347" y="1691931"/>
+              <a:ext cx="3815751" cy="366590"/>
             </a:xfrm>
             <a:prstGeom prst="rect">
               <a:avLst/>
@@ -3919,25 +3519,17 @@
               </a:pPr>
               <a:r>
                 <a:rPr lang="pt-BR" dirty="0"/>
-                <a:t>No </a:t>
-              </a:r>
-              <a:r>
-                <a:rPr lang="pt-BR" dirty="0" err="1"/>
-                <a:t>db.json</a:t>
-              </a:r>
-              <a:r>
-                <a:rPr lang="pt-BR" dirty="0"/>
-                <a:t>, inicialmente podemos deixar:</a:t>
+                <a:t>Dentro da pasta do projeto:</a:t>
               </a:r>
             </a:p>
           </p:txBody>
         </p:sp>
         <p:grpSp>
           <p:nvGrpSpPr>
-            <p:cNvPr id="12" name="Agrupar 11">
+            <p:cNvPr id="5" name="Agrupar 4">
               <a:extLst>
                 <a:ext uri="{FF2B5EF4-FFF2-40B4-BE49-F238E27FC236}">
-                  <a16:creationId xmlns:a16="http://schemas.microsoft.com/office/drawing/2014/main" id="{AFCE276F-A178-4778-8926-D64023E7E7D0}"/>
+                  <a16:creationId xmlns:a16="http://schemas.microsoft.com/office/drawing/2014/main" id="{CC8B7FA4-5037-B67A-64A5-F1AA40011401}"/>
                 </a:ext>
               </a:extLst>
             </p:cNvPr>
@@ -3946,18 +3538,18 @@
           </p:nvGrpSpPr>
           <p:grpSpPr>
             <a:xfrm>
-              <a:off x="746311" y="3868047"/>
-              <a:ext cx="8907433" cy="1521738"/>
+              <a:off x="749184" y="2243397"/>
+              <a:ext cx="4051416" cy="2202928"/>
               <a:chOff x="749185" y="2527734"/>
-              <a:chExt cx="5284556" cy="1521738"/>
+              <a:chExt cx="5284556" cy="1805256"/>
             </a:xfrm>
           </p:grpSpPr>
           <p:sp>
             <p:nvSpPr>
-              <p:cNvPr id="13" name="Shape 20">
+              <p:cNvPr id="6" name="Shape 20">
                 <a:extLst>
                   <a:ext uri="{FF2B5EF4-FFF2-40B4-BE49-F238E27FC236}">
-                    <a16:creationId xmlns:a16="http://schemas.microsoft.com/office/drawing/2014/main" id="{38ABB9DB-759C-34F8-EA79-C27A56F5AE22}"/>
+                    <a16:creationId xmlns:a16="http://schemas.microsoft.com/office/drawing/2014/main" id="{2FC2A2B6-4E61-EECC-C271-E93C0C8586EE}"/>
                   </a:ext>
                 </a:extLst>
               </p:cNvPr>
@@ -3967,7 +3559,7 @@
             <p:spPr>
               <a:xfrm>
                 <a:off x="749185" y="2527734"/>
-                <a:ext cx="5284556" cy="1521738"/>
+                <a:ext cx="5284556" cy="1805256"/>
               </a:xfrm>
               <a:prstGeom prst="roundRect">
                 <a:avLst>
@@ -3989,10 +3581,10 @@
           </p:sp>
           <p:sp>
             <p:nvSpPr>
-              <p:cNvPr id="14" name="Text 21">
+              <p:cNvPr id="7" name="Text 21">
                 <a:extLst>
                   <a:ext uri="{FF2B5EF4-FFF2-40B4-BE49-F238E27FC236}">
-                    <a16:creationId xmlns:a16="http://schemas.microsoft.com/office/drawing/2014/main" id="{7DA2996A-BF5F-6AA3-45BE-5C13A5C08FC8}"/>
+                    <a16:creationId xmlns:a16="http://schemas.microsoft.com/office/drawing/2014/main" id="{DB9E0A09-415B-32F3-A09C-62522C6558CB}"/>
                   </a:ext>
                 </a:extLst>
               </p:cNvPr>
@@ -4001,8 +3593,8 @@
             </p:nvSpPr>
             <p:spPr>
               <a:xfrm>
-                <a:off x="896521" y="2831519"/>
-                <a:ext cx="4989884" cy="914168"/>
+                <a:off x="896521" y="2710750"/>
+                <a:ext cx="4989884" cy="1439225"/>
               </a:xfrm>
               <a:prstGeom prst="rect">
                 <a:avLst/>
@@ -4016,6 +3608,9 @@
               </a:bodyPr>
               <a:lstStyle/>
               <a:p>
+                <a:pPr marL="0" indent="0" algn="l">
+                  <a:buNone/>
+                </a:pPr>
                 <a:r>
                   <a:rPr lang="en-US" kern="0" spc="-19" dirty="0">
                     <a:solidFill>
@@ -4025,7 +3620,77 @@
                     <a:ea typeface="Consolas" pitchFamily="34" charset="-122"/>
                     <a:cs typeface="Consolas" pitchFamily="34" charset="-120"/>
                   </a:rPr>
-                  <a:t>{</a:t>
+                  <a:t>tech-store/</a:t>
+                </a:r>
+              </a:p>
+              <a:p>
+                <a:pPr marL="0" indent="0" algn="l">
+                  <a:buNone/>
+                </a:pPr>
+                <a:r>
+                  <a:rPr lang="en-US" kern="0" spc="-19" dirty="0">
+                    <a:solidFill>
+                      <a:srgbClr val="D73A49"/>
+                    </a:solidFill>
+                    <a:latin typeface="Consolas" pitchFamily="34" charset="0"/>
+                    <a:ea typeface="Consolas" pitchFamily="34" charset="-122"/>
+                    <a:cs typeface="Consolas" pitchFamily="34" charset="-120"/>
+                  </a:rPr>
+                  <a:t>├── index.html</a:t>
+                </a:r>
+              </a:p>
+              <a:p>
+                <a:pPr marL="0" indent="0" algn="l">
+                  <a:buNone/>
+                </a:pPr>
+                <a:r>
+                  <a:rPr lang="en-US" kern="0" spc="-19" dirty="0">
+                    <a:solidFill>
+                      <a:srgbClr val="D73A49"/>
+                    </a:solidFill>
+                    <a:latin typeface="Consolas" pitchFamily="34" charset="0"/>
+                    <a:ea typeface="Consolas" pitchFamily="34" charset="-122"/>
+                    <a:cs typeface="Consolas" pitchFamily="34" charset="-120"/>
+                  </a:rPr>
+                  <a:t>├── </a:t>
+                </a:r>
+                <a:r>
+                  <a:rPr lang="en-US" kern="0" spc="-19" dirty="0" err="1">
+                    <a:solidFill>
+                      <a:srgbClr val="D73A49"/>
+                    </a:solidFill>
+                    <a:latin typeface="Consolas" pitchFamily="34" charset="0"/>
+                    <a:ea typeface="Consolas" pitchFamily="34" charset="-122"/>
+                    <a:cs typeface="Consolas" pitchFamily="34" charset="-120"/>
+                  </a:rPr>
+                  <a:t>css</a:t>
+                </a:r>
+                <a:r>
+                  <a:rPr lang="en-US" kern="0" spc="-19" dirty="0">
+                    <a:solidFill>
+                      <a:srgbClr val="D73A49"/>
+                    </a:solidFill>
+                    <a:latin typeface="Consolas" pitchFamily="34" charset="0"/>
+                    <a:ea typeface="Consolas" pitchFamily="34" charset="-122"/>
+                    <a:cs typeface="Consolas" pitchFamily="34" charset="-120"/>
+                  </a:rPr>
+                  <a:t>/</a:t>
+                </a:r>
+              </a:p>
+              <a:p>
+                <a:pPr marL="0" indent="0" algn="l">
+                  <a:buNone/>
+                </a:pPr>
+                <a:r>
+                  <a:rPr lang="en-US" kern="0" spc="-19" dirty="0">
+                    <a:solidFill>
+                      <a:srgbClr val="D73A49"/>
+                    </a:solidFill>
+                    <a:latin typeface="Consolas" pitchFamily="34" charset="0"/>
+                    <a:ea typeface="Consolas" pitchFamily="34" charset="-122"/>
+                    <a:cs typeface="Consolas" pitchFamily="34" charset="-120"/>
+                  </a:rPr>
+                  <a:t>│      └── style.css</a:t>
                 </a:r>
               </a:p>
               <a:p>
@@ -4038,29 +3703,7 @@
                     <a:ea typeface="Consolas" pitchFamily="34" charset="-122"/>
                     <a:cs typeface="Consolas" pitchFamily="34" charset="-120"/>
                   </a:rPr>
-                  <a:t>  "</a:t>
-                </a:r>
-                <a:r>
-                  <a:rPr lang="en-US" kern="0" spc="-19" dirty="0" err="1">
-                    <a:solidFill>
-                      <a:srgbClr val="D73A49"/>
-                    </a:solidFill>
-                    <a:latin typeface="Consolas" pitchFamily="34" charset="0"/>
-                    <a:ea typeface="Consolas" pitchFamily="34" charset="-122"/>
-                    <a:cs typeface="Consolas" pitchFamily="34" charset="-120"/>
-                  </a:rPr>
-                  <a:t>produtos</a:t>
-                </a:r>
-                <a:r>
-                  <a:rPr lang="en-US" kern="0" spc="-19" dirty="0">
-                    <a:solidFill>
-                      <a:srgbClr val="D73A49"/>
-                    </a:solidFill>
-                    <a:latin typeface="Consolas" pitchFamily="34" charset="0"/>
-                    <a:ea typeface="Consolas" pitchFamily="34" charset="-122"/>
-                    <a:cs typeface="Consolas" pitchFamily="34" charset="-120"/>
-                  </a:rPr>
-                  <a:t>": []</a:t>
+                  <a:t>└── backend/</a:t>
                 </a:r>
               </a:p>
               <a:p>
@@ -4073,84 +3716,44 @@
                     <a:ea typeface="Consolas" pitchFamily="34" charset="-122"/>
                     <a:cs typeface="Consolas" pitchFamily="34" charset="-120"/>
                   </a:rPr>
-                  <a:t>}</a:t>
+                  <a:t>           └──</a:t>
                 </a:r>
+                <a:r>
+                  <a:rPr lang="en-US" kern="0" spc="-19" dirty="0" err="1">
+                    <a:solidFill>
+                      <a:srgbClr val="D73A49"/>
+                    </a:solidFill>
+                    <a:latin typeface="Consolas" pitchFamily="34" charset="0"/>
+                    <a:ea typeface="Consolas" pitchFamily="34" charset="-122"/>
+                    <a:cs typeface="Consolas" pitchFamily="34" charset="-120"/>
+                  </a:rPr>
+                  <a:t>db.json</a:t>
+                </a:r>
+                <a:endParaRPr lang="en-US" kern="0" spc="-19" dirty="0">
+                  <a:solidFill>
+                    <a:srgbClr val="D73A49"/>
+                  </a:solidFill>
+                  <a:latin typeface="Consolas" pitchFamily="34" charset="0"/>
+                  <a:ea typeface="Consolas" pitchFamily="34" charset="-122"/>
+                  <a:cs typeface="Consolas" pitchFamily="34" charset="-120"/>
+                </a:endParaRPr>
+              </a:p>
+              <a:p>
+                <a:pPr marL="0" indent="0" algn="l">
+                  <a:buNone/>
+                </a:pPr>
                 <a:endParaRPr lang="en-US" dirty="0"/>
               </a:p>
             </p:txBody>
           </p:sp>
         </p:grpSp>
       </p:grpSp>
-    </p:spTree>
-    <p:extLst>
-      <p:ext uri="{BB962C8B-B14F-4D97-AF65-F5344CB8AC3E}">
-        <p14:creationId xmlns:p14="http://schemas.microsoft.com/office/powerpoint/2010/main" val="2681198270"/>
-      </p:ext>
-    </p:extLst>
-  </p:cSld>
-  <p:clrMapOvr>
-    <a:masterClrMapping/>
-  </p:clrMapOvr>
-</p:sld>
-</file>
-
-<file path=ppt/slides/slide11.xml><?xml version="1.0" encoding="utf-8"?>
-<p:sld xmlns:a="http://schemas.openxmlformats.org/drawingml/2006/main" xmlns:r="http://schemas.openxmlformats.org/officeDocument/2006/relationships" xmlns:p="http://schemas.openxmlformats.org/presentationml/2006/main">
-  <p:cSld>
-    <p:spTree>
-      <p:nvGrpSpPr>
-        <p:cNvPr id="1" name="">
-          <a:extLst>
-            <a:ext uri="{FF2B5EF4-FFF2-40B4-BE49-F238E27FC236}">
-              <a16:creationId xmlns:a16="http://schemas.microsoft.com/office/drawing/2014/main" id="{9494E511-7937-0ABF-92CC-71A2F2FA1C66}"/>
-            </a:ext>
-          </a:extLst>
-        </p:cNvPr>
-        <p:cNvGrpSpPr/>
-        <p:nvPr/>
-      </p:nvGrpSpPr>
-      <p:grpSpPr>
-        <a:xfrm>
-          <a:off x="0" y="0"/>
-          <a:ext cx="0" cy="0"/>
-          <a:chOff x="0" y="0"/>
-          <a:chExt cx="0" cy="0"/>
-        </a:xfrm>
-      </p:grpSpPr>
-      <p:sp>
-        <p:nvSpPr>
-          <p:cNvPr id="2" name="Título 1">
-            <a:extLst>
-              <a:ext uri="{FF2B5EF4-FFF2-40B4-BE49-F238E27FC236}">
-                <a16:creationId xmlns:a16="http://schemas.microsoft.com/office/drawing/2014/main" id="{130D6A16-AC0A-7A8B-8C81-F26C51682D4D}"/>
-              </a:ext>
-            </a:extLst>
-          </p:cNvPr>
-          <p:cNvSpPr>
-            <a:spLocks noGrp="1"/>
-          </p:cNvSpPr>
-          <p:nvPr>
-            <p:ph type="title"/>
-          </p:nvPr>
-        </p:nvSpPr>
-        <p:spPr/>
-        <p:txBody>
-          <a:bodyPr/>
-          <a:lstStyle/>
-          <a:p>
-            <a:r>
-              <a:rPr lang="pt-BR" dirty="0"/>
-              <a:t>Instalar o JSON Server</a:t>
-            </a:r>
-          </a:p>
-        </p:txBody>
-      </p:sp>
       <p:grpSp>
         <p:nvGrpSpPr>
-          <p:cNvPr id="8" name="Agrupar 7">
-            <a:extLst>
-              <a:ext uri="{FF2B5EF4-FFF2-40B4-BE49-F238E27FC236}">
-                <a16:creationId xmlns:a16="http://schemas.microsoft.com/office/drawing/2014/main" id="{D68C9EE5-A3F3-053C-8209-8C766BCD27FF}"/>
+          <p:cNvPr id="16" name="Agrupar 15">
+            <a:extLst>
+              <a:ext uri="{FF2B5EF4-FFF2-40B4-BE49-F238E27FC236}">
+                <a16:creationId xmlns:a16="http://schemas.microsoft.com/office/drawing/2014/main" id="{75E56470-FCB5-4A47-BA1C-070E476FCEB9}"/>
               </a:ext>
             </a:extLst>
           </p:cNvPr>
@@ -4159,18 +3762,18 @@
         </p:nvGrpSpPr>
         <p:grpSpPr>
           <a:xfrm>
-            <a:off x="592347" y="1890767"/>
-            <a:ext cx="9064270" cy="1203998"/>
+            <a:off x="6835430" y="1691931"/>
+            <a:ext cx="3942616" cy="1203998"/>
             <a:chOff x="592347" y="1890767"/>
-            <a:chExt cx="9064270" cy="1203998"/>
+            <a:chExt cx="9554582" cy="1203998"/>
           </a:xfrm>
         </p:grpSpPr>
         <p:sp>
           <p:nvSpPr>
-            <p:cNvPr id="4" name="Espaço Reservado para Conteúdo 5">
+            <p:cNvPr id="17" name="Espaço Reservado para Conteúdo 5">
               <a:extLst>
                 <a:ext uri="{FF2B5EF4-FFF2-40B4-BE49-F238E27FC236}">
-                  <a16:creationId xmlns:a16="http://schemas.microsoft.com/office/drawing/2014/main" id="{F56F8E27-63F6-509C-E034-7D6719458D60}"/>
+                  <a16:creationId xmlns:a16="http://schemas.microsoft.com/office/drawing/2014/main" id="{A2240294-FB95-4793-A121-4E83F56963C6}"/>
                 </a:ext>
               </a:extLst>
             </p:cNvPr>
@@ -4182,7 +3785,7 @@
           <p:spPr>
             <a:xfrm>
               <a:off x="592347" y="1890767"/>
-              <a:ext cx="5359879" cy="366590"/>
+              <a:ext cx="9554582" cy="366590"/>
             </a:xfrm>
             <a:prstGeom prst="rect">
               <a:avLst/>
@@ -4362,17 +3965,22 @@
               </a:pPr>
               <a:r>
                 <a:rPr lang="pt-BR" dirty="0"/>
-                <a:t>No terminal, dentro da pasta do projeto:</a:t>
+                <a:t>No terminal, acesse a pasta </a:t>
               </a:r>
+              <a:r>
+                <a:rPr lang="pt-BR" dirty="0" err="1"/>
+                <a:t>backend</a:t>
+              </a:r>
+              <a:endParaRPr lang="pt-BR" dirty="0"/>
             </a:p>
           </p:txBody>
         </p:sp>
         <p:grpSp>
           <p:nvGrpSpPr>
-            <p:cNvPr id="5" name="Agrupar 4">
+            <p:cNvPr id="18" name="Agrupar 17">
               <a:extLst>
                 <a:ext uri="{FF2B5EF4-FFF2-40B4-BE49-F238E27FC236}">
-                  <a16:creationId xmlns:a16="http://schemas.microsoft.com/office/drawing/2014/main" id="{7FE003AC-6737-0583-DB3E-3C34E08F85D4}"/>
+                  <a16:creationId xmlns:a16="http://schemas.microsoft.com/office/drawing/2014/main" id="{8BFCAD2B-9D5B-460F-929A-73E1BCD6B057}"/>
                 </a:ext>
               </a:extLst>
             </p:cNvPr>
@@ -4382,17 +3990,17 @@
           <p:grpSpPr>
             <a:xfrm>
               <a:off x="749184" y="2456193"/>
-              <a:ext cx="8907433" cy="638572"/>
+              <a:ext cx="8659089" cy="638572"/>
               <a:chOff x="749185" y="2527734"/>
-              <a:chExt cx="5284556" cy="638572"/>
+              <a:chExt cx="5137220" cy="638572"/>
             </a:xfrm>
           </p:grpSpPr>
           <p:sp>
             <p:nvSpPr>
-              <p:cNvPr id="6" name="Shape 20">
+              <p:cNvPr id="19" name="Shape 20">
                 <a:extLst>
                   <a:ext uri="{FF2B5EF4-FFF2-40B4-BE49-F238E27FC236}">
-                    <a16:creationId xmlns:a16="http://schemas.microsoft.com/office/drawing/2014/main" id="{FD882544-B419-6CCB-36E5-ED9AA3CED56C}"/>
+                    <a16:creationId xmlns:a16="http://schemas.microsoft.com/office/drawing/2014/main" id="{24585B29-6995-42D5-A15A-8164783B434B}"/>
                   </a:ext>
                 </a:extLst>
               </p:cNvPr>
@@ -4402,7 +4010,7 @@
             <p:spPr>
               <a:xfrm>
                 <a:off x="749185" y="2527734"/>
-                <a:ext cx="5284556" cy="638572"/>
+                <a:ext cx="3819683" cy="638572"/>
               </a:xfrm>
               <a:prstGeom prst="roundRect">
                 <a:avLst>
@@ -4424,10 +4032,10 @@
           </p:sp>
           <p:sp>
             <p:nvSpPr>
-              <p:cNvPr id="7" name="Text 21">
+              <p:cNvPr id="20" name="Text 21">
                 <a:extLst>
                   <a:ext uri="{FF2B5EF4-FFF2-40B4-BE49-F238E27FC236}">
-                    <a16:creationId xmlns:a16="http://schemas.microsoft.com/office/drawing/2014/main" id="{19529696-B28E-DF9D-A943-EF09112D620C}"/>
+                    <a16:creationId xmlns:a16="http://schemas.microsoft.com/office/drawing/2014/main" id="{87D49E68-85CF-4F1C-8E5D-24D09148A7B8}"/>
                   </a:ext>
                 </a:extLst>
               </p:cNvPr>
@@ -4455,17 +4063,6 @@
                   <a:buNone/>
                 </a:pPr>
                 <a:r>
-                  <a:rPr lang="en-US" kern="0" spc="-19" dirty="0" err="1">
-                    <a:solidFill>
-                      <a:srgbClr val="D73A49"/>
-                    </a:solidFill>
-                    <a:latin typeface="Consolas" pitchFamily="34" charset="0"/>
-                    <a:ea typeface="Consolas" pitchFamily="34" charset="-122"/>
-                    <a:cs typeface="Consolas" pitchFamily="34" charset="-120"/>
-                  </a:rPr>
-                  <a:t>json</a:t>
-                </a:r>
-                <a:r>
                   <a:rPr lang="en-US" kern="0" spc="-19" dirty="0">
                     <a:solidFill>
                       <a:srgbClr val="D73A49"/>
@@ -4474,19 +4071,13 @@
                     <a:ea typeface="Consolas" pitchFamily="34" charset="-122"/>
                     <a:cs typeface="Consolas" pitchFamily="34" charset="-120"/>
                   </a:rPr>
-                  <a:t>-server --watch </a:t>
+                  <a:t>cd backend</a:t>
                 </a:r>
-                <a:r>
-                  <a:rPr lang="en-US" kern="0" spc="-19" dirty="0" err="1">
-                    <a:solidFill>
-                      <a:srgbClr val="D73A49"/>
-                    </a:solidFill>
-                    <a:latin typeface="Consolas" pitchFamily="34" charset="0"/>
-                    <a:ea typeface="Consolas" pitchFamily="34" charset="-122"/>
-                    <a:cs typeface="Consolas" pitchFamily="34" charset="-120"/>
-                  </a:rPr>
-                  <a:t>db.json</a:t>
-                </a:r>
+              </a:p>
+              <a:p>
+                <a:pPr marL="0" indent="0" algn="l">
+                  <a:buNone/>
+                </a:pPr>
                 <a:endParaRPr lang="en-US" dirty="0"/>
               </a:p>
             </p:txBody>
@@ -4495,10 +4086,10 @@
       </p:grpSp>
       <p:grpSp>
         <p:nvGrpSpPr>
-          <p:cNvPr id="15" name="Agrupar 14">
-            <a:extLst>
-              <a:ext uri="{FF2B5EF4-FFF2-40B4-BE49-F238E27FC236}">
-                <a16:creationId xmlns:a16="http://schemas.microsoft.com/office/drawing/2014/main" id="{9C21C342-2796-0020-917E-1CE5FADE71EE}"/>
+          <p:cNvPr id="21" name="Agrupar 20">
+            <a:extLst>
+              <a:ext uri="{FF2B5EF4-FFF2-40B4-BE49-F238E27FC236}">
+                <a16:creationId xmlns:a16="http://schemas.microsoft.com/office/drawing/2014/main" id="{2000BA31-84F0-4254-9B4B-F77BA5003186}"/>
               </a:ext>
             </a:extLst>
           </p:cNvPr>
@@ -4507,18 +4098,18 @@
         </p:nvGrpSpPr>
         <p:grpSpPr>
           <a:xfrm>
-            <a:off x="592347" y="3410557"/>
-            <a:ext cx="9064270" cy="1203998"/>
+            <a:off x="1413954" y="5175249"/>
+            <a:ext cx="9845446" cy="1203998"/>
             <a:chOff x="589474" y="3302621"/>
             <a:chExt cx="9064270" cy="1203998"/>
           </a:xfrm>
         </p:grpSpPr>
         <p:sp>
           <p:nvSpPr>
-            <p:cNvPr id="3" name="Espaço Reservado para Conteúdo 5">
+            <p:cNvPr id="22" name="Espaço Reservado para Conteúdo 5">
               <a:extLst>
                 <a:ext uri="{FF2B5EF4-FFF2-40B4-BE49-F238E27FC236}">
-                  <a16:creationId xmlns:a16="http://schemas.microsoft.com/office/drawing/2014/main" id="{22B769BE-6ED4-A35A-B6CB-87C13CE2F144}"/>
+                  <a16:creationId xmlns:a16="http://schemas.microsoft.com/office/drawing/2014/main" id="{71D99815-D17D-46E2-9E7E-FDDB4EE33FFF}"/>
                 </a:ext>
               </a:extLst>
             </p:cNvPr>
@@ -4710,17 +4301,25 @@
               </a:pPr>
               <a:r>
                 <a:rPr lang="pt-BR" dirty="0"/>
-                <a:t>Dependendo da versão instalada, o comando pode ser simplesmente:</a:t>
+                <a:t>Depois instale o </a:t>
+              </a:r>
+              <a:r>
+                <a:rPr lang="pt-BR" b="1" dirty="0"/>
+                <a:t>documento de configuração do projeto</a:t>
+              </a:r>
+              <a:r>
+                <a:rPr lang="pt-BR" dirty="0"/>
+                <a:t>.</a:t>
               </a:r>
             </a:p>
           </p:txBody>
         </p:sp>
         <p:grpSp>
           <p:nvGrpSpPr>
-            <p:cNvPr id="12" name="Agrupar 11">
+            <p:cNvPr id="23" name="Agrupar 22">
               <a:extLst>
                 <a:ext uri="{FF2B5EF4-FFF2-40B4-BE49-F238E27FC236}">
-                  <a16:creationId xmlns:a16="http://schemas.microsoft.com/office/drawing/2014/main" id="{595A4B56-F037-DCF3-16EE-A4165B5533E8}"/>
+                  <a16:creationId xmlns:a16="http://schemas.microsoft.com/office/drawing/2014/main" id="{2670950E-94BA-4608-96F3-A48483F46F0B}"/>
                 </a:ext>
               </a:extLst>
             </p:cNvPr>
@@ -4737,10 +4336,10 @@
           </p:grpSpPr>
           <p:sp>
             <p:nvSpPr>
-              <p:cNvPr id="13" name="Shape 20">
+              <p:cNvPr id="24" name="Shape 20">
                 <a:extLst>
                   <a:ext uri="{FF2B5EF4-FFF2-40B4-BE49-F238E27FC236}">
-                    <a16:creationId xmlns:a16="http://schemas.microsoft.com/office/drawing/2014/main" id="{A13364D6-119C-FA06-6826-F41BCE8811D2}"/>
+                    <a16:creationId xmlns:a16="http://schemas.microsoft.com/office/drawing/2014/main" id="{BE01224C-A0A5-4DFB-90DF-A0F8B746FA75}"/>
                   </a:ext>
                 </a:extLst>
               </p:cNvPr>
@@ -4772,10 +4371,10 @@
           </p:sp>
           <p:sp>
             <p:nvSpPr>
-              <p:cNvPr id="14" name="Text 21">
+              <p:cNvPr id="25" name="Text 21">
                 <a:extLst>
                   <a:ext uri="{FF2B5EF4-FFF2-40B4-BE49-F238E27FC236}">
-                    <a16:creationId xmlns:a16="http://schemas.microsoft.com/office/drawing/2014/main" id="{C50D7F39-90DF-8E30-A0FC-9FD390C323A7}"/>
+                    <a16:creationId xmlns:a16="http://schemas.microsoft.com/office/drawing/2014/main" id="{D9289DD0-A9E3-4D47-8BB1-473BBCA2CA60}"/>
                   </a:ext>
                 </a:extLst>
               </p:cNvPr>
@@ -4811,7 +4410,7 @@
                     <a:ea typeface="Consolas" pitchFamily="34" charset="-122"/>
                     <a:cs typeface="Consolas" pitchFamily="34" charset="-120"/>
                   </a:rPr>
-                  <a:t>json</a:t>
+                  <a:t>npm</a:t>
                 </a:r>
                 <a:r>
                   <a:rPr lang="en-US" kern="0" spc="-19" dirty="0">
@@ -4822,7 +4421,7 @@
                     <a:ea typeface="Consolas" pitchFamily="34" charset="-122"/>
                     <a:cs typeface="Consolas" pitchFamily="34" charset="-120"/>
                   </a:rPr>
-                  <a:t>-server </a:t>
+                  <a:t> </a:t>
                 </a:r>
                 <a:r>
                   <a:rPr lang="en-US" kern="0" spc="-19" dirty="0" err="1">
@@ -4833,323 +4432,8 @@
                     <a:ea typeface="Consolas" pitchFamily="34" charset="-122"/>
                     <a:cs typeface="Consolas" pitchFamily="34" charset="-120"/>
                   </a:rPr>
-                  <a:t>db.json</a:t>
+                  <a:t>init</a:t>
                 </a:r>
-                <a:endParaRPr lang="en-US" dirty="0"/>
-              </a:p>
-            </p:txBody>
-          </p:sp>
-        </p:grpSp>
-      </p:grpSp>
-      <p:grpSp>
-        <p:nvGrpSpPr>
-          <p:cNvPr id="9" name="Agrupar 8">
-            <a:extLst>
-              <a:ext uri="{FF2B5EF4-FFF2-40B4-BE49-F238E27FC236}">
-                <a16:creationId xmlns:a16="http://schemas.microsoft.com/office/drawing/2014/main" id="{56C5FCB3-9707-872B-1AD8-09F0BC2358E1}"/>
-              </a:ext>
-            </a:extLst>
-          </p:cNvPr>
-          <p:cNvGrpSpPr/>
-          <p:nvPr/>
-        </p:nvGrpSpPr>
-        <p:grpSpPr>
-          <a:xfrm>
-            <a:off x="592347" y="5029448"/>
-            <a:ext cx="9064270" cy="1203998"/>
-            <a:chOff x="589474" y="3302621"/>
-            <a:chExt cx="9064270" cy="1203998"/>
-          </a:xfrm>
-        </p:grpSpPr>
-        <p:sp>
-          <p:nvSpPr>
-            <p:cNvPr id="10" name="Espaço Reservado para Conteúdo 5">
-              <a:extLst>
-                <a:ext uri="{FF2B5EF4-FFF2-40B4-BE49-F238E27FC236}">
-                  <a16:creationId xmlns:a16="http://schemas.microsoft.com/office/drawing/2014/main" id="{F1998665-258C-74E8-747F-3B6C72A9ACF5}"/>
-                </a:ext>
-              </a:extLst>
-            </p:cNvPr>
-            <p:cNvSpPr txBox="1">
-              <a:spLocks/>
-            </p:cNvSpPr>
-            <p:nvPr/>
-          </p:nvSpPr>
-          <p:spPr>
-            <a:xfrm>
-              <a:off x="589474" y="3302621"/>
-              <a:ext cx="8189344" cy="366590"/>
-            </a:xfrm>
-            <a:prstGeom prst="rect">
-              <a:avLst/>
-            </a:prstGeom>
-          </p:spPr>
-          <p:txBody>
-            <a:bodyPr/>
-            <a:lstStyle>
-              <a:lvl1pPr marL="0" indent="0" algn="just" defTabSz="914400" rtl="0" eaLnBrk="1" latinLnBrk="0" hangingPunct="1">
-                <a:lnSpc>
-                  <a:spcPct val="150000"/>
-                </a:lnSpc>
-                <a:spcBef>
-                  <a:spcPts val="0"/>
-                </a:spcBef>
-                <a:buFont typeface="Arial" panose="020B0604020202020204" pitchFamily="34" charset="0"/>
-                <a:buNone/>
-                <a:defRPr sz="2000" kern="1200">
-                  <a:solidFill>
-                    <a:schemeClr val="tx1"/>
-                  </a:solidFill>
-                  <a:latin typeface="Times New Roman" panose="02020603050405020304" pitchFamily="18" charset="0"/>
-                  <a:ea typeface="+mn-ea"/>
-                  <a:cs typeface="Times New Roman" panose="02020603050405020304" pitchFamily="18" charset="0"/>
-                </a:defRPr>
-              </a:lvl1pPr>
-              <a:lvl2pPr marL="457200" indent="0" algn="just" defTabSz="914400" rtl="0" eaLnBrk="1" latinLnBrk="0" hangingPunct="1">
-                <a:lnSpc>
-                  <a:spcPct val="150000"/>
-                </a:lnSpc>
-                <a:spcBef>
-                  <a:spcPts val="0"/>
-                </a:spcBef>
-                <a:buFont typeface="Arial" panose="020B0604020202020204" pitchFamily="34" charset="0"/>
-                <a:buNone/>
-                <a:defRPr sz="1600" kern="1200">
-                  <a:solidFill>
-                    <a:schemeClr val="tx1"/>
-                  </a:solidFill>
-                  <a:latin typeface="Times New Roman" panose="02020603050405020304" pitchFamily="18" charset="0"/>
-                  <a:ea typeface="+mn-ea"/>
-                  <a:cs typeface="Times New Roman" panose="02020603050405020304" pitchFamily="18" charset="0"/>
-                </a:defRPr>
-              </a:lvl2pPr>
-              <a:lvl3pPr marL="914400" indent="0" algn="just" defTabSz="914400" rtl="0" eaLnBrk="1" latinLnBrk="0" hangingPunct="1">
-                <a:lnSpc>
-                  <a:spcPct val="150000"/>
-                </a:lnSpc>
-                <a:spcBef>
-                  <a:spcPts val="0"/>
-                </a:spcBef>
-                <a:buFont typeface="Arial" panose="020B0604020202020204" pitchFamily="34" charset="0"/>
-                <a:buNone/>
-                <a:defRPr sz="1400" kern="1200">
-                  <a:solidFill>
-                    <a:schemeClr val="tx1"/>
-                  </a:solidFill>
-                  <a:latin typeface="Times New Roman" panose="02020603050405020304" pitchFamily="18" charset="0"/>
-                  <a:ea typeface="+mn-ea"/>
-                  <a:cs typeface="Times New Roman" panose="02020603050405020304" pitchFamily="18" charset="0"/>
-                </a:defRPr>
-              </a:lvl3pPr>
-              <a:lvl4pPr marL="1371600" indent="0" algn="just" defTabSz="914400" rtl="0" eaLnBrk="1" latinLnBrk="0" hangingPunct="1">
-                <a:lnSpc>
-                  <a:spcPct val="150000"/>
-                </a:lnSpc>
-                <a:spcBef>
-                  <a:spcPts val="0"/>
-                </a:spcBef>
-                <a:buFont typeface="Arial" panose="020B0604020202020204" pitchFamily="34" charset="0"/>
-                <a:buNone/>
-                <a:defRPr sz="1200" kern="1200">
-                  <a:solidFill>
-                    <a:schemeClr val="tx1"/>
-                  </a:solidFill>
-                  <a:latin typeface="Times New Roman" panose="02020603050405020304" pitchFamily="18" charset="0"/>
-                  <a:ea typeface="+mn-ea"/>
-                  <a:cs typeface="Times New Roman" panose="02020603050405020304" pitchFamily="18" charset="0"/>
-                </a:defRPr>
-              </a:lvl4pPr>
-              <a:lvl5pPr marL="1828800" indent="0" algn="just" defTabSz="914400" rtl="0" eaLnBrk="1" latinLnBrk="0" hangingPunct="1">
-                <a:lnSpc>
-                  <a:spcPct val="150000"/>
-                </a:lnSpc>
-                <a:spcBef>
-                  <a:spcPts val="0"/>
-                </a:spcBef>
-                <a:buFont typeface="Arial" panose="020B0604020202020204" pitchFamily="34" charset="0"/>
-                <a:buNone/>
-                <a:defRPr sz="1000" kern="1200">
-                  <a:solidFill>
-                    <a:schemeClr val="tx1"/>
-                  </a:solidFill>
-                  <a:latin typeface="Times New Roman" panose="02020603050405020304" pitchFamily="18" charset="0"/>
-                  <a:ea typeface="+mn-ea"/>
-                  <a:cs typeface="Times New Roman" panose="02020603050405020304" pitchFamily="18" charset="0"/>
-                </a:defRPr>
-              </a:lvl5pPr>
-              <a:lvl6pPr marL="2514600" indent="-228600" algn="l" defTabSz="914400" rtl="0" eaLnBrk="1" latinLnBrk="0" hangingPunct="1">
-                <a:lnSpc>
-                  <a:spcPct val="90000"/>
-                </a:lnSpc>
-                <a:spcBef>
-                  <a:spcPts val="500"/>
-                </a:spcBef>
-                <a:buFont typeface="Arial" panose="020B0604020202020204" pitchFamily="34" charset="0"/>
-                <a:buChar char="•"/>
-                <a:defRPr sz="1800" kern="1200">
-                  <a:solidFill>
-                    <a:schemeClr val="tx1"/>
-                  </a:solidFill>
-                  <a:latin typeface="+mn-lt"/>
-                  <a:ea typeface="+mn-ea"/>
-                  <a:cs typeface="+mn-cs"/>
-                </a:defRPr>
-              </a:lvl6pPr>
-              <a:lvl7pPr marL="2971800" indent="-228600" algn="l" defTabSz="914400" rtl="0" eaLnBrk="1" latinLnBrk="0" hangingPunct="1">
-                <a:lnSpc>
-                  <a:spcPct val="90000"/>
-                </a:lnSpc>
-                <a:spcBef>
-                  <a:spcPts val="500"/>
-                </a:spcBef>
-                <a:buFont typeface="Arial" panose="020B0604020202020204" pitchFamily="34" charset="0"/>
-                <a:buChar char="•"/>
-                <a:defRPr sz="1800" kern="1200">
-                  <a:solidFill>
-                    <a:schemeClr val="tx1"/>
-                  </a:solidFill>
-                  <a:latin typeface="+mn-lt"/>
-                  <a:ea typeface="+mn-ea"/>
-                  <a:cs typeface="+mn-cs"/>
-                </a:defRPr>
-              </a:lvl7pPr>
-              <a:lvl8pPr marL="3429000" indent="-228600" algn="l" defTabSz="914400" rtl="0" eaLnBrk="1" latinLnBrk="0" hangingPunct="1">
-                <a:lnSpc>
-                  <a:spcPct val="90000"/>
-                </a:lnSpc>
-                <a:spcBef>
-                  <a:spcPts val="500"/>
-                </a:spcBef>
-                <a:buFont typeface="Arial" panose="020B0604020202020204" pitchFamily="34" charset="0"/>
-                <a:buChar char="•"/>
-                <a:defRPr sz="1800" kern="1200">
-                  <a:solidFill>
-                    <a:schemeClr val="tx1"/>
-                  </a:solidFill>
-                  <a:latin typeface="+mn-lt"/>
-                  <a:ea typeface="+mn-ea"/>
-                  <a:cs typeface="+mn-cs"/>
-                </a:defRPr>
-              </a:lvl8pPr>
-              <a:lvl9pPr marL="3886200" indent="-228600" algn="l" defTabSz="914400" rtl="0" eaLnBrk="1" latinLnBrk="0" hangingPunct="1">
-                <a:lnSpc>
-                  <a:spcPct val="90000"/>
-                </a:lnSpc>
-                <a:spcBef>
-                  <a:spcPts val="500"/>
-                </a:spcBef>
-                <a:buFont typeface="Arial" panose="020B0604020202020204" pitchFamily="34" charset="0"/>
-                <a:buChar char="•"/>
-                <a:defRPr sz="1800" kern="1200">
-                  <a:solidFill>
-                    <a:schemeClr val="tx1"/>
-                  </a:solidFill>
-                  <a:latin typeface="+mn-lt"/>
-                  <a:ea typeface="+mn-ea"/>
-                  <a:cs typeface="+mn-cs"/>
-                </a:defRPr>
-              </a:lvl9pPr>
-            </a:lstStyle>
-            <a:p>
-              <a:pPr>
-                <a:lnSpc>
-                  <a:spcPct val="100000"/>
-                </a:lnSpc>
-              </a:pPr>
-              <a:r>
-                <a:rPr lang="pt-BR" dirty="0"/>
-                <a:t>O servidor disponibilizará nossa API localmente, normalmente em:</a:t>
-              </a:r>
-            </a:p>
-          </p:txBody>
-        </p:sp>
-        <p:grpSp>
-          <p:nvGrpSpPr>
-            <p:cNvPr id="11" name="Agrupar 10">
-              <a:extLst>
-                <a:ext uri="{FF2B5EF4-FFF2-40B4-BE49-F238E27FC236}">
-                  <a16:creationId xmlns:a16="http://schemas.microsoft.com/office/drawing/2014/main" id="{03640EE6-6F5E-7F74-45FB-6B17BF0007DB}"/>
-                </a:ext>
-              </a:extLst>
-            </p:cNvPr>
-            <p:cNvGrpSpPr/>
-            <p:nvPr/>
-          </p:nvGrpSpPr>
-          <p:grpSpPr>
-            <a:xfrm>
-              <a:off x="746311" y="3868047"/>
-              <a:ext cx="8907433" cy="638572"/>
-              <a:chOff x="749185" y="2527734"/>
-              <a:chExt cx="5284556" cy="638572"/>
-            </a:xfrm>
-          </p:grpSpPr>
-          <p:sp>
-            <p:nvSpPr>
-              <p:cNvPr id="16" name="Shape 20">
-                <a:extLst>
-                  <a:ext uri="{FF2B5EF4-FFF2-40B4-BE49-F238E27FC236}">
-                    <a16:creationId xmlns:a16="http://schemas.microsoft.com/office/drawing/2014/main" id="{38EA066D-D46A-8CC8-F6C6-8EF1E3E5506C}"/>
-                  </a:ext>
-                </a:extLst>
-              </p:cNvPr>
-              <p:cNvSpPr/>
-              <p:nvPr/>
-            </p:nvSpPr>
-            <p:spPr>
-              <a:xfrm>
-                <a:off x="749185" y="2527734"/>
-                <a:ext cx="5284556" cy="638572"/>
-              </a:xfrm>
-              <a:prstGeom prst="roundRect">
-                <a:avLst>
-                  <a:gd name="adj" fmla="val 8081"/>
-                </a:avLst>
-              </a:prstGeom>
-              <a:solidFill>
-                <a:srgbClr val="F2F2F2"/>
-              </a:solidFill>
-              <a:ln/>
-            </p:spPr>
-            <p:txBody>
-              <a:bodyPr/>
-              <a:lstStyle/>
-              <a:p>
-                <a:endParaRPr lang="pt-BR"/>
-              </a:p>
-            </p:txBody>
-          </p:sp>
-          <p:sp>
-            <p:nvSpPr>
-              <p:cNvPr id="17" name="Text 21">
-                <a:extLst>
-                  <a:ext uri="{FF2B5EF4-FFF2-40B4-BE49-F238E27FC236}">
-                    <a16:creationId xmlns:a16="http://schemas.microsoft.com/office/drawing/2014/main" id="{AC3E041D-3851-EDC2-8762-C170893C38B3}"/>
-                  </a:ext>
-                </a:extLst>
-              </p:cNvPr>
-              <p:cNvSpPr/>
-              <p:nvPr/>
-            </p:nvSpPr>
-            <p:spPr>
-              <a:xfrm>
-                <a:off x="896521" y="2712610"/>
-                <a:ext cx="4989884" cy="268820"/>
-              </a:xfrm>
-              <a:prstGeom prst="rect">
-                <a:avLst/>
-              </a:prstGeom>
-              <a:noFill/>
-              <a:ln/>
-            </p:spPr>
-            <p:txBody>
-              <a:bodyPr wrap="square" lIns="0" tIns="0" rIns="0" bIns="0" rtlCol="0" anchor="t">
-                <a:noAutofit/>
-              </a:bodyPr>
-              <a:lstStyle/>
-              <a:p>
-                <a:pPr marL="0" indent="0" algn="l">
-                  <a:buNone/>
-                </a:pPr>
                 <a:r>
                   <a:rPr lang="en-US" kern="0" spc="-19" dirty="0">
                     <a:solidFill>
@@ -5159,7 +4443,7 @@
                     <a:ea typeface="Consolas" pitchFamily="34" charset="-122"/>
                     <a:cs typeface="Consolas" pitchFamily="34" charset="-120"/>
                   </a:rPr>
-                  <a:t>http://localhost:3000</a:t>
+                  <a:t> -y</a:t>
                 </a:r>
                 <a:endParaRPr lang="en-US" dirty="0"/>
               </a:p>
@@ -5167,6 +4451,505 @@
           </p:sp>
         </p:grpSp>
       </p:grpSp>
+      <p:sp>
+        <p:nvSpPr>
+          <p:cNvPr id="9" name="Elipse 8">
+            <a:extLst>
+              <a:ext uri="{FF2B5EF4-FFF2-40B4-BE49-F238E27FC236}">
+                <a16:creationId xmlns:a16="http://schemas.microsoft.com/office/drawing/2014/main" id="{543F2ECD-114D-4B7A-A827-886F5F233B97}"/>
+              </a:ext>
+            </a:extLst>
+          </p:cNvPr>
+          <p:cNvSpPr/>
+          <p:nvPr/>
+        </p:nvSpPr>
+        <p:spPr>
+          <a:xfrm>
+            <a:off x="748792" y="1691931"/>
+            <a:ext cx="540000" cy="540000"/>
+          </a:xfrm>
+          <a:prstGeom prst="ellipse">
+            <a:avLst/>
+          </a:prstGeom>
+          <a:solidFill>
+            <a:srgbClr val="292A86"/>
+          </a:solidFill>
+          <a:ln>
+            <a:solidFill>
+              <a:schemeClr val="tx1"/>
+            </a:solidFill>
+          </a:ln>
+        </p:spPr>
+        <p:style>
+          <a:lnRef idx="2">
+            <a:schemeClr val="accent1">
+              <a:shade val="50000"/>
+            </a:schemeClr>
+          </a:lnRef>
+          <a:fillRef idx="1">
+            <a:schemeClr val="accent1"/>
+          </a:fillRef>
+          <a:effectRef idx="0">
+            <a:schemeClr val="accent1"/>
+          </a:effectRef>
+          <a:fontRef idx="minor">
+            <a:schemeClr val="lt1"/>
+          </a:fontRef>
+        </p:style>
+        <p:txBody>
+          <a:bodyPr rtlCol="0" anchor="ctr"/>
+          <a:lstStyle/>
+          <a:p>
+            <a:pPr algn="ctr"/>
+            <a:r>
+              <a:rPr lang="pt-BR" dirty="0"/>
+              <a:t>1</a:t>
+            </a:r>
+          </a:p>
+        </p:txBody>
+      </p:sp>
+      <p:sp>
+        <p:nvSpPr>
+          <p:cNvPr id="26" name="Elipse 25">
+            <a:extLst>
+              <a:ext uri="{FF2B5EF4-FFF2-40B4-BE49-F238E27FC236}">
+                <a16:creationId xmlns:a16="http://schemas.microsoft.com/office/drawing/2014/main" id="{BBA979B6-84C2-47C9-8C81-E4BBAAFB888D}"/>
+              </a:ext>
+            </a:extLst>
+          </p:cNvPr>
+          <p:cNvSpPr/>
+          <p:nvPr/>
+        </p:nvSpPr>
+        <p:spPr>
+          <a:xfrm>
+            <a:off x="6095220" y="1691931"/>
+            <a:ext cx="540000" cy="540000"/>
+          </a:xfrm>
+          <a:prstGeom prst="ellipse">
+            <a:avLst/>
+          </a:prstGeom>
+          <a:solidFill>
+            <a:srgbClr val="292A86"/>
+          </a:solidFill>
+          <a:ln>
+            <a:solidFill>
+              <a:schemeClr val="tx1"/>
+            </a:solidFill>
+          </a:ln>
+        </p:spPr>
+        <p:style>
+          <a:lnRef idx="2">
+            <a:schemeClr val="accent1">
+              <a:shade val="50000"/>
+            </a:schemeClr>
+          </a:lnRef>
+          <a:fillRef idx="1">
+            <a:schemeClr val="accent1"/>
+          </a:fillRef>
+          <a:effectRef idx="0">
+            <a:schemeClr val="accent1"/>
+          </a:effectRef>
+          <a:fontRef idx="minor">
+            <a:schemeClr val="lt1"/>
+          </a:fontRef>
+        </p:style>
+        <p:txBody>
+          <a:bodyPr rtlCol="0" anchor="ctr"/>
+          <a:lstStyle/>
+          <a:p>
+            <a:pPr algn="ctr"/>
+            <a:r>
+              <a:rPr lang="pt-BR" dirty="0"/>
+              <a:t>2</a:t>
+            </a:r>
+          </a:p>
+        </p:txBody>
+      </p:sp>
+      <p:sp>
+        <p:nvSpPr>
+          <p:cNvPr id="27" name="Elipse 26">
+            <a:extLst>
+              <a:ext uri="{FF2B5EF4-FFF2-40B4-BE49-F238E27FC236}">
+                <a16:creationId xmlns:a16="http://schemas.microsoft.com/office/drawing/2014/main" id="{029CF1B9-A8C0-44E4-8397-0769E3A15F80}"/>
+              </a:ext>
+            </a:extLst>
+          </p:cNvPr>
+          <p:cNvSpPr/>
+          <p:nvPr/>
+        </p:nvSpPr>
+        <p:spPr>
+          <a:xfrm>
+            <a:off x="748792" y="5088544"/>
+            <a:ext cx="540000" cy="540000"/>
+          </a:xfrm>
+          <a:prstGeom prst="ellipse">
+            <a:avLst/>
+          </a:prstGeom>
+          <a:solidFill>
+            <a:srgbClr val="292A86"/>
+          </a:solidFill>
+          <a:ln>
+            <a:solidFill>
+              <a:schemeClr val="tx1"/>
+            </a:solidFill>
+          </a:ln>
+        </p:spPr>
+        <p:style>
+          <a:lnRef idx="2">
+            <a:schemeClr val="accent1">
+              <a:shade val="50000"/>
+            </a:schemeClr>
+          </a:lnRef>
+          <a:fillRef idx="1">
+            <a:schemeClr val="accent1"/>
+          </a:fillRef>
+          <a:effectRef idx="0">
+            <a:schemeClr val="accent1"/>
+          </a:effectRef>
+          <a:fontRef idx="minor">
+            <a:schemeClr val="lt1"/>
+          </a:fontRef>
+        </p:style>
+        <p:txBody>
+          <a:bodyPr rtlCol="0" anchor="ctr"/>
+          <a:lstStyle/>
+          <a:p>
+            <a:pPr algn="ctr"/>
+            <a:r>
+              <a:rPr lang="pt-BR" dirty="0"/>
+              <a:t>3</a:t>
+            </a:r>
+          </a:p>
+        </p:txBody>
+      </p:sp>
+    </p:spTree>
+    <p:extLst>
+      <p:ext uri="{BB962C8B-B14F-4D97-AF65-F5344CB8AC3E}">
+        <p14:creationId xmlns:p14="http://schemas.microsoft.com/office/powerpoint/2010/main" val="2681198270"/>
+      </p:ext>
+    </p:extLst>
+  </p:cSld>
+  <p:clrMapOvr>
+    <a:masterClrMapping/>
+  </p:clrMapOvr>
+</p:sld>
+</file>
+
+<file path=ppt/slides/slide11.xml><?xml version="1.0" encoding="utf-8"?>
+<p:sld xmlns:a="http://schemas.openxmlformats.org/drawingml/2006/main" xmlns:r="http://schemas.openxmlformats.org/officeDocument/2006/relationships" xmlns:p="http://schemas.openxmlformats.org/presentationml/2006/main">
+  <p:cSld>
+    <p:spTree>
+      <p:nvGrpSpPr>
+        <p:cNvPr id="1" name="">
+          <a:extLst>
+            <a:ext uri="{FF2B5EF4-FFF2-40B4-BE49-F238E27FC236}">
+              <a16:creationId xmlns:a16="http://schemas.microsoft.com/office/drawing/2014/main" id="{9494E511-7937-0ABF-92CC-71A2F2FA1C66}"/>
+            </a:ext>
+          </a:extLst>
+        </p:cNvPr>
+        <p:cNvGrpSpPr/>
+        <p:nvPr/>
+      </p:nvGrpSpPr>
+      <p:grpSpPr>
+        <a:xfrm>
+          <a:off x="0" y="0"/>
+          <a:ext cx="0" cy="0"/>
+          <a:chOff x="0" y="0"/>
+          <a:chExt cx="0" cy="0"/>
+        </a:xfrm>
+      </p:grpSpPr>
+      <p:sp>
+        <p:nvSpPr>
+          <p:cNvPr id="2" name="Título 1">
+            <a:extLst>
+              <a:ext uri="{FF2B5EF4-FFF2-40B4-BE49-F238E27FC236}">
+                <a16:creationId xmlns:a16="http://schemas.microsoft.com/office/drawing/2014/main" id="{130D6A16-AC0A-7A8B-8C81-F26C51682D4D}"/>
+              </a:ext>
+            </a:extLst>
+          </p:cNvPr>
+          <p:cNvSpPr>
+            <a:spLocks noGrp="1"/>
+          </p:cNvSpPr>
+          <p:nvPr>
+            <p:ph type="title"/>
+          </p:nvPr>
+        </p:nvSpPr>
+        <p:spPr/>
+        <p:txBody>
+          <a:bodyPr/>
+          <a:lstStyle/>
+          <a:p>
+            <a:r>
+              <a:rPr lang="pt-BR" dirty="0"/>
+              <a:t>Configuração do </a:t>
+            </a:r>
+            <a:r>
+              <a:rPr lang="pt-BR" dirty="0" err="1"/>
+              <a:t>package.json</a:t>
+            </a:r>
+            <a:endParaRPr lang="pt-BR" dirty="0"/>
+          </a:p>
+        </p:txBody>
+      </p:sp>
+      <p:sp>
+        <p:nvSpPr>
+          <p:cNvPr id="23" name="Espaço Reservado para Conteúdo 5">
+            <a:extLst>
+              <a:ext uri="{FF2B5EF4-FFF2-40B4-BE49-F238E27FC236}">
+                <a16:creationId xmlns:a16="http://schemas.microsoft.com/office/drawing/2014/main" id="{78E8E083-DC26-4BFB-B75F-C3636775FAFC}"/>
+              </a:ext>
+            </a:extLst>
+          </p:cNvPr>
+          <p:cNvSpPr txBox="1">
+            <a:spLocks/>
+          </p:cNvSpPr>
+          <p:nvPr/>
+        </p:nvSpPr>
+        <p:spPr>
+          <a:xfrm>
+            <a:off x="749185" y="1761067"/>
+            <a:ext cx="10731615" cy="1430865"/>
+          </a:xfrm>
+          <a:prstGeom prst="rect">
+            <a:avLst/>
+          </a:prstGeom>
+        </p:spPr>
+        <p:txBody>
+          <a:bodyPr/>
+          <a:lstStyle>
+            <a:lvl1pPr marL="0" indent="0" algn="just" defTabSz="914400" rtl="0" eaLnBrk="1" latinLnBrk="0" hangingPunct="1">
+              <a:lnSpc>
+                <a:spcPct val="150000"/>
+              </a:lnSpc>
+              <a:spcBef>
+                <a:spcPts val="0"/>
+              </a:spcBef>
+              <a:buFont typeface="Arial" panose="020B0604020202020204" pitchFamily="34" charset="0"/>
+              <a:buNone/>
+              <a:defRPr sz="2000" kern="1200">
+                <a:solidFill>
+                  <a:schemeClr val="tx1"/>
+                </a:solidFill>
+                <a:latin typeface="Times New Roman" panose="02020603050405020304" pitchFamily="18" charset="0"/>
+                <a:ea typeface="+mn-ea"/>
+                <a:cs typeface="Times New Roman" panose="02020603050405020304" pitchFamily="18" charset="0"/>
+              </a:defRPr>
+            </a:lvl1pPr>
+            <a:lvl2pPr marL="457200" indent="0" algn="just" defTabSz="914400" rtl="0" eaLnBrk="1" latinLnBrk="0" hangingPunct="1">
+              <a:lnSpc>
+                <a:spcPct val="150000"/>
+              </a:lnSpc>
+              <a:spcBef>
+                <a:spcPts val="0"/>
+              </a:spcBef>
+              <a:buFont typeface="Arial" panose="020B0604020202020204" pitchFamily="34" charset="0"/>
+              <a:buNone/>
+              <a:defRPr sz="1600" kern="1200">
+                <a:solidFill>
+                  <a:schemeClr val="tx1"/>
+                </a:solidFill>
+                <a:latin typeface="Times New Roman" panose="02020603050405020304" pitchFamily="18" charset="0"/>
+                <a:ea typeface="+mn-ea"/>
+                <a:cs typeface="Times New Roman" panose="02020603050405020304" pitchFamily="18" charset="0"/>
+              </a:defRPr>
+            </a:lvl2pPr>
+            <a:lvl3pPr marL="914400" indent="0" algn="just" defTabSz="914400" rtl="0" eaLnBrk="1" latinLnBrk="0" hangingPunct="1">
+              <a:lnSpc>
+                <a:spcPct val="150000"/>
+              </a:lnSpc>
+              <a:spcBef>
+                <a:spcPts val="0"/>
+              </a:spcBef>
+              <a:buFont typeface="Arial" panose="020B0604020202020204" pitchFamily="34" charset="0"/>
+              <a:buNone/>
+              <a:defRPr sz="1400" kern="1200">
+                <a:solidFill>
+                  <a:schemeClr val="tx1"/>
+                </a:solidFill>
+                <a:latin typeface="Times New Roman" panose="02020603050405020304" pitchFamily="18" charset="0"/>
+                <a:ea typeface="+mn-ea"/>
+                <a:cs typeface="Times New Roman" panose="02020603050405020304" pitchFamily="18" charset="0"/>
+              </a:defRPr>
+            </a:lvl3pPr>
+            <a:lvl4pPr marL="1371600" indent="0" algn="just" defTabSz="914400" rtl="0" eaLnBrk="1" latinLnBrk="0" hangingPunct="1">
+              <a:lnSpc>
+                <a:spcPct val="150000"/>
+              </a:lnSpc>
+              <a:spcBef>
+                <a:spcPts val="0"/>
+              </a:spcBef>
+              <a:buFont typeface="Arial" panose="020B0604020202020204" pitchFamily="34" charset="0"/>
+              <a:buNone/>
+              <a:defRPr sz="1200" kern="1200">
+                <a:solidFill>
+                  <a:schemeClr val="tx1"/>
+                </a:solidFill>
+                <a:latin typeface="Times New Roman" panose="02020603050405020304" pitchFamily="18" charset="0"/>
+                <a:ea typeface="+mn-ea"/>
+                <a:cs typeface="Times New Roman" panose="02020603050405020304" pitchFamily="18" charset="0"/>
+              </a:defRPr>
+            </a:lvl4pPr>
+            <a:lvl5pPr marL="1828800" indent="0" algn="just" defTabSz="914400" rtl="0" eaLnBrk="1" latinLnBrk="0" hangingPunct="1">
+              <a:lnSpc>
+                <a:spcPct val="150000"/>
+              </a:lnSpc>
+              <a:spcBef>
+                <a:spcPts val="0"/>
+              </a:spcBef>
+              <a:buFont typeface="Arial" panose="020B0604020202020204" pitchFamily="34" charset="0"/>
+              <a:buNone/>
+              <a:defRPr sz="1000" kern="1200">
+                <a:solidFill>
+                  <a:schemeClr val="tx1"/>
+                </a:solidFill>
+                <a:latin typeface="Times New Roman" panose="02020603050405020304" pitchFamily="18" charset="0"/>
+                <a:ea typeface="+mn-ea"/>
+                <a:cs typeface="Times New Roman" panose="02020603050405020304" pitchFamily="18" charset="0"/>
+              </a:defRPr>
+            </a:lvl5pPr>
+            <a:lvl6pPr marL="2514600" indent="-228600" algn="l" defTabSz="914400" rtl="0" eaLnBrk="1" latinLnBrk="0" hangingPunct="1">
+              <a:lnSpc>
+                <a:spcPct val="90000"/>
+              </a:lnSpc>
+              <a:spcBef>
+                <a:spcPts val="500"/>
+              </a:spcBef>
+              <a:buFont typeface="Arial" panose="020B0604020202020204" pitchFamily="34" charset="0"/>
+              <a:buChar char="•"/>
+              <a:defRPr sz="1800" kern="1200">
+                <a:solidFill>
+                  <a:schemeClr val="tx1"/>
+                </a:solidFill>
+                <a:latin typeface="+mn-lt"/>
+                <a:ea typeface="+mn-ea"/>
+                <a:cs typeface="+mn-cs"/>
+              </a:defRPr>
+            </a:lvl6pPr>
+            <a:lvl7pPr marL="2971800" indent="-228600" algn="l" defTabSz="914400" rtl="0" eaLnBrk="1" latinLnBrk="0" hangingPunct="1">
+              <a:lnSpc>
+                <a:spcPct val="90000"/>
+              </a:lnSpc>
+              <a:spcBef>
+                <a:spcPts val="500"/>
+              </a:spcBef>
+              <a:buFont typeface="Arial" panose="020B0604020202020204" pitchFamily="34" charset="0"/>
+              <a:buChar char="•"/>
+              <a:defRPr sz="1800" kern="1200">
+                <a:solidFill>
+                  <a:schemeClr val="tx1"/>
+                </a:solidFill>
+                <a:latin typeface="+mn-lt"/>
+                <a:ea typeface="+mn-ea"/>
+                <a:cs typeface="+mn-cs"/>
+              </a:defRPr>
+            </a:lvl7pPr>
+            <a:lvl8pPr marL="3429000" indent="-228600" algn="l" defTabSz="914400" rtl="0" eaLnBrk="1" latinLnBrk="0" hangingPunct="1">
+              <a:lnSpc>
+                <a:spcPct val="90000"/>
+              </a:lnSpc>
+              <a:spcBef>
+                <a:spcPts val="500"/>
+              </a:spcBef>
+              <a:buFont typeface="Arial" panose="020B0604020202020204" pitchFamily="34" charset="0"/>
+              <a:buChar char="•"/>
+              <a:defRPr sz="1800" kern="1200">
+                <a:solidFill>
+                  <a:schemeClr val="tx1"/>
+                </a:solidFill>
+                <a:latin typeface="+mn-lt"/>
+                <a:ea typeface="+mn-ea"/>
+                <a:cs typeface="+mn-cs"/>
+              </a:defRPr>
+            </a:lvl8pPr>
+            <a:lvl9pPr marL="3886200" indent="-228600" algn="l" defTabSz="914400" rtl="0" eaLnBrk="1" latinLnBrk="0" hangingPunct="1">
+              <a:lnSpc>
+                <a:spcPct val="90000"/>
+              </a:lnSpc>
+              <a:spcBef>
+                <a:spcPts val="500"/>
+              </a:spcBef>
+              <a:buFont typeface="Arial" panose="020B0604020202020204" pitchFamily="34" charset="0"/>
+              <a:buChar char="•"/>
+              <a:defRPr sz="1800" kern="1200">
+                <a:solidFill>
+                  <a:schemeClr val="tx1"/>
+                </a:solidFill>
+                <a:latin typeface="+mn-lt"/>
+                <a:ea typeface="+mn-ea"/>
+                <a:cs typeface="+mn-cs"/>
+              </a:defRPr>
+            </a:lvl9pPr>
+          </a:lstStyle>
+          <a:p>
+            <a:r>
+              <a:rPr lang="pt-BR" sz="1800" dirty="0"/>
+              <a:t>Para facilitar a inicialização do nosso servidor </a:t>
+            </a:r>
+            <a:r>
+              <a:rPr lang="pt-BR" sz="1800" dirty="0" err="1"/>
+              <a:t>back-end</a:t>
+            </a:r>
+            <a:r>
+              <a:rPr lang="pt-BR" sz="1800" dirty="0"/>
+              <a:t> </a:t>
+            </a:r>
+            <a:r>
+              <a:rPr lang="pt-BR" sz="1800" dirty="0" err="1"/>
+              <a:t>fake</a:t>
+            </a:r>
+            <a:r>
+              <a:rPr lang="pt-BR" sz="1800" dirty="0"/>
+              <a:t>, podemos configurar um script no arquivo </a:t>
+            </a:r>
+            <a:r>
+              <a:rPr lang="pt-BR" sz="1800" dirty="0" err="1"/>
+              <a:t>package.json</a:t>
+            </a:r>
+            <a:r>
+              <a:rPr lang="pt-BR" sz="1800" dirty="0"/>
+              <a:t>. Dessa forma, o JSON Server será iniciado automaticamente utilizando o arquivo </a:t>
+            </a:r>
+            <a:r>
+              <a:rPr lang="pt-BR" sz="1800" dirty="0" err="1"/>
+              <a:t>db.json</a:t>
+            </a:r>
+            <a:r>
+              <a:rPr lang="pt-BR" sz="1800" dirty="0"/>
+              <a:t> como banco de dados e a porta 3000.</a:t>
+            </a:r>
+          </a:p>
+        </p:txBody>
+      </p:sp>
+      <p:pic>
+        <p:nvPicPr>
+          <p:cNvPr id="25" name="Imagem 24">
+            <a:extLst>
+              <a:ext uri="{FF2B5EF4-FFF2-40B4-BE49-F238E27FC236}">
+                <a16:creationId xmlns:a16="http://schemas.microsoft.com/office/drawing/2014/main" id="{B78A181D-F853-4FF1-8C59-07AD4451D756}"/>
+              </a:ext>
+            </a:extLst>
+          </p:cNvPr>
+          <p:cNvPicPr>
+            <a:picLocks noChangeAspect="1"/>
+          </p:cNvPicPr>
+          <p:nvPr/>
+        </p:nvPicPr>
+        <p:blipFill>
+          <a:blip r:embed="rId2"/>
+          <a:stretch>
+            <a:fillRect/>
+          </a:stretch>
+        </p:blipFill>
+        <p:spPr>
+          <a:xfrm>
+            <a:off x="2975918" y="3268008"/>
+            <a:ext cx="6240164" cy="3253838"/>
+          </a:xfrm>
+          <a:prstGeom prst="rect">
+            <a:avLst/>
+          </a:prstGeom>
+        </p:spPr>
+      </p:pic>
     </p:spTree>
     <p:extLst>
       <p:ext uri="{BB962C8B-B14F-4D97-AF65-F5344CB8AC3E}">
@@ -5181,6 +4964,132 @@
 </file>
 
 <file path=ppt/slides/slide12.xml><?xml version="1.0" encoding="utf-8"?>
+<p:sld xmlns:a="http://schemas.openxmlformats.org/drawingml/2006/main" xmlns:r="http://schemas.openxmlformats.org/officeDocument/2006/relationships" xmlns:p="http://schemas.openxmlformats.org/presentationml/2006/main">
+  <p:cSld>
+    <p:spTree>
+      <p:nvGrpSpPr>
+        <p:cNvPr id="1" name=""/>
+        <p:cNvGrpSpPr/>
+        <p:nvPr/>
+      </p:nvGrpSpPr>
+      <p:grpSpPr>
+        <a:xfrm>
+          <a:off x="0" y="0"/>
+          <a:ext cx="0" cy="0"/>
+          <a:chOff x="0" y="0"/>
+          <a:chExt cx="0" cy="0"/>
+        </a:xfrm>
+      </p:grpSpPr>
+      <p:sp>
+        <p:nvSpPr>
+          <p:cNvPr id="2" name="Título 1">
+            <a:extLst>
+              <a:ext uri="{FF2B5EF4-FFF2-40B4-BE49-F238E27FC236}">
+                <a16:creationId xmlns:a16="http://schemas.microsoft.com/office/drawing/2014/main" id="{BC534029-2BAB-46E2-95BC-AFFF21FA8006}"/>
+              </a:ext>
+            </a:extLst>
+          </p:cNvPr>
+          <p:cNvSpPr>
+            <a:spLocks noGrp="1"/>
+          </p:cNvSpPr>
+          <p:nvPr>
+            <p:ph type="title"/>
+          </p:nvPr>
+        </p:nvSpPr>
+        <p:spPr/>
+        <p:txBody>
+          <a:bodyPr/>
+          <a:lstStyle/>
+          <a:p>
+            <a:r>
+              <a:rPr lang="pt-BR" dirty="0"/>
+              <a:t>Configuração inicial do </a:t>
+            </a:r>
+            <a:r>
+              <a:rPr lang="pt-BR" dirty="0" err="1"/>
+              <a:t>db.json</a:t>
+            </a:r>
+            <a:endParaRPr lang="pt-BR" dirty="0"/>
+          </a:p>
+        </p:txBody>
+      </p:sp>
+      <p:sp>
+        <p:nvSpPr>
+          <p:cNvPr id="3" name="Espaço Reservado para Conteúdo 2">
+            <a:extLst>
+              <a:ext uri="{FF2B5EF4-FFF2-40B4-BE49-F238E27FC236}">
+                <a16:creationId xmlns:a16="http://schemas.microsoft.com/office/drawing/2014/main" id="{C00FCFAC-B3F2-4E88-9246-D433FCAFF719}"/>
+              </a:ext>
+            </a:extLst>
+          </p:cNvPr>
+          <p:cNvSpPr>
+            <a:spLocks noGrp="1"/>
+          </p:cNvSpPr>
+          <p:nvPr>
+            <p:ph idx="1"/>
+          </p:nvPr>
+        </p:nvSpPr>
+        <p:spPr>
+          <a:xfrm>
+            <a:off x="592347" y="1651001"/>
+            <a:ext cx="11007306" cy="762000"/>
+          </a:xfrm>
+        </p:spPr>
+        <p:txBody>
+          <a:bodyPr/>
+          <a:lstStyle/>
+          <a:p>
+            <a:r>
+              <a:rPr lang="pt-BR" dirty="0"/>
+              <a:t>No nosso banco de dados iremos salvar as seguintes informações:</a:t>
+            </a:r>
+          </a:p>
+        </p:txBody>
+      </p:sp>
+      <p:pic>
+        <p:nvPicPr>
+          <p:cNvPr id="4" name="Imagem 3">
+            <a:extLst>
+              <a:ext uri="{FF2B5EF4-FFF2-40B4-BE49-F238E27FC236}">
+                <a16:creationId xmlns:a16="http://schemas.microsoft.com/office/drawing/2014/main" id="{F9133996-F386-4D64-8F42-A159E675C216}"/>
+              </a:ext>
+            </a:extLst>
+          </p:cNvPr>
+          <p:cNvPicPr>
+            <a:picLocks noChangeAspect="1"/>
+          </p:cNvPicPr>
+          <p:nvPr/>
+        </p:nvPicPr>
+        <p:blipFill>
+          <a:blip r:embed="rId2"/>
+          <a:stretch>
+            <a:fillRect/>
+          </a:stretch>
+        </p:blipFill>
+        <p:spPr>
+          <a:xfrm>
+            <a:off x="1865499" y="2599266"/>
+            <a:ext cx="8461002" cy="3757945"/>
+          </a:xfrm>
+          <a:prstGeom prst="rect">
+            <a:avLst/>
+          </a:prstGeom>
+        </p:spPr>
+      </p:pic>
+    </p:spTree>
+    <p:extLst>
+      <p:ext uri="{BB962C8B-B14F-4D97-AF65-F5344CB8AC3E}">
+        <p14:creationId xmlns:p14="http://schemas.microsoft.com/office/powerpoint/2010/main" val="1613705636"/>
+      </p:ext>
+    </p:extLst>
+  </p:cSld>
+  <p:clrMapOvr>
+    <a:masterClrMapping/>
+  </p:clrMapOvr>
+</p:sld>
+</file>
+
+<file path=ppt/slides/slide13.xml><?xml version="1.0" encoding="utf-8"?>
 <p:sld xmlns:a="http://schemas.openxmlformats.org/drawingml/2006/main" xmlns:r="http://schemas.openxmlformats.org/officeDocument/2006/relationships" xmlns:p="http://schemas.openxmlformats.org/presentationml/2006/main">
   <p:cSld>
     <p:spTree>
@@ -5226,7 +5135,7 @@
           <a:p>
             <a:r>
               <a:rPr lang="pt-BR" dirty="0"/>
-              <a:t>Instalar o JSON Server</a:t>
+              <a:t>Iniciando o projeto</a:t>
             </a:r>
           </a:p>
         </p:txBody>
@@ -5245,7 +5154,7 @@
         </p:nvGrpSpPr>
         <p:grpSpPr>
           <a:xfrm>
-            <a:off x="592347" y="1890767"/>
+            <a:off x="749185" y="4247110"/>
             <a:ext cx="9064270" cy="1203998"/>
             <a:chOff x="592347" y="1890767"/>
             <a:chExt cx="9064270" cy="1203998"/>
@@ -5448,7 +5357,7 @@
               </a:pPr>
               <a:r>
                 <a:rPr lang="pt-BR" dirty="0"/>
-                <a:t>E o recurso de produtos:</a:t>
+                <a:t>E para acessar o banco basta procurar pela URL:</a:t>
               </a:r>
             </a:p>
           </p:txBody>
@@ -5557,12 +5466,539 @@
           </p:sp>
         </p:grpSp>
       </p:grpSp>
+      <p:grpSp>
+        <p:nvGrpSpPr>
+          <p:cNvPr id="9" name="Agrupar 8">
+            <a:extLst>
+              <a:ext uri="{FF2B5EF4-FFF2-40B4-BE49-F238E27FC236}">
+                <a16:creationId xmlns:a16="http://schemas.microsoft.com/office/drawing/2014/main" id="{5FBA01CA-469C-4F20-B04B-285E96972CF5}"/>
+              </a:ext>
+            </a:extLst>
+          </p:cNvPr>
+          <p:cNvGrpSpPr/>
+          <p:nvPr/>
+        </p:nvGrpSpPr>
+        <p:grpSpPr>
+          <a:xfrm>
+            <a:off x="749185" y="2253637"/>
+            <a:ext cx="9064270" cy="1203998"/>
+            <a:chOff x="589474" y="3302621"/>
+            <a:chExt cx="9064270" cy="1203998"/>
+          </a:xfrm>
+        </p:grpSpPr>
+        <p:sp>
+          <p:nvSpPr>
+            <p:cNvPr id="10" name="Espaço Reservado para Conteúdo 5">
+              <a:extLst>
+                <a:ext uri="{FF2B5EF4-FFF2-40B4-BE49-F238E27FC236}">
+                  <a16:creationId xmlns:a16="http://schemas.microsoft.com/office/drawing/2014/main" id="{D640FA5C-5F32-4A75-8E39-2789279D2D07}"/>
+                </a:ext>
+              </a:extLst>
+            </p:cNvPr>
+            <p:cNvSpPr txBox="1">
+              <a:spLocks/>
+            </p:cNvSpPr>
+            <p:nvPr/>
+          </p:nvSpPr>
+          <p:spPr>
+            <a:xfrm>
+              <a:off x="589474" y="3302621"/>
+              <a:ext cx="8189344" cy="366590"/>
+            </a:xfrm>
+            <a:prstGeom prst="rect">
+              <a:avLst/>
+            </a:prstGeom>
+          </p:spPr>
+          <p:txBody>
+            <a:bodyPr/>
+            <a:lstStyle>
+              <a:lvl1pPr marL="0" indent="0" algn="just" defTabSz="914400" rtl="0" eaLnBrk="1" latinLnBrk="0" hangingPunct="1">
+                <a:lnSpc>
+                  <a:spcPct val="150000"/>
+                </a:lnSpc>
+                <a:spcBef>
+                  <a:spcPts val="0"/>
+                </a:spcBef>
+                <a:buFont typeface="Arial" panose="020B0604020202020204" pitchFamily="34" charset="0"/>
+                <a:buNone/>
+                <a:defRPr sz="2000" kern="1200">
+                  <a:solidFill>
+                    <a:schemeClr val="tx1"/>
+                  </a:solidFill>
+                  <a:latin typeface="Times New Roman" panose="02020603050405020304" pitchFamily="18" charset="0"/>
+                  <a:ea typeface="+mn-ea"/>
+                  <a:cs typeface="Times New Roman" panose="02020603050405020304" pitchFamily="18" charset="0"/>
+                </a:defRPr>
+              </a:lvl1pPr>
+              <a:lvl2pPr marL="457200" indent="0" algn="just" defTabSz="914400" rtl="0" eaLnBrk="1" latinLnBrk="0" hangingPunct="1">
+                <a:lnSpc>
+                  <a:spcPct val="150000"/>
+                </a:lnSpc>
+                <a:spcBef>
+                  <a:spcPts val="0"/>
+                </a:spcBef>
+                <a:buFont typeface="Arial" panose="020B0604020202020204" pitchFamily="34" charset="0"/>
+                <a:buNone/>
+                <a:defRPr sz="1600" kern="1200">
+                  <a:solidFill>
+                    <a:schemeClr val="tx1"/>
+                  </a:solidFill>
+                  <a:latin typeface="Times New Roman" panose="02020603050405020304" pitchFamily="18" charset="0"/>
+                  <a:ea typeface="+mn-ea"/>
+                  <a:cs typeface="Times New Roman" panose="02020603050405020304" pitchFamily="18" charset="0"/>
+                </a:defRPr>
+              </a:lvl2pPr>
+              <a:lvl3pPr marL="914400" indent="0" algn="just" defTabSz="914400" rtl="0" eaLnBrk="1" latinLnBrk="0" hangingPunct="1">
+                <a:lnSpc>
+                  <a:spcPct val="150000"/>
+                </a:lnSpc>
+                <a:spcBef>
+                  <a:spcPts val="0"/>
+                </a:spcBef>
+                <a:buFont typeface="Arial" panose="020B0604020202020204" pitchFamily="34" charset="0"/>
+                <a:buNone/>
+                <a:defRPr sz="1400" kern="1200">
+                  <a:solidFill>
+                    <a:schemeClr val="tx1"/>
+                  </a:solidFill>
+                  <a:latin typeface="Times New Roman" panose="02020603050405020304" pitchFamily="18" charset="0"/>
+                  <a:ea typeface="+mn-ea"/>
+                  <a:cs typeface="Times New Roman" panose="02020603050405020304" pitchFamily="18" charset="0"/>
+                </a:defRPr>
+              </a:lvl3pPr>
+              <a:lvl4pPr marL="1371600" indent="0" algn="just" defTabSz="914400" rtl="0" eaLnBrk="1" latinLnBrk="0" hangingPunct="1">
+                <a:lnSpc>
+                  <a:spcPct val="150000"/>
+                </a:lnSpc>
+                <a:spcBef>
+                  <a:spcPts val="0"/>
+                </a:spcBef>
+                <a:buFont typeface="Arial" panose="020B0604020202020204" pitchFamily="34" charset="0"/>
+                <a:buNone/>
+                <a:defRPr sz="1200" kern="1200">
+                  <a:solidFill>
+                    <a:schemeClr val="tx1"/>
+                  </a:solidFill>
+                  <a:latin typeface="Times New Roman" panose="02020603050405020304" pitchFamily="18" charset="0"/>
+                  <a:ea typeface="+mn-ea"/>
+                  <a:cs typeface="Times New Roman" panose="02020603050405020304" pitchFamily="18" charset="0"/>
+                </a:defRPr>
+              </a:lvl4pPr>
+              <a:lvl5pPr marL="1828800" indent="0" algn="just" defTabSz="914400" rtl="0" eaLnBrk="1" latinLnBrk="0" hangingPunct="1">
+                <a:lnSpc>
+                  <a:spcPct val="150000"/>
+                </a:lnSpc>
+                <a:spcBef>
+                  <a:spcPts val="0"/>
+                </a:spcBef>
+                <a:buFont typeface="Arial" panose="020B0604020202020204" pitchFamily="34" charset="0"/>
+                <a:buNone/>
+                <a:defRPr sz="1000" kern="1200">
+                  <a:solidFill>
+                    <a:schemeClr val="tx1"/>
+                  </a:solidFill>
+                  <a:latin typeface="Times New Roman" panose="02020603050405020304" pitchFamily="18" charset="0"/>
+                  <a:ea typeface="+mn-ea"/>
+                  <a:cs typeface="Times New Roman" panose="02020603050405020304" pitchFamily="18" charset="0"/>
+                </a:defRPr>
+              </a:lvl5pPr>
+              <a:lvl6pPr marL="2514600" indent="-228600" algn="l" defTabSz="914400" rtl="0" eaLnBrk="1" latinLnBrk="0" hangingPunct="1">
+                <a:lnSpc>
+                  <a:spcPct val="90000"/>
+                </a:lnSpc>
+                <a:spcBef>
+                  <a:spcPts val="500"/>
+                </a:spcBef>
+                <a:buFont typeface="Arial" panose="020B0604020202020204" pitchFamily="34" charset="0"/>
+                <a:buChar char="•"/>
+                <a:defRPr sz="1800" kern="1200">
+                  <a:solidFill>
+                    <a:schemeClr val="tx1"/>
+                  </a:solidFill>
+                  <a:latin typeface="+mn-lt"/>
+                  <a:ea typeface="+mn-ea"/>
+                  <a:cs typeface="+mn-cs"/>
+                </a:defRPr>
+              </a:lvl6pPr>
+              <a:lvl7pPr marL="2971800" indent="-228600" algn="l" defTabSz="914400" rtl="0" eaLnBrk="1" latinLnBrk="0" hangingPunct="1">
+                <a:lnSpc>
+                  <a:spcPct val="90000"/>
+                </a:lnSpc>
+                <a:spcBef>
+                  <a:spcPts val="500"/>
+                </a:spcBef>
+                <a:buFont typeface="Arial" panose="020B0604020202020204" pitchFamily="34" charset="0"/>
+                <a:buChar char="•"/>
+                <a:defRPr sz="1800" kern="1200">
+                  <a:solidFill>
+                    <a:schemeClr val="tx1"/>
+                  </a:solidFill>
+                  <a:latin typeface="+mn-lt"/>
+                  <a:ea typeface="+mn-ea"/>
+                  <a:cs typeface="+mn-cs"/>
+                </a:defRPr>
+              </a:lvl7pPr>
+              <a:lvl8pPr marL="3429000" indent="-228600" algn="l" defTabSz="914400" rtl="0" eaLnBrk="1" latinLnBrk="0" hangingPunct="1">
+                <a:lnSpc>
+                  <a:spcPct val="90000"/>
+                </a:lnSpc>
+                <a:spcBef>
+                  <a:spcPts val="500"/>
+                </a:spcBef>
+                <a:buFont typeface="Arial" panose="020B0604020202020204" pitchFamily="34" charset="0"/>
+                <a:buChar char="•"/>
+                <a:defRPr sz="1800" kern="1200">
+                  <a:solidFill>
+                    <a:schemeClr val="tx1"/>
+                  </a:solidFill>
+                  <a:latin typeface="+mn-lt"/>
+                  <a:ea typeface="+mn-ea"/>
+                  <a:cs typeface="+mn-cs"/>
+                </a:defRPr>
+              </a:lvl8pPr>
+              <a:lvl9pPr marL="3886200" indent="-228600" algn="l" defTabSz="914400" rtl="0" eaLnBrk="1" latinLnBrk="0" hangingPunct="1">
+                <a:lnSpc>
+                  <a:spcPct val="90000"/>
+                </a:lnSpc>
+                <a:spcBef>
+                  <a:spcPts val="500"/>
+                </a:spcBef>
+                <a:buFont typeface="Arial" panose="020B0604020202020204" pitchFamily="34" charset="0"/>
+                <a:buChar char="•"/>
+                <a:defRPr sz="1800" kern="1200">
+                  <a:solidFill>
+                    <a:schemeClr val="tx1"/>
+                  </a:solidFill>
+                  <a:latin typeface="+mn-lt"/>
+                  <a:ea typeface="+mn-ea"/>
+                  <a:cs typeface="+mn-cs"/>
+                </a:defRPr>
+              </a:lvl9pPr>
+            </a:lstStyle>
+            <a:p>
+              <a:pPr>
+                <a:lnSpc>
+                  <a:spcPct val="100000"/>
+                </a:lnSpc>
+              </a:pPr>
+              <a:r>
+                <a:rPr lang="pt-BR" dirty="0"/>
+                <a:t>Para iniciar o projeto, basta acessar a pasta e dar o seguinte comando:</a:t>
+              </a:r>
+            </a:p>
+          </p:txBody>
+        </p:sp>
+        <p:grpSp>
+          <p:nvGrpSpPr>
+            <p:cNvPr id="11" name="Agrupar 10">
+              <a:extLst>
+                <a:ext uri="{FF2B5EF4-FFF2-40B4-BE49-F238E27FC236}">
+                  <a16:creationId xmlns:a16="http://schemas.microsoft.com/office/drawing/2014/main" id="{E0DE6BA9-135B-4AD1-AC99-3834D8EFA737}"/>
+                </a:ext>
+              </a:extLst>
+            </p:cNvPr>
+            <p:cNvGrpSpPr/>
+            <p:nvPr/>
+          </p:nvGrpSpPr>
+          <p:grpSpPr>
+            <a:xfrm>
+              <a:off x="746311" y="3868047"/>
+              <a:ext cx="8907433" cy="638572"/>
+              <a:chOff x="749185" y="2527734"/>
+              <a:chExt cx="5284556" cy="638572"/>
+            </a:xfrm>
+          </p:grpSpPr>
+          <p:sp>
+            <p:nvSpPr>
+              <p:cNvPr id="12" name="Shape 20">
+                <a:extLst>
+                  <a:ext uri="{FF2B5EF4-FFF2-40B4-BE49-F238E27FC236}">
+                    <a16:creationId xmlns:a16="http://schemas.microsoft.com/office/drawing/2014/main" id="{D7AA632F-DC98-48A1-851E-FD8D563EB94E}"/>
+                  </a:ext>
+                </a:extLst>
+              </p:cNvPr>
+              <p:cNvSpPr/>
+              <p:nvPr/>
+            </p:nvSpPr>
+            <p:spPr>
+              <a:xfrm>
+                <a:off x="749185" y="2527734"/>
+                <a:ext cx="5284556" cy="638572"/>
+              </a:xfrm>
+              <a:prstGeom prst="roundRect">
+                <a:avLst>
+                  <a:gd name="adj" fmla="val 8081"/>
+                </a:avLst>
+              </a:prstGeom>
+              <a:solidFill>
+                <a:srgbClr val="F2F2F2"/>
+              </a:solidFill>
+              <a:ln/>
+            </p:spPr>
+            <p:txBody>
+              <a:bodyPr/>
+              <a:lstStyle/>
+              <a:p>
+                <a:endParaRPr lang="pt-BR"/>
+              </a:p>
+            </p:txBody>
+          </p:sp>
+          <p:sp>
+            <p:nvSpPr>
+              <p:cNvPr id="13" name="Text 21">
+                <a:extLst>
+                  <a:ext uri="{FF2B5EF4-FFF2-40B4-BE49-F238E27FC236}">
+                    <a16:creationId xmlns:a16="http://schemas.microsoft.com/office/drawing/2014/main" id="{4875F3F3-EE99-49E1-B3FA-2295864CD6D4}"/>
+                  </a:ext>
+                </a:extLst>
+              </p:cNvPr>
+              <p:cNvSpPr/>
+              <p:nvPr/>
+            </p:nvSpPr>
+            <p:spPr>
+              <a:xfrm>
+                <a:off x="896521" y="2712610"/>
+                <a:ext cx="4989884" cy="268820"/>
+              </a:xfrm>
+              <a:prstGeom prst="rect">
+                <a:avLst/>
+              </a:prstGeom>
+              <a:noFill/>
+              <a:ln/>
+            </p:spPr>
+            <p:txBody>
+              <a:bodyPr wrap="square" lIns="0" tIns="0" rIns="0" bIns="0" rtlCol="0" anchor="t">
+                <a:noAutofit/>
+              </a:bodyPr>
+              <a:lstStyle/>
+              <a:p>
+                <a:pPr marL="0" indent="0" algn="l">
+                  <a:buNone/>
+                </a:pPr>
+                <a:r>
+                  <a:rPr lang="en-US" kern="0" spc="-19" dirty="0" err="1">
+                    <a:solidFill>
+                      <a:srgbClr val="D73A49"/>
+                    </a:solidFill>
+                    <a:latin typeface="Consolas" pitchFamily="34" charset="0"/>
+                    <a:ea typeface="Consolas" pitchFamily="34" charset="-122"/>
+                    <a:cs typeface="Consolas" pitchFamily="34" charset="-120"/>
+                  </a:rPr>
+                  <a:t>npm</a:t>
+                </a:r>
+                <a:r>
+                  <a:rPr lang="en-US" kern="0" spc="-19" dirty="0">
+                    <a:solidFill>
+                      <a:srgbClr val="D73A49"/>
+                    </a:solidFill>
+                    <a:latin typeface="Consolas" pitchFamily="34" charset="0"/>
+                    <a:ea typeface="Consolas" pitchFamily="34" charset="-122"/>
+                    <a:cs typeface="Consolas" pitchFamily="34" charset="-120"/>
+                  </a:rPr>
+                  <a:t> start</a:t>
+                </a:r>
+                <a:endParaRPr lang="en-US" dirty="0"/>
+              </a:p>
+            </p:txBody>
+          </p:sp>
+        </p:grpSp>
+      </p:grpSp>
+    </p:spTree>
+    <p:extLst>
+      <p:ext uri="{BB962C8B-B14F-4D97-AF65-F5344CB8AC3E}">
+        <p14:creationId xmlns:p14="http://schemas.microsoft.com/office/powerpoint/2010/main" val="3026534779"/>
+      </p:ext>
+    </p:extLst>
+  </p:cSld>
+  <p:clrMapOvr>
+    <a:masterClrMapping/>
+  </p:clrMapOvr>
+</p:sld>
+</file>
+
+<file path=ppt/slides/slide14.xml><?xml version="1.0" encoding="utf-8"?>
+<p:sld xmlns:a="http://schemas.openxmlformats.org/drawingml/2006/main" xmlns:r="http://schemas.openxmlformats.org/officeDocument/2006/relationships" xmlns:p="http://schemas.openxmlformats.org/presentationml/2006/main">
+  <p:cSld>
+    <p:spTree>
+      <p:nvGrpSpPr>
+        <p:cNvPr id="1" name=""/>
+        <p:cNvGrpSpPr/>
+        <p:nvPr/>
+      </p:nvGrpSpPr>
+      <p:grpSpPr>
+        <a:xfrm>
+          <a:off x="0" y="0"/>
+          <a:ext cx="0" cy="0"/>
+          <a:chOff x="0" y="0"/>
+          <a:chExt cx="0" cy="0"/>
+        </a:xfrm>
+      </p:grpSpPr>
       <p:sp>
         <p:nvSpPr>
-          <p:cNvPr id="19" name="Espaço Reservado para Conteúdo 5">
-            <a:extLst>
-              <a:ext uri="{FF2B5EF4-FFF2-40B4-BE49-F238E27FC236}">
-                <a16:creationId xmlns:a16="http://schemas.microsoft.com/office/drawing/2014/main" id="{70173FB5-BABC-0693-5CBF-647AA1D35DC4}"/>
+          <p:cNvPr id="4" name="Título 3">
+            <a:extLst>
+              <a:ext uri="{FF2B5EF4-FFF2-40B4-BE49-F238E27FC236}">
+                <a16:creationId xmlns:a16="http://schemas.microsoft.com/office/drawing/2014/main" id="{F310ECD8-EF09-41C1-894E-F98C2F14802E}"/>
+              </a:ext>
+            </a:extLst>
+          </p:cNvPr>
+          <p:cNvSpPr>
+            <a:spLocks noGrp="1"/>
+          </p:cNvSpPr>
+          <p:nvPr>
+            <p:ph type="ctrTitle"/>
+          </p:nvPr>
+        </p:nvSpPr>
+        <p:spPr/>
+        <p:txBody>
+          <a:bodyPr/>
+          <a:lstStyle/>
+          <a:p>
+            <a:r>
+              <a:rPr lang="pt-BR" dirty="0"/>
+              <a:t>Método GET</a:t>
+            </a:r>
+          </a:p>
+        </p:txBody>
+      </p:sp>
+      <p:sp>
+        <p:nvSpPr>
+          <p:cNvPr id="5" name="Subtítulo 4">
+            <a:extLst>
+              <a:ext uri="{FF2B5EF4-FFF2-40B4-BE49-F238E27FC236}">
+                <a16:creationId xmlns:a16="http://schemas.microsoft.com/office/drawing/2014/main" id="{B167C996-46CA-4208-9C55-B86889EFB85A}"/>
+              </a:ext>
+            </a:extLst>
+          </p:cNvPr>
+          <p:cNvSpPr>
+            <a:spLocks noGrp="1"/>
+          </p:cNvSpPr>
+          <p:nvPr>
+            <p:ph type="subTitle" idx="1"/>
+          </p:nvPr>
+        </p:nvSpPr>
+        <p:spPr/>
+        <p:txBody>
+          <a:bodyPr/>
+          <a:lstStyle/>
+          <a:p>
+            <a:endParaRPr lang="pt-BR"/>
+          </a:p>
+        </p:txBody>
+      </p:sp>
+    </p:spTree>
+    <p:extLst>
+      <p:ext uri="{BB962C8B-B14F-4D97-AF65-F5344CB8AC3E}">
+        <p14:creationId xmlns:p14="http://schemas.microsoft.com/office/powerpoint/2010/main" val="2115184742"/>
+      </p:ext>
+    </p:extLst>
+  </p:cSld>
+  <p:clrMapOvr>
+    <a:masterClrMapping/>
+  </p:clrMapOvr>
+</p:sld>
+</file>
+
+<file path=ppt/slides/slide15.xml><?xml version="1.0" encoding="utf-8"?>
+<p:sld xmlns:a="http://schemas.openxmlformats.org/drawingml/2006/main" xmlns:r="http://schemas.openxmlformats.org/officeDocument/2006/relationships" xmlns:p="http://schemas.openxmlformats.org/presentationml/2006/main">
+  <p:cSld>
+    <p:spTree>
+      <p:nvGrpSpPr>
+        <p:cNvPr id="1" name=""/>
+        <p:cNvGrpSpPr/>
+        <p:nvPr/>
+      </p:nvGrpSpPr>
+      <p:grpSpPr>
+        <a:xfrm>
+          <a:off x="0" y="0"/>
+          <a:ext cx="0" cy="0"/>
+          <a:chOff x="0" y="0"/>
+          <a:chExt cx="0" cy="0"/>
+        </a:xfrm>
+      </p:grpSpPr>
+      <p:sp>
+        <p:nvSpPr>
+          <p:cNvPr id="2" name="Título 1">
+            <a:extLst>
+              <a:ext uri="{FF2B5EF4-FFF2-40B4-BE49-F238E27FC236}">
+                <a16:creationId xmlns:a16="http://schemas.microsoft.com/office/drawing/2014/main" id="{F4F13448-1EF9-501A-B4DD-E0A745A9806F}"/>
+              </a:ext>
+            </a:extLst>
+          </p:cNvPr>
+          <p:cNvSpPr>
+            <a:spLocks noGrp="1"/>
+          </p:cNvSpPr>
+          <p:nvPr>
+            <p:ph type="title"/>
+          </p:nvPr>
+        </p:nvSpPr>
+        <p:spPr/>
+        <p:txBody>
+          <a:bodyPr/>
+          <a:lstStyle/>
+          <a:p>
+            <a:r>
+              <a:rPr lang="pt-BR" dirty="0"/>
+              <a:t>Método GET</a:t>
+            </a:r>
+          </a:p>
+        </p:txBody>
+      </p:sp>
+      <p:sp>
+        <p:nvSpPr>
+          <p:cNvPr id="3" name="Espaço Reservado para Conteúdo 2">
+            <a:extLst>
+              <a:ext uri="{FF2B5EF4-FFF2-40B4-BE49-F238E27FC236}">
+                <a16:creationId xmlns:a16="http://schemas.microsoft.com/office/drawing/2014/main" id="{8DEE8165-D787-E9F5-D06C-1A4A0788C6E3}"/>
+              </a:ext>
+            </a:extLst>
+          </p:cNvPr>
+          <p:cNvSpPr>
+            <a:spLocks noGrp="1"/>
+          </p:cNvSpPr>
+          <p:nvPr>
+            <p:ph idx="1"/>
+          </p:nvPr>
+        </p:nvSpPr>
+        <p:spPr>
+          <a:xfrm>
+            <a:off x="592347" y="1844675"/>
+            <a:ext cx="11007306" cy="1101725"/>
+          </a:xfrm>
+        </p:spPr>
+        <p:txBody>
+          <a:bodyPr/>
+          <a:lstStyle/>
+          <a:p>
+            <a:r>
+              <a:rPr lang="pt-BR" dirty="0"/>
+              <a:t>O método </a:t>
+            </a:r>
+            <a:r>
+              <a:rPr lang="pt-BR" b="1" dirty="0"/>
+              <a:t>GET</a:t>
+            </a:r>
+            <a:r>
+              <a:rPr lang="pt-BR" dirty="0"/>
+              <a:t> é utilizado para </a:t>
+            </a:r>
+            <a:r>
+              <a:rPr lang="pt-BR" b="1" dirty="0"/>
+              <a:t>buscar ou consultar informações</a:t>
+            </a:r>
+            <a:r>
+              <a:rPr lang="pt-BR" dirty="0"/>
+              <a:t> em um servidor. Em uma API, uma requisição GET pode retornar todos os registros de um recurso ou apenas um registro específico.</a:t>
+            </a:r>
+          </a:p>
+        </p:txBody>
+      </p:sp>
+      <p:sp>
+        <p:nvSpPr>
+          <p:cNvPr id="6" name="Espaço Reservado para Conteúdo 2">
+            <a:extLst>
+              <a:ext uri="{FF2B5EF4-FFF2-40B4-BE49-F238E27FC236}">
+                <a16:creationId xmlns:a16="http://schemas.microsoft.com/office/drawing/2014/main" id="{0959664D-71FE-4DFA-83E9-FBB59C5BDC6C}"/>
               </a:ext>
             </a:extLst>
           </p:cNvPr>
@@ -5573,8 +6009,8 @@
         </p:nvSpPr>
         <p:spPr>
           <a:xfrm>
-            <a:off x="592347" y="3429000"/>
-            <a:ext cx="11001555" cy="1039483"/>
+            <a:off x="592347" y="3005667"/>
+            <a:ext cx="11007306" cy="1101725"/>
           </a:xfrm>
           <a:prstGeom prst="rect">
             <a:avLst/>
@@ -5747,42 +6183,117 @@
             </a:lvl9pPr>
           </a:lstStyle>
           <a:p>
-            <a:pPr>
-              <a:lnSpc>
-                <a:spcPct val="100000"/>
-              </a:lnSpc>
-            </a:pPr>
-            <a:r>
-              <a:rPr lang="pt-BR" b="1" dirty="0"/>
-              <a:t>Para a aula</a:t>
-            </a:r>
-            <a:r>
-              <a:rPr lang="pt-BR" dirty="0"/>
-              <a:t>, eu faria primeiro essa instalação e mostraria aos alunos o </a:t>
-            </a:r>
-            <a:r>
-              <a:rPr lang="pt-BR" dirty="0" err="1"/>
-              <a:t>db.json</a:t>
-            </a:r>
-            <a:r>
-              <a:rPr lang="pt-BR" dirty="0"/>
-              <a:t> e a URL /produtos no navegador. Só depois entraria no GET com </a:t>
-            </a:r>
-            <a:r>
-              <a:rPr lang="pt-BR" dirty="0" err="1"/>
-              <a:t>JavaScript</a:t>
-            </a:r>
-            <a:r>
-              <a:rPr lang="pt-BR" dirty="0"/>
-              <a:t>.</a:t>
-            </a:r>
+            <a:r>
+              <a:rPr lang="pt-BR"/>
+              <a:t>No JavaScript, fazemos uma busca com GET utilizando o fetch(). Como você já criou o api.js, podemos centralizar a requisição nele.</a:t>
+            </a:r>
+            <a:endParaRPr lang="pt-BR" dirty="0"/>
+          </a:p>
+        </p:txBody>
+      </p:sp>
+      <p:sp>
+        <p:nvSpPr>
+          <p:cNvPr id="8" name="Retângulo 7">
+            <a:extLst>
+              <a:ext uri="{FF2B5EF4-FFF2-40B4-BE49-F238E27FC236}">
+                <a16:creationId xmlns:a16="http://schemas.microsoft.com/office/drawing/2014/main" id="{A0393BDD-30DC-4230-9109-FCDA209FD37B}"/>
+              </a:ext>
+            </a:extLst>
+          </p:cNvPr>
+          <p:cNvSpPr/>
+          <p:nvPr/>
+        </p:nvSpPr>
+        <p:spPr>
+          <a:xfrm>
+            <a:off x="1693333" y="4526252"/>
+            <a:ext cx="8805333" cy="1477328"/>
+          </a:xfrm>
+          <a:prstGeom prst="rect">
+            <a:avLst/>
+          </a:prstGeom>
+        </p:spPr>
+        <p:txBody>
+          <a:bodyPr wrap="square">
+            <a:spAutoFit/>
+          </a:bodyPr>
+          <a:lstStyle/>
+          <a:p>
+            <a:r>
+              <a:rPr lang="en-US" dirty="0"/>
+              <a:t>async </a:t>
+            </a:r>
+            <a:r>
+              <a:rPr lang="en-US" dirty="0" err="1"/>
+              <a:t>buscarProdutos</a:t>
+            </a:r>
+            <a:r>
+              <a:rPr lang="en-US" dirty="0"/>
+              <a:t>() { </a:t>
+            </a:r>
+          </a:p>
+          <a:p>
+            <a:r>
+              <a:rPr lang="en-US" dirty="0"/>
+              <a:t>	const response = await fetch( "http://localhost:3000/</a:t>
+            </a:r>
+            <a:r>
+              <a:rPr lang="en-US" dirty="0" err="1"/>
+              <a:t>produtos</a:t>
+            </a:r>
+            <a:r>
+              <a:rPr lang="en-US" dirty="0"/>
+              <a:t>" ) </a:t>
+            </a:r>
+          </a:p>
+          <a:p>
+            <a:r>
+              <a:rPr lang="en-US" dirty="0"/>
+              <a:t>	const </a:t>
+            </a:r>
+            <a:r>
+              <a:rPr lang="en-US" dirty="0" err="1"/>
+              <a:t>produtos</a:t>
+            </a:r>
+            <a:r>
+              <a:rPr lang="en-US" dirty="0"/>
+              <a:t> = await </a:t>
+            </a:r>
+            <a:r>
+              <a:rPr lang="en-US" dirty="0" err="1"/>
+              <a:t>response.json</a:t>
+            </a:r>
+            <a:r>
+              <a:rPr lang="en-US" dirty="0"/>
+              <a:t>() </a:t>
+            </a:r>
+          </a:p>
+          <a:p>
+            <a:r>
+              <a:rPr lang="en-US" dirty="0"/>
+              <a:t>	return </a:t>
+            </a:r>
+            <a:r>
+              <a:rPr lang="en-US" dirty="0" err="1"/>
+              <a:t>produtos</a:t>
+            </a:r>
+            <a:r>
+              <a:rPr lang="en-US" dirty="0"/>
+              <a:t> </a:t>
+            </a:r>
+          </a:p>
+          <a:p>
+            <a:r>
+              <a:rPr lang="en-US" dirty="0"/>
+              <a:t>}</a:t>
+            </a:r>
+            <a:endParaRPr lang="pt-BR" dirty="0"/>
           </a:p>
         </p:txBody>
       </p:sp>
     </p:spTree>
     <p:extLst>
       <p:ext uri="{BB962C8B-B14F-4D97-AF65-F5344CB8AC3E}">
-        <p14:creationId xmlns:p14="http://schemas.microsoft.com/office/powerpoint/2010/main" val="3026534779"/>
+        <p14:creationId xmlns:p14="http://schemas.microsoft.com/office/powerpoint/2010/main" val="1500640087"/>
       </p:ext>
     </p:extLst>
   </p:cSld>
@@ -5792,7 +6303,7 @@
 </p:sld>
 </file>
 
-<file path=ppt/slides/slide13.xml><?xml version="1.0" encoding="utf-8"?>
+<file path=ppt/slides/slide16.xml><?xml version="1.0" encoding="utf-8"?>
 <p:sld xmlns:a="http://schemas.openxmlformats.org/drawingml/2006/main" xmlns:r="http://schemas.openxmlformats.org/officeDocument/2006/relationships" xmlns:p="http://schemas.openxmlformats.org/presentationml/2006/main">
   <p:cSld>
     <p:spTree>
@@ -5814,7 +6325,7 @@
           <p:cNvPr id="2" name="Título 1">
             <a:extLst>
               <a:ext uri="{FF2B5EF4-FFF2-40B4-BE49-F238E27FC236}">
-                <a16:creationId xmlns:a16="http://schemas.microsoft.com/office/drawing/2014/main" id="{F4F13448-1EF9-501A-B4DD-E0A745A9806F}"/>
+                <a16:creationId xmlns:a16="http://schemas.microsoft.com/office/drawing/2014/main" id="{8738858E-69E2-8A32-4D8D-61A4750C2960}"/>
               </a:ext>
             </a:extLst>
           </p:cNvPr>
@@ -5839,7 +6350,7 @@
           <p:cNvPr id="3" name="Espaço Reservado para Conteúdo 2">
             <a:extLst>
               <a:ext uri="{FF2B5EF4-FFF2-40B4-BE49-F238E27FC236}">
-                <a16:creationId xmlns:a16="http://schemas.microsoft.com/office/drawing/2014/main" id="{8DEE8165-D787-E9F5-D06C-1A4A0788C6E3}"/>
+                <a16:creationId xmlns:a16="http://schemas.microsoft.com/office/drawing/2014/main" id="{1634CA0B-A520-9184-A9C1-803F8634393B}"/>
               </a:ext>
             </a:extLst>
           </p:cNvPr>
@@ -5862,7 +6373,7 @@
     </p:spTree>
     <p:extLst>
       <p:ext uri="{BB962C8B-B14F-4D97-AF65-F5344CB8AC3E}">
-        <p14:creationId xmlns:p14="http://schemas.microsoft.com/office/powerpoint/2010/main" val="1500640087"/>
+        <p14:creationId xmlns:p14="http://schemas.microsoft.com/office/powerpoint/2010/main" val="2353324059"/>
       </p:ext>
     </p:extLst>
   </p:cSld>
@@ -5872,7 +6383,7 @@
 </p:sld>
 </file>
 
-<file path=ppt/slides/slide14.xml><?xml version="1.0" encoding="utf-8"?>
+<file path=ppt/slides/slide17.xml><?xml version="1.0" encoding="utf-8"?>
 <p:sld xmlns:a="http://schemas.openxmlformats.org/drawingml/2006/main" xmlns:r="http://schemas.openxmlformats.org/officeDocument/2006/relationships" xmlns:p="http://schemas.openxmlformats.org/presentationml/2006/main">
   <p:cSld>
     <p:spTree>
@@ -5894,86 +6405,6 @@
           <p:cNvPr id="2" name="Título 1">
             <a:extLst>
               <a:ext uri="{FF2B5EF4-FFF2-40B4-BE49-F238E27FC236}">
-                <a16:creationId xmlns:a16="http://schemas.microsoft.com/office/drawing/2014/main" id="{8738858E-69E2-8A32-4D8D-61A4750C2960}"/>
-              </a:ext>
-            </a:extLst>
-          </p:cNvPr>
-          <p:cNvSpPr>
-            <a:spLocks noGrp="1"/>
-          </p:cNvSpPr>
-          <p:nvPr>
-            <p:ph type="title"/>
-          </p:nvPr>
-        </p:nvSpPr>
-        <p:spPr/>
-        <p:txBody>
-          <a:bodyPr/>
-          <a:lstStyle/>
-          <a:p>
-            <a:endParaRPr lang="pt-BR"/>
-          </a:p>
-        </p:txBody>
-      </p:sp>
-      <p:sp>
-        <p:nvSpPr>
-          <p:cNvPr id="3" name="Espaço Reservado para Conteúdo 2">
-            <a:extLst>
-              <a:ext uri="{FF2B5EF4-FFF2-40B4-BE49-F238E27FC236}">
-                <a16:creationId xmlns:a16="http://schemas.microsoft.com/office/drawing/2014/main" id="{1634CA0B-A520-9184-A9C1-803F8634393B}"/>
-              </a:ext>
-            </a:extLst>
-          </p:cNvPr>
-          <p:cNvSpPr>
-            <a:spLocks noGrp="1"/>
-          </p:cNvSpPr>
-          <p:nvPr>
-            <p:ph idx="1"/>
-          </p:nvPr>
-        </p:nvSpPr>
-        <p:spPr/>
-        <p:txBody>
-          <a:bodyPr/>
-          <a:lstStyle/>
-          <a:p>
-            <a:endParaRPr lang="pt-BR"/>
-          </a:p>
-        </p:txBody>
-      </p:sp>
-    </p:spTree>
-    <p:extLst>
-      <p:ext uri="{BB962C8B-B14F-4D97-AF65-F5344CB8AC3E}">
-        <p14:creationId xmlns:p14="http://schemas.microsoft.com/office/powerpoint/2010/main" val="2353324059"/>
-      </p:ext>
-    </p:extLst>
-  </p:cSld>
-  <p:clrMapOvr>
-    <a:masterClrMapping/>
-  </p:clrMapOvr>
-</p:sld>
-</file>
-
-<file path=ppt/slides/slide15.xml><?xml version="1.0" encoding="utf-8"?>
-<p:sld xmlns:a="http://schemas.openxmlformats.org/drawingml/2006/main" xmlns:r="http://schemas.openxmlformats.org/officeDocument/2006/relationships" xmlns:p="http://schemas.openxmlformats.org/presentationml/2006/main">
-  <p:cSld>
-    <p:spTree>
-      <p:nvGrpSpPr>
-        <p:cNvPr id="1" name=""/>
-        <p:cNvGrpSpPr/>
-        <p:nvPr/>
-      </p:nvGrpSpPr>
-      <p:grpSpPr>
-        <a:xfrm>
-          <a:off x="0" y="0"/>
-          <a:ext cx="0" cy="0"/>
-          <a:chOff x="0" y="0"/>
-          <a:chExt cx="0" cy="0"/>
-        </a:xfrm>
-      </p:grpSpPr>
-      <p:sp>
-        <p:nvSpPr>
-          <p:cNvPr id="2" name="Título 1">
-            <a:extLst>
-              <a:ext uri="{FF2B5EF4-FFF2-40B4-BE49-F238E27FC236}">
                 <a16:creationId xmlns:a16="http://schemas.microsoft.com/office/drawing/2014/main" id="{BF615A30-6D2A-8B4E-AFAD-9F640740C0F1}"/>
               </a:ext>
             </a:extLst>
@@ -6032,7 +6463,7 @@
 </p:sld>
 </file>
 
-<file path=ppt/slides/slide16.xml><?xml version="1.0" encoding="utf-8"?>
+<file path=ppt/slides/slide18.xml><?xml version="1.0" encoding="utf-8"?>
 <p:sld xmlns:a="http://schemas.openxmlformats.org/drawingml/2006/main" xmlns:r="http://schemas.openxmlformats.org/officeDocument/2006/relationships" xmlns:p="http://schemas.openxmlformats.org/presentationml/2006/main">
   <p:cSld>
     <p:spTree>
@@ -6519,7 +6950,7 @@
 </p:sld>
 </file>
 
-<file path=ppt/slides/slide17.xml><?xml version="1.0" encoding="utf-8"?>
+<file path=ppt/slides/slide19.xml><?xml version="1.0" encoding="utf-8"?>
 <p:sld xmlns:a="http://schemas.openxmlformats.org/drawingml/2006/main" xmlns:r="http://schemas.openxmlformats.org/officeDocument/2006/relationships" xmlns:p="http://schemas.openxmlformats.org/presentationml/2006/main">
   <p:cSld>
     <p:spTree>
@@ -7205,7 +7636,190 @@
 </p:sld>
 </file>
 
-<file path=ppt/slides/slide18.xml><?xml version="1.0" encoding="utf-8"?>
+<file path=ppt/slides/slide2.xml><?xml version="1.0" encoding="utf-8"?>
+<p:sld xmlns:a="http://schemas.openxmlformats.org/drawingml/2006/main" xmlns:r="http://schemas.openxmlformats.org/officeDocument/2006/relationships" xmlns:p="http://schemas.openxmlformats.org/presentationml/2006/main">
+  <p:cSld>
+    <p:spTree>
+      <p:nvGrpSpPr>
+        <p:cNvPr id="1" name=""/>
+        <p:cNvGrpSpPr/>
+        <p:nvPr/>
+      </p:nvGrpSpPr>
+      <p:grpSpPr>
+        <a:xfrm>
+          <a:off x="0" y="0"/>
+          <a:ext cx="0" cy="0"/>
+          <a:chOff x="0" y="0"/>
+          <a:chExt cx="0" cy="0"/>
+        </a:xfrm>
+      </p:grpSpPr>
+      <p:sp>
+        <p:nvSpPr>
+          <p:cNvPr id="2" name="Título 1">
+            <a:extLst>
+              <a:ext uri="{FF2B5EF4-FFF2-40B4-BE49-F238E27FC236}">
+                <a16:creationId xmlns:a16="http://schemas.microsoft.com/office/drawing/2014/main" id="{B3E63485-508B-C1C3-3D4B-A556E48947BE}"/>
+              </a:ext>
+            </a:extLst>
+          </p:cNvPr>
+          <p:cNvSpPr>
+            <a:spLocks noGrp="1"/>
+          </p:cNvSpPr>
+          <p:nvPr>
+            <p:ph type="title"/>
+          </p:nvPr>
+        </p:nvSpPr>
+        <p:spPr/>
+        <p:txBody>
+          <a:bodyPr/>
+          <a:lstStyle/>
+          <a:p>
+            <a:r>
+              <a:rPr lang="pt-BR" dirty="0"/>
+              <a:t>Como mostrar os equipamentos registrados</a:t>
+            </a:r>
+          </a:p>
+        </p:txBody>
+      </p:sp>
+      <p:grpSp>
+        <p:nvGrpSpPr>
+          <p:cNvPr id="10" name="Agrupar 9">
+            <a:extLst>
+              <a:ext uri="{FF2B5EF4-FFF2-40B4-BE49-F238E27FC236}">
+                <a16:creationId xmlns:a16="http://schemas.microsoft.com/office/drawing/2014/main" id="{39FA6042-1511-7572-4085-62A1CE180370}"/>
+              </a:ext>
+            </a:extLst>
+          </p:cNvPr>
+          <p:cNvGrpSpPr/>
+          <p:nvPr/>
+        </p:nvGrpSpPr>
+        <p:grpSpPr>
+          <a:xfrm>
+            <a:off x="749185" y="2320507"/>
+            <a:ext cx="5139781" cy="3579557"/>
+            <a:chOff x="499019" y="2135911"/>
+            <a:chExt cx="4408828" cy="3105805"/>
+          </a:xfrm>
+        </p:grpSpPr>
+        <p:pic>
+          <p:nvPicPr>
+            <p:cNvPr id="7" name="Imagem 6">
+              <a:extLst>
+                <a:ext uri="{FF2B5EF4-FFF2-40B4-BE49-F238E27FC236}">
+                  <a16:creationId xmlns:a16="http://schemas.microsoft.com/office/drawing/2014/main" id="{7FB28246-6AAC-BB49-8A97-48DB955BAE45}"/>
+                </a:ext>
+              </a:extLst>
+            </p:cNvPr>
+            <p:cNvPicPr>
+              <a:picLocks noChangeAspect="1"/>
+            </p:cNvPicPr>
+            <p:nvPr/>
+          </p:nvPicPr>
+          <p:blipFill>
+            <a:blip r:embed="rId2"/>
+            <a:stretch>
+              <a:fillRect/>
+            </a:stretch>
+          </p:blipFill>
+          <p:spPr>
+            <a:xfrm>
+              <a:off x="499019" y="2135911"/>
+              <a:ext cx="3240000" cy="1752245"/>
+            </a:xfrm>
+            <a:prstGeom prst="rect">
+              <a:avLst/>
+            </a:prstGeom>
+          </p:spPr>
+        </p:pic>
+        <p:pic>
+          <p:nvPicPr>
+            <p:cNvPr id="5" name="Imagem 4">
+              <a:extLst>
+                <a:ext uri="{FF2B5EF4-FFF2-40B4-BE49-F238E27FC236}">
+                  <a16:creationId xmlns:a16="http://schemas.microsoft.com/office/drawing/2014/main" id="{C9DCCF41-6E4C-4CA0-7BE0-B7740FA1D3DF}"/>
+                </a:ext>
+              </a:extLst>
+            </p:cNvPr>
+            <p:cNvPicPr>
+              <a:picLocks noChangeAspect="1"/>
+            </p:cNvPicPr>
+            <p:nvPr/>
+          </p:nvPicPr>
+          <p:blipFill>
+            <a:blip r:embed="rId3"/>
+            <a:stretch>
+              <a:fillRect/>
+            </a:stretch>
+          </p:blipFill>
+          <p:spPr>
+            <a:xfrm>
+              <a:off x="1667847" y="3292934"/>
+              <a:ext cx="3240000" cy="1948782"/>
+            </a:xfrm>
+            <a:prstGeom prst="rect">
+              <a:avLst/>
+            </a:prstGeom>
+          </p:spPr>
+        </p:pic>
+      </p:grpSp>
+      <p:cxnSp>
+        <p:nvCxnSpPr>
+          <p:cNvPr id="9" name="Conector de Seta Reta 8">
+            <a:extLst>
+              <a:ext uri="{FF2B5EF4-FFF2-40B4-BE49-F238E27FC236}">
+                <a16:creationId xmlns:a16="http://schemas.microsoft.com/office/drawing/2014/main" id="{3E381279-5B1B-AEB3-F1F7-6FE4EF9399D2}"/>
+              </a:ext>
+            </a:extLst>
+          </p:cNvPr>
+          <p:cNvCxnSpPr>
+            <a:cxnSpLocks/>
+          </p:cNvCxnSpPr>
+          <p:nvPr/>
+        </p:nvCxnSpPr>
+        <p:spPr>
+          <a:xfrm>
+            <a:off x="6029864" y="3899139"/>
+            <a:ext cx="1187570" cy="0"/>
+          </a:xfrm>
+          <a:prstGeom prst="straightConnector1">
+            <a:avLst/>
+          </a:prstGeom>
+          <a:ln w="38100">
+            <a:solidFill>
+              <a:schemeClr val="tx1"/>
+            </a:solidFill>
+            <a:tailEnd type="triangle"/>
+          </a:ln>
+        </p:spPr>
+        <p:style>
+          <a:lnRef idx="1">
+            <a:schemeClr val="accent1"/>
+          </a:lnRef>
+          <a:fillRef idx="0">
+            <a:schemeClr val="accent1"/>
+          </a:fillRef>
+          <a:effectRef idx="0">
+            <a:schemeClr val="accent1"/>
+          </a:effectRef>
+          <a:fontRef idx="minor">
+            <a:schemeClr val="tx1"/>
+          </a:fontRef>
+        </p:style>
+      </p:cxnSp>
+    </p:spTree>
+    <p:extLst>
+      <p:ext uri="{BB962C8B-B14F-4D97-AF65-F5344CB8AC3E}">
+        <p14:creationId xmlns:p14="http://schemas.microsoft.com/office/powerpoint/2010/main" val="3736684106"/>
+      </p:ext>
+    </p:extLst>
+  </p:cSld>
+  <p:clrMapOvr>
+    <a:masterClrMapping/>
+  </p:clrMapOvr>
+</p:sld>
+</file>
+
+<file path=ppt/slides/slide20.xml><?xml version="1.0" encoding="utf-8"?>
 <p:sld xmlns:a="http://schemas.openxmlformats.org/drawingml/2006/main" xmlns:r="http://schemas.openxmlformats.org/officeDocument/2006/relationships" xmlns:p="http://schemas.openxmlformats.org/presentationml/2006/main">
   <p:cSld>
     <p:spTree>
@@ -8230,7 +8844,7 @@
 </p:sld>
 </file>
 
-<file path=ppt/slides/slide19.xml><?xml version="1.0" encoding="utf-8"?>
+<file path=ppt/slides/slide21.xml><?xml version="1.0" encoding="utf-8"?>
 <p:sld xmlns:a="http://schemas.openxmlformats.org/drawingml/2006/main" xmlns:r="http://schemas.openxmlformats.org/officeDocument/2006/relationships" xmlns:p="http://schemas.openxmlformats.org/presentationml/2006/main">
   <p:cSld>
     <p:spTree>
@@ -8352,190 +8966,7 @@
 </p:sld>
 </file>
 
-<file path=ppt/slides/slide2.xml><?xml version="1.0" encoding="utf-8"?>
-<p:sld xmlns:a="http://schemas.openxmlformats.org/drawingml/2006/main" xmlns:r="http://schemas.openxmlformats.org/officeDocument/2006/relationships" xmlns:p="http://schemas.openxmlformats.org/presentationml/2006/main">
-  <p:cSld>
-    <p:spTree>
-      <p:nvGrpSpPr>
-        <p:cNvPr id="1" name=""/>
-        <p:cNvGrpSpPr/>
-        <p:nvPr/>
-      </p:nvGrpSpPr>
-      <p:grpSpPr>
-        <a:xfrm>
-          <a:off x="0" y="0"/>
-          <a:ext cx="0" cy="0"/>
-          <a:chOff x="0" y="0"/>
-          <a:chExt cx="0" cy="0"/>
-        </a:xfrm>
-      </p:grpSpPr>
-      <p:sp>
-        <p:nvSpPr>
-          <p:cNvPr id="2" name="Título 1">
-            <a:extLst>
-              <a:ext uri="{FF2B5EF4-FFF2-40B4-BE49-F238E27FC236}">
-                <a16:creationId xmlns:a16="http://schemas.microsoft.com/office/drawing/2014/main" id="{B3E63485-508B-C1C3-3D4B-A556E48947BE}"/>
-              </a:ext>
-            </a:extLst>
-          </p:cNvPr>
-          <p:cNvSpPr>
-            <a:spLocks noGrp="1"/>
-          </p:cNvSpPr>
-          <p:nvPr>
-            <p:ph type="title"/>
-          </p:nvPr>
-        </p:nvSpPr>
-        <p:spPr/>
-        <p:txBody>
-          <a:bodyPr/>
-          <a:lstStyle/>
-          <a:p>
-            <a:r>
-              <a:rPr lang="pt-BR" dirty="0"/>
-              <a:t>Como mostrar os equipamentos registrados</a:t>
-            </a:r>
-          </a:p>
-        </p:txBody>
-      </p:sp>
-      <p:grpSp>
-        <p:nvGrpSpPr>
-          <p:cNvPr id="10" name="Agrupar 9">
-            <a:extLst>
-              <a:ext uri="{FF2B5EF4-FFF2-40B4-BE49-F238E27FC236}">
-                <a16:creationId xmlns:a16="http://schemas.microsoft.com/office/drawing/2014/main" id="{39FA6042-1511-7572-4085-62A1CE180370}"/>
-              </a:ext>
-            </a:extLst>
-          </p:cNvPr>
-          <p:cNvGrpSpPr/>
-          <p:nvPr/>
-        </p:nvGrpSpPr>
-        <p:grpSpPr>
-          <a:xfrm>
-            <a:off x="749185" y="2320507"/>
-            <a:ext cx="5139781" cy="3579557"/>
-            <a:chOff x="499019" y="2135911"/>
-            <a:chExt cx="4408828" cy="3105805"/>
-          </a:xfrm>
-        </p:grpSpPr>
-        <p:pic>
-          <p:nvPicPr>
-            <p:cNvPr id="7" name="Imagem 6">
-              <a:extLst>
-                <a:ext uri="{FF2B5EF4-FFF2-40B4-BE49-F238E27FC236}">
-                  <a16:creationId xmlns:a16="http://schemas.microsoft.com/office/drawing/2014/main" id="{7FB28246-6AAC-BB49-8A97-48DB955BAE45}"/>
-                </a:ext>
-              </a:extLst>
-            </p:cNvPr>
-            <p:cNvPicPr>
-              <a:picLocks noChangeAspect="1"/>
-            </p:cNvPicPr>
-            <p:nvPr/>
-          </p:nvPicPr>
-          <p:blipFill>
-            <a:blip r:embed="rId2"/>
-            <a:stretch>
-              <a:fillRect/>
-            </a:stretch>
-          </p:blipFill>
-          <p:spPr>
-            <a:xfrm>
-              <a:off x="499019" y="2135911"/>
-              <a:ext cx="3240000" cy="1752245"/>
-            </a:xfrm>
-            <a:prstGeom prst="rect">
-              <a:avLst/>
-            </a:prstGeom>
-          </p:spPr>
-        </p:pic>
-        <p:pic>
-          <p:nvPicPr>
-            <p:cNvPr id="5" name="Imagem 4">
-              <a:extLst>
-                <a:ext uri="{FF2B5EF4-FFF2-40B4-BE49-F238E27FC236}">
-                  <a16:creationId xmlns:a16="http://schemas.microsoft.com/office/drawing/2014/main" id="{C9DCCF41-6E4C-4CA0-7BE0-B7740FA1D3DF}"/>
-                </a:ext>
-              </a:extLst>
-            </p:cNvPr>
-            <p:cNvPicPr>
-              <a:picLocks noChangeAspect="1"/>
-            </p:cNvPicPr>
-            <p:nvPr/>
-          </p:nvPicPr>
-          <p:blipFill>
-            <a:blip r:embed="rId3"/>
-            <a:stretch>
-              <a:fillRect/>
-            </a:stretch>
-          </p:blipFill>
-          <p:spPr>
-            <a:xfrm>
-              <a:off x="1667847" y="3292934"/>
-              <a:ext cx="3240000" cy="1948782"/>
-            </a:xfrm>
-            <a:prstGeom prst="rect">
-              <a:avLst/>
-            </a:prstGeom>
-          </p:spPr>
-        </p:pic>
-      </p:grpSp>
-      <p:cxnSp>
-        <p:nvCxnSpPr>
-          <p:cNvPr id="9" name="Conector de Seta Reta 8">
-            <a:extLst>
-              <a:ext uri="{FF2B5EF4-FFF2-40B4-BE49-F238E27FC236}">
-                <a16:creationId xmlns:a16="http://schemas.microsoft.com/office/drawing/2014/main" id="{3E381279-5B1B-AEB3-F1F7-6FE4EF9399D2}"/>
-              </a:ext>
-            </a:extLst>
-          </p:cNvPr>
-          <p:cNvCxnSpPr>
-            <a:cxnSpLocks/>
-          </p:cNvCxnSpPr>
-          <p:nvPr/>
-        </p:nvCxnSpPr>
-        <p:spPr>
-          <a:xfrm>
-            <a:off x="6029864" y="3899139"/>
-            <a:ext cx="1187570" cy="0"/>
-          </a:xfrm>
-          <a:prstGeom prst="straightConnector1">
-            <a:avLst/>
-          </a:prstGeom>
-          <a:ln w="38100">
-            <a:solidFill>
-              <a:schemeClr val="tx1"/>
-            </a:solidFill>
-            <a:tailEnd type="triangle"/>
-          </a:ln>
-        </p:spPr>
-        <p:style>
-          <a:lnRef idx="1">
-            <a:schemeClr val="accent1"/>
-          </a:lnRef>
-          <a:fillRef idx="0">
-            <a:schemeClr val="accent1"/>
-          </a:fillRef>
-          <a:effectRef idx="0">
-            <a:schemeClr val="accent1"/>
-          </a:effectRef>
-          <a:fontRef idx="minor">
-            <a:schemeClr val="tx1"/>
-          </a:fontRef>
-        </p:style>
-      </p:cxnSp>
-    </p:spTree>
-    <p:extLst>
-      <p:ext uri="{BB962C8B-B14F-4D97-AF65-F5344CB8AC3E}">
-        <p14:creationId xmlns:p14="http://schemas.microsoft.com/office/powerpoint/2010/main" val="3736684106"/>
-      </p:ext>
-    </p:extLst>
-  </p:cSld>
-  <p:clrMapOvr>
-    <a:masterClrMapping/>
-  </p:clrMapOvr>
-</p:sld>
-</file>
-
-<file path=ppt/slides/slide20.xml><?xml version="1.0" encoding="utf-8"?>
+<file path=ppt/slides/slide22.xml><?xml version="1.0" encoding="utf-8"?>
 <p:sld xmlns:a="http://schemas.openxmlformats.org/drawingml/2006/main" xmlns:r="http://schemas.openxmlformats.org/officeDocument/2006/relationships" xmlns:p="http://schemas.openxmlformats.org/presentationml/2006/main">
   <p:cSld>
     <p:spTree>
@@ -8663,7 +9094,7 @@
 </p:sld>
 </file>
 
-<file path=ppt/slides/slide21.xml><?xml version="1.0" encoding="utf-8"?>
+<file path=ppt/slides/slide23.xml><?xml version="1.0" encoding="utf-8"?>
 <p:sld xmlns:a="http://schemas.openxmlformats.org/drawingml/2006/main" xmlns:r="http://schemas.openxmlformats.org/officeDocument/2006/relationships" xmlns:p="http://schemas.openxmlformats.org/presentationml/2006/main">
   <p:cSld>
     <p:spTree>

--- a/SI/Programação para Internet/Módulo 2 - JavaScript/Aula03 - Implementado o CRUD/Implementando CRUD.pptx
+++ b/SI/Programação para Internet/Módulo 2 - JavaScript/Aula03 - Implementado o CRUD/Implementando CRUD.pptx
@@ -21,13 +21,18 @@
     <p:sldId id="280" r:id="rId15"/>
     <p:sldId id="272" r:id="rId16"/>
     <p:sldId id="273" r:id="rId17"/>
-    <p:sldId id="274" r:id="rId18"/>
-    <p:sldId id="261" r:id="rId19"/>
-    <p:sldId id="262" r:id="rId20"/>
-    <p:sldId id="263" r:id="rId21"/>
-    <p:sldId id="265" r:id="rId22"/>
-    <p:sldId id="267" r:id="rId23"/>
-    <p:sldId id="266" r:id="rId24"/>
+    <p:sldId id="281" r:id="rId18"/>
+    <p:sldId id="282" r:id="rId19"/>
+    <p:sldId id="283" r:id="rId20"/>
+    <p:sldId id="284" r:id="rId21"/>
+    <p:sldId id="285" r:id="rId22"/>
+    <p:sldId id="286" r:id="rId23"/>
+    <p:sldId id="261" r:id="rId24"/>
+    <p:sldId id="262" r:id="rId25"/>
+    <p:sldId id="263" r:id="rId26"/>
+    <p:sldId id="265" r:id="rId27"/>
+    <p:sldId id="267" r:id="rId28"/>
+    <p:sldId id="266" r:id="rId29"/>
   </p:sldIdLst>
   <p:sldSz cx="12192000" cy="6858000"/>
   <p:notesSz cx="6858000" cy="9144000"/>
@@ -6184,112 +6189,328 @@
           </a:lstStyle>
           <a:p>
             <a:r>
-              <a:rPr lang="pt-BR"/>
-              <a:t>No JavaScript, fazemos uma busca com GET utilizando o fetch(). Como você já criou o api.js, podemos centralizar a requisição nele.</a:t>
-            </a:r>
-            <a:endParaRPr lang="pt-BR" dirty="0"/>
+              <a:rPr lang="pt-BR" dirty="0"/>
+              <a:t>No </a:t>
+            </a:r>
+            <a:r>
+              <a:rPr lang="pt-BR" dirty="0" err="1"/>
+              <a:t>JavaScript</a:t>
+            </a:r>
+            <a:r>
+              <a:rPr lang="pt-BR" dirty="0"/>
+              <a:t>, fazemos uma busca com GET utilizando o </a:t>
+            </a:r>
+            <a:r>
+              <a:rPr lang="pt-BR" dirty="0" err="1"/>
+              <a:t>fetch</a:t>
+            </a:r>
+            <a:r>
+              <a:rPr lang="pt-BR" dirty="0"/>
+              <a:t>(). Como você já criou o api.js, podemos centralizar a requisição nele.</a:t>
+            </a:r>
           </a:p>
         </p:txBody>
       </p:sp>
-      <p:sp>
-        <p:nvSpPr>
-          <p:cNvPr id="8" name="Retângulo 7">
+      <p:grpSp>
+        <p:nvGrpSpPr>
+          <p:cNvPr id="7" name="Agrupar 6">
             <a:extLst>
               <a:ext uri="{FF2B5EF4-FFF2-40B4-BE49-F238E27FC236}">
-                <a16:creationId xmlns:a16="http://schemas.microsoft.com/office/drawing/2014/main" id="{A0393BDD-30DC-4230-9109-FCDA209FD37B}"/>
+                <a16:creationId xmlns:a16="http://schemas.microsoft.com/office/drawing/2014/main" id="{7DD36164-6D7E-40D4-9C4C-F0C09C5E96E1}"/>
               </a:ext>
             </a:extLst>
           </p:cNvPr>
-          <p:cNvSpPr/>
+          <p:cNvGrpSpPr/>
           <p:nvPr/>
-        </p:nvSpPr>
-        <p:spPr>
+        </p:nvGrpSpPr>
+        <p:grpSpPr>
           <a:xfrm>
-            <a:off x="1693333" y="4526252"/>
-            <a:ext cx="8805333" cy="1477328"/>
+            <a:off x="1583017" y="4299718"/>
+            <a:ext cx="9025966" cy="2151114"/>
+            <a:chOff x="1472701" y="4452118"/>
+            <a:chExt cx="9025966" cy="2151114"/>
           </a:xfrm>
-          <a:prstGeom prst="rect">
-            <a:avLst/>
-          </a:prstGeom>
-        </p:spPr>
-        <p:txBody>
-          <a:bodyPr wrap="square">
-            <a:spAutoFit/>
-          </a:bodyPr>
-          <a:lstStyle/>
-          <a:p>
-            <a:r>
-              <a:rPr lang="en-US" dirty="0"/>
-              <a:t>async </a:t>
-            </a:r>
-            <a:r>
-              <a:rPr lang="en-US" dirty="0" err="1"/>
-              <a:t>buscarProdutos</a:t>
-            </a:r>
-            <a:r>
-              <a:rPr lang="en-US" dirty="0"/>
-              <a:t>() { </a:t>
-            </a:r>
-          </a:p>
-          <a:p>
-            <a:r>
-              <a:rPr lang="en-US" dirty="0"/>
-              <a:t>	const response = await fetch( "http://localhost:3000/</a:t>
-            </a:r>
-            <a:r>
-              <a:rPr lang="en-US" dirty="0" err="1"/>
-              <a:t>produtos</a:t>
-            </a:r>
-            <a:r>
-              <a:rPr lang="en-US" dirty="0"/>
-              <a:t>" ) </a:t>
-            </a:r>
-          </a:p>
-          <a:p>
-            <a:r>
-              <a:rPr lang="en-US" dirty="0"/>
-              <a:t>	const </a:t>
-            </a:r>
-            <a:r>
-              <a:rPr lang="en-US" dirty="0" err="1"/>
-              <a:t>produtos</a:t>
-            </a:r>
-            <a:r>
-              <a:rPr lang="en-US" dirty="0"/>
-              <a:t> = await </a:t>
-            </a:r>
-            <a:r>
-              <a:rPr lang="en-US" dirty="0" err="1"/>
-              <a:t>response.json</a:t>
-            </a:r>
-            <a:r>
-              <a:rPr lang="en-US" dirty="0"/>
-              <a:t>() </a:t>
-            </a:r>
-          </a:p>
-          <a:p>
-            <a:r>
-              <a:rPr lang="en-US" dirty="0"/>
-              <a:t>	return </a:t>
-            </a:r>
-            <a:r>
-              <a:rPr lang="en-US" dirty="0" err="1"/>
-              <a:t>produtos</a:t>
-            </a:r>
-            <a:r>
-              <a:rPr lang="en-US" dirty="0"/>
-              <a:t> </a:t>
-            </a:r>
-          </a:p>
-          <a:p>
-            <a:r>
-              <a:rPr lang="en-US" dirty="0"/>
-              <a:t>}</a:t>
-            </a:r>
-            <a:endParaRPr lang="pt-BR" dirty="0"/>
-          </a:p>
-        </p:txBody>
-      </p:sp>
+        </p:grpSpPr>
+        <p:sp>
+          <p:nvSpPr>
+            <p:cNvPr id="9" name="Shape 20">
+              <a:extLst>
+                <a:ext uri="{FF2B5EF4-FFF2-40B4-BE49-F238E27FC236}">
+                  <a16:creationId xmlns:a16="http://schemas.microsoft.com/office/drawing/2014/main" id="{E12793E5-DFFD-4484-A175-7F29953135E9}"/>
+                </a:ext>
+              </a:extLst>
+            </p:cNvPr>
+            <p:cNvSpPr/>
+            <p:nvPr/>
+          </p:nvSpPr>
+          <p:spPr>
+            <a:xfrm>
+              <a:off x="1472701" y="4452118"/>
+              <a:ext cx="9025966" cy="2151114"/>
+            </a:xfrm>
+            <a:prstGeom prst="roundRect">
+              <a:avLst>
+                <a:gd name="adj" fmla="val 8081"/>
+              </a:avLst>
+            </a:prstGeom>
+            <a:solidFill>
+              <a:srgbClr val="1E1E1E"/>
+            </a:solidFill>
+            <a:ln>
+              <a:solidFill>
+                <a:srgbClr val="1E1E1E"/>
+              </a:solidFill>
+            </a:ln>
+          </p:spPr>
+          <p:txBody>
+            <a:bodyPr/>
+            <a:lstStyle/>
+            <a:p>
+              <a:endParaRPr lang="pt-BR"/>
+            </a:p>
+          </p:txBody>
+        </p:sp>
+        <p:sp>
+          <p:nvSpPr>
+            <p:cNvPr id="4" name="Retângulo 3">
+              <a:extLst>
+                <a:ext uri="{FF2B5EF4-FFF2-40B4-BE49-F238E27FC236}">
+                  <a16:creationId xmlns:a16="http://schemas.microsoft.com/office/drawing/2014/main" id="{F1911A2B-C213-4176-8F40-784C21E92A0F}"/>
+                </a:ext>
+              </a:extLst>
+            </p:cNvPr>
+            <p:cNvSpPr/>
+            <p:nvPr/>
+          </p:nvSpPr>
+          <p:spPr>
+            <a:xfrm>
+              <a:off x="1667684" y="4789011"/>
+              <a:ext cx="8636000" cy="1477328"/>
+            </a:xfrm>
+            <a:prstGeom prst="rect">
+              <a:avLst/>
+            </a:prstGeom>
+          </p:spPr>
+          <p:txBody>
+            <a:bodyPr wrap="square">
+              <a:spAutoFit/>
+            </a:bodyPr>
+            <a:lstStyle/>
+            <a:p>
+              <a:r>
+                <a:rPr lang="pt-BR" dirty="0" err="1">
+                  <a:solidFill>
+                    <a:srgbClr val="569CD6"/>
+                  </a:solidFill>
+                  <a:latin typeface="Consolas" panose="020B0609020204030204" pitchFamily="49" charset="0"/>
+                </a:rPr>
+                <a:t>async</a:t>
+              </a:r>
+              <a:r>
+                <a:rPr lang="pt-BR" dirty="0">
+                  <a:solidFill>
+                    <a:srgbClr val="D4D4D4"/>
+                  </a:solidFill>
+                  <a:latin typeface="Consolas" panose="020B0609020204030204" pitchFamily="49" charset="0"/>
+                </a:rPr>
+                <a:t> </a:t>
+              </a:r>
+              <a:r>
+                <a:rPr lang="pt-BR" dirty="0" err="1">
+                  <a:solidFill>
+                    <a:srgbClr val="D4D4D4"/>
+                  </a:solidFill>
+                  <a:latin typeface="Consolas" panose="020B0609020204030204" pitchFamily="49" charset="0"/>
+                </a:rPr>
+                <a:t>buscarProdutos</a:t>
+              </a:r>
+              <a:r>
+                <a:rPr lang="pt-BR" dirty="0">
+                  <a:solidFill>
+                    <a:srgbClr val="D4D4D4"/>
+                  </a:solidFill>
+                  <a:latin typeface="Consolas" panose="020B0609020204030204" pitchFamily="49" charset="0"/>
+                </a:rPr>
+                <a:t>() {</a:t>
+              </a:r>
+            </a:p>
+            <a:p>
+              <a:r>
+                <a:rPr lang="pt-BR" dirty="0">
+                  <a:solidFill>
+                    <a:srgbClr val="D4D4D4"/>
+                  </a:solidFill>
+                  <a:latin typeface="Consolas" panose="020B0609020204030204" pitchFamily="49" charset="0"/>
+                </a:rPr>
+                <a:t>    </a:t>
+              </a:r>
+              <a:r>
+                <a:rPr lang="pt-BR" dirty="0" err="1">
+                  <a:solidFill>
+                    <a:srgbClr val="569CD6"/>
+                  </a:solidFill>
+                  <a:latin typeface="Consolas" panose="020B0609020204030204" pitchFamily="49" charset="0"/>
+                </a:rPr>
+                <a:t>const</a:t>
+              </a:r>
+              <a:r>
+                <a:rPr lang="pt-BR" dirty="0">
+                  <a:solidFill>
+                    <a:srgbClr val="D4D4D4"/>
+                  </a:solidFill>
+                  <a:latin typeface="Consolas" panose="020B0609020204030204" pitchFamily="49" charset="0"/>
+                </a:rPr>
+                <a:t> response = </a:t>
+              </a:r>
+              <a:r>
+                <a:rPr lang="pt-BR" dirty="0" err="1">
+                  <a:solidFill>
+                    <a:srgbClr val="569CD6"/>
+                  </a:solidFill>
+                  <a:latin typeface="Consolas" panose="020B0609020204030204" pitchFamily="49" charset="0"/>
+                </a:rPr>
+                <a:t>await</a:t>
+              </a:r>
+              <a:r>
+                <a:rPr lang="pt-BR" dirty="0">
+                  <a:solidFill>
+                    <a:srgbClr val="D4D4D4"/>
+                  </a:solidFill>
+                  <a:latin typeface="Consolas" panose="020B0609020204030204" pitchFamily="49" charset="0"/>
+                </a:rPr>
+                <a:t> </a:t>
+              </a:r>
+              <a:r>
+                <a:rPr lang="pt-BR" dirty="0" err="1">
+                  <a:solidFill>
+                    <a:srgbClr val="D4D4D4"/>
+                  </a:solidFill>
+                  <a:latin typeface="Consolas" panose="020B0609020204030204" pitchFamily="49" charset="0"/>
+                </a:rPr>
+                <a:t>fetch</a:t>
+              </a:r>
+              <a:r>
+                <a:rPr lang="pt-BR" dirty="0">
+                  <a:solidFill>
+                    <a:srgbClr val="D4D4D4"/>
+                  </a:solidFill>
+                  <a:latin typeface="Consolas" panose="020B0609020204030204" pitchFamily="49" charset="0"/>
+                </a:rPr>
+                <a:t>(</a:t>
+              </a:r>
+              <a:r>
+                <a:rPr lang="pt-BR" dirty="0">
+                  <a:solidFill>
+                    <a:srgbClr val="CE9178"/>
+                  </a:solidFill>
+                  <a:latin typeface="Consolas" panose="020B0609020204030204" pitchFamily="49" charset="0"/>
+                </a:rPr>
+                <a:t>"http://localhost:3000/produtos"</a:t>
+              </a:r>
+              <a:r>
+                <a:rPr lang="pt-BR" dirty="0">
+                  <a:solidFill>
+                    <a:srgbClr val="D4D4D4"/>
+                  </a:solidFill>
+                  <a:latin typeface="Consolas" panose="020B0609020204030204" pitchFamily="49" charset="0"/>
+                </a:rPr>
+                <a:t>)</a:t>
+              </a:r>
+            </a:p>
+            <a:p>
+              <a:br>
+                <a:rPr lang="pt-BR" dirty="0">
+                  <a:solidFill>
+                    <a:srgbClr val="D4D4D4"/>
+                  </a:solidFill>
+                  <a:latin typeface="Consolas" panose="020B0609020204030204" pitchFamily="49" charset="0"/>
+                </a:rPr>
+              </a:br>
+              <a:r>
+                <a:rPr lang="pt-BR" dirty="0">
+                  <a:solidFill>
+                    <a:srgbClr val="D4D4D4"/>
+                  </a:solidFill>
+                  <a:latin typeface="Consolas" panose="020B0609020204030204" pitchFamily="49" charset="0"/>
+                </a:rPr>
+                <a:t>    </a:t>
+              </a:r>
+              <a:r>
+                <a:rPr lang="pt-BR" dirty="0" err="1">
+                  <a:solidFill>
+                    <a:srgbClr val="569CD6"/>
+                  </a:solidFill>
+                  <a:latin typeface="Consolas" panose="020B0609020204030204" pitchFamily="49" charset="0"/>
+                </a:rPr>
+                <a:t>return</a:t>
+              </a:r>
+              <a:r>
+                <a:rPr lang="pt-BR" dirty="0">
+                  <a:solidFill>
+                    <a:srgbClr val="D4D4D4"/>
+                  </a:solidFill>
+                  <a:latin typeface="Consolas" panose="020B0609020204030204" pitchFamily="49" charset="0"/>
+                </a:rPr>
+                <a:t> </a:t>
+              </a:r>
+              <a:r>
+                <a:rPr lang="pt-BR" dirty="0" err="1">
+                  <a:solidFill>
+                    <a:srgbClr val="569CD6"/>
+                  </a:solidFill>
+                  <a:latin typeface="Consolas" panose="020B0609020204030204" pitchFamily="49" charset="0"/>
+                </a:rPr>
+                <a:t>await</a:t>
+              </a:r>
+              <a:r>
+                <a:rPr lang="pt-BR" dirty="0">
+                  <a:solidFill>
+                    <a:srgbClr val="D4D4D4"/>
+                  </a:solidFill>
+                  <a:latin typeface="Consolas" panose="020B0609020204030204" pitchFamily="49" charset="0"/>
+                </a:rPr>
+                <a:t> </a:t>
+              </a:r>
+              <a:r>
+                <a:rPr lang="pt-BR" dirty="0" err="1">
+                  <a:solidFill>
+                    <a:srgbClr val="D4D4D4"/>
+                  </a:solidFill>
+                  <a:latin typeface="Consolas" panose="020B0609020204030204" pitchFamily="49" charset="0"/>
+                </a:rPr>
+                <a:t>response.json</a:t>
+              </a:r>
+              <a:r>
+                <a:rPr lang="pt-BR" dirty="0">
+                  <a:solidFill>
+                    <a:srgbClr val="D4D4D4"/>
+                  </a:solidFill>
+                  <a:latin typeface="Consolas" panose="020B0609020204030204" pitchFamily="49" charset="0"/>
+                </a:rPr>
+                <a:t>() </a:t>
+              </a:r>
+            </a:p>
+            <a:p>
+              <a:r>
+                <a:rPr lang="pt-BR" dirty="0">
+                  <a:solidFill>
+                    <a:srgbClr val="D4D4D4"/>
+                  </a:solidFill>
+                  <a:latin typeface="Consolas" panose="020B0609020204030204" pitchFamily="49" charset="0"/>
+                </a:rPr>
+                <a:t>}</a:t>
+              </a:r>
+              <a:endParaRPr lang="pt-BR" b="0" dirty="0">
+                <a:solidFill>
+                  <a:srgbClr val="D4D4D4"/>
+                </a:solidFill>
+                <a:effectLst/>
+                <a:latin typeface="Consolas" panose="020B0609020204030204" pitchFamily="49" charset="0"/>
+              </a:endParaRPr>
+            </a:p>
+          </p:txBody>
+        </p:sp>
+      </p:grpSp>
     </p:spTree>
     <p:extLst>
       <p:ext uri="{BB962C8B-B14F-4D97-AF65-F5344CB8AC3E}">
@@ -6341,35 +6562,502 @@
           <a:bodyPr/>
           <a:lstStyle/>
           <a:p>
-            <a:endParaRPr lang="pt-BR"/>
+            <a:r>
+              <a:rPr lang="pt-BR" dirty="0"/>
+              <a:t>Criando o Método GET no nosso programa</a:t>
+            </a:r>
           </a:p>
         </p:txBody>
       </p:sp>
       <p:sp>
         <p:nvSpPr>
-          <p:cNvPr id="3" name="Espaço Reservado para Conteúdo 2">
+          <p:cNvPr id="6" name="Espaço Reservado para Conteúdo 5">
             <a:extLst>
               <a:ext uri="{FF2B5EF4-FFF2-40B4-BE49-F238E27FC236}">
-                <a16:creationId xmlns:a16="http://schemas.microsoft.com/office/drawing/2014/main" id="{1634CA0B-A520-9184-A9C1-803F8634393B}"/>
+                <a16:creationId xmlns:a16="http://schemas.microsoft.com/office/drawing/2014/main" id="{B24F9431-18D8-4DC9-B9CC-1BCF1A71C18D}"/>
               </a:ext>
             </a:extLst>
           </p:cNvPr>
-          <p:cNvSpPr>
-            <a:spLocks noGrp="1"/>
+          <p:cNvSpPr txBox="1">
+            <a:spLocks/>
           </p:cNvSpPr>
-          <p:nvPr>
-            <p:ph idx="1"/>
-          </p:nvPr>
+          <p:nvPr/>
         </p:nvSpPr>
-        <p:spPr/>
+        <p:spPr>
+          <a:xfrm>
+            <a:off x="918644" y="1701521"/>
+            <a:ext cx="10354713" cy="1211012"/>
+          </a:xfrm>
+          <a:prstGeom prst="rect">
+            <a:avLst/>
+          </a:prstGeom>
+        </p:spPr>
         <p:txBody>
           <a:bodyPr/>
-          <a:lstStyle/>
+          <a:lstStyle>
+            <a:lvl1pPr marL="0" indent="0" algn="just" defTabSz="914400" rtl="0" eaLnBrk="1" latinLnBrk="0" hangingPunct="1">
+              <a:lnSpc>
+                <a:spcPct val="150000"/>
+              </a:lnSpc>
+              <a:spcBef>
+                <a:spcPts val="0"/>
+              </a:spcBef>
+              <a:buFont typeface="Arial" panose="020B0604020202020204" pitchFamily="34" charset="0"/>
+              <a:buNone/>
+              <a:defRPr sz="2000" kern="1200">
+                <a:solidFill>
+                  <a:schemeClr val="tx1"/>
+                </a:solidFill>
+                <a:latin typeface="Times New Roman" panose="02020603050405020304" pitchFamily="18" charset="0"/>
+                <a:ea typeface="+mn-ea"/>
+                <a:cs typeface="Times New Roman" panose="02020603050405020304" pitchFamily="18" charset="0"/>
+              </a:defRPr>
+            </a:lvl1pPr>
+            <a:lvl2pPr marL="457200" indent="0" algn="just" defTabSz="914400" rtl="0" eaLnBrk="1" latinLnBrk="0" hangingPunct="1">
+              <a:lnSpc>
+                <a:spcPct val="150000"/>
+              </a:lnSpc>
+              <a:spcBef>
+                <a:spcPts val="0"/>
+              </a:spcBef>
+              <a:buFont typeface="Arial" panose="020B0604020202020204" pitchFamily="34" charset="0"/>
+              <a:buNone/>
+              <a:defRPr sz="1600" kern="1200">
+                <a:solidFill>
+                  <a:schemeClr val="tx1"/>
+                </a:solidFill>
+                <a:latin typeface="Times New Roman" panose="02020603050405020304" pitchFamily="18" charset="0"/>
+                <a:ea typeface="+mn-ea"/>
+                <a:cs typeface="Times New Roman" panose="02020603050405020304" pitchFamily="18" charset="0"/>
+              </a:defRPr>
+            </a:lvl2pPr>
+            <a:lvl3pPr marL="914400" indent="0" algn="just" defTabSz="914400" rtl="0" eaLnBrk="1" latinLnBrk="0" hangingPunct="1">
+              <a:lnSpc>
+                <a:spcPct val="150000"/>
+              </a:lnSpc>
+              <a:spcBef>
+                <a:spcPts val="0"/>
+              </a:spcBef>
+              <a:buFont typeface="Arial" panose="020B0604020202020204" pitchFamily="34" charset="0"/>
+              <a:buNone/>
+              <a:defRPr sz="1400" kern="1200">
+                <a:solidFill>
+                  <a:schemeClr val="tx1"/>
+                </a:solidFill>
+                <a:latin typeface="Times New Roman" panose="02020603050405020304" pitchFamily="18" charset="0"/>
+                <a:ea typeface="+mn-ea"/>
+                <a:cs typeface="Times New Roman" panose="02020603050405020304" pitchFamily="18" charset="0"/>
+              </a:defRPr>
+            </a:lvl3pPr>
+            <a:lvl4pPr marL="1371600" indent="0" algn="just" defTabSz="914400" rtl="0" eaLnBrk="1" latinLnBrk="0" hangingPunct="1">
+              <a:lnSpc>
+                <a:spcPct val="150000"/>
+              </a:lnSpc>
+              <a:spcBef>
+                <a:spcPts val="0"/>
+              </a:spcBef>
+              <a:buFont typeface="Arial" panose="020B0604020202020204" pitchFamily="34" charset="0"/>
+              <a:buNone/>
+              <a:defRPr sz="1200" kern="1200">
+                <a:solidFill>
+                  <a:schemeClr val="tx1"/>
+                </a:solidFill>
+                <a:latin typeface="Times New Roman" panose="02020603050405020304" pitchFamily="18" charset="0"/>
+                <a:ea typeface="+mn-ea"/>
+                <a:cs typeface="Times New Roman" panose="02020603050405020304" pitchFamily="18" charset="0"/>
+              </a:defRPr>
+            </a:lvl4pPr>
+            <a:lvl5pPr marL="1828800" indent="0" algn="just" defTabSz="914400" rtl="0" eaLnBrk="1" latinLnBrk="0" hangingPunct="1">
+              <a:lnSpc>
+                <a:spcPct val="150000"/>
+              </a:lnSpc>
+              <a:spcBef>
+                <a:spcPts val="0"/>
+              </a:spcBef>
+              <a:buFont typeface="Arial" panose="020B0604020202020204" pitchFamily="34" charset="0"/>
+              <a:buNone/>
+              <a:defRPr sz="1000" kern="1200">
+                <a:solidFill>
+                  <a:schemeClr val="tx1"/>
+                </a:solidFill>
+                <a:latin typeface="Times New Roman" panose="02020603050405020304" pitchFamily="18" charset="0"/>
+                <a:ea typeface="+mn-ea"/>
+                <a:cs typeface="Times New Roman" panose="02020603050405020304" pitchFamily="18" charset="0"/>
+              </a:defRPr>
+            </a:lvl5pPr>
+            <a:lvl6pPr marL="2514600" indent="-228600" algn="l" defTabSz="914400" rtl="0" eaLnBrk="1" latinLnBrk="0" hangingPunct="1">
+              <a:lnSpc>
+                <a:spcPct val="90000"/>
+              </a:lnSpc>
+              <a:spcBef>
+                <a:spcPts val="500"/>
+              </a:spcBef>
+              <a:buFont typeface="Arial" panose="020B0604020202020204" pitchFamily="34" charset="0"/>
+              <a:buChar char="•"/>
+              <a:defRPr sz="1800" kern="1200">
+                <a:solidFill>
+                  <a:schemeClr val="tx1"/>
+                </a:solidFill>
+                <a:latin typeface="+mn-lt"/>
+                <a:ea typeface="+mn-ea"/>
+                <a:cs typeface="+mn-cs"/>
+              </a:defRPr>
+            </a:lvl6pPr>
+            <a:lvl7pPr marL="2971800" indent="-228600" algn="l" defTabSz="914400" rtl="0" eaLnBrk="1" latinLnBrk="0" hangingPunct="1">
+              <a:lnSpc>
+                <a:spcPct val="90000"/>
+              </a:lnSpc>
+              <a:spcBef>
+                <a:spcPts val="500"/>
+              </a:spcBef>
+              <a:buFont typeface="Arial" panose="020B0604020202020204" pitchFamily="34" charset="0"/>
+              <a:buChar char="•"/>
+              <a:defRPr sz="1800" kern="1200">
+                <a:solidFill>
+                  <a:schemeClr val="tx1"/>
+                </a:solidFill>
+                <a:latin typeface="+mn-lt"/>
+                <a:ea typeface="+mn-ea"/>
+                <a:cs typeface="+mn-cs"/>
+              </a:defRPr>
+            </a:lvl7pPr>
+            <a:lvl8pPr marL="3429000" indent="-228600" algn="l" defTabSz="914400" rtl="0" eaLnBrk="1" latinLnBrk="0" hangingPunct="1">
+              <a:lnSpc>
+                <a:spcPct val="90000"/>
+              </a:lnSpc>
+              <a:spcBef>
+                <a:spcPts val="500"/>
+              </a:spcBef>
+              <a:buFont typeface="Arial" panose="020B0604020202020204" pitchFamily="34" charset="0"/>
+              <a:buChar char="•"/>
+              <a:defRPr sz="1800" kern="1200">
+                <a:solidFill>
+                  <a:schemeClr val="tx1"/>
+                </a:solidFill>
+                <a:latin typeface="+mn-lt"/>
+                <a:ea typeface="+mn-ea"/>
+                <a:cs typeface="+mn-cs"/>
+              </a:defRPr>
+            </a:lvl8pPr>
+            <a:lvl9pPr marL="3886200" indent="-228600" algn="l" defTabSz="914400" rtl="0" eaLnBrk="1" latinLnBrk="0" hangingPunct="1">
+              <a:lnSpc>
+                <a:spcPct val="90000"/>
+              </a:lnSpc>
+              <a:spcBef>
+                <a:spcPts val="500"/>
+              </a:spcBef>
+              <a:buFont typeface="Arial" panose="020B0604020202020204" pitchFamily="34" charset="0"/>
+              <a:buChar char="•"/>
+              <a:defRPr sz="1800" kern="1200">
+                <a:solidFill>
+                  <a:schemeClr val="tx1"/>
+                </a:solidFill>
+                <a:latin typeface="+mn-lt"/>
+                <a:ea typeface="+mn-ea"/>
+                <a:cs typeface="+mn-cs"/>
+              </a:defRPr>
+            </a:lvl9pPr>
+          </a:lstStyle>
           <a:p>
-            <a:endParaRPr lang="pt-BR"/>
+            <a:r>
+              <a:rPr lang="pt-BR" dirty="0"/>
+              <a:t>Dentro da pasta do projeto, crie uma pasta chamada script. Em seguida, dentro dela, crie o arquivo api.js, que será responsável por realizar as requisições e consultas ao nosso </a:t>
+            </a:r>
+            <a:r>
+              <a:rPr lang="pt-BR" dirty="0" err="1"/>
+              <a:t>back</a:t>
+            </a:r>
+            <a:r>
+              <a:rPr lang="pt-BR" dirty="0"/>
+              <a:t>-end.</a:t>
+            </a:r>
           </a:p>
         </p:txBody>
       </p:sp>
+      <p:grpSp>
+        <p:nvGrpSpPr>
+          <p:cNvPr id="7" name="Agrupar 6">
+            <a:extLst>
+              <a:ext uri="{FF2B5EF4-FFF2-40B4-BE49-F238E27FC236}">
+                <a16:creationId xmlns:a16="http://schemas.microsoft.com/office/drawing/2014/main" id="{AB2F1E58-E11F-4542-BF18-E5EF56B5D910}"/>
+              </a:ext>
+            </a:extLst>
+          </p:cNvPr>
+          <p:cNvGrpSpPr/>
+          <p:nvPr/>
+        </p:nvGrpSpPr>
+        <p:grpSpPr>
+          <a:xfrm>
+            <a:off x="2317965" y="3062478"/>
+            <a:ext cx="7556071" cy="3142211"/>
+            <a:chOff x="749185" y="2527734"/>
+            <a:chExt cx="5284556" cy="1805256"/>
+          </a:xfrm>
+        </p:grpSpPr>
+        <p:sp>
+          <p:nvSpPr>
+            <p:cNvPr id="8" name="Shape 20">
+              <a:extLst>
+                <a:ext uri="{FF2B5EF4-FFF2-40B4-BE49-F238E27FC236}">
+                  <a16:creationId xmlns:a16="http://schemas.microsoft.com/office/drawing/2014/main" id="{5AEEA8AD-6718-413B-A391-B7D9E19E569D}"/>
+                </a:ext>
+              </a:extLst>
+            </p:cNvPr>
+            <p:cNvSpPr/>
+            <p:nvPr/>
+          </p:nvSpPr>
+          <p:spPr>
+            <a:xfrm>
+              <a:off x="749185" y="2527734"/>
+              <a:ext cx="5284556" cy="1805256"/>
+            </a:xfrm>
+            <a:prstGeom prst="roundRect">
+              <a:avLst>
+                <a:gd name="adj" fmla="val 8081"/>
+              </a:avLst>
+            </a:prstGeom>
+            <a:solidFill>
+              <a:srgbClr val="F2F2F2"/>
+            </a:solidFill>
+            <a:ln/>
+          </p:spPr>
+          <p:txBody>
+            <a:bodyPr/>
+            <a:lstStyle/>
+            <a:p>
+              <a:endParaRPr lang="pt-BR"/>
+            </a:p>
+          </p:txBody>
+        </p:sp>
+        <p:sp>
+          <p:nvSpPr>
+            <p:cNvPr id="9" name="Text 21">
+              <a:extLst>
+                <a:ext uri="{FF2B5EF4-FFF2-40B4-BE49-F238E27FC236}">
+                  <a16:creationId xmlns:a16="http://schemas.microsoft.com/office/drawing/2014/main" id="{C27D53AB-2C58-4E88-85BE-314FF8DE4F47}"/>
+                </a:ext>
+              </a:extLst>
+            </p:cNvPr>
+            <p:cNvSpPr/>
+            <p:nvPr/>
+          </p:nvSpPr>
+          <p:spPr>
+            <a:xfrm>
+              <a:off x="896521" y="2710750"/>
+              <a:ext cx="4989884" cy="1439225"/>
+            </a:xfrm>
+            <a:prstGeom prst="rect">
+              <a:avLst/>
+            </a:prstGeom>
+            <a:noFill/>
+            <a:ln/>
+          </p:spPr>
+          <p:txBody>
+            <a:bodyPr wrap="square" lIns="0" tIns="0" rIns="0" bIns="0" rtlCol="0" anchor="t">
+              <a:noAutofit/>
+            </a:bodyPr>
+            <a:lstStyle/>
+            <a:p>
+              <a:pPr marL="0" indent="0" algn="l">
+                <a:buNone/>
+              </a:pPr>
+              <a:r>
+                <a:rPr lang="en-US" kern="0" spc="-19" dirty="0">
+                  <a:solidFill>
+                    <a:srgbClr val="D73A49"/>
+                  </a:solidFill>
+                  <a:latin typeface="Consolas" pitchFamily="34" charset="0"/>
+                  <a:ea typeface="Consolas" pitchFamily="34" charset="-122"/>
+                  <a:cs typeface="Consolas" pitchFamily="34" charset="-120"/>
+                </a:rPr>
+                <a:t>tech-store/</a:t>
+              </a:r>
+            </a:p>
+            <a:p>
+              <a:pPr marL="0" indent="0" algn="l">
+                <a:buNone/>
+              </a:pPr>
+              <a:r>
+                <a:rPr lang="en-US" kern="0" spc="-19" dirty="0">
+                  <a:solidFill>
+                    <a:srgbClr val="D73A49"/>
+                  </a:solidFill>
+                  <a:latin typeface="Consolas" pitchFamily="34" charset="0"/>
+                  <a:ea typeface="Consolas" pitchFamily="34" charset="-122"/>
+                  <a:cs typeface="Consolas" pitchFamily="34" charset="-120"/>
+                </a:rPr>
+                <a:t>├── index.html</a:t>
+              </a:r>
+            </a:p>
+            <a:p>
+              <a:pPr marL="0" indent="0" algn="l">
+                <a:buNone/>
+              </a:pPr>
+              <a:r>
+                <a:rPr lang="en-US" kern="0" spc="-19" dirty="0">
+                  <a:solidFill>
+                    <a:srgbClr val="D73A49"/>
+                  </a:solidFill>
+                  <a:latin typeface="Consolas" pitchFamily="34" charset="0"/>
+                  <a:ea typeface="Consolas" pitchFamily="34" charset="-122"/>
+                  <a:cs typeface="Consolas" pitchFamily="34" charset="-120"/>
+                </a:rPr>
+                <a:t>├── </a:t>
+              </a:r>
+              <a:r>
+                <a:rPr lang="en-US" kern="0" spc="-19" dirty="0" err="1">
+                  <a:solidFill>
+                    <a:srgbClr val="D73A49"/>
+                  </a:solidFill>
+                  <a:latin typeface="Consolas" pitchFamily="34" charset="0"/>
+                  <a:ea typeface="Consolas" pitchFamily="34" charset="-122"/>
+                  <a:cs typeface="Consolas" pitchFamily="34" charset="-120"/>
+                </a:rPr>
+                <a:t>css</a:t>
+              </a:r>
+              <a:r>
+                <a:rPr lang="en-US" kern="0" spc="-19" dirty="0">
+                  <a:solidFill>
+                    <a:srgbClr val="D73A49"/>
+                  </a:solidFill>
+                  <a:latin typeface="Consolas" pitchFamily="34" charset="0"/>
+                  <a:ea typeface="Consolas" pitchFamily="34" charset="-122"/>
+                  <a:cs typeface="Consolas" pitchFamily="34" charset="-120"/>
+                </a:rPr>
+                <a:t>/</a:t>
+              </a:r>
+            </a:p>
+            <a:p>
+              <a:pPr marL="0" indent="0" algn="l">
+                <a:buNone/>
+              </a:pPr>
+              <a:r>
+                <a:rPr lang="en-US" kern="0" spc="-19" dirty="0">
+                  <a:solidFill>
+                    <a:srgbClr val="D73A49"/>
+                  </a:solidFill>
+                  <a:latin typeface="Consolas" pitchFamily="34" charset="0"/>
+                  <a:ea typeface="Consolas" pitchFamily="34" charset="-122"/>
+                  <a:cs typeface="Consolas" pitchFamily="34" charset="-120"/>
+                </a:rPr>
+                <a:t>│      └── style.css</a:t>
+              </a:r>
+            </a:p>
+            <a:p>
+              <a:r>
+                <a:rPr lang="en-US" kern="0" spc="-19" dirty="0">
+                  <a:solidFill>
+                    <a:srgbClr val="D73A49"/>
+                  </a:solidFill>
+                  <a:latin typeface="Consolas" pitchFamily="34" charset="0"/>
+                  <a:ea typeface="Consolas" pitchFamily="34" charset="-122"/>
+                  <a:cs typeface="Consolas" pitchFamily="34" charset="-120"/>
+                </a:rPr>
+                <a:t>├── </a:t>
+              </a:r>
+              <a:r>
+                <a:rPr lang="en-US" kern="0" spc="-19" dirty="0" err="1">
+                  <a:solidFill>
+                    <a:srgbClr val="D73A49"/>
+                  </a:solidFill>
+                  <a:latin typeface="Consolas" pitchFamily="34" charset="0"/>
+                  <a:ea typeface="Consolas" pitchFamily="34" charset="-122"/>
+                  <a:cs typeface="Consolas" pitchFamily="34" charset="-120"/>
+                </a:rPr>
+                <a:t>js</a:t>
+              </a:r>
+              <a:r>
+                <a:rPr lang="en-US" kern="0" spc="-19" dirty="0">
+                  <a:solidFill>
+                    <a:srgbClr val="D73A49"/>
+                  </a:solidFill>
+                  <a:latin typeface="Consolas" pitchFamily="34" charset="0"/>
+                  <a:ea typeface="Consolas" pitchFamily="34" charset="-122"/>
+                  <a:cs typeface="Consolas" pitchFamily="34" charset="-120"/>
+                </a:rPr>
+                <a:t>/</a:t>
+              </a:r>
+            </a:p>
+            <a:p>
+              <a:r>
+                <a:rPr lang="en-US" kern="0" spc="-19" dirty="0">
+                  <a:solidFill>
+                    <a:srgbClr val="D73A49"/>
+                  </a:solidFill>
+                  <a:latin typeface="Consolas" pitchFamily="34" charset="0"/>
+                  <a:ea typeface="Consolas" pitchFamily="34" charset="-122"/>
+                  <a:cs typeface="Consolas" pitchFamily="34" charset="-120"/>
+                </a:rPr>
+                <a:t>│     └── api.js</a:t>
+              </a:r>
+            </a:p>
+            <a:p>
+              <a:r>
+                <a:rPr lang="en-US" kern="0" spc="-19" dirty="0">
+                  <a:solidFill>
+                    <a:srgbClr val="D73A49"/>
+                  </a:solidFill>
+                  <a:latin typeface="Consolas" pitchFamily="34" charset="0"/>
+                  <a:ea typeface="Consolas" pitchFamily="34" charset="-122"/>
+                  <a:cs typeface="Consolas" pitchFamily="34" charset="-120"/>
+                </a:rPr>
+                <a:t>│</a:t>
+              </a:r>
+            </a:p>
+            <a:p>
+              <a:r>
+                <a:rPr lang="en-US" kern="0" spc="-19" dirty="0">
+                  <a:solidFill>
+                    <a:srgbClr val="D73A49"/>
+                  </a:solidFill>
+                  <a:latin typeface="Consolas" pitchFamily="34" charset="0"/>
+                  <a:ea typeface="Consolas" pitchFamily="34" charset="-122"/>
+                  <a:cs typeface="Consolas" pitchFamily="34" charset="-120"/>
+                </a:rPr>
+                <a:t>└── backend/</a:t>
+              </a:r>
+            </a:p>
+            <a:p>
+              <a:r>
+                <a:rPr lang="en-US" kern="0" spc="-19" dirty="0">
+                  <a:solidFill>
+                    <a:srgbClr val="D73A49"/>
+                  </a:solidFill>
+                  <a:latin typeface="Consolas" pitchFamily="34" charset="0"/>
+                  <a:ea typeface="Consolas" pitchFamily="34" charset="-122"/>
+                  <a:cs typeface="Consolas" pitchFamily="34" charset="-120"/>
+                </a:rPr>
+                <a:t>           └──</a:t>
+              </a:r>
+              <a:r>
+                <a:rPr lang="en-US" kern="0" spc="-19" dirty="0" err="1">
+                  <a:solidFill>
+                    <a:srgbClr val="D73A49"/>
+                  </a:solidFill>
+                  <a:latin typeface="Consolas" pitchFamily="34" charset="0"/>
+                  <a:ea typeface="Consolas" pitchFamily="34" charset="-122"/>
+                  <a:cs typeface="Consolas" pitchFamily="34" charset="-120"/>
+                </a:rPr>
+                <a:t>db.json</a:t>
+              </a:r>
+              <a:endParaRPr lang="en-US" kern="0" spc="-19" dirty="0">
+                <a:solidFill>
+                  <a:srgbClr val="D73A49"/>
+                </a:solidFill>
+                <a:latin typeface="Consolas" pitchFamily="34" charset="0"/>
+                <a:ea typeface="Consolas" pitchFamily="34" charset="-122"/>
+                <a:cs typeface="Consolas" pitchFamily="34" charset="-120"/>
+              </a:endParaRPr>
+            </a:p>
+            <a:p>
+              <a:pPr marL="0" indent="0" algn="l">
+                <a:buNone/>
+              </a:pPr>
+              <a:endParaRPr lang="en-US" dirty="0"/>
+            </a:p>
+          </p:txBody>
+        </p:sp>
+      </p:grpSp>
     </p:spTree>
     <p:extLst>
       <p:ext uri="{BB962C8B-B14F-4D97-AF65-F5344CB8AC3E}">
@@ -6405,7 +7093,2276 @@
           <p:cNvPr id="2" name="Título 1">
             <a:extLst>
               <a:ext uri="{FF2B5EF4-FFF2-40B4-BE49-F238E27FC236}">
-                <a16:creationId xmlns:a16="http://schemas.microsoft.com/office/drawing/2014/main" id="{BF615A30-6D2A-8B4E-AFAD-9F640740C0F1}"/>
+                <a16:creationId xmlns:a16="http://schemas.microsoft.com/office/drawing/2014/main" id="{8738858E-69E2-8A32-4D8D-61A4750C2960}"/>
+              </a:ext>
+            </a:extLst>
+          </p:cNvPr>
+          <p:cNvSpPr>
+            <a:spLocks noGrp="1"/>
+          </p:cNvSpPr>
+          <p:nvPr>
+            <p:ph type="title"/>
+          </p:nvPr>
+        </p:nvSpPr>
+        <p:spPr/>
+        <p:txBody>
+          <a:bodyPr/>
+          <a:lstStyle/>
+          <a:p>
+            <a:r>
+              <a:rPr lang="pt-BR" dirty="0"/>
+              <a:t>Criando o Método GET no nosso programa</a:t>
+            </a:r>
+          </a:p>
+        </p:txBody>
+      </p:sp>
+      <p:sp>
+        <p:nvSpPr>
+          <p:cNvPr id="6" name="Espaço Reservado para Conteúdo 5">
+            <a:extLst>
+              <a:ext uri="{FF2B5EF4-FFF2-40B4-BE49-F238E27FC236}">
+                <a16:creationId xmlns:a16="http://schemas.microsoft.com/office/drawing/2014/main" id="{B24F9431-18D8-4DC9-B9CC-1BCF1A71C18D}"/>
+              </a:ext>
+            </a:extLst>
+          </p:cNvPr>
+          <p:cNvSpPr txBox="1">
+            <a:spLocks/>
+          </p:cNvSpPr>
+          <p:nvPr/>
+        </p:nvSpPr>
+        <p:spPr>
+          <a:xfrm>
+            <a:off x="1081373" y="1701521"/>
+            <a:ext cx="10029255" cy="1465012"/>
+          </a:xfrm>
+          <a:prstGeom prst="rect">
+            <a:avLst/>
+          </a:prstGeom>
+        </p:spPr>
+        <p:txBody>
+          <a:bodyPr/>
+          <a:lstStyle>
+            <a:lvl1pPr marL="0" indent="0" algn="just" defTabSz="914400" rtl="0" eaLnBrk="1" latinLnBrk="0" hangingPunct="1">
+              <a:lnSpc>
+                <a:spcPct val="150000"/>
+              </a:lnSpc>
+              <a:spcBef>
+                <a:spcPts val="0"/>
+              </a:spcBef>
+              <a:buFont typeface="Arial" panose="020B0604020202020204" pitchFamily="34" charset="0"/>
+              <a:buNone/>
+              <a:defRPr sz="2000" kern="1200">
+                <a:solidFill>
+                  <a:schemeClr val="tx1"/>
+                </a:solidFill>
+                <a:latin typeface="Times New Roman" panose="02020603050405020304" pitchFamily="18" charset="0"/>
+                <a:ea typeface="+mn-ea"/>
+                <a:cs typeface="Times New Roman" panose="02020603050405020304" pitchFamily="18" charset="0"/>
+              </a:defRPr>
+            </a:lvl1pPr>
+            <a:lvl2pPr marL="457200" indent="0" algn="just" defTabSz="914400" rtl="0" eaLnBrk="1" latinLnBrk="0" hangingPunct="1">
+              <a:lnSpc>
+                <a:spcPct val="150000"/>
+              </a:lnSpc>
+              <a:spcBef>
+                <a:spcPts val="0"/>
+              </a:spcBef>
+              <a:buFont typeface="Arial" panose="020B0604020202020204" pitchFamily="34" charset="0"/>
+              <a:buNone/>
+              <a:defRPr sz="1600" kern="1200">
+                <a:solidFill>
+                  <a:schemeClr val="tx1"/>
+                </a:solidFill>
+                <a:latin typeface="Times New Roman" panose="02020603050405020304" pitchFamily="18" charset="0"/>
+                <a:ea typeface="+mn-ea"/>
+                <a:cs typeface="Times New Roman" panose="02020603050405020304" pitchFamily="18" charset="0"/>
+              </a:defRPr>
+            </a:lvl2pPr>
+            <a:lvl3pPr marL="914400" indent="0" algn="just" defTabSz="914400" rtl="0" eaLnBrk="1" latinLnBrk="0" hangingPunct="1">
+              <a:lnSpc>
+                <a:spcPct val="150000"/>
+              </a:lnSpc>
+              <a:spcBef>
+                <a:spcPts val="0"/>
+              </a:spcBef>
+              <a:buFont typeface="Arial" panose="020B0604020202020204" pitchFamily="34" charset="0"/>
+              <a:buNone/>
+              <a:defRPr sz="1400" kern="1200">
+                <a:solidFill>
+                  <a:schemeClr val="tx1"/>
+                </a:solidFill>
+                <a:latin typeface="Times New Roman" panose="02020603050405020304" pitchFamily="18" charset="0"/>
+                <a:ea typeface="+mn-ea"/>
+                <a:cs typeface="Times New Roman" panose="02020603050405020304" pitchFamily="18" charset="0"/>
+              </a:defRPr>
+            </a:lvl3pPr>
+            <a:lvl4pPr marL="1371600" indent="0" algn="just" defTabSz="914400" rtl="0" eaLnBrk="1" latinLnBrk="0" hangingPunct="1">
+              <a:lnSpc>
+                <a:spcPct val="150000"/>
+              </a:lnSpc>
+              <a:spcBef>
+                <a:spcPts val="0"/>
+              </a:spcBef>
+              <a:buFont typeface="Arial" panose="020B0604020202020204" pitchFamily="34" charset="0"/>
+              <a:buNone/>
+              <a:defRPr sz="1200" kern="1200">
+                <a:solidFill>
+                  <a:schemeClr val="tx1"/>
+                </a:solidFill>
+                <a:latin typeface="Times New Roman" panose="02020603050405020304" pitchFamily="18" charset="0"/>
+                <a:ea typeface="+mn-ea"/>
+                <a:cs typeface="Times New Roman" panose="02020603050405020304" pitchFamily="18" charset="0"/>
+              </a:defRPr>
+            </a:lvl4pPr>
+            <a:lvl5pPr marL="1828800" indent="0" algn="just" defTabSz="914400" rtl="0" eaLnBrk="1" latinLnBrk="0" hangingPunct="1">
+              <a:lnSpc>
+                <a:spcPct val="150000"/>
+              </a:lnSpc>
+              <a:spcBef>
+                <a:spcPts val="0"/>
+              </a:spcBef>
+              <a:buFont typeface="Arial" panose="020B0604020202020204" pitchFamily="34" charset="0"/>
+              <a:buNone/>
+              <a:defRPr sz="1000" kern="1200">
+                <a:solidFill>
+                  <a:schemeClr val="tx1"/>
+                </a:solidFill>
+                <a:latin typeface="Times New Roman" panose="02020603050405020304" pitchFamily="18" charset="0"/>
+                <a:ea typeface="+mn-ea"/>
+                <a:cs typeface="Times New Roman" panose="02020603050405020304" pitchFamily="18" charset="0"/>
+              </a:defRPr>
+            </a:lvl5pPr>
+            <a:lvl6pPr marL="2514600" indent="-228600" algn="l" defTabSz="914400" rtl="0" eaLnBrk="1" latinLnBrk="0" hangingPunct="1">
+              <a:lnSpc>
+                <a:spcPct val="90000"/>
+              </a:lnSpc>
+              <a:spcBef>
+                <a:spcPts val="500"/>
+              </a:spcBef>
+              <a:buFont typeface="Arial" panose="020B0604020202020204" pitchFamily="34" charset="0"/>
+              <a:buChar char="•"/>
+              <a:defRPr sz="1800" kern="1200">
+                <a:solidFill>
+                  <a:schemeClr val="tx1"/>
+                </a:solidFill>
+                <a:latin typeface="+mn-lt"/>
+                <a:ea typeface="+mn-ea"/>
+                <a:cs typeface="+mn-cs"/>
+              </a:defRPr>
+            </a:lvl6pPr>
+            <a:lvl7pPr marL="2971800" indent="-228600" algn="l" defTabSz="914400" rtl="0" eaLnBrk="1" latinLnBrk="0" hangingPunct="1">
+              <a:lnSpc>
+                <a:spcPct val="90000"/>
+              </a:lnSpc>
+              <a:spcBef>
+                <a:spcPts val="500"/>
+              </a:spcBef>
+              <a:buFont typeface="Arial" panose="020B0604020202020204" pitchFamily="34" charset="0"/>
+              <a:buChar char="•"/>
+              <a:defRPr sz="1800" kern="1200">
+                <a:solidFill>
+                  <a:schemeClr val="tx1"/>
+                </a:solidFill>
+                <a:latin typeface="+mn-lt"/>
+                <a:ea typeface="+mn-ea"/>
+                <a:cs typeface="+mn-cs"/>
+              </a:defRPr>
+            </a:lvl7pPr>
+            <a:lvl8pPr marL="3429000" indent="-228600" algn="l" defTabSz="914400" rtl="0" eaLnBrk="1" latinLnBrk="0" hangingPunct="1">
+              <a:lnSpc>
+                <a:spcPct val="90000"/>
+              </a:lnSpc>
+              <a:spcBef>
+                <a:spcPts val="500"/>
+              </a:spcBef>
+              <a:buFont typeface="Arial" panose="020B0604020202020204" pitchFamily="34" charset="0"/>
+              <a:buChar char="•"/>
+              <a:defRPr sz="1800" kern="1200">
+                <a:solidFill>
+                  <a:schemeClr val="tx1"/>
+                </a:solidFill>
+                <a:latin typeface="+mn-lt"/>
+                <a:ea typeface="+mn-ea"/>
+                <a:cs typeface="+mn-cs"/>
+              </a:defRPr>
+            </a:lvl8pPr>
+            <a:lvl9pPr marL="3886200" indent="-228600" algn="l" defTabSz="914400" rtl="0" eaLnBrk="1" latinLnBrk="0" hangingPunct="1">
+              <a:lnSpc>
+                <a:spcPct val="90000"/>
+              </a:lnSpc>
+              <a:spcBef>
+                <a:spcPts val="500"/>
+              </a:spcBef>
+              <a:buFont typeface="Arial" panose="020B0604020202020204" pitchFamily="34" charset="0"/>
+              <a:buChar char="•"/>
+              <a:defRPr sz="1800" kern="1200">
+                <a:solidFill>
+                  <a:schemeClr val="tx1"/>
+                </a:solidFill>
+                <a:latin typeface="+mn-lt"/>
+                <a:ea typeface="+mn-ea"/>
+                <a:cs typeface="+mn-cs"/>
+              </a:defRPr>
+            </a:lvl9pPr>
+          </a:lstStyle>
+          <a:p>
+            <a:r>
+              <a:rPr lang="pt-BR" dirty="0"/>
+              <a:t>A primeira requisição do nosso projeto será responsável por buscar todos os produtos cadastrados no banco de dados. Para isso, utilizaremos o método GET e devemos adicionar o seguinte código ao arquivo api.js:</a:t>
+            </a:r>
+          </a:p>
+        </p:txBody>
+      </p:sp>
+      <p:grpSp>
+        <p:nvGrpSpPr>
+          <p:cNvPr id="5" name="Agrupar 4">
+            <a:extLst>
+              <a:ext uri="{FF2B5EF4-FFF2-40B4-BE49-F238E27FC236}">
+                <a16:creationId xmlns:a16="http://schemas.microsoft.com/office/drawing/2014/main" id="{959DB256-760D-43FD-8554-746A3EF5433E}"/>
+              </a:ext>
+            </a:extLst>
+          </p:cNvPr>
+          <p:cNvGrpSpPr/>
+          <p:nvPr/>
+        </p:nvGrpSpPr>
+        <p:grpSpPr>
+          <a:xfrm>
+            <a:off x="1468842" y="3335867"/>
+            <a:ext cx="9254316" cy="3218682"/>
+            <a:chOff x="1735418" y="3429000"/>
+            <a:chExt cx="9254316" cy="3218682"/>
+          </a:xfrm>
+        </p:grpSpPr>
+        <p:sp>
+          <p:nvSpPr>
+            <p:cNvPr id="11" name="Shape 20">
+              <a:extLst>
+                <a:ext uri="{FF2B5EF4-FFF2-40B4-BE49-F238E27FC236}">
+                  <a16:creationId xmlns:a16="http://schemas.microsoft.com/office/drawing/2014/main" id="{EE383B37-7310-4563-9BC8-B173B5286B0D}"/>
+                </a:ext>
+              </a:extLst>
+            </p:cNvPr>
+            <p:cNvSpPr/>
+            <p:nvPr/>
+          </p:nvSpPr>
+          <p:spPr>
+            <a:xfrm>
+              <a:off x="1735418" y="3429000"/>
+              <a:ext cx="9254316" cy="3218682"/>
+            </a:xfrm>
+            <a:prstGeom prst="roundRect">
+              <a:avLst>
+                <a:gd name="adj" fmla="val 8081"/>
+              </a:avLst>
+            </a:prstGeom>
+            <a:solidFill>
+              <a:srgbClr val="1E1E1E"/>
+            </a:solidFill>
+            <a:ln>
+              <a:solidFill>
+                <a:srgbClr val="1E1E1E"/>
+              </a:solidFill>
+            </a:ln>
+          </p:spPr>
+          <p:txBody>
+            <a:bodyPr/>
+            <a:lstStyle/>
+            <a:p>
+              <a:endParaRPr lang="pt-BR"/>
+            </a:p>
+          </p:txBody>
+        </p:sp>
+        <p:sp>
+          <p:nvSpPr>
+            <p:cNvPr id="4" name="Retângulo 3">
+              <a:extLst>
+                <a:ext uri="{FF2B5EF4-FFF2-40B4-BE49-F238E27FC236}">
+                  <a16:creationId xmlns:a16="http://schemas.microsoft.com/office/drawing/2014/main" id="{3CE8AC7A-3364-4E97-BC2E-25CF018F1E04}"/>
+                </a:ext>
+              </a:extLst>
+            </p:cNvPr>
+            <p:cNvSpPr/>
+            <p:nvPr/>
+          </p:nvSpPr>
+          <p:spPr>
+            <a:xfrm>
+              <a:off x="2408642" y="3591791"/>
+              <a:ext cx="7907868" cy="2893100"/>
+            </a:xfrm>
+            <a:prstGeom prst="rect">
+              <a:avLst/>
+            </a:prstGeom>
+          </p:spPr>
+          <p:txBody>
+            <a:bodyPr wrap="square">
+              <a:spAutoFit/>
+            </a:bodyPr>
+            <a:lstStyle/>
+            <a:p>
+              <a:r>
+                <a:rPr lang="en-US" sz="1400" dirty="0">
+                  <a:solidFill>
+                    <a:srgbClr val="569CD6"/>
+                  </a:solidFill>
+                  <a:latin typeface="Consolas" panose="020B0609020204030204" pitchFamily="49" charset="0"/>
+                </a:rPr>
+                <a:t>const</a:t>
+              </a:r>
+              <a:r>
+                <a:rPr lang="en-US" sz="1400" dirty="0">
+                  <a:solidFill>
+                    <a:srgbClr val="D4D4D4"/>
+                  </a:solidFill>
+                  <a:latin typeface="Consolas" panose="020B0609020204030204" pitchFamily="49" charset="0"/>
+                </a:rPr>
+                <a:t> </a:t>
+              </a:r>
+              <a:r>
+                <a:rPr lang="en-US" sz="1400" dirty="0" err="1">
+                  <a:solidFill>
+                    <a:srgbClr val="D4D4D4"/>
+                  </a:solidFill>
+                  <a:latin typeface="Consolas" panose="020B0609020204030204" pitchFamily="49" charset="0"/>
+                </a:rPr>
+                <a:t>api</a:t>
+              </a:r>
+              <a:r>
+                <a:rPr lang="en-US" sz="1400" dirty="0">
+                  <a:solidFill>
+                    <a:srgbClr val="D4D4D4"/>
+                  </a:solidFill>
+                  <a:latin typeface="Consolas" panose="020B0609020204030204" pitchFamily="49" charset="0"/>
+                </a:rPr>
+                <a:t> = {</a:t>
+              </a:r>
+            </a:p>
+            <a:p>
+              <a:r>
+                <a:rPr lang="en-US" sz="1400" dirty="0">
+                  <a:solidFill>
+                    <a:srgbClr val="D4D4D4"/>
+                  </a:solidFill>
+                  <a:latin typeface="Consolas" panose="020B0609020204030204" pitchFamily="49" charset="0"/>
+                </a:rPr>
+                <a:t>    </a:t>
+              </a:r>
+              <a:r>
+                <a:rPr lang="en-US" sz="1400" dirty="0">
+                  <a:solidFill>
+                    <a:srgbClr val="569CD6"/>
+                  </a:solidFill>
+                  <a:latin typeface="Consolas" panose="020B0609020204030204" pitchFamily="49" charset="0"/>
+                </a:rPr>
+                <a:t>async</a:t>
+              </a:r>
+              <a:r>
+                <a:rPr lang="en-US" sz="1400" dirty="0">
+                  <a:solidFill>
+                    <a:srgbClr val="D4D4D4"/>
+                  </a:solidFill>
+                  <a:latin typeface="Consolas" panose="020B0609020204030204" pitchFamily="49" charset="0"/>
+                </a:rPr>
+                <a:t> </a:t>
+              </a:r>
+              <a:r>
+                <a:rPr lang="en-US" sz="1400" dirty="0" err="1">
+                  <a:solidFill>
+                    <a:srgbClr val="D4D4D4"/>
+                  </a:solidFill>
+                  <a:latin typeface="Consolas" panose="020B0609020204030204" pitchFamily="49" charset="0"/>
+                </a:rPr>
+                <a:t>buscarProdutos</a:t>
+              </a:r>
+              <a:r>
+                <a:rPr lang="en-US" sz="1400" dirty="0">
+                  <a:solidFill>
+                    <a:srgbClr val="D4D4D4"/>
+                  </a:solidFill>
+                  <a:latin typeface="Consolas" panose="020B0609020204030204" pitchFamily="49" charset="0"/>
+                </a:rPr>
+                <a:t>() {</a:t>
+              </a:r>
+            </a:p>
+            <a:p>
+              <a:r>
+                <a:rPr lang="en-US" sz="1400" dirty="0">
+                  <a:solidFill>
+                    <a:srgbClr val="D4D4D4"/>
+                  </a:solidFill>
+                  <a:latin typeface="Consolas" panose="020B0609020204030204" pitchFamily="49" charset="0"/>
+                </a:rPr>
+                <a:t>        </a:t>
+              </a:r>
+              <a:r>
+                <a:rPr lang="en-US" sz="1400" dirty="0">
+                  <a:solidFill>
+                    <a:srgbClr val="569CD6"/>
+                  </a:solidFill>
+                  <a:latin typeface="Consolas" panose="020B0609020204030204" pitchFamily="49" charset="0"/>
+                </a:rPr>
+                <a:t>try</a:t>
+              </a:r>
+              <a:r>
+                <a:rPr lang="en-US" sz="1400" dirty="0">
+                  <a:solidFill>
+                    <a:srgbClr val="D4D4D4"/>
+                  </a:solidFill>
+                  <a:latin typeface="Consolas" panose="020B0609020204030204" pitchFamily="49" charset="0"/>
+                </a:rPr>
+                <a:t> {</a:t>
+              </a:r>
+            </a:p>
+            <a:p>
+              <a:r>
+                <a:rPr lang="en-US" sz="1400" dirty="0">
+                  <a:solidFill>
+                    <a:srgbClr val="D4D4D4"/>
+                  </a:solidFill>
+                  <a:latin typeface="Consolas" panose="020B0609020204030204" pitchFamily="49" charset="0"/>
+                </a:rPr>
+                <a:t>            </a:t>
+              </a:r>
+              <a:r>
+                <a:rPr lang="en-US" sz="1400" dirty="0">
+                  <a:solidFill>
+                    <a:srgbClr val="569CD6"/>
+                  </a:solidFill>
+                  <a:latin typeface="Consolas" panose="020B0609020204030204" pitchFamily="49" charset="0"/>
+                </a:rPr>
+                <a:t>const</a:t>
+              </a:r>
+              <a:r>
+                <a:rPr lang="en-US" sz="1400" dirty="0">
+                  <a:solidFill>
+                    <a:srgbClr val="D4D4D4"/>
+                  </a:solidFill>
+                  <a:latin typeface="Consolas" panose="020B0609020204030204" pitchFamily="49" charset="0"/>
+                </a:rPr>
+                <a:t> response = </a:t>
+              </a:r>
+              <a:r>
+                <a:rPr lang="en-US" sz="1400" dirty="0">
+                  <a:solidFill>
+                    <a:srgbClr val="569CD6"/>
+                  </a:solidFill>
+                  <a:latin typeface="Consolas" panose="020B0609020204030204" pitchFamily="49" charset="0"/>
+                </a:rPr>
+                <a:t>await</a:t>
+              </a:r>
+              <a:r>
+                <a:rPr lang="en-US" sz="1400" dirty="0">
+                  <a:solidFill>
+                    <a:srgbClr val="D4D4D4"/>
+                  </a:solidFill>
+                  <a:latin typeface="Consolas" panose="020B0609020204030204" pitchFamily="49" charset="0"/>
+                </a:rPr>
+                <a:t> fetch(</a:t>
+              </a:r>
+              <a:r>
+                <a:rPr lang="en-US" sz="1400" dirty="0">
+                  <a:solidFill>
+                    <a:srgbClr val="CE9178"/>
+                  </a:solidFill>
+                  <a:latin typeface="Consolas" panose="020B0609020204030204" pitchFamily="49" charset="0"/>
+                </a:rPr>
+                <a:t>"http://localhost:3000/</a:t>
+              </a:r>
+              <a:r>
+                <a:rPr lang="en-US" sz="1400" dirty="0" err="1">
+                  <a:solidFill>
+                    <a:srgbClr val="CE9178"/>
+                  </a:solidFill>
+                  <a:latin typeface="Consolas" panose="020B0609020204030204" pitchFamily="49" charset="0"/>
+                </a:rPr>
+                <a:t>produtos</a:t>
+              </a:r>
+              <a:r>
+                <a:rPr lang="en-US" sz="1400" dirty="0">
+                  <a:solidFill>
+                    <a:srgbClr val="CE9178"/>
+                  </a:solidFill>
+                  <a:latin typeface="Consolas" panose="020B0609020204030204" pitchFamily="49" charset="0"/>
+                </a:rPr>
+                <a:t>"</a:t>
+              </a:r>
+              <a:r>
+                <a:rPr lang="en-US" sz="1400" dirty="0">
+                  <a:solidFill>
+                    <a:srgbClr val="D4D4D4"/>
+                  </a:solidFill>
+                  <a:latin typeface="Consolas" panose="020B0609020204030204" pitchFamily="49" charset="0"/>
+                </a:rPr>
+                <a:t>)</a:t>
+              </a:r>
+            </a:p>
+            <a:p>
+              <a:r>
+                <a:rPr lang="en-US" sz="1400" dirty="0">
+                  <a:solidFill>
+                    <a:srgbClr val="D4D4D4"/>
+                  </a:solidFill>
+                  <a:latin typeface="Consolas" panose="020B0609020204030204" pitchFamily="49" charset="0"/>
+                </a:rPr>
+                <a:t>            </a:t>
+              </a:r>
+              <a:r>
+                <a:rPr lang="en-US" sz="1400" dirty="0">
+                  <a:solidFill>
+                    <a:srgbClr val="569CD6"/>
+                  </a:solidFill>
+                  <a:latin typeface="Consolas" panose="020B0609020204030204" pitchFamily="49" charset="0"/>
+                </a:rPr>
+                <a:t>return</a:t>
+              </a:r>
+              <a:r>
+                <a:rPr lang="en-US" sz="1400" dirty="0">
+                  <a:solidFill>
+                    <a:srgbClr val="D4D4D4"/>
+                  </a:solidFill>
+                  <a:latin typeface="Consolas" panose="020B0609020204030204" pitchFamily="49" charset="0"/>
+                </a:rPr>
+                <a:t> </a:t>
+              </a:r>
+              <a:r>
+                <a:rPr lang="en-US" sz="1400" dirty="0">
+                  <a:solidFill>
+                    <a:srgbClr val="569CD6"/>
+                  </a:solidFill>
+                  <a:latin typeface="Consolas" panose="020B0609020204030204" pitchFamily="49" charset="0"/>
+                </a:rPr>
+                <a:t>await</a:t>
+              </a:r>
+              <a:r>
+                <a:rPr lang="en-US" sz="1400" dirty="0">
+                  <a:solidFill>
+                    <a:srgbClr val="D4D4D4"/>
+                  </a:solidFill>
+                  <a:latin typeface="Consolas" panose="020B0609020204030204" pitchFamily="49" charset="0"/>
+                </a:rPr>
+                <a:t> </a:t>
+              </a:r>
+              <a:r>
+                <a:rPr lang="en-US" sz="1400" dirty="0" err="1">
+                  <a:solidFill>
+                    <a:srgbClr val="D4D4D4"/>
+                  </a:solidFill>
+                  <a:latin typeface="Consolas" panose="020B0609020204030204" pitchFamily="49" charset="0"/>
+                </a:rPr>
+                <a:t>response.json</a:t>
+              </a:r>
+              <a:r>
+                <a:rPr lang="en-US" sz="1400" dirty="0">
+                  <a:solidFill>
+                    <a:srgbClr val="D4D4D4"/>
+                  </a:solidFill>
+                  <a:latin typeface="Consolas" panose="020B0609020204030204" pitchFamily="49" charset="0"/>
+                </a:rPr>
+                <a:t>()</a:t>
+              </a:r>
+            </a:p>
+            <a:p>
+              <a:r>
+                <a:rPr lang="en-US" sz="1400" dirty="0">
+                  <a:solidFill>
+                    <a:srgbClr val="D4D4D4"/>
+                  </a:solidFill>
+                  <a:latin typeface="Consolas" panose="020B0609020204030204" pitchFamily="49" charset="0"/>
+                </a:rPr>
+                <a:t>        } </a:t>
+              </a:r>
+              <a:r>
+                <a:rPr lang="en-US" sz="1400" dirty="0">
+                  <a:solidFill>
+                    <a:srgbClr val="569CD6"/>
+                  </a:solidFill>
+                  <a:latin typeface="Consolas" panose="020B0609020204030204" pitchFamily="49" charset="0"/>
+                </a:rPr>
+                <a:t>catch</a:t>
+              </a:r>
+              <a:r>
+                <a:rPr lang="en-US" sz="1400" dirty="0">
+                  <a:solidFill>
+                    <a:srgbClr val="D4D4D4"/>
+                  </a:solidFill>
+                  <a:latin typeface="Consolas" panose="020B0609020204030204" pitchFamily="49" charset="0"/>
+                </a:rPr>
+                <a:t> (error) {</a:t>
+              </a:r>
+            </a:p>
+            <a:p>
+              <a:r>
+                <a:rPr lang="en-US" sz="1400" dirty="0">
+                  <a:solidFill>
+                    <a:srgbClr val="D4D4D4"/>
+                  </a:solidFill>
+                  <a:latin typeface="Consolas" panose="020B0609020204030204" pitchFamily="49" charset="0"/>
+                </a:rPr>
+                <a:t>            alert(</a:t>
+              </a:r>
+              <a:r>
+                <a:rPr lang="en-US" sz="1400" dirty="0">
+                  <a:solidFill>
+                    <a:srgbClr val="CE9178"/>
+                  </a:solidFill>
+                  <a:latin typeface="Consolas" panose="020B0609020204030204" pitchFamily="49" charset="0"/>
+                </a:rPr>
+                <a:t>"</a:t>
+              </a:r>
+              <a:r>
+                <a:rPr lang="en-US" sz="1400" dirty="0" err="1">
+                  <a:solidFill>
+                    <a:srgbClr val="CE9178"/>
+                  </a:solidFill>
+                  <a:latin typeface="Consolas" panose="020B0609020204030204" pitchFamily="49" charset="0"/>
+                </a:rPr>
+                <a:t>Erro</a:t>
+              </a:r>
+              <a:r>
+                <a:rPr lang="en-US" sz="1400" dirty="0">
+                  <a:solidFill>
+                    <a:srgbClr val="CE9178"/>
+                  </a:solidFill>
+                  <a:latin typeface="Consolas" panose="020B0609020204030204" pitchFamily="49" charset="0"/>
+                </a:rPr>
+                <a:t> </a:t>
+              </a:r>
+              <a:r>
+                <a:rPr lang="en-US" sz="1400" dirty="0" err="1">
+                  <a:solidFill>
+                    <a:srgbClr val="CE9178"/>
+                  </a:solidFill>
+                  <a:latin typeface="Consolas" panose="020B0609020204030204" pitchFamily="49" charset="0"/>
+                </a:rPr>
+                <a:t>ao</a:t>
+              </a:r>
+              <a:r>
+                <a:rPr lang="en-US" sz="1400" dirty="0">
+                  <a:solidFill>
+                    <a:srgbClr val="CE9178"/>
+                  </a:solidFill>
+                  <a:latin typeface="Consolas" panose="020B0609020204030204" pitchFamily="49" charset="0"/>
+                </a:rPr>
+                <a:t> </a:t>
+              </a:r>
+              <a:r>
+                <a:rPr lang="en-US" sz="1400" dirty="0" err="1">
+                  <a:solidFill>
+                    <a:srgbClr val="CE9178"/>
+                  </a:solidFill>
+                  <a:latin typeface="Consolas" panose="020B0609020204030204" pitchFamily="49" charset="0"/>
+                </a:rPr>
+                <a:t>buscar</a:t>
+              </a:r>
+              <a:r>
+                <a:rPr lang="en-US" sz="1400" dirty="0">
+                  <a:solidFill>
+                    <a:srgbClr val="CE9178"/>
+                  </a:solidFill>
+                  <a:latin typeface="Consolas" panose="020B0609020204030204" pitchFamily="49" charset="0"/>
+                </a:rPr>
+                <a:t> </a:t>
+              </a:r>
+              <a:r>
+                <a:rPr lang="en-US" sz="1400" dirty="0" err="1">
+                  <a:solidFill>
+                    <a:srgbClr val="CE9178"/>
+                  </a:solidFill>
+                  <a:latin typeface="Consolas" panose="020B0609020204030204" pitchFamily="49" charset="0"/>
+                </a:rPr>
+                <a:t>produtos</a:t>
+              </a:r>
+              <a:r>
+                <a:rPr lang="en-US" sz="1400" dirty="0">
+                  <a:solidFill>
+                    <a:srgbClr val="CE9178"/>
+                  </a:solidFill>
+                  <a:latin typeface="Consolas" panose="020B0609020204030204" pitchFamily="49" charset="0"/>
+                </a:rPr>
+                <a:t>"</a:t>
+              </a:r>
+              <a:r>
+                <a:rPr lang="en-US" sz="1400" dirty="0">
+                  <a:solidFill>
+                    <a:srgbClr val="D4D4D4"/>
+                  </a:solidFill>
+                  <a:latin typeface="Consolas" panose="020B0609020204030204" pitchFamily="49" charset="0"/>
+                </a:rPr>
+                <a:t>)</a:t>
+              </a:r>
+            </a:p>
+            <a:p>
+              <a:r>
+                <a:rPr lang="en-US" sz="1400" dirty="0">
+                  <a:solidFill>
+                    <a:srgbClr val="D4D4D4"/>
+                  </a:solidFill>
+                  <a:latin typeface="Consolas" panose="020B0609020204030204" pitchFamily="49" charset="0"/>
+                </a:rPr>
+                <a:t>            </a:t>
+              </a:r>
+              <a:r>
+                <a:rPr lang="en-US" sz="1400" dirty="0">
+                  <a:solidFill>
+                    <a:srgbClr val="569CD6"/>
+                  </a:solidFill>
+                  <a:latin typeface="Consolas" panose="020B0609020204030204" pitchFamily="49" charset="0"/>
+                </a:rPr>
+                <a:t>throw</a:t>
+              </a:r>
+              <a:r>
+                <a:rPr lang="en-US" sz="1400" dirty="0">
+                  <a:solidFill>
+                    <a:srgbClr val="D4D4D4"/>
+                  </a:solidFill>
+                  <a:latin typeface="Consolas" panose="020B0609020204030204" pitchFamily="49" charset="0"/>
+                </a:rPr>
+                <a:t> error</a:t>
+              </a:r>
+            </a:p>
+            <a:p>
+              <a:r>
+                <a:rPr lang="en-US" sz="1400" dirty="0">
+                  <a:solidFill>
+                    <a:srgbClr val="D4D4D4"/>
+                  </a:solidFill>
+                  <a:latin typeface="Consolas" panose="020B0609020204030204" pitchFamily="49" charset="0"/>
+                </a:rPr>
+                <a:t>        }</a:t>
+              </a:r>
+            </a:p>
+            <a:p>
+              <a:r>
+                <a:rPr lang="en-US" sz="1400" dirty="0">
+                  <a:solidFill>
+                    <a:srgbClr val="D4D4D4"/>
+                  </a:solidFill>
+                  <a:latin typeface="Consolas" panose="020B0609020204030204" pitchFamily="49" charset="0"/>
+                </a:rPr>
+                <a:t>    }</a:t>
+              </a:r>
+            </a:p>
+            <a:p>
+              <a:r>
+                <a:rPr lang="en-US" sz="1400" dirty="0">
+                  <a:solidFill>
+                    <a:srgbClr val="D4D4D4"/>
+                  </a:solidFill>
+                  <a:latin typeface="Consolas" panose="020B0609020204030204" pitchFamily="49" charset="0"/>
+                </a:rPr>
+                <a:t>}</a:t>
+              </a:r>
+            </a:p>
+            <a:p>
+              <a:br>
+                <a:rPr lang="en-US" sz="1400" dirty="0">
+                  <a:solidFill>
+                    <a:srgbClr val="D4D4D4"/>
+                  </a:solidFill>
+                  <a:latin typeface="Consolas" panose="020B0609020204030204" pitchFamily="49" charset="0"/>
+                </a:rPr>
+              </a:br>
+              <a:r>
+                <a:rPr lang="en-US" sz="1400" dirty="0">
+                  <a:solidFill>
+                    <a:srgbClr val="569CD6"/>
+                  </a:solidFill>
+                  <a:latin typeface="Consolas" panose="020B0609020204030204" pitchFamily="49" charset="0"/>
+                </a:rPr>
+                <a:t>export</a:t>
+              </a:r>
+              <a:r>
+                <a:rPr lang="en-US" sz="1400" dirty="0">
+                  <a:solidFill>
+                    <a:srgbClr val="D4D4D4"/>
+                  </a:solidFill>
+                  <a:latin typeface="Consolas" panose="020B0609020204030204" pitchFamily="49" charset="0"/>
+                </a:rPr>
+                <a:t> </a:t>
+              </a:r>
+              <a:r>
+                <a:rPr lang="en-US" sz="1400" dirty="0">
+                  <a:solidFill>
+                    <a:srgbClr val="569CD6"/>
+                  </a:solidFill>
+                  <a:latin typeface="Consolas" panose="020B0609020204030204" pitchFamily="49" charset="0"/>
+                </a:rPr>
+                <a:t>default</a:t>
+              </a:r>
+              <a:r>
+                <a:rPr lang="en-US" sz="1400" dirty="0">
+                  <a:solidFill>
+                    <a:srgbClr val="D4D4D4"/>
+                  </a:solidFill>
+                  <a:latin typeface="Consolas" panose="020B0609020204030204" pitchFamily="49" charset="0"/>
+                </a:rPr>
+                <a:t> </a:t>
+              </a:r>
+              <a:r>
+                <a:rPr lang="en-US" sz="1400" dirty="0" err="1">
+                  <a:solidFill>
+                    <a:srgbClr val="D4D4D4"/>
+                  </a:solidFill>
+                  <a:latin typeface="Consolas" panose="020B0609020204030204" pitchFamily="49" charset="0"/>
+                </a:rPr>
+                <a:t>api</a:t>
+              </a:r>
+              <a:r>
+                <a:rPr lang="en-US" sz="1400" dirty="0">
+                  <a:solidFill>
+                    <a:srgbClr val="D4D4D4"/>
+                  </a:solidFill>
+                  <a:latin typeface="Consolas" panose="020B0609020204030204" pitchFamily="49" charset="0"/>
+                </a:rPr>
+                <a:t> </a:t>
+              </a:r>
+              <a:endParaRPr lang="en-US" sz="1400" b="0" dirty="0">
+                <a:solidFill>
+                  <a:srgbClr val="D4D4D4"/>
+                </a:solidFill>
+                <a:effectLst/>
+                <a:latin typeface="Consolas" panose="020B0609020204030204" pitchFamily="49" charset="0"/>
+              </a:endParaRPr>
+            </a:p>
+          </p:txBody>
+        </p:sp>
+      </p:grpSp>
+    </p:spTree>
+    <p:extLst>
+      <p:ext uri="{BB962C8B-B14F-4D97-AF65-F5344CB8AC3E}">
+        <p14:creationId xmlns:p14="http://schemas.microsoft.com/office/powerpoint/2010/main" val="76966833"/>
+      </p:ext>
+    </p:extLst>
+  </p:cSld>
+  <p:clrMapOvr>
+    <a:masterClrMapping/>
+  </p:clrMapOvr>
+</p:sld>
+</file>
+
+<file path=ppt/slides/slide18.xml><?xml version="1.0" encoding="utf-8"?>
+<p:sld xmlns:a="http://schemas.openxmlformats.org/drawingml/2006/main" xmlns:r="http://schemas.openxmlformats.org/officeDocument/2006/relationships" xmlns:p="http://schemas.openxmlformats.org/presentationml/2006/main">
+  <p:cSld>
+    <p:spTree>
+      <p:nvGrpSpPr>
+        <p:cNvPr id="1" name=""/>
+        <p:cNvGrpSpPr/>
+        <p:nvPr/>
+      </p:nvGrpSpPr>
+      <p:grpSpPr>
+        <a:xfrm>
+          <a:off x="0" y="0"/>
+          <a:ext cx="0" cy="0"/>
+          <a:chOff x="0" y="0"/>
+          <a:chExt cx="0" cy="0"/>
+        </a:xfrm>
+      </p:grpSpPr>
+      <p:sp>
+        <p:nvSpPr>
+          <p:cNvPr id="2" name="Título 1">
+            <a:extLst>
+              <a:ext uri="{FF2B5EF4-FFF2-40B4-BE49-F238E27FC236}">
+                <a16:creationId xmlns:a16="http://schemas.microsoft.com/office/drawing/2014/main" id="{8738858E-69E2-8A32-4D8D-61A4750C2960}"/>
+              </a:ext>
+            </a:extLst>
+          </p:cNvPr>
+          <p:cNvSpPr>
+            <a:spLocks noGrp="1"/>
+          </p:cNvSpPr>
+          <p:nvPr>
+            <p:ph type="title"/>
+          </p:nvPr>
+        </p:nvSpPr>
+        <p:spPr/>
+        <p:txBody>
+          <a:bodyPr/>
+          <a:lstStyle/>
+          <a:p>
+            <a:r>
+              <a:rPr lang="pt-BR" dirty="0"/>
+              <a:t>Criando o Método GET no nosso programa</a:t>
+            </a:r>
+          </a:p>
+        </p:txBody>
+      </p:sp>
+      <p:sp>
+        <p:nvSpPr>
+          <p:cNvPr id="6" name="Espaço Reservado para Conteúdo 5">
+            <a:extLst>
+              <a:ext uri="{FF2B5EF4-FFF2-40B4-BE49-F238E27FC236}">
+                <a16:creationId xmlns:a16="http://schemas.microsoft.com/office/drawing/2014/main" id="{B24F9431-18D8-4DC9-B9CC-1BCF1A71C18D}"/>
+              </a:ext>
+            </a:extLst>
+          </p:cNvPr>
+          <p:cNvSpPr txBox="1">
+            <a:spLocks/>
+          </p:cNvSpPr>
+          <p:nvPr/>
+        </p:nvSpPr>
+        <p:spPr>
+          <a:xfrm>
+            <a:off x="749185" y="1600200"/>
+            <a:ext cx="10858615" cy="1032933"/>
+          </a:xfrm>
+          <a:prstGeom prst="rect">
+            <a:avLst/>
+          </a:prstGeom>
+        </p:spPr>
+        <p:txBody>
+          <a:bodyPr/>
+          <a:lstStyle>
+            <a:lvl1pPr marL="0" indent="0" algn="just" defTabSz="914400" rtl="0" eaLnBrk="1" latinLnBrk="0" hangingPunct="1">
+              <a:lnSpc>
+                <a:spcPct val="150000"/>
+              </a:lnSpc>
+              <a:spcBef>
+                <a:spcPts val="0"/>
+              </a:spcBef>
+              <a:buFont typeface="Arial" panose="020B0604020202020204" pitchFamily="34" charset="0"/>
+              <a:buNone/>
+              <a:defRPr sz="2000" kern="1200">
+                <a:solidFill>
+                  <a:schemeClr val="tx1"/>
+                </a:solidFill>
+                <a:latin typeface="Times New Roman" panose="02020603050405020304" pitchFamily="18" charset="0"/>
+                <a:ea typeface="+mn-ea"/>
+                <a:cs typeface="Times New Roman" panose="02020603050405020304" pitchFamily="18" charset="0"/>
+              </a:defRPr>
+            </a:lvl1pPr>
+            <a:lvl2pPr marL="457200" indent="0" algn="just" defTabSz="914400" rtl="0" eaLnBrk="1" latinLnBrk="0" hangingPunct="1">
+              <a:lnSpc>
+                <a:spcPct val="150000"/>
+              </a:lnSpc>
+              <a:spcBef>
+                <a:spcPts val="0"/>
+              </a:spcBef>
+              <a:buFont typeface="Arial" panose="020B0604020202020204" pitchFamily="34" charset="0"/>
+              <a:buNone/>
+              <a:defRPr sz="1600" kern="1200">
+                <a:solidFill>
+                  <a:schemeClr val="tx1"/>
+                </a:solidFill>
+                <a:latin typeface="Times New Roman" panose="02020603050405020304" pitchFamily="18" charset="0"/>
+                <a:ea typeface="+mn-ea"/>
+                <a:cs typeface="Times New Roman" panose="02020603050405020304" pitchFamily="18" charset="0"/>
+              </a:defRPr>
+            </a:lvl2pPr>
+            <a:lvl3pPr marL="914400" indent="0" algn="just" defTabSz="914400" rtl="0" eaLnBrk="1" latinLnBrk="0" hangingPunct="1">
+              <a:lnSpc>
+                <a:spcPct val="150000"/>
+              </a:lnSpc>
+              <a:spcBef>
+                <a:spcPts val="0"/>
+              </a:spcBef>
+              <a:buFont typeface="Arial" panose="020B0604020202020204" pitchFamily="34" charset="0"/>
+              <a:buNone/>
+              <a:defRPr sz="1400" kern="1200">
+                <a:solidFill>
+                  <a:schemeClr val="tx1"/>
+                </a:solidFill>
+                <a:latin typeface="Times New Roman" panose="02020603050405020304" pitchFamily="18" charset="0"/>
+                <a:ea typeface="+mn-ea"/>
+                <a:cs typeface="Times New Roman" panose="02020603050405020304" pitchFamily="18" charset="0"/>
+              </a:defRPr>
+            </a:lvl3pPr>
+            <a:lvl4pPr marL="1371600" indent="0" algn="just" defTabSz="914400" rtl="0" eaLnBrk="1" latinLnBrk="0" hangingPunct="1">
+              <a:lnSpc>
+                <a:spcPct val="150000"/>
+              </a:lnSpc>
+              <a:spcBef>
+                <a:spcPts val="0"/>
+              </a:spcBef>
+              <a:buFont typeface="Arial" panose="020B0604020202020204" pitchFamily="34" charset="0"/>
+              <a:buNone/>
+              <a:defRPr sz="1200" kern="1200">
+                <a:solidFill>
+                  <a:schemeClr val="tx1"/>
+                </a:solidFill>
+                <a:latin typeface="Times New Roman" panose="02020603050405020304" pitchFamily="18" charset="0"/>
+                <a:ea typeface="+mn-ea"/>
+                <a:cs typeface="Times New Roman" panose="02020603050405020304" pitchFamily="18" charset="0"/>
+              </a:defRPr>
+            </a:lvl4pPr>
+            <a:lvl5pPr marL="1828800" indent="0" algn="just" defTabSz="914400" rtl="0" eaLnBrk="1" latinLnBrk="0" hangingPunct="1">
+              <a:lnSpc>
+                <a:spcPct val="150000"/>
+              </a:lnSpc>
+              <a:spcBef>
+                <a:spcPts val="0"/>
+              </a:spcBef>
+              <a:buFont typeface="Arial" panose="020B0604020202020204" pitchFamily="34" charset="0"/>
+              <a:buNone/>
+              <a:defRPr sz="1000" kern="1200">
+                <a:solidFill>
+                  <a:schemeClr val="tx1"/>
+                </a:solidFill>
+                <a:latin typeface="Times New Roman" panose="02020603050405020304" pitchFamily="18" charset="0"/>
+                <a:ea typeface="+mn-ea"/>
+                <a:cs typeface="Times New Roman" panose="02020603050405020304" pitchFamily="18" charset="0"/>
+              </a:defRPr>
+            </a:lvl5pPr>
+            <a:lvl6pPr marL="2514600" indent="-228600" algn="l" defTabSz="914400" rtl="0" eaLnBrk="1" latinLnBrk="0" hangingPunct="1">
+              <a:lnSpc>
+                <a:spcPct val="90000"/>
+              </a:lnSpc>
+              <a:spcBef>
+                <a:spcPts val="500"/>
+              </a:spcBef>
+              <a:buFont typeface="Arial" panose="020B0604020202020204" pitchFamily="34" charset="0"/>
+              <a:buChar char="•"/>
+              <a:defRPr sz="1800" kern="1200">
+                <a:solidFill>
+                  <a:schemeClr val="tx1"/>
+                </a:solidFill>
+                <a:latin typeface="+mn-lt"/>
+                <a:ea typeface="+mn-ea"/>
+                <a:cs typeface="+mn-cs"/>
+              </a:defRPr>
+            </a:lvl6pPr>
+            <a:lvl7pPr marL="2971800" indent="-228600" algn="l" defTabSz="914400" rtl="0" eaLnBrk="1" latinLnBrk="0" hangingPunct="1">
+              <a:lnSpc>
+                <a:spcPct val="90000"/>
+              </a:lnSpc>
+              <a:spcBef>
+                <a:spcPts val="500"/>
+              </a:spcBef>
+              <a:buFont typeface="Arial" panose="020B0604020202020204" pitchFamily="34" charset="0"/>
+              <a:buChar char="•"/>
+              <a:defRPr sz="1800" kern="1200">
+                <a:solidFill>
+                  <a:schemeClr val="tx1"/>
+                </a:solidFill>
+                <a:latin typeface="+mn-lt"/>
+                <a:ea typeface="+mn-ea"/>
+                <a:cs typeface="+mn-cs"/>
+              </a:defRPr>
+            </a:lvl7pPr>
+            <a:lvl8pPr marL="3429000" indent="-228600" algn="l" defTabSz="914400" rtl="0" eaLnBrk="1" latinLnBrk="0" hangingPunct="1">
+              <a:lnSpc>
+                <a:spcPct val="90000"/>
+              </a:lnSpc>
+              <a:spcBef>
+                <a:spcPts val="500"/>
+              </a:spcBef>
+              <a:buFont typeface="Arial" panose="020B0604020202020204" pitchFamily="34" charset="0"/>
+              <a:buChar char="•"/>
+              <a:defRPr sz="1800" kern="1200">
+                <a:solidFill>
+                  <a:schemeClr val="tx1"/>
+                </a:solidFill>
+                <a:latin typeface="+mn-lt"/>
+                <a:ea typeface="+mn-ea"/>
+                <a:cs typeface="+mn-cs"/>
+              </a:defRPr>
+            </a:lvl8pPr>
+            <a:lvl9pPr marL="3886200" indent="-228600" algn="l" defTabSz="914400" rtl="0" eaLnBrk="1" latinLnBrk="0" hangingPunct="1">
+              <a:lnSpc>
+                <a:spcPct val="90000"/>
+              </a:lnSpc>
+              <a:spcBef>
+                <a:spcPts val="500"/>
+              </a:spcBef>
+              <a:buFont typeface="Arial" panose="020B0604020202020204" pitchFamily="34" charset="0"/>
+              <a:buChar char="•"/>
+              <a:defRPr sz="1800" kern="1200">
+                <a:solidFill>
+                  <a:schemeClr val="tx1"/>
+                </a:solidFill>
+                <a:latin typeface="+mn-lt"/>
+                <a:ea typeface="+mn-ea"/>
+                <a:cs typeface="+mn-cs"/>
+              </a:defRPr>
+            </a:lvl9pPr>
+          </a:lstStyle>
+          <a:p>
+            <a:r>
+              <a:rPr lang="pt-BR" dirty="0"/>
+              <a:t>Agora vamos criar um arquivo chamado de consultasAPI.js que será responsável por registrar todas as consultas que iremos fazer dentro do nosso programa.</a:t>
+            </a:r>
+          </a:p>
+        </p:txBody>
+      </p:sp>
+      <p:grpSp>
+        <p:nvGrpSpPr>
+          <p:cNvPr id="7" name="Agrupar 6">
+            <a:extLst>
+              <a:ext uri="{FF2B5EF4-FFF2-40B4-BE49-F238E27FC236}">
+                <a16:creationId xmlns:a16="http://schemas.microsoft.com/office/drawing/2014/main" id="{E631E9BC-9E1D-472E-A50F-4405B6AE7C47}"/>
+              </a:ext>
+            </a:extLst>
+          </p:cNvPr>
+          <p:cNvGrpSpPr/>
+          <p:nvPr/>
+        </p:nvGrpSpPr>
+        <p:grpSpPr>
+          <a:xfrm>
+            <a:off x="1468842" y="2697175"/>
+            <a:ext cx="9254316" cy="3921416"/>
+            <a:chOff x="1468842" y="2697175"/>
+            <a:chExt cx="9254316" cy="3921416"/>
+          </a:xfrm>
+        </p:grpSpPr>
+        <p:sp>
+          <p:nvSpPr>
+            <p:cNvPr id="11" name="Shape 20">
+              <a:extLst>
+                <a:ext uri="{FF2B5EF4-FFF2-40B4-BE49-F238E27FC236}">
+                  <a16:creationId xmlns:a16="http://schemas.microsoft.com/office/drawing/2014/main" id="{EE383B37-7310-4563-9BC8-B173B5286B0D}"/>
+                </a:ext>
+              </a:extLst>
+            </p:cNvPr>
+            <p:cNvSpPr/>
+            <p:nvPr/>
+          </p:nvSpPr>
+          <p:spPr>
+            <a:xfrm>
+              <a:off x="1468842" y="2697175"/>
+              <a:ext cx="9254316" cy="3921416"/>
+            </a:xfrm>
+            <a:prstGeom prst="roundRect">
+              <a:avLst>
+                <a:gd name="adj" fmla="val 8081"/>
+              </a:avLst>
+            </a:prstGeom>
+            <a:solidFill>
+              <a:srgbClr val="1E1E1E"/>
+            </a:solidFill>
+            <a:ln>
+              <a:solidFill>
+                <a:srgbClr val="1E1E1E"/>
+              </a:solidFill>
+            </a:ln>
+          </p:spPr>
+          <p:txBody>
+            <a:bodyPr/>
+            <a:lstStyle/>
+            <a:p>
+              <a:endParaRPr lang="pt-BR" dirty="0"/>
+            </a:p>
+          </p:txBody>
+        </p:sp>
+        <p:sp>
+          <p:nvSpPr>
+            <p:cNvPr id="3" name="Retângulo 2">
+              <a:extLst>
+                <a:ext uri="{FF2B5EF4-FFF2-40B4-BE49-F238E27FC236}">
+                  <a16:creationId xmlns:a16="http://schemas.microsoft.com/office/drawing/2014/main" id="{AC84D1EB-AB27-41AB-8D7E-1ED14BD299A4}"/>
+                </a:ext>
+              </a:extLst>
+            </p:cNvPr>
+            <p:cNvSpPr/>
+            <p:nvPr/>
+          </p:nvSpPr>
+          <p:spPr>
+            <a:xfrm>
+              <a:off x="1866900" y="2888168"/>
+              <a:ext cx="8458200" cy="3539430"/>
+            </a:xfrm>
+            <a:prstGeom prst="rect">
+              <a:avLst/>
+            </a:prstGeom>
+          </p:spPr>
+          <p:txBody>
+            <a:bodyPr wrap="square">
+              <a:spAutoFit/>
+            </a:bodyPr>
+            <a:lstStyle/>
+            <a:p>
+              <a:r>
+                <a:rPr lang="pt-BR" sz="1600" dirty="0" err="1">
+                  <a:solidFill>
+                    <a:srgbClr val="569CD6"/>
+                  </a:solidFill>
+                  <a:latin typeface="Consolas" panose="020B0609020204030204" pitchFamily="49" charset="0"/>
+                </a:rPr>
+                <a:t>import</a:t>
+              </a:r>
+              <a:r>
+                <a:rPr lang="pt-BR" sz="1600" dirty="0">
+                  <a:solidFill>
+                    <a:srgbClr val="D4D4D4"/>
+                  </a:solidFill>
+                  <a:latin typeface="Consolas" panose="020B0609020204030204" pitchFamily="49" charset="0"/>
+                </a:rPr>
+                <a:t> </a:t>
+              </a:r>
+              <a:r>
+                <a:rPr lang="pt-BR" sz="1600" dirty="0" err="1">
+                  <a:solidFill>
+                    <a:srgbClr val="D4D4D4"/>
+                  </a:solidFill>
+                  <a:latin typeface="Consolas" panose="020B0609020204030204" pitchFamily="49" charset="0"/>
+                </a:rPr>
+                <a:t>api</a:t>
+              </a:r>
+              <a:r>
+                <a:rPr lang="pt-BR" sz="1600" dirty="0">
+                  <a:solidFill>
+                    <a:srgbClr val="D4D4D4"/>
+                  </a:solidFill>
+                  <a:latin typeface="Consolas" panose="020B0609020204030204" pitchFamily="49" charset="0"/>
+                </a:rPr>
+                <a:t> </a:t>
+              </a:r>
+              <a:r>
+                <a:rPr lang="pt-BR" sz="1600" dirty="0" err="1">
+                  <a:solidFill>
+                    <a:srgbClr val="569CD6"/>
+                  </a:solidFill>
+                  <a:latin typeface="Consolas" panose="020B0609020204030204" pitchFamily="49" charset="0"/>
+                </a:rPr>
+                <a:t>from</a:t>
+              </a:r>
+              <a:r>
+                <a:rPr lang="pt-BR" sz="1600" dirty="0">
+                  <a:solidFill>
+                    <a:srgbClr val="D4D4D4"/>
+                  </a:solidFill>
+                  <a:latin typeface="Consolas" panose="020B0609020204030204" pitchFamily="49" charset="0"/>
+                </a:rPr>
+                <a:t> </a:t>
+              </a:r>
+              <a:r>
+                <a:rPr lang="pt-BR" sz="1600" dirty="0">
+                  <a:solidFill>
+                    <a:srgbClr val="CE9178"/>
+                  </a:solidFill>
+                  <a:latin typeface="Consolas" panose="020B0609020204030204" pitchFamily="49" charset="0"/>
+                </a:rPr>
+                <a:t>"./api.js"</a:t>
+              </a:r>
+              <a:endParaRPr lang="pt-BR" sz="1600" dirty="0">
+                <a:solidFill>
+                  <a:srgbClr val="D4D4D4"/>
+                </a:solidFill>
+                <a:latin typeface="Consolas" panose="020B0609020204030204" pitchFamily="49" charset="0"/>
+              </a:endParaRPr>
+            </a:p>
+            <a:p>
+              <a:r>
+                <a:rPr lang="pt-BR" sz="1600" dirty="0" err="1">
+                  <a:solidFill>
+                    <a:srgbClr val="569CD6"/>
+                  </a:solidFill>
+                  <a:latin typeface="Consolas" panose="020B0609020204030204" pitchFamily="49" charset="0"/>
+                </a:rPr>
+                <a:t>const</a:t>
+              </a:r>
+              <a:r>
+                <a:rPr lang="pt-BR" sz="1600" dirty="0">
+                  <a:solidFill>
+                    <a:srgbClr val="D4D4D4"/>
+                  </a:solidFill>
+                  <a:latin typeface="Consolas" panose="020B0609020204030204" pitchFamily="49" charset="0"/>
+                </a:rPr>
+                <a:t> consulta = {</a:t>
+              </a:r>
+            </a:p>
+            <a:p>
+              <a:r>
+                <a:rPr lang="pt-BR" sz="1600" dirty="0">
+                  <a:solidFill>
+                    <a:srgbClr val="D4D4D4"/>
+                  </a:solidFill>
+                  <a:latin typeface="Consolas" panose="020B0609020204030204" pitchFamily="49" charset="0"/>
+                </a:rPr>
+                <a:t>    </a:t>
+              </a:r>
+              <a:r>
+                <a:rPr lang="pt-BR" sz="1600" dirty="0" err="1">
+                  <a:solidFill>
+                    <a:srgbClr val="569CD6"/>
+                  </a:solidFill>
+                  <a:latin typeface="Consolas" panose="020B0609020204030204" pitchFamily="49" charset="0"/>
+                </a:rPr>
+                <a:t>async</a:t>
+              </a:r>
+              <a:r>
+                <a:rPr lang="pt-BR" sz="1600" dirty="0">
+                  <a:solidFill>
+                    <a:srgbClr val="D4D4D4"/>
+                  </a:solidFill>
+                  <a:latin typeface="Consolas" panose="020B0609020204030204" pitchFamily="49" charset="0"/>
+                </a:rPr>
+                <a:t> </a:t>
+              </a:r>
+              <a:r>
+                <a:rPr lang="pt-BR" sz="1600" dirty="0" err="1">
+                  <a:solidFill>
+                    <a:srgbClr val="D4D4D4"/>
+                  </a:solidFill>
+                  <a:latin typeface="Consolas" panose="020B0609020204030204" pitchFamily="49" charset="0"/>
+                </a:rPr>
+                <a:t>mostrarProdutos</a:t>
+              </a:r>
+              <a:r>
+                <a:rPr lang="pt-BR" sz="1600" dirty="0">
+                  <a:solidFill>
+                    <a:srgbClr val="D4D4D4"/>
+                  </a:solidFill>
+                  <a:latin typeface="Consolas" panose="020B0609020204030204" pitchFamily="49" charset="0"/>
+                </a:rPr>
+                <a:t>() {</a:t>
+              </a:r>
+            </a:p>
+            <a:p>
+              <a:r>
+                <a:rPr lang="pt-BR" sz="1600" dirty="0">
+                  <a:solidFill>
+                    <a:srgbClr val="D4D4D4"/>
+                  </a:solidFill>
+                  <a:latin typeface="Consolas" panose="020B0609020204030204" pitchFamily="49" charset="0"/>
+                </a:rPr>
+                <a:t>        </a:t>
+              </a:r>
+              <a:r>
+                <a:rPr lang="pt-BR" sz="1600" dirty="0" err="1">
+                  <a:solidFill>
+                    <a:srgbClr val="569CD6"/>
+                  </a:solidFill>
+                  <a:latin typeface="Consolas" panose="020B0609020204030204" pitchFamily="49" charset="0"/>
+                </a:rPr>
+                <a:t>try</a:t>
+              </a:r>
+              <a:r>
+                <a:rPr lang="pt-BR" sz="1600" dirty="0">
+                  <a:solidFill>
+                    <a:srgbClr val="D4D4D4"/>
+                  </a:solidFill>
+                  <a:latin typeface="Consolas" panose="020B0609020204030204" pitchFamily="49" charset="0"/>
+                </a:rPr>
+                <a:t> {</a:t>
+              </a:r>
+            </a:p>
+            <a:p>
+              <a:r>
+                <a:rPr lang="pt-BR" sz="1600" dirty="0">
+                  <a:solidFill>
+                    <a:srgbClr val="D4D4D4"/>
+                  </a:solidFill>
+                  <a:latin typeface="Consolas" panose="020B0609020204030204" pitchFamily="49" charset="0"/>
+                </a:rPr>
+                <a:t>            </a:t>
+              </a:r>
+              <a:r>
+                <a:rPr lang="pt-BR" sz="1600" dirty="0" err="1">
+                  <a:solidFill>
+                    <a:srgbClr val="569CD6"/>
+                  </a:solidFill>
+                  <a:latin typeface="Consolas" panose="020B0609020204030204" pitchFamily="49" charset="0"/>
+                </a:rPr>
+                <a:t>const</a:t>
+              </a:r>
+              <a:r>
+                <a:rPr lang="pt-BR" sz="1600" dirty="0">
+                  <a:solidFill>
+                    <a:srgbClr val="D4D4D4"/>
+                  </a:solidFill>
+                  <a:latin typeface="Consolas" panose="020B0609020204030204" pitchFamily="49" charset="0"/>
+                </a:rPr>
+                <a:t> produtos = </a:t>
+              </a:r>
+              <a:r>
+                <a:rPr lang="pt-BR" sz="1600" dirty="0" err="1">
+                  <a:solidFill>
+                    <a:srgbClr val="569CD6"/>
+                  </a:solidFill>
+                  <a:latin typeface="Consolas" panose="020B0609020204030204" pitchFamily="49" charset="0"/>
+                </a:rPr>
+                <a:t>await</a:t>
+              </a:r>
+              <a:r>
+                <a:rPr lang="pt-BR" sz="1600" dirty="0">
+                  <a:solidFill>
+                    <a:srgbClr val="D4D4D4"/>
+                  </a:solidFill>
+                  <a:latin typeface="Consolas" panose="020B0609020204030204" pitchFamily="49" charset="0"/>
+                </a:rPr>
+                <a:t> </a:t>
+              </a:r>
+              <a:r>
+                <a:rPr lang="pt-BR" sz="1600" dirty="0" err="1">
+                  <a:solidFill>
+                    <a:srgbClr val="D4D4D4"/>
+                  </a:solidFill>
+                  <a:latin typeface="Consolas" panose="020B0609020204030204" pitchFamily="49" charset="0"/>
+                </a:rPr>
+                <a:t>api.buscarProdutos</a:t>
+              </a:r>
+              <a:r>
+                <a:rPr lang="pt-BR" sz="1600" dirty="0">
+                  <a:solidFill>
+                    <a:srgbClr val="D4D4D4"/>
+                  </a:solidFill>
+                  <a:latin typeface="Consolas" panose="020B0609020204030204" pitchFamily="49" charset="0"/>
+                </a:rPr>
+                <a:t>()</a:t>
+              </a:r>
+            </a:p>
+            <a:p>
+              <a:r>
+                <a:rPr lang="pt-BR" sz="1600" dirty="0">
+                  <a:solidFill>
+                    <a:srgbClr val="D4D4D4"/>
+                  </a:solidFill>
+                  <a:latin typeface="Consolas" panose="020B0609020204030204" pitchFamily="49" charset="0"/>
+                </a:rPr>
+                <a:t>            console.log(produtos)</a:t>
+              </a:r>
+            </a:p>
+            <a:p>
+              <a:br>
+                <a:rPr lang="pt-BR" sz="1600" dirty="0">
+                  <a:solidFill>
+                    <a:srgbClr val="D4D4D4"/>
+                  </a:solidFill>
+                  <a:latin typeface="Consolas" panose="020B0609020204030204" pitchFamily="49" charset="0"/>
+                </a:rPr>
+              </a:br>
+              <a:r>
+                <a:rPr lang="pt-BR" sz="1600" dirty="0">
+                  <a:solidFill>
+                    <a:srgbClr val="D4D4D4"/>
+                  </a:solidFill>
+                  <a:latin typeface="Consolas" panose="020B0609020204030204" pitchFamily="49" charset="0"/>
+                </a:rPr>
+                <a:t>        } </a:t>
+              </a:r>
+              <a:r>
+                <a:rPr lang="pt-BR" sz="1600" dirty="0">
+                  <a:solidFill>
+                    <a:srgbClr val="569CD6"/>
+                  </a:solidFill>
+                  <a:latin typeface="Consolas" panose="020B0609020204030204" pitchFamily="49" charset="0"/>
+                </a:rPr>
+                <a:t>catch</a:t>
+              </a:r>
+              <a:r>
+                <a:rPr lang="pt-BR" sz="1600" dirty="0">
+                  <a:solidFill>
+                    <a:srgbClr val="D4D4D4"/>
+                  </a:solidFill>
+                  <a:latin typeface="Consolas" panose="020B0609020204030204" pitchFamily="49" charset="0"/>
+                </a:rPr>
+                <a:t> (</a:t>
+              </a:r>
+              <a:r>
+                <a:rPr lang="pt-BR" sz="1600" dirty="0" err="1">
+                  <a:solidFill>
+                    <a:srgbClr val="D4D4D4"/>
+                  </a:solidFill>
+                  <a:latin typeface="Consolas" panose="020B0609020204030204" pitchFamily="49" charset="0"/>
+                </a:rPr>
+                <a:t>error</a:t>
+              </a:r>
+              <a:r>
+                <a:rPr lang="pt-BR" sz="1600" dirty="0">
+                  <a:solidFill>
+                    <a:srgbClr val="D4D4D4"/>
+                  </a:solidFill>
+                  <a:latin typeface="Consolas" panose="020B0609020204030204" pitchFamily="49" charset="0"/>
+                </a:rPr>
+                <a:t>) {</a:t>
+              </a:r>
+            </a:p>
+            <a:p>
+              <a:r>
+                <a:rPr lang="pt-BR" sz="1600" dirty="0">
+                  <a:solidFill>
+                    <a:srgbClr val="D4D4D4"/>
+                  </a:solidFill>
+                  <a:latin typeface="Consolas" panose="020B0609020204030204" pitchFamily="49" charset="0"/>
+                </a:rPr>
+                <a:t>            </a:t>
+              </a:r>
+              <a:r>
+                <a:rPr lang="pt-BR" sz="1600" dirty="0" err="1">
+                  <a:solidFill>
+                    <a:srgbClr val="D4D4D4"/>
+                  </a:solidFill>
+                  <a:latin typeface="Consolas" panose="020B0609020204030204" pitchFamily="49" charset="0"/>
+                </a:rPr>
+                <a:t>console.error</a:t>
+              </a:r>
+              <a:r>
+                <a:rPr lang="pt-BR" sz="1600" dirty="0">
+                  <a:solidFill>
+                    <a:srgbClr val="D4D4D4"/>
+                  </a:solidFill>
+                  <a:latin typeface="Consolas" panose="020B0609020204030204" pitchFamily="49" charset="0"/>
+                </a:rPr>
+                <a:t>(</a:t>
+              </a:r>
+              <a:r>
+                <a:rPr lang="pt-BR" sz="1600" dirty="0" err="1">
+                  <a:solidFill>
+                    <a:srgbClr val="D4D4D4"/>
+                  </a:solidFill>
+                  <a:latin typeface="Consolas" panose="020B0609020204030204" pitchFamily="49" charset="0"/>
+                </a:rPr>
+                <a:t>error</a:t>
+              </a:r>
+              <a:r>
+                <a:rPr lang="pt-BR" sz="1600" dirty="0">
+                  <a:solidFill>
+                    <a:srgbClr val="D4D4D4"/>
+                  </a:solidFill>
+                  <a:latin typeface="Consolas" panose="020B0609020204030204" pitchFamily="49" charset="0"/>
+                </a:rPr>
+                <a:t>)</a:t>
+              </a:r>
+            </a:p>
+            <a:p>
+              <a:r>
+                <a:rPr lang="pt-BR" sz="1600" dirty="0">
+                  <a:solidFill>
+                    <a:srgbClr val="D4D4D4"/>
+                  </a:solidFill>
+                  <a:latin typeface="Consolas" panose="020B0609020204030204" pitchFamily="49" charset="0"/>
+                </a:rPr>
+                <a:t>        }</a:t>
+              </a:r>
+            </a:p>
+            <a:p>
+              <a:r>
+                <a:rPr lang="pt-BR" sz="1600" dirty="0">
+                  <a:solidFill>
+                    <a:srgbClr val="D4D4D4"/>
+                  </a:solidFill>
+                  <a:latin typeface="Consolas" panose="020B0609020204030204" pitchFamily="49" charset="0"/>
+                </a:rPr>
+                <a:t>    }</a:t>
+              </a:r>
+            </a:p>
+            <a:p>
+              <a:r>
+                <a:rPr lang="pt-BR" sz="1600" dirty="0">
+                  <a:solidFill>
+                    <a:srgbClr val="D4D4D4"/>
+                  </a:solidFill>
+                  <a:latin typeface="Consolas" panose="020B0609020204030204" pitchFamily="49" charset="0"/>
+                </a:rPr>
+                <a:t>}</a:t>
+              </a:r>
+            </a:p>
+            <a:p>
+              <a:endParaRPr lang="pt-BR" sz="1600" dirty="0">
+                <a:solidFill>
+                  <a:srgbClr val="D4D4D4"/>
+                </a:solidFill>
+                <a:latin typeface="Consolas" panose="020B0609020204030204" pitchFamily="49" charset="0"/>
+              </a:endParaRPr>
+            </a:p>
+            <a:p>
+              <a:r>
+                <a:rPr lang="pt-BR" sz="1600" dirty="0" err="1">
+                  <a:solidFill>
+                    <a:srgbClr val="D4D4D4"/>
+                  </a:solidFill>
+                  <a:latin typeface="Consolas" panose="020B0609020204030204" pitchFamily="49" charset="0"/>
+                </a:rPr>
+                <a:t>consulta.mostrarProdutos</a:t>
+              </a:r>
+              <a:r>
+                <a:rPr lang="pt-BR" sz="1600" dirty="0">
+                  <a:solidFill>
+                    <a:srgbClr val="D4D4D4"/>
+                  </a:solidFill>
+                  <a:latin typeface="Consolas" panose="020B0609020204030204" pitchFamily="49" charset="0"/>
+                </a:rPr>
+                <a:t>()</a:t>
+              </a:r>
+            </a:p>
+          </p:txBody>
+        </p:sp>
+      </p:grpSp>
+    </p:spTree>
+    <p:extLst>
+      <p:ext uri="{BB962C8B-B14F-4D97-AF65-F5344CB8AC3E}">
+        <p14:creationId xmlns:p14="http://schemas.microsoft.com/office/powerpoint/2010/main" val="1827656758"/>
+      </p:ext>
+    </p:extLst>
+  </p:cSld>
+  <p:clrMapOvr>
+    <a:masterClrMapping/>
+  </p:clrMapOvr>
+</p:sld>
+</file>
+
+<file path=ppt/slides/slide19.xml><?xml version="1.0" encoding="utf-8"?>
+<p:sld xmlns:a="http://schemas.openxmlformats.org/drawingml/2006/main" xmlns:r="http://schemas.openxmlformats.org/officeDocument/2006/relationships" xmlns:p="http://schemas.openxmlformats.org/presentationml/2006/main">
+  <p:cSld>
+    <p:spTree>
+      <p:nvGrpSpPr>
+        <p:cNvPr id="1" name=""/>
+        <p:cNvGrpSpPr/>
+        <p:nvPr/>
+      </p:nvGrpSpPr>
+      <p:grpSpPr>
+        <a:xfrm>
+          <a:off x="0" y="0"/>
+          <a:ext cx="0" cy="0"/>
+          <a:chOff x="0" y="0"/>
+          <a:chExt cx="0" cy="0"/>
+        </a:xfrm>
+      </p:grpSpPr>
+      <p:sp>
+        <p:nvSpPr>
+          <p:cNvPr id="2" name="Título 1">
+            <a:extLst>
+              <a:ext uri="{FF2B5EF4-FFF2-40B4-BE49-F238E27FC236}">
+                <a16:creationId xmlns:a16="http://schemas.microsoft.com/office/drawing/2014/main" id="{50AED99B-FCD9-43F1-B948-D7213C6416F7}"/>
+              </a:ext>
+            </a:extLst>
+          </p:cNvPr>
+          <p:cNvSpPr>
+            <a:spLocks noGrp="1"/>
+          </p:cNvSpPr>
+          <p:nvPr>
+            <p:ph type="title"/>
+          </p:nvPr>
+        </p:nvSpPr>
+        <p:spPr/>
+        <p:txBody>
+          <a:bodyPr/>
+          <a:lstStyle/>
+          <a:p>
+            <a:r>
+              <a:rPr lang="pt-BR" dirty="0"/>
+              <a:t>Criando o Método GET no nosso programa</a:t>
+            </a:r>
+          </a:p>
+        </p:txBody>
+      </p:sp>
+      <p:sp>
+        <p:nvSpPr>
+          <p:cNvPr id="3" name="Espaço Reservado para Conteúdo 2">
+            <a:extLst>
+              <a:ext uri="{FF2B5EF4-FFF2-40B4-BE49-F238E27FC236}">
+                <a16:creationId xmlns:a16="http://schemas.microsoft.com/office/drawing/2014/main" id="{1686890E-9B9B-48A3-A84C-A9801F8D27BF}"/>
+              </a:ext>
+            </a:extLst>
+          </p:cNvPr>
+          <p:cNvSpPr>
+            <a:spLocks noGrp="1"/>
+          </p:cNvSpPr>
+          <p:nvPr>
+            <p:ph idx="1"/>
+          </p:nvPr>
+        </p:nvSpPr>
+        <p:spPr>
+          <a:xfrm>
+            <a:off x="592347" y="1651000"/>
+            <a:ext cx="11007306" cy="643467"/>
+          </a:xfrm>
+        </p:spPr>
+        <p:txBody>
+          <a:bodyPr/>
+          <a:lstStyle/>
+          <a:p>
+            <a:r>
+              <a:rPr lang="pt-BR" dirty="0"/>
+              <a:t>Por fim adicione o seguinte comando para o </a:t>
+            </a:r>
+            <a:r>
+              <a:rPr lang="pt-BR" dirty="0" err="1"/>
+              <a:t>html</a:t>
+            </a:r>
+            <a:r>
+              <a:rPr lang="pt-BR" dirty="0"/>
+              <a:t> chamar o arquivo consultarAPI.js</a:t>
+            </a:r>
+          </a:p>
+        </p:txBody>
+      </p:sp>
+      <p:grpSp>
+        <p:nvGrpSpPr>
+          <p:cNvPr id="6" name="Agrupar 5">
+            <a:extLst>
+              <a:ext uri="{FF2B5EF4-FFF2-40B4-BE49-F238E27FC236}">
+                <a16:creationId xmlns:a16="http://schemas.microsoft.com/office/drawing/2014/main" id="{39122735-1407-4993-A2E1-FD2AC2764AE6}"/>
+              </a:ext>
+            </a:extLst>
+          </p:cNvPr>
+          <p:cNvGrpSpPr/>
+          <p:nvPr/>
+        </p:nvGrpSpPr>
+        <p:grpSpPr>
+          <a:xfrm>
+            <a:off x="1468842" y="2714108"/>
+            <a:ext cx="9254316" cy="2602959"/>
+            <a:chOff x="1533162" y="2409308"/>
+            <a:chExt cx="9254316" cy="2602959"/>
+          </a:xfrm>
+        </p:grpSpPr>
+        <p:sp>
+          <p:nvSpPr>
+            <p:cNvPr id="5" name="Shape 20">
+              <a:extLst>
+                <a:ext uri="{FF2B5EF4-FFF2-40B4-BE49-F238E27FC236}">
+                  <a16:creationId xmlns:a16="http://schemas.microsoft.com/office/drawing/2014/main" id="{65179D05-B3F6-44E6-B72A-98D48F0DA71E}"/>
+                </a:ext>
+              </a:extLst>
+            </p:cNvPr>
+            <p:cNvSpPr/>
+            <p:nvPr/>
+          </p:nvSpPr>
+          <p:spPr>
+            <a:xfrm>
+              <a:off x="1533162" y="2409308"/>
+              <a:ext cx="9254316" cy="2602959"/>
+            </a:xfrm>
+            <a:prstGeom prst="roundRect">
+              <a:avLst>
+                <a:gd name="adj" fmla="val 8081"/>
+              </a:avLst>
+            </a:prstGeom>
+            <a:solidFill>
+              <a:srgbClr val="1E1E1E"/>
+            </a:solidFill>
+            <a:ln>
+              <a:solidFill>
+                <a:srgbClr val="1E1E1E"/>
+              </a:solidFill>
+            </a:ln>
+          </p:spPr>
+          <p:txBody>
+            <a:bodyPr/>
+            <a:lstStyle/>
+            <a:p>
+              <a:endParaRPr lang="pt-BR" dirty="0"/>
+            </a:p>
+          </p:txBody>
+        </p:sp>
+        <p:sp>
+          <p:nvSpPr>
+            <p:cNvPr id="4" name="Retângulo 3">
+              <a:extLst>
+                <a:ext uri="{FF2B5EF4-FFF2-40B4-BE49-F238E27FC236}">
+                  <a16:creationId xmlns:a16="http://schemas.microsoft.com/office/drawing/2014/main" id="{6CBD0A4E-90F1-4639-877E-3A27F5E69A51}"/>
+                </a:ext>
+              </a:extLst>
+            </p:cNvPr>
+            <p:cNvSpPr/>
+            <p:nvPr/>
+          </p:nvSpPr>
+          <p:spPr>
+            <a:xfrm>
+              <a:off x="1728841" y="2695125"/>
+              <a:ext cx="8862958" cy="2031325"/>
+            </a:xfrm>
+            <a:prstGeom prst="rect">
+              <a:avLst/>
+            </a:prstGeom>
+          </p:spPr>
+          <p:txBody>
+            <a:bodyPr wrap="square">
+              <a:spAutoFit/>
+            </a:bodyPr>
+            <a:lstStyle/>
+            <a:p>
+              <a:r>
+                <a:rPr lang="pt-BR" dirty="0">
+                  <a:solidFill>
+                    <a:srgbClr val="808080"/>
+                  </a:solidFill>
+                  <a:latin typeface="Consolas" panose="020B0609020204030204" pitchFamily="49" charset="0"/>
+                </a:rPr>
+                <a:t>&lt;</a:t>
+              </a:r>
+              <a:r>
+                <a:rPr lang="pt-BR" dirty="0" err="1">
+                  <a:solidFill>
+                    <a:srgbClr val="569CD6"/>
+                  </a:solidFill>
+                  <a:latin typeface="Consolas" panose="020B0609020204030204" pitchFamily="49" charset="0"/>
+                </a:rPr>
+                <a:t>body</a:t>
+              </a:r>
+              <a:r>
+                <a:rPr lang="pt-BR" dirty="0">
+                  <a:solidFill>
+                    <a:srgbClr val="808080"/>
+                  </a:solidFill>
+                  <a:latin typeface="Consolas" panose="020B0609020204030204" pitchFamily="49" charset="0"/>
+                </a:rPr>
+                <a:t>&gt;</a:t>
+              </a:r>
+              <a:endParaRPr lang="pt-BR" dirty="0">
+                <a:solidFill>
+                  <a:srgbClr val="D4D4D4"/>
+                </a:solidFill>
+                <a:latin typeface="Consolas" panose="020B0609020204030204" pitchFamily="49" charset="0"/>
+              </a:endParaRPr>
+            </a:p>
+            <a:p>
+              <a:br>
+                <a:rPr lang="pt-BR" dirty="0">
+                  <a:solidFill>
+                    <a:srgbClr val="D4D4D4"/>
+                  </a:solidFill>
+                  <a:latin typeface="Consolas" panose="020B0609020204030204" pitchFamily="49" charset="0"/>
+                </a:rPr>
+              </a:br>
+              <a:r>
+                <a:rPr lang="pt-BR" dirty="0">
+                  <a:solidFill>
+                    <a:srgbClr val="D4D4D4"/>
+                  </a:solidFill>
+                  <a:latin typeface="Consolas" panose="020B0609020204030204" pitchFamily="49" charset="0"/>
+                </a:rPr>
+                <a:t>    </a:t>
+              </a:r>
+              <a:r>
+                <a:rPr lang="pt-BR" dirty="0">
+                  <a:solidFill>
+                    <a:srgbClr val="808080"/>
+                  </a:solidFill>
+                  <a:latin typeface="Consolas" panose="020B0609020204030204" pitchFamily="49" charset="0"/>
+                </a:rPr>
+                <a:t>&lt;</a:t>
+              </a:r>
+              <a:r>
+                <a:rPr lang="pt-BR" dirty="0">
+                  <a:solidFill>
+                    <a:srgbClr val="569CD6"/>
+                  </a:solidFill>
+                  <a:latin typeface="Consolas" panose="020B0609020204030204" pitchFamily="49" charset="0"/>
+                </a:rPr>
+                <a:t>script</a:t>
+              </a:r>
+              <a:r>
+                <a:rPr lang="pt-BR" dirty="0">
+                  <a:solidFill>
+                    <a:srgbClr val="D4D4D4"/>
+                  </a:solidFill>
+                  <a:latin typeface="Consolas" panose="020B0609020204030204" pitchFamily="49" charset="0"/>
+                </a:rPr>
+                <a:t> </a:t>
+              </a:r>
+              <a:r>
+                <a:rPr lang="pt-BR" dirty="0" err="1">
+                  <a:solidFill>
+                    <a:srgbClr val="9CDCFE"/>
+                  </a:solidFill>
+                  <a:latin typeface="Consolas" panose="020B0609020204030204" pitchFamily="49" charset="0"/>
+                </a:rPr>
+                <a:t>type</a:t>
+              </a:r>
+              <a:r>
+                <a:rPr lang="pt-BR" dirty="0">
+                  <a:solidFill>
+                    <a:srgbClr val="D4D4D4"/>
+                  </a:solidFill>
+                  <a:latin typeface="Consolas" panose="020B0609020204030204" pitchFamily="49" charset="0"/>
+                </a:rPr>
+                <a:t>=</a:t>
+              </a:r>
+              <a:r>
+                <a:rPr lang="pt-BR" dirty="0">
+                  <a:solidFill>
+                    <a:srgbClr val="CE9178"/>
+                  </a:solidFill>
+                  <a:latin typeface="Consolas" panose="020B0609020204030204" pitchFamily="49" charset="0"/>
+                </a:rPr>
+                <a:t>"module"</a:t>
+              </a:r>
+              <a:r>
+                <a:rPr lang="pt-BR" dirty="0">
+                  <a:solidFill>
+                    <a:srgbClr val="D4D4D4"/>
+                  </a:solidFill>
+                  <a:latin typeface="Consolas" panose="020B0609020204030204" pitchFamily="49" charset="0"/>
+                </a:rPr>
+                <a:t> </a:t>
+              </a:r>
+              <a:r>
+                <a:rPr lang="pt-BR" dirty="0" err="1">
+                  <a:solidFill>
+                    <a:srgbClr val="9CDCFE"/>
+                  </a:solidFill>
+                  <a:latin typeface="Consolas" panose="020B0609020204030204" pitchFamily="49" charset="0"/>
+                </a:rPr>
+                <a:t>src</a:t>
+              </a:r>
+              <a:r>
+                <a:rPr lang="pt-BR" dirty="0">
+                  <a:solidFill>
+                    <a:srgbClr val="D4D4D4"/>
+                  </a:solidFill>
+                  <a:latin typeface="Consolas" panose="020B0609020204030204" pitchFamily="49" charset="0"/>
+                </a:rPr>
+                <a:t>=</a:t>
+              </a:r>
+              <a:r>
+                <a:rPr lang="pt-BR" dirty="0">
+                  <a:solidFill>
+                    <a:srgbClr val="CE9178"/>
+                  </a:solidFill>
+                  <a:latin typeface="Consolas" panose="020B0609020204030204" pitchFamily="49" charset="0"/>
+                </a:rPr>
+                <a:t>"</a:t>
+              </a:r>
+              <a:r>
+                <a:rPr lang="pt-BR" dirty="0" err="1">
+                  <a:solidFill>
+                    <a:srgbClr val="CE9178"/>
+                  </a:solidFill>
+                  <a:latin typeface="Consolas" panose="020B0609020204030204" pitchFamily="49" charset="0"/>
+                </a:rPr>
+                <a:t>js</a:t>
+              </a:r>
+              <a:r>
+                <a:rPr lang="pt-BR" dirty="0">
+                  <a:solidFill>
+                    <a:srgbClr val="CE9178"/>
+                  </a:solidFill>
+                  <a:latin typeface="Consolas" panose="020B0609020204030204" pitchFamily="49" charset="0"/>
+                </a:rPr>
+                <a:t>/consultasAPI.js"</a:t>
+              </a:r>
+              <a:r>
+                <a:rPr lang="pt-BR" dirty="0">
+                  <a:solidFill>
+                    <a:srgbClr val="808080"/>
+                  </a:solidFill>
+                  <a:latin typeface="Consolas" panose="020B0609020204030204" pitchFamily="49" charset="0"/>
+                </a:rPr>
+                <a:t>&gt;&lt;/</a:t>
+              </a:r>
+              <a:r>
+                <a:rPr lang="pt-BR" dirty="0">
+                  <a:solidFill>
+                    <a:srgbClr val="569CD6"/>
+                  </a:solidFill>
+                  <a:latin typeface="Consolas" panose="020B0609020204030204" pitchFamily="49" charset="0"/>
+                </a:rPr>
+                <a:t>script</a:t>
+              </a:r>
+              <a:r>
+                <a:rPr lang="pt-BR" dirty="0">
+                  <a:solidFill>
+                    <a:srgbClr val="808080"/>
+                  </a:solidFill>
+                  <a:latin typeface="Consolas" panose="020B0609020204030204" pitchFamily="49" charset="0"/>
+                </a:rPr>
+                <a:t>&gt;</a:t>
+              </a:r>
+              <a:endParaRPr lang="pt-BR" dirty="0">
+                <a:solidFill>
+                  <a:srgbClr val="D4D4D4"/>
+                </a:solidFill>
+                <a:latin typeface="Consolas" panose="020B0609020204030204" pitchFamily="49" charset="0"/>
+              </a:endParaRPr>
+            </a:p>
+            <a:p>
+              <a:r>
+                <a:rPr lang="pt-BR" dirty="0">
+                  <a:solidFill>
+                    <a:srgbClr val="808080"/>
+                  </a:solidFill>
+                  <a:latin typeface="Consolas" panose="020B0609020204030204" pitchFamily="49" charset="0"/>
+                </a:rPr>
+                <a:t>&lt;/</a:t>
+              </a:r>
+              <a:r>
+                <a:rPr lang="pt-BR" dirty="0" err="1">
+                  <a:solidFill>
+                    <a:srgbClr val="569CD6"/>
+                  </a:solidFill>
+                  <a:latin typeface="Consolas" panose="020B0609020204030204" pitchFamily="49" charset="0"/>
+                </a:rPr>
+                <a:t>body</a:t>
+              </a:r>
+              <a:r>
+                <a:rPr lang="pt-BR" dirty="0">
+                  <a:solidFill>
+                    <a:srgbClr val="808080"/>
+                  </a:solidFill>
+                  <a:latin typeface="Consolas" panose="020B0609020204030204" pitchFamily="49" charset="0"/>
+                </a:rPr>
+                <a:t>&gt;</a:t>
+              </a:r>
+              <a:endParaRPr lang="pt-BR" dirty="0">
+                <a:solidFill>
+                  <a:srgbClr val="D4D4D4"/>
+                </a:solidFill>
+                <a:latin typeface="Consolas" panose="020B0609020204030204" pitchFamily="49" charset="0"/>
+              </a:endParaRPr>
+            </a:p>
+            <a:p>
+              <a:br>
+                <a:rPr lang="pt-BR" dirty="0">
+                  <a:solidFill>
+                    <a:srgbClr val="D4D4D4"/>
+                  </a:solidFill>
+                  <a:latin typeface="Consolas" panose="020B0609020204030204" pitchFamily="49" charset="0"/>
+                </a:rPr>
+              </a:br>
+              <a:br>
+                <a:rPr lang="pt-BR" dirty="0">
+                  <a:solidFill>
+                    <a:srgbClr val="D4D4D4"/>
+                  </a:solidFill>
+                  <a:latin typeface="Consolas" panose="020B0609020204030204" pitchFamily="49" charset="0"/>
+                </a:rPr>
+              </a:br>
+              <a:r>
+                <a:rPr lang="pt-BR" dirty="0">
+                  <a:solidFill>
+                    <a:srgbClr val="808080"/>
+                  </a:solidFill>
+                  <a:latin typeface="Consolas" panose="020B0609020204030204" pitchFamily="49" charset="0"/>
+                </a:rPr>
+                <a:t>&lt;/</a:t>
+              </a:r>
+              <a:r>
+                <a:rPr lang="pt-BR" dirty="0" err="1">
+                  <a:solidFill>
+                    <a:srgbClr val="569CD6"/>
+                  </a:solidFill>
+                  <a:latin typeface="Consolas" panose="020B0609020204030204" pitchFamily="49" charset="0"/>
+                </a:rPr>
+                <a:t>html</a:t>
+              </a:r>
+              <a:r>
+                <a:rPr lang="pt-BR" dirty="0">
+                  <a:solidFill>
+                    <a:srgbClr val="808080"/>
+                  </a:solidFill>
+                  <a:latin typeface="Consolas" panose="020B0609020204030204" pitchFamily="49" charset="0"/>
+                </a:rPr>
+                <a:t>&gt;</a:t>
+              </a:r>
+              <a:endParaRPr lang="pt-BR" b="0" dirty="0">
+                <a:solidFill>
+                  <a:srgbClr val="D4D4D4"/>
+                </a:solidFill>
+                <a:effectLst/>
+                <a:latin typeface="Consolas" panose="020B0609020204030204" pitchFamily="49" charset="0"/>
+              </a:endParaRPr>
+            </a:p>
+          </p:txBody>
+        </p:sp>
+      </p:grpSp>
+    </p:spTree>
+    <p:extLst>
+      <p:ext uri="{BB962C8B-B14F-4D97-AF65-F5344CB8AC3E}">
+        <p14:creationId xmlns:p14="http://schemas.microsoft.com/office/powerpoint/2010/main" val="355905715"/>
+      </p:ext>
+    </p:extLst>
+  </p:cSld>
+  <p:clrMapOvr>
+    <a:masterClrMapping/>
+  </p:clrMapOvr>
+</p:sld>
+</file>
+
+<file path=ppt/slides/slide2.xml><?xml version="1.0" encoding="utf-8"?>
+<p:sld xmlns:a="http://schemas.openxmlformats.org/drawingml/2006/main" xmlns:r="http://schemas.openxmlformats.org/officeDocument/2006/relationships" xmlns:p="http://schemas.openxmlformats.org/presentationml/2006/main">
+  <p:cSld>
+    <p:spTree>
+      <p:nvGrpSpPr>
+        <p:cNvPr id="1" name=""/>
+        <p:cNvGrpSpPr/>
+        <p:nvPr/>
+      </p:nvGrpSpPr>
+      <p:grpSpPr>
+        <a:xfrm>
+          <a:off x="0" y="0"/>
+          <a:ext cx="0" cy="0"/>
+          <a:chOff x="0" y="0"/>
+          <a:chExt cx="0" cy="0"/>
+        </a:xfrm>
+      </p:grpSpPr>
+      <p:sp>
+        <p:nvSpPr>
+          <p:cNvPr id="2" name="Título 1">
+            <a:extLst>
+              <a:ext uri="{FF2B5EF4-FFF2-40B4-BE49-F238E27FC236}">
+                <a16:creationId xmlns:a16="http://schemas.microsoft.com/office/drawing/2014/main" id="{B3E63485-508B-C1C3-3D4B-A556E48947BE}"/>
+              </a:ext>
+            </a:extLst>
+          </p:cNvPr>
+          <p:cNvSpPr>
+            <a:spLocks noGrp="1"/>
+          </p:cNvSpPr>
+          <p:nvPr>
+            <p:ph type="title"/>
+          </p:nvPr>
+        </p:nvSpPr>
+        <p:spPr/>
+        <p:txBody>
+          <a:bodyPr/>
+          <a:lstStyle/>
+          <a:p>
+            <a:r>
+              <a:rPr lang="pt-BR" dirty="0"/>
+              <a:t>Como mostrar os equipamentos registrados</a:t>
+            </a:r>
+          </a:p>
+        </p:txBody>
+      </p:sp>
+      <p:grpSp>
+        <p:nvGrpSpPr>
+          <p:cNvPr id="10" name="Agrupar 9">
+            <a:extLst>
+              <a:ext uri="{FF2B5EF4-FFF2-40B4-BE49-F238E27FC236}">
+                <a16:creationId xmlns:a16="http://schemas.microsoft.com/office/drawing/2014/main" id="{39FA6042-1511-7572-4085-62A1CE180370}"/>
+              </a:ext>
+            </a:extLst>
+          </p:cNvPr>
+          <p:cNvGrpSpPr/>
+          <p:nvPr/>
+        </p:nvGrpSpPr>
+        <p:grpSpPr>
+          <a:xfrm>
+            <a:off x="749185" y="2320507"/>
+            <a:ext cx="5139781" cy="3579557"/>
+            <a:chOff x="499019" y="2135911"/>
+            <a:chExt cx="4408828" cy="3105805"/>
+          </a:xfrm>
+        </p:grpSpPr>
+        <p:pic>
+          <p:nvPicPr>
+            <p:cNvPr id="7" name="Imagem 6">
+              <a:extLst>
+                <a:ext uri="{FF2B5EF4-FFF2-40B4-BE49-F238E27FC236}">
+                  <a16:creationId xmlns:a16="http://schemas.microsoft.com/office/drawing/2014/main" id="{7FB28246-6AAC-BB49-8A97-48DB955BAE45}"/>
+                </a:ext>
+              </a:extLst>
+            </p:cNvPr>
+            <p:cNvPicPr>
+              <a:picLocks noChangeAspect="1"/>
+            </p:cNvPicPr>
+            <p:nvPr/>
+          </p:nvPicPr>
+          <p:blipFill>
+            <a:blip r:embed="rId2"/>
+            <a:stretch>
+              <a:fillRect/>
+            </a:stretch>
+          </p:blipFill>
+          <p:spPr>
+            <a:xfrm>
+              <a:off x="499019" y="2135911"/>
+              <a:ext cx="3240000" cy="1752245"/>
+            </a:xfrm>
+            <a:prstGeom prst="rect">
+              <a:avLst/>
+            </a:prstGeom>
+          </p:spPr>
+        </p:pic>
+        <p:pic>
+          <p:nvPicPr>
+            <p:cNvPr id="5" name="Imagem 4">
+              <a:extLst>
+                <a:ext uri="{FF2B5EF4-FFF2-40B4-BE49-F238E27FC236}">
+                  <a16:creationId xmlns:a16="http://schemas.microsoft.com/office/drawing/2014/main" id="{C9DCCF41-6E4C-4CA0-7BE0-B7740FA1D3DF}"/>
+                </a:ext>
+              </a:extLst>
+            </p:cNvPr>
+            <p:cNvPicPr>
+              <a:picLocks noChangeAspect="1"/>
+            </p:cNvPicPr>
+            <p:nvPr/>
+          </p:nvPicPr>
+          <p:blipFill>
+            <a:blip r:embed="rId3"/>
+            <a:stretch>
+              <a:fillRect/>
+            </a:stretch>
+          </p:blipFill>
+          <p:spPr>
+            <a:xfrm>
+              <a:off x="1667847" y="3292934"/>
+              <a:ext cx="3240000" cy="1948782"/>
+            </a:xfrm>
+            <a:prstGeom prst="rect">
+              <a:avLst/>
+            </a:prstGeom>
+          </p:spPr>
+        </p:pic>
+      </p:grpSp>
+      <p:cxnSp>
+        <p:nvCxnSpPr>
+          <p:cNvPr id="9" name="Conector de Seta Reta 8">
+            <a:extLst>
+              <a:ext uri="{FF2B5EF4-FFF2-40B4-BE49-F238E27FC236}">
+                <a16:creationId xmlns:a16="http://schemas.microsoft.com/office/drawing/2014/main" id="{3E381279-5B1B-AEB3-F1F7-6FE4EF9399D2}"/>
+              </a:ext>
+            </a:extLst>
+          </p:cNvPr>
+          <p:cNvCxnSpPr>
+            <a:cxnSpLocks/>
+          </p:cNvCxnSpPr>
+          <p:nvPr/>
+        </p:nvCxnSpPr>
+        <p:spPr>
+          <a:xfrm>
+            <a:off x="6029864" y="3899139"/>
+            <a:ext cx="1187570" cy="0"/>
+          </a:xfrm>
+          <a:prstGeom prst="straightConnector1">
+            <a:avLst/>
+          </a:prstGeom>
+          <a:ln w="38100">
+            <a:solidFill>
+              <a:schemeClr val="tx1"/>
+            </a:solidFill>
+            <a:tailEnd type="triangle"/>
+          </a:ln>
+        </p:spPr>
+        <p:style>
+          <a:lnRef idx="1">
+            <a:schemeClr val="accent1"/>
+          </a:lnRef>
+          <a:fillRef idx="0">
+            <a:schemeClr val="accent1"/>
+          </a:fillRef>
+          <a:effectRef idx="0">
+            <a:schemeClr val="accent1"/>
+          </a:effectRef>
+          <a:fontRef idx="minor">
+            <a:schemeClr val="tx1"/>
+          </a:fontRef>
+        </p:style>
+      </p:cxnSp>
+    </p:spTree>
+    <p:extLst>
+      <p:ext uri="{BB962C8B-B14F-4D97-AF65-F5344CB8AC3E}">
+        <p14:creationId xmlns:p14="http://schemas.microsoft.com/office/powerpoint/2010/main" val="3736684106"/>
+      </p:ext>
+    </p:extLst>
+  </p:cSld>
+  <p:clrMapOvr>
+    <a:masterClrMapping/>
+  </p:clrMapOvr>
+</p:sld>
+</file>
+
+<file path=ppt/slides/slide20.xml><?xml version="1.0" encoding="utf-8"?>
+<p:sld xmlns:a="http://schemas.openxmlformats.org/drawingml/2006/main" xmlns:r="http://schemas.openxmlformats.org/officeDocument/2006/relationships" xmlns:p="http://schemas.openxmlformats.org/presentationml/2006/main">
+  <p:cSld>
+    <p:spTree>
+      <p:nvGrpSpPr>
+        <p:cNvPr id="1" name=""/>
+        <p:cNvGrpSpPr/>
+        <p:nvPr/>
+      </p:nvGrpSpPr>
+      <p:grpSpPr>
+        <a:xfrm>
+          <a:off x="0" y="0"/>
+          <a:ext cx="0" cy="0"/>
+          <a:chOff x="0" y="0"/>
+          <a:chExt cx="0" cy="0"/>
+        </a:xfrm>
+      </p:grpSpPr>
+      <p:sp>
+        <p:nvSpPr>
+          <p:cNvPr id="2" name="Título 1">
+            <a:extLst>
+              <a:ext uri="{FF2B5EF4-FFF2-40B4-BE49-F238E27FC236}">
+                <a16:creationId xmlns:a16="http://schemas.microsoft.com/office/drawing/2014/main" id="{AD50ADB3-678B-467F-ACD2-15286043C414}"/>
               </a:ext>
             </a:extLst>
           </p:cNvPr>
@@ -6430,7 +9387,7 @@
           <p:cNvPr id="3" name="Espaço Reservado para Conteúdo 2">
             <a:extLst>
               <a:ext uri="{FF2B5EF4-FFF2-40B4-BE49-F238E27FC236}">
-                <a16:creationId xmlns:a16="http://schemas.microsoft.com/office/drawing/2014/main" id="{BBF74573-13EC-13DB-6F02-C3B13A606DCD}"/>
+                <a16:creationId xmlns:a16="http://schemas.microsoft.com/office/drawing/2014/main" id="{6600FCB5-BDBF-48FD-B296-D9935A4ECEAA}"/>
               </a:ext>
             </a:extLst>
           </p:cNvPr>
@@ -6453,7 +9410,7 @@
     </p:spTree>
     <p:extLst>
       <p:ext uri="{BB962C8B-B14F-4D97-AF65-F5344CB8AC3E}">
-        <p14:creationId xmlns:p14="http://schemas.microsoft.com/office/powerpoint/2010/main" val="4141421439"/>
+        <p14:creationId xmlns:p14="http://schemas.microsoft.com/office/powerpoint/2010/main" val="3552506365"/>
       </p:ext>
     </p:extLst>
   </p:cSld>
@@ -6463,7 +9420,167 @@
 </p:sld>
 </file>
 
-<file path=ppt/slides/slide18.xml><?xml version="1.0" encoding="utf-8"?>
+<file path=ppt/slides/slide21.xml><?xml version="1.0" encoding="utf-8"?>
+<p:sld xmlns:a="http://schemas.openxmlformats.org/drawingml/2006/main" xmlns:r="http://schemas.openxmlformats.org/officeDocument/2006/relationships" xmlns:p="http://schemas.openxmlformats.org/presentationml/2006/main">
+  <p:cSld>
+    <p:spTree>
+      <p:nvGrpSpPr>
+        <p:cNvPr id="1" name=""/>
+        <p:cNvGrpSpPr/>
+        <p:nvPr/>
+      </p:nvGrpSpPr>
+      <p:grpSpPr>
+        <a:xfrm>
+          <a:off x="0" y="0"/>
+          <a:ext cx="0" cy="0"/>
+          <a:chOff x="0" y="0"/>
+          <a:chExt cx="0" cy="0"/>
+        </a:xfrm>
+      </p:grpSpPr>
+      <p:sp>
+        <p:nvSpPr>
+          <p:cNvPr id="2" name="Título 1">
+            <a:extLst>
+              <a:ext uri="{FF2B5EF4-FFF2-40B4-BE49-F238E27FC236}">
+                <a16:creationId xmlns:a16="http://schemas.microsoft.com/office/drawing/2014/main" id="{1DA6209E-44D6-4DB2-98AC-F412A8357553}"/>
+              </a:ext>
+            </a:extLst>
+          </p:cNvPr>
+          <p:cNvSpPr>
+            <a:spLocks noGrp="1"/>
+          </p:cNvSpPr>
+          <p:nvPr>
+            <p:ph type="title"/>
+          </p:nvPr>
+        </p:nvSpPr>
+        <p:spPr/>
+        <p:txBody>
+          <a:bodyPr/>
+          <a:lstStyle/>
+          <a:p>
+            <a:endParaRPr lang="pt-BR"/>
+          </a:p>
+        </p:txBody>
+      </p:sp>
+      <p:sp>
+        <p:nvSpPr>
+          <p:cNvPr id="3" name="Espaço Reservado para Conteúdo 2">
+            <a:extLst>
+              <a:ext uri="{FF2B5EF4-FFF2-40B4-BE49-F238E27FC236}">
+                <a16:creationId xmlns:a16="http://schemas.microsoft.com/office/drawing/2014/main" id="{93DC8050-0D3F-4BE1-B110-2D846246946F}"/>
+              </a:ext>
+            </a:extLst>
+          </p:cNvPr>
+          <p:cNvSpPr>
+            <a:spLocks noGrp="1"/>
+          </p:cNvSpPr>
+          <p:nvPr>
+            <p:ph idx="1"/>
+          </p:nvPr>
+        </p:nvSpPr>
+        <p:spPr/>
+        <p:txBody>
+          <a:bodyPr/>
+          <a:lstStyle/>
+          <a:p>
+            <a:endParaRPr lang="pt-BR"/>
+          </a:p>
+        </p:txBody>
+      </p:sp>
+    </p:spTree>
+    <p:extLst>
+      <p:ext uri="{BB962C8B-B14F-4D97-AF65-F5344CB8AC3E}">
+        <p14:creationId xmlns:p14="http://schemas.microsoft.com/office/powerpoint/2010/main" val="2205313656"/>
+      </p:ext>
+    </p:extLst>
+  </p:cSld>
+  <p:clrMapOvr>
+    <a:masterClrMapping/>
+  </p:clrMapOvr>
+</p:sld>
+</file>
+
+<file path=ppt/slides/slide22.xml><?xml version="1.0" encoding="utf-8"?>
+<p:sld xmlns:a="http://schemas.openxmlformats.org/drawingml/2006/main" xmlns:r="http://schemas.openxmlformats.org/officeDocument/2006/relationships" xmlns:p="http://schemas.openxmlformats.org/presentationml/2006/main">
+  <p:cSld>
+    <p:spTree>
+      <p:nvGrpSpPr>
+        <p:cNvPr id="1" name=""/>
+        <p:cNvGrpSpPr/>
+        <p:nvPr/>
+      </p:nvGrpSpPr>
+      <p:grpSpPr>
+        <a:xfrm>
+          <a:off x="0" y="0"/>
+          <a:ext cx="0" cy="0"/>
+          <a:chOff x="0" y="0"/>
+          <a:chExt cx="0" cy="0"/>
+        </a:xfrm>
+      </p:grpSpPr>
+      <p:sp>
+        <p:nvSpPr>
+          <p:cNvPr id="2" name="Título 1">
+            <a:extLst>
+              <a:ext uri="{FF2B5EF4-FFF2-40B4-BE49-F238E27FC236}">
+                <a16:creationId xmlns:a16="http://schemas.microsoft.com/office/drawing/2014/main" id="{867D346A-7931-4E6A-9DF2-1EDDA2BCB6F3}"/>
+              </a:ext>
+            </a:extLst>
+          </p:cNvPr>
+          <p:cNvSpPr>
+            <a:spLocks noGrp="1"/>
+          </p:cNvSpPr>
+          <p:nvPr>
+            <p:ph type="title"/>
+          </p:nvPr>
+        </p:nvSpPr>
+        <p:spPr/>
+        <p:txBody>
+          <a:bodyPr/>
+          <a:lstStyle/>
+          <a:p>
+            <a:endParaRPr lang="pt-BR"/>
+          </a:p>
+        </p:txBody>
+      </p:sp>
+      <p:sp>
+        <p:nvSpPr>
+          <p:cNvPr id="3" name="Espaço Reservado para Conteúdo 2">
+            <a:extLst>
+              <a:ext uri="{FF2B5EF4-FFF2-40B4-BE49-F238E27FC236}">
+                <a16:creationId xmlns:a16="http://schemas.microsoft.com/office/drawing/2014/main" id="{AF8F5E35-3249-4181-AAA2-D8E915A6A79C}"/>
+              </a:ext>
+            </a:extLst>
+          </p:cNvPr>
+          <p:cNvSpPr>
+            <a:spLocks noGrp="1"/>
+          </p:cNvSpPr>
+          <p:nvPr>
+            <p:ph idx="1"/>
+          </p:nvPr>
+        </p:nvSpPr>
+        <p:spPr/>
+        <p:txBody>
+          <a:bodyPr/>
+          <a:lstStyle/>
+          <a:p>
+            <a:endParaRPr lang="pt-BR"/>
+          </a:p>
+        </p:txBody>
+      </p:sp>
+    </p:spTree>
+    <p:extLst>
+      <p:ext uri="{BB962C8B-B14F-4D97-AF65-F5344CB8AC3E}">
+        <p14:creationId xmlns:p14="http://schemas.microsoft.com/office/powerpoint/2010/main" val="2066741149"/>
+      </p:ext>
+    </p:extLst>
+  </p:cSld>
+  <p:clrMapOvr>
+    <a:masterClrMapping/>
+  </p:clrMapOvr>
+</p:sld>
+</file>
+
+<file path=ppt/slides/slide23.xml><?xml version="1.0" encoding="utf-8"?>
 <p:sld xmlns:a="http://schemas.openxmlformats.org/drawingml/2006/main" xmlns:r="http://schemas.openxmlformats.org/officeDocument/2006/relationships" xmlns:p="http://schemas.openxmlformats.org/presentationml/2006/main">
   <p:cSld>
     <p:spTree>
@@ -6950,7 +10067,7 @@
 </p:sld>
 </file>
 
-<file path=ppt/slides/slide19.xml><?xml version="1.0" encoding="utf-8"?>
+<file path=ppt/slides/slide24.xml><?xml version="1.0" encoding="utf-8"?>
 <p:sld xmlns:a="http://schemas.openxmlformats.org/drawingml/2006/main" xmlns:r="http://schemas.openxmlformats.org/officeDocument/2006/relationships" xmlns:p="http://schemas.openxmlformats.org/presentationml/2006/main">
   <p:cSld>
     <p:spTree>
@@ -7636,190 +10753,7 @@
 </p:sld>
 </file>
 
-<file path=ppt/slides/slide2.xml><?xml version="1.0" encoding="utf-8"?>
-<p:sld xmlns:a="http://schemas.openxmlformats.org/drawingml/2006/main" xmlns:r="http://schemas.openxmlformats.org/officeDocument/2006/relationships" xmlns:p="http://schemas.openxmlformats.org/presentationml/2006/main">
-  <p:cSld>
-    <p:spTree>
-      <p:nvGrpSpPr>
-        <p:cNvPr id="1" name=""/>
-        <p:cNvGrpSpPr/>
-        <p:nvPr/>
-      </p:nvGrpSpPr>
-      <p:grpSpPr>
-        <a:xfrm>
-          <a:off x="0" y="0"/>
-          <a:ext cx="0" cy="0"/>
-          <a:chOff x="0" y="0"/>
-          <a:chExt cx="0" cy="0"/>
-        </a:xfrm>
-      </p:grpSpPr>
-      <p:sp>
-        <p:nvSpPr>
-          <p:cNvPr id="2" name="Título 1">
-            <a:extLst>
-              <a:ext uri="{FF2B5EF4-FFF2-40B4-BE49-F238E27FC236}">
-                <a16:creationId xmlns:a16="http://schemas.microsoft.com/office/drawing/2014/main" id="{B3E63485-508B-C1C3-3D4B-A556E48947BE}"/>
-              </a:ext>
-            </a:extLst>
-          </p:cNvPr>
-          <p:cNvSpPr>
-            <a:spLocks noGrp="1"/>
-          </p:cNvSpPr>
-          <p:nvPr>
-            <p:ph type="title"/>
-          </p:nvPr>
-        </p:nvSpPr>
-        <p:spPr/>
-        <p:txBody>
-          <a:bodyPr/>
-          <a:lstStyle/>
-          <a:p>
-            <a:r>
-              <a:rPr lang="pt-BR" dirty="0"/>
-              <a:t>Como mostrar os equipamentos registrados</a:t>
-            </a:r>
-          </a:p>
-        </p:txBody>
-      </p:sp>
-      <p:grpSp>
-        <p:nvGrpSpPr>
-          <p:cNvPr id="10" name="Agrupar 9">
-            <a:extLst>
-              <a:ext uri="{FF2B5EF4-FFF2-40B4-BE49-F238E27FC236}">
-                <a16:creationId xmlns:a16="http://schemas.microsoft.com/office/drawing/2014/main" id="{39FA6042-1511-7572-4085-62A1CE180370}"/>
-              </a:ext>
-            </a:extLst>
-          </p:cNvPr>
-          <p:cNvGrpSpPr/>
-          <p:nvPr/>
-        </p:nvGrpSpPr>
-        <p:grpSpPr>
-          <a:xfrm>
-            <a:off x="749185" y="2320507"/>
-            <a:ext cx="5139781" cy="3579557"/>
-            <a:chOff x="499019" y="2135911"/>
-            <a:chExt cx="4408828" cy="3105805"/>
-          </a:xfrm>
-        </p:grpSpPr>
-        <p:pic>
-          <p:nvPicPr>
-            <p:cNvPr id="7" name="Imagem 6">
-              <a:extLst>
-                <a:ext uri="{FF2B5EF4-FFF2-40B4-BE49-F238E27FC236}">
-                  <a16:creationId xmlns:a16="http://schemas.microsoft.com/office/drawing/2014/main" id="{7FB28246-6AAC-BB49-8A97-48DB955BAE45}"/>
-                </a:ext>
-              </a:extLst>
-            </p:cNvPr>
-            <p:cNvPicPr>
-              <a:picLocks noChangeAspect="1"/>
-            </p:cNvPicPr>
-            <p:nvPr/>
-          </p:nvPicPr>
-          <p:blipFill>
-            <a:blip r:embed="rId2"/>
-            <a:stretch>
-              <a:fillRect/>
-            </a:stretch>
-          </p:blipFill>
-          <p:spPr>
-            <a:xfrm>
-              <a:off x="499019" y="2135911"/>
-              <a:ext cx="3240000" cy="1752245"/>
-            </a:xfrm>
-            <a:prstGeom prst="rect">
-              <a:avLst/>
-            </a:prstGeom>
-          </p:spPr>
-        </p:pic>
-        <p:pic>
-          <p:nvPicPr>
-            <p:cNvPr id="5" name="Imagem 4">
-              <a:extLst>
-                <a:ext uri="{FF2B5EF4-FFF2-40B4-BE49-F238E27FC236}">
-                  <a16:creationId xmlns:a16="http://schemas.microsoft.com/office/drawing/2014/main" id="{C9DCCF41-6E4C-4CA0-7BE0-B7740FA1D3DF}"/>
-                </a:ext>
-              </a:extLst>
-            </p:cNvPr>
-            <p:cNvPicPr>
-              <a:picLocks noChangeAspect="1"/>
-            </p:cNvPicPr>
-            <p:nvPr/>
-          </p:nvPicPr>
-          <p:blipFill>
-            <a:blip r:embed="rId3"/>
-            <a:stretch>
-              <a:fillRect/>
-            </a:stretch>
-          </p:blipFill>
-          <p:spPr>
-            <a:xfrm>
-              <a:off x="1667847" y="3292934"/>
-              <a:ext cx="3240000" cy="1948782"/>
-            </a:xfrm>
-            <a:prstGeom prst="rect">
-              <a:avLst/>
-            </a:prstGeom>
-          </p:spPr>
-        </p:pic>
-      </p:grpSp>
-      <p:cxnSp>
-        <p:nvCxnSpPr>
-          <p:cNvPr id="9" name="Conector de Seta Reta 8">
-            <a:extLst>
-              <a:ext uri="{FF2B5EF4-FFF2-40B4-BE49-F238E27FC236}">
-                <a16:creationId xmlns:a16="http://schemas.microsoft.com/office/drawing/2014/main" id="{3E381279-5B1B-AEB3-F1F7-6FE4EF9399D2}"/>
-              </a:ext>
-            </a:extLst>
-          </p:cNvPr>
-          <p:cNvCxnSpPr>
-            <a:cxnSpLocks/>
-          </p:cNvCxnSpPr>
-          <p:nvPr/>
-        </p:nvCxnSpPr>
-        <p:spPr>
-          <a:xfrm>
-            <a:off x="6029864" y="3899139"/>
-            <a:ext cx="1187570" cy="0"/>
-          </a:xfrm>
-          <a:prstGeom prst="straightConnector1">
-            <a:avLst/>
-          </a:prstGeom>
-          <a:ln w="38100">
-            <a:solidFill>
-              <a:schemeClr val="tx1"/>
-            </a:solidFill>
-            <a:tailEnd type="triangle"/>
-          </a:ln>
-        </p:spPr>
-        <p:style>
-          <a:lnRef idx="1">
-            <a:schemeClr val="accent1"/>
-          </a:lnRef>
-          <a:fillRef idx="0">
-            <a:schemeClr val="accent1"/>
-          </a:fillRef>
-          <a:effectRef idx="0">
-            <a:schemeClr val="accent1"/>
-          </a:effectRef>
-          <a:fontRef idx="minor">
-            <a:schemeClr val="tx1"/>
-          </a:fontRef>
-        </p:style>
-      </p:cxnSp>
-    </p:spTree>
-    <p:extLst>
-      <p:ext uri="{BB962C8B-B14F-4D97-AF65-F5344CB8AC3E}">
-        <p14:creationId xmlns:p14="http://schemas.microsoft.com/office/powerpoint/2010/main" val="3736684106"/>
-      </p:ext>
-    </p:extLst>
-  </p:cSld>
-  <p:clrMapOvr>
-    <a:masterClrMapping/>
-  </p:clrMapOvr>
-</p:sld>
-</file>
-
-<file path=ppt/slides/slide20.xml><?xml version="1.0" encoding="utf-8"?>
+<file path=ppt/slides/slide25.xml><?xml version="1.0" encoding="utf-8"?>
 <p:sld xmlns:a="http://schemas.openxmlformats.org/drawingml/2006/main" xmlns:r="http://schemas.openxmlformats.org/officeDocument/2006/relationships" xmlns:p="http://schemas.openxmlformats.org/presentationml/2006/main">
   <p:cSld>
     <p:spTree>
@@ -8844,7 +11778,7 @@
 </p:sld>
 </file>
 
-<file path=ppt/slides/slide21.xml><?xml version="1.0" encoding="utf-8"?>
+<file path=ppt/slides/slide26.xml><?xml version="1.0" encoding="utf-8"?>
 <p:sld xmlns:a="http://schemas.openxmlformats.org/drawingml/2006/main" xmlns:r="http://schemas.openxmlformats.org/officeDocument/2006/relationships" xmlns:p="http://schemas.openxmlformats.org/presentationml/2006/main">
   <p:cSld>
     <p:spTree>
@@ -8966,7 +11900,7 @@
 </p:sld>
 </file>
 
-<file path=ppt/slides/slide22.xml><?xml version="1.0" encoding="utf-8"?>
+<file path=ppt/slides/slide27.xml><?xml version="1.0" encoding="utf-8"?>
 <p:sld xmlns:a="http://schemas.openxmlformats.org/drawingml/2006/main" xmlns:r="http://schemas.openxmlformats.org/officeDocument/2006/relationships" xmlns:p="http://schemas.openxmlformats.org/presentationml/2006/main">
   <p:cSld>
     <p:spTree>
@@ -9094,7 +12028,7 @@
 </p:sld>
 </file>
 
-<file path=ppt/slides/slide23.xml><?xml version="1.0" encoding="utf-8"?>
+<file path=ppt/slides/slide28.xml><?xml version="1.0" encoding="utf-8"?>
 <p:sld xmlns:a="http://schemas.openxmlformats.org/drawingml/2006/main" xmlns:r="http://schemas.openxmlformats.org/officeDocument/2006/relationships" xmlns:p="http://schemas.openxmlformats.org/presentationml/2006/main">
   <p:cSld>
     <p:spTree>

--- a/SI/Programação para Internet/Módulo 2 - JavaScript/Aula03 - Implementado o CRUD/Implementando CRUD.pptx
+++ b/SI/Programação para Internet/Módulo 2 - JavaScript/Aula03 - Implementado o CRUD/Implementando CRUD.pptx
@@ -27,12 +27,11 @@
     <p:sldId id="284" r:id="rId21"/>
     <p:sldId id="285" r:id="rId22"/>
     <p:sldId id="286" r:id="rId23"/>
-    <p:sldId id="261" r:id="rId24"/>
-    <p:sldId id="262" r:id="rId25"/>
-    <p:sldId id="263" r:id="rId26"/>
-    <p:sldId id="265" r:id="rId27"/>
-    <p:sldId id="267" r:id="rId28"/>
-    <p:sldId id="266" r:id="rId29"/>
+    <p:sldId id="287" r:id="rId24"/>
+    <p:sldId id="288" r:id="rId25"/>
+    <p:sldId id="289" r:id="rId26"/>
+    <p:sldId id="291" r:id="rId27"/>
+    <p:sldId id="292" r:id="rId28"/>
   </p:sldIdLst>
   <p:sldSz cx="12192000" cy="6858000"/>
   <p:notesSz cx="6858000" cy="9144000"/>
@@ -719,7 +718,7 @@
           <a:p>
             <a:fld id="{CDD55C27-F8C6-4481-8569-CAC50CAE9F1F}" type="datetimeFigureOut">
               <a:rPr lang="pt-BR" smtClean="0"/>
-              <a:t>01/09/2026</a:t>
+              <a:t>02/09/2026</a:t>
             </a:fld>
             <a:endParaRPr lang="pt-BR"/>
           </a:p>
@@ -856,7 +855,7 @@
           <a:p>
             <a:fld id="{CDD55C27-F8C6-4481-8569-CAC50CAE9F1F}" type="datetimeFigureOut">
               <a:rPr lang="pt-BR" smtClean="0"/>
-              <a:t>01/09/2026</a:t>
+              <a:t>02/09/2026</a:t>
             </a:fld>
             <a:endParaRPr lang="pt-BR"/>
           </a:p>
@@ -1576,7 +1575,7 @@
           <a:p>
             <a:fld id="{CDD55C27-F8C6-4481-8569-CAC50CAE9F1F}" type="datetimeFigureOut">
               <a:rPr lang="pt-BR" smtClean="0"/>
-              <a:t>01/09/2026</a:t>
+              <a:t>02/09/2026</a:t>
             </a:fld>
             <a:endParaRPr lang="pt-BR"/>
           </a:p>
@@ -1756,7 +1755,7 @@
           <a:p>
             <a:fld id="{CDD55C27-F8C6-4481-8569-CAC50CAE9F1F}" type="datetimeFigureOut">
               <a:rPr lang="pt-BR" smtClean="0"/>
-              <a:t>01/09/2026</a:t>
+              <a:t>02/09/2026</a:t>
             </a:fld>
             <a:endParaRPr lang="pt-BR"/>
           </a:p>
@@ -1936,7 +1935,7 @@
           <a:p>
             <a:fld id="{CDD55C27-F8C6-4481-8569-CAC50CAE9F1F}" type="datetimeFigureOut">
               <a:rPr lang="pt-BR" smtClean="0"/>
-              <a:t>01/09/2026</a:t>
+              <a:t>02/09/2026</a:t>
             </a:fld>
             <a:endParaRPr lang="pt-BR"/>
           </a:p>
@@ -2147,7 +2146,7 @@
           <a:p>
             <a:fld id="{CDD55C27-F8C6-4481-8569-CAC50CAE9F1F}" type="datetimeFigureOut">
               <a:rPr lang="pt-BR" smtClean="0"/>
-              <a:t>01/09/2026</a:t>
+              <a:t>02/09/2026</a:t>
             </a:fld>
             <a:endParaRPr lang="pt-BR"/>
           </a:p>
@@ -2602,7 +2601,7 @@
           <a:p>
             <a:fld id="{CDD55C27-F8C6-4481-8569-CAC50CAE9F1F}" type="datetimeFigureOut">
               <a:rPr lang="pt-BR" smtClean="0"/>
-              <a:t>01/09/2026</a:t>
+              <a:t>02/09/2026</a:t>
             </a:fld>
             <a:endParaRPr lang="pt-BR"/>
           </a:p>
@@ -5866,31 +5865,6 @@
           </a:p>
         </p:txBody>
       </p:sp>
-      <p:sp>
-        <p:nvSpPr>
-          <p:cNvPr id="5" name="Subtítulo 4">
-            <a:extLst>
-              <a:ext uri="{FF2B5EF4-FFF2-40B4-BE49-F238E27FC236}">
-                <a16:creationId xmlns:a16="http://schemas.microsoft.com/office/drawing/2014/main" id="{B167C996-46CA-4208-9C55-B86889EFB85A}"/>
-              </a:ext>
-            </a:extLst>
-          </p:cNvPr>
-          <p:cNvSpPr>
-            <a:spLocks noGrp="1"/>
-          </p:cNvSpPr>
-          <p:nvPr>
-            <p:ph type="subTitle" idx="1"/>
-          </p:nvPr>
-        </p:nvSpPr>
-        <p:spPr/>
-        <p:txBody>
-          <a:bodyPr/>
-          <a:lstStyle/>
-          <a:p>
-            <a:endParaRPr lang="pt-BR"/>
-          </a:p>
-        </p:txBody>
-      </p:sp>
     </p:spTree>
     <p:extLst>
       <p:ext uri="{BB962C8B-B14F-4D97-AF65-F5344CB8AC3E}">
@@ -9378,7 +9352,10 @@
           <a:bodyPr/>
           <a:lstStyle/>
           <a:p>
-            <a:endParaRPr lang="pt-BR"/>
+            <a:r>
+              <a:rPr lang="pt-BR" dirty="0"/>
+              <a:t>Validando produto no estoque</a:t>
+            </a:r>
           </a:p>
         </p:txBody>
       </p:sp>
@@ -9398,15 +9375,99 @@
             <p:ph idx="1"/>
           </p:nvPr>
         </p:nvSpPr>
-        <p:spPr/>
+        <p:spPr>
+          <a:xfrm>
+            <a:off x="592347" y="1844675"/>
+            <a:ext cx="11007306" cy="1083009"/>
+          </a:xfrm>
+        </p:spPr>
         <p:txBody>
           <a:bodyPr/>
           <a:lstStyle/>
           <a:p>
-            <a:endParaRPr lang="pt-BR"/>
+            <a:r>
+              <a:rPr lang="pt-BR" dirty="0"/>
+              <a:t>A primeira etapa do nosso programa é validar se existe algum produto no estoque, para removermos o </a:t>
+            </a:r>
+            <a:r>
+              <a:rPr lang="pt-BR" dirty="0" err="1"/>
+              <a:t>icone</a:t>
+            </a:r>
+            <a:r>
+              <a:rPr lang="pt-BR" dirty="0"/>
+              <a:t> e o texto </a:t>
+            </a:r>
+            <a:r>
+              <a:rPr lang="pt-BR" b="1" dirty="0"/>
+              <a:t>NENHUM PRODUTO NO ESTOQUE</a:t>
+            </a:r>
+            <a:r>
+              <a:rPr lang="pt-BR" dirty="0"/>
+              <a:t>.</a:t>
+            </a:r>
           </a:p>
         </p:txBody>
       </p:sp>
+      <p:pic>
+        <p:nvPicPr>
+          <p:cNvPr id="7" name="Imagem 6">
+            <a:extLst>
+              <a:ext uri="{FF2B5EF4-FFF2-40B4-BE49-F238E27FC236}">
+                <a16:creationId xmlns:a16="http://schemas.microsoft.com/office/drawing/2014/main" id="{CE64D309-2C6C-4864-A25C-854658A22EC7}"/>
+              </a:ext>
+            </a:extLst>
+          </p:cNvPr>
+          <p:cNvPicPr>
+            <a:picLocks noChangeAspect="1"/>
+          </p:cNvPicPr>
+          <p:nvPr/>
+        </p:nvPicPr>
+        <p:blipFill>
+          <a:blip r:embed="rId2"/>
+          <a:stretch>
+            <a:fillRect/>
+          </a:stretch>
+        </p:blipFill>
+        <p:spPr>
+          <a:xfrm>
+            <a:off x="1070027" y="3754774"/>
+            <a:ext cx="4023709" cy="1867062"/>
+          </a:xfrm>
+          <a:prstGeom prst="rect">
+            <a:avLst/>
+          </a:prstGeom>
+        </p:spPr>
+      </p:pic>
+      <p:pic>
+        <p:nvPicPr>
+          <p:cNvPr id="9" name="Imagem 8">
+            <a:extLst>
+              <a:ext uri="{FF2B5EF4-FFF2-40B4-BE49-F238E27FC236}">
+                <a16:creationId xmlns:a16="http://schemas.microsoft.com/office/drawing/2014/main" id="{FB920689-EE6B-DE69-E8B6-C5C9D0440EDC}"/>
+              </a:ext>
+            </a:extLst>
+          </p:cNvPr>
+          <p:cNvPicPr>
+            <a:picLocks noChangeAspect="1"/>
+          </p:cNvPicPr>
+          <p:nvPr/>
+        </p:nvPicPr>
+        <p:blipFill>
+          <a:blip r:embed="rId3"/>
+          <a:stretch>
+            <a:fillRect/>
+          </a:stretch>
+        </p:blipFill>
+        <p:spPr>
+          <a:xfrm>
+            <a:off x="6469214" y="3202276"/>
+            <a:ext cx="3825572" cy="2972058"/>
+          </a:xfrm>
+          <a:prstGeom prst="rect">
+            <a:avLst/>
+          </a:prstGeom>
+        </p:spPr>
+      </p:pic>
     </p:spTree>
     <p:extLst>
       <p:ext uri="{BB962C8B-B14F-4D97-AF65-F5344CB8AC3E}">
@@ -9458,7 +9519,10 @@
           <a:bodyPr/>
           <a:lstStyle/>
           <a:p>
-            <a:endParaRPr lang="pt-BR"/>
+            <a:r>
+              <a:rPr lang="pt-BR" dirty="0"/>
+              <a:t>Função JS – Verifica Produto</a:t>
+            </a:r>
           </a:p>
         </p:txBody>
       </p:sp>
@@ -9478,12 +9542,629 @@
             <p:ph idx="1"/>
           </p:nvPr>
         </p:nvSpPr>
-        <p:spPr/>
+        <p:spPr>
+          <a:xfrm>
+            <a:off x="592347" y="1844675"/>
+            <a:ext cx="11007306" cy="1091030"/>
+          </a:xfrm>
+        </p:spPr>
         <p:txBody>
           <a:bodyPr/>
           <a:lstStyle/>
           <a:p>
-            <a:endParaRPr lang="pt-BR"/>
+            <a:r>
+              <a:rPr lang="pt-BR" dirty="0"/>
+              <a:t>Para removermos esse campo no </a:t>
+            </a:r>
+            <a:r>
+              <a:rPr lang="pt-BR" dirty="0" err="1"/>
+              <a:t>html</a:t>
+            </a:r>
+            <a:r>
+              <a:rPr lang="pt-BR" dirty="0"/>
+              <a:t>, devemos manipular ele diretamente do nosso, </a:t>
+            </a:r>
+            <a:r>
+              <a:rPr lang="pt-BR" dirty="0" err="1"/>
+              <a:t>js</a:t>
+            </a:r>
+            <a:r>
+              <a:rPr lang="pt-BR" dirty="0"/>
+              <a:t>, para isso devemos adicionar o seguinte comando.</a:t>
+            </a:r>
+          </a:p>
+          <a:p>
+            <a:endParaRPr lang="pt-BR" dirty="0"/>
+          </a:p>
+        </p:txBody>
+      </p:sp>
+      <p:sp>
+        <p:nvSpPr>
+          <p:cNvPr id="5" name="CaixaDeTexto 4">
+            <a:extLst>
+              <a:ext uri="{FF2B5EF4-FFF2-40B4-BE49-F238E27FC236}">
+                <a16:creationId xmlns:a16="http://schemas.microsoft.com/office/drawing/2014/main" id="{7FA6ECA4-EA89-5A73-E45F-110C73A9D4C5}"/>
+              </a:ext>
+            </a:extLst>
+          </p:cNvPr>
+          <p:cNvSpPr txBox="1"/>
+          <p:nvPr/>
+        </p:nvSpPr>
+        <p:spPr>
+          <a:xfrm>
+            <a:off x="2294021" y="3289709"/>
+            <a:ext cx="7603957" cy="3289362"/>
+          </a:xfrm>
+          <a:prstGeom prst="rect">
+            <a:avLst/>
+          </a:prstGeom>
+          <a:noFill/>
+        </p:spPr>
+        <p:txBody>
+          <a:bodyPr wrap="square">
+            <a:spAutoFit/>
+          </a:bodyPr>
+          <a:lstStyle/>
+          <a:p>
+            <a:pPr>
+              <a:lnSpc>
+                <a:spcPct val="150000"/>
+              </a:lnSpc>
+              <a:buNone/>
+            </a:pPr>
+            <a:r>
+              <a:rPr lang="pt-BR" sz="1400" b="0" dirty="0" err="1">
+                <a:solidFill>
+                  <a:srgbClr val="0000FF"/>
+                </a:solidFill>
+                <a:effectLst/>
+                <a:latin typeface="Consolas" panose="020B0609020204030204" pitchFamily="49" charset="0"/>
+              </a:rPr>
+              <a:t>function</a:t>
+            </a:r>
+            <a:r>
+              <a:rPr lang="pt-BR" sz="1400" b="0" dirty="0">
+                <a:solidFill>
+                  <a:srgbClr val="000000"/>
+                </a:solidFill>
+                <a:effectLst/>
+                <a:latin typeface="Consolas" panose="020B0609020204030204" pitchFamily="49" charset="0"/>
+              </a:rPr>
+              <a:t> </a:t>
+            </a:r>
+            <a:r>
+              <a:rPr lang="pt-BR" sz="1400" b="0" dirty="0" err="1">
+                <a:solidFill>
+                  <a:srgbClr val="000000"/>
+                </a:solidFill>
+                <a:effectLst/>
+                <a:latin typeface="Consolas" panose="020B0609020204030204" pitchFamily="49" charset="0"/>
+              </a:rPr>
+              <a:t>verificarProdutosCadastrados</a:t>
+            </a:r>
+            <a:r>
+              <a:rPr lang="pt-BR" sz="1400" b="0" dirty="0">
+                <a:solidFill>
+                  <a:srgbClr val="000000"/>
+                </a:solidFill>
+                <a:effectLst/>
+                <a:latin typeface="Consolas" panose="020B0609020204030204" pitchFamily="49" charset="0"/>
+              </a:rPr>
+              <a:t>(produtos){</a:t>
+            </a:r>
+          </a:p>
+          <a:p>
+            <a:pPr>
+              <a:lnSpc>
+                <a:spcPct val="150000"/>
+              </a:lnSpc>
+              <a:buNone/>
+            </a:pPr>
+            <a:r>
+              <a:rPr lang="pt-BR" sz="1400" b="0" dirty="0">
+                <a:solidFill>
+                  <a:srgbClr val="000000"/>
+                </a:solidFill>
+                <a:effectLst/>
+                <a:latin typeface="Consolas" panose="020B0609020204030204" pitchFamily="49" charset="0"/>
+              </a:rPr>
+              <a:t>    </a:t>
+            </a:r>
+            <a:r>
+              <a:rPr lang="pt-BR" sz="1400" b="0" dirty="0" err="1">
+                <a:solidFill>
+                  <a:srgbClr val="0000FF"/>
+                </a:solidFill>
+                <a:effectLst/>
+                <a:latin typeface="Consolas" panose="020B0609020204030204" pitchFamily="49" charset="0"/>
+              </a:rPr>
+              <a:t>let</a:t>
+            </a:r>
+            <a:r>
+              <a:rPr lang="pt-BR" sz="1400" b="0" dirty="0">
+                <a:solidFill>
+                  <a:srgbClr val="000000"/>
+                </a:solidFill>
+                <a:effectLst/>
+                <a:latin typeface="Consolas" panose="020B0609020204030204" pitchFamily="49" charset="0"/>
+              </a:rPr>
+              <a:t> </a:t>
+            </a:r>
+            <a:r>
+              <a:rPr lang="pt-BR" sz="1400" b="0" dirty="0" err="1">
+                <a:solidFill>
+                  <a:srgbClr val="000000"/>
+                </a:solidFill>
+                <a:effectLst/>
+                <a:latin typeface="Consolas" panose="020B0609020204030204" pitchFamily="49" charset="0"/>
+              </a:rPr>
+              <a:t>produtosCadastrados</a:t>
+            </a:r>
+            <a:r>
+              <a:rPr lang="pt-BR" sz="1400" b="0" dirty="0">
+                <a:solidFill>
+                  <a:srgbClr val="000000"/>
+                </a:solidFill>
+                <a:effectLst/>
+                <a:latin typeface="Consolas" panose="020B0609020204030204" pitchFamily="49" charset="0"/>
+              </a:rPr>
+              <a:t> = </a:t>
+            </a:r>
+            <a:r>
+              <a:rPr lang="pt-BR" sz="1400" b="0" dirty="0" err="1">
+                <a:solidFill>
+                  <a:srgbClr val="000000"/>
+                </a:solidFill>
+                <a:effectLst/>
+                <a:latin typeface="Consolas" panose="020B0609020204030204" pitchFamily="49" charset="0"/>
+              </a:rPr>
+              <a:t>produtos.length</a:t>
+            </a:r>
+            <a:endParaRPr lang="pt-BR" sz="1400" b="0" dirty="0">
+              <a:solidFill>
+                <a:srgbClr val="000000"/>
+              </a:solidFill>
+              <a:effectLst/>
+              <a:latin typeface="Consolas" panose="020B0609020204030204" pitchFamily="49" charset="0"/>
+            </a:endParaRPr>
+          </a:p>
+          <a:p>
+            <a:pPr>
+              <a:lnSpc>
+                <a:spcPct val="150000"/>
+              </a:lnSpc>
+              <a:buNone/>
+            </a:pPr>
+            <a:r>
+              <a:rPr lang="pt-BR" sz="1400" b="0" dirty="0">
+                <a:solidFill>
+                  <a:srgbClr val="000000"/>
+                </a:solidFill>
+                <a:effectLst/>
+                <a:latin typeface="Consolas" panose="020B0609020204030204" pitchFamily="49" charset="0"/>
+              </a:rPr>
+              <a:t>    </a:t>
+            </a:r>
+            <a:r>
+              <a:rPr lang="pt-BR" sz="1400" b="0" dirty="0" err="1">
+                <a:solidFill>
+                  <a:srgbClr val="0000FF"/>
+                </a:solidFill>
+                <a:effectLst/>
+                <a:latin typeface="Consolas" panose="020B0609020204030204" pitchFamily="49" charset="0"/>
+              </a:rPr>
+              <a:t>const</a:t>
+            </a:r>
+            <a:r>
+              <a:rPr lang="pt-BR" sz="1400" b="0" dirty="0">
+                <a:solidFill>
+                  <a:srgbClr val="000000"/>
+                </a:solidFill>
+                <a:effectLst/>
+                <a:latin typeface="Consolas" panose="020B0609020204030204" pitchFamily="49" charset="0"/>
+              </a:rPr>
+              <a:t> </a:t>
+            </a:r>
+            <a:r>
+              <a:rPr lang="pt-BR" sz="1400" b="0" dirty="0" err="1">
+                <a:solidFill>
+                  <a:srgbClr val="000000"/>
+                </a:solidFill>
+                <a:effectLst/>
+                <a:latin typeface="Consolas" panose="020B0609020204030204" pitchFamily="49" charset="0"/>
+              </a:rPr>
+              <a:t>removerNenhumProduto</a:t>
+            </a:r>
+            <a:r>
+              <a:rPr lang="pt-BR" sz="1400" b="0" dirty="0">
+                <a:solidFill>
+                  <a:srgbClr val="000000"/>
+                </a:solidFill>
+                <a:effectLst/>
+                <a:latin typeface="Consolas" panose="020B0609020204030204" pitchFamily="49" charset="0"/>
+              </a:rPr>
+              <a:t> = </a:t>
+            </a:r>
+            <a:r>
+              <a:rPr lang="pt-BR" sz="1400" b="0" dirty="0" err="1">
+                <a:solidFill>
+                  <a:srgbClr val="000000"/>
+                </a:solidFill>
+                <a:effectLst/>
+                <a:latin typeface="Consolas" panose="020B0609020204030204" pitchFamily="49" charset="0"/>
+              </a:rPr>
+              <a:t>document.querySelector</a:t>
+            </a:r>
+            <a:r>
+              <a:rPr lang="pt-BR" sz="1400" b="0" dirty="0">
+                <a:solidFill>
+                  <a:srgbClr val="000000"/>
+                </a:solidFill>
+                <a:effectLst/>
+                <a:latin typeface="Consolas" panose="020B0609020204030204" pitchFamily="49" charset="0"/>
+              </a:rPr>
+              <a:t>(</a:t>
+            </a:r>
+            <a:r>
+              <a:rPr lang="pt-BR" sz="1400" b="0" dirty="0">
+                <a:solidFill>
+                  <a:srgbClr val="A31515"/>
+                </a:solidFill>
+                <a:effectLst/>
+                <a:latin typeface="Consolas" panose="020B0609020204030204" pitchFamily="49" charset="0"/>
+              </a:rPr>
+              <a:t>"#</a:t>
+            </a:r>
+            <a:r>
+              <a:rPr lang="pt-BR" sz="1400" b="0" dirty="0" err="1">
+                <a:solidFill>
+                  <a:srgbClr val="A31515"/>
+                </a:solidFill>
+                <a:effectLst/>
+                <a:latin typeface="Consolas" panose="020B0609020204030204" pitchFamily="49" charset="0"/>
+              </a:rPr>
+              <a:t>verificaProduto</a:t>
+            </a:r>
+            <a:r>
+              <a:rPr lang="pt-BR" sz="1400" b="0" dirty="0">
+                <a:solidFill>
+                  <a:srgbClr val="A31515"/>
+                </a:solidFill>
+                <a:effectLst/>
+                <a:latin typeface="Consolas" panose="020B0609020204030204" pitchFamily="49" charset="0"/>
+              </a:rPr>
+              <a:t>"</a:t>
+            </a:r>
+            <a:r>
+              <a:rPr lang="pt-BR" sz="1400" b="0" dirty="0">
+                <a:solidFill>
+                  <a:srgbClr val="000000"/>
+                </a:solidFill>
+                <a:effectLst/>
+                <a:latin typeface="Consolas" panose="020B0609020204030204" pitchFamily="49" charset="0"/>
+              </a:rPr>
+              <a:t>)</a:t>
+            </a:r>
+          </a:p>
+          <a:p>
+            <a:pPr>
+              <a:lnSpc>
+                <a:spcPct val="150000"/>
+              </a:lnSpc>
+              <a:buNone/>
+            </a:pPr>
+            <a:r>
+              <a:rPr lang="pt-BR" sz="1400" b="0" dirty="0">
+                <a:solidFill>
+                  <a:srgbClr val="000000"/>
+                </a:solidFill>
+                <a:effectLst/>
+                <a:latin typeface="Consolas" panose="020B0609020204030204" pitchFamily="49" charset="0"/>
+              </a:rPr>
+              <a:t>    </a:t>
+            </a:r>
+          </a:p>
+          <a:p>
+            <a:pPr>
+              <a:lnSpc>
+                <a:spcPct val="150000"/>
+              </a:lnSpc>
+              <a:buNone/>
+            </a:pPr>
+            <a:r>
+              <a:rPr lang="pt-BR" sz="1400" b="0" dirty="0">
+                <a:solidFill>
+                  <a:srgbClr val="000000"/>
+                </a:solidFill>
+                <a:effectLst/>
+                <a:latin typeface="Consolas" panose="020B0609020204030204" pitchFamily="49" charset="0"/>
+              </a:rPr>
+              <a:t>    </a:t>
+            </a:r>
+            <a:r>
+              <a:rPr lang="pt-BR" sz="1400" b="0" dirty="0" err="1">
+                <a:solidFill>
+                  <a:srgbClr val="0000FF"/>
+                </a:solidFill>
+                <a:effectLst/>
+                <a:latin typeface="Consolas" panose="020B0609020204030204" pitchFamily="49" charset="0"/>
+              </a:rPr>
+              <a:t>if</a:t>
+            </a:r>
+            <a:r>
+              <a:rPr lang="pt-BR" sz="1400" b="0" dirty="0">
+                <a:solidFill>
+                  <a:srgbClr val="000000"/>
+                </a:solidFill>
+                <a:effectLst/>
+                <a:latin typeface="Consolas" panose="020B0609020204030204" pitchFamily="49" charset="0"/>
+              </a:rPr>
+              <a:t> (</a:t>
+            </a:r>
+            <a:r>
+              <a:rPr lang="pt-BR" sz="1400" b="0" dirty="0" err="1">
+                <a:solidFill>
+                  <a:srgbClr val="000000"/>
+                </a:solidFill>
+                <a:effectLst/>
+                <a:latin typeface="Consolas" panose="020B0609020204030204" pitchFamily="49" charset="0"/>
+              </a:rPr>
+              <a:t>produtosCadastrados</a:t>
+            </a:r>
+            <a:r>
+              <a:rPr lang="pt-BR" sz="1400" b="0" dirty="0">
+                <a:solidFill>
+                  <a:srgbClr val="000000"/>
+                </a:solidFill>
+                <a:effectLst/>
+                <a:latin typeface="Consolas" panose="020B0609020204030204" pitchFamily="49" charset="0"/>
+              </a:rPr>
+              <a:t> &gt; </a:t>
+            </a:r>
+            <a:r>
+              <a:rPr lang="pt-BR" sz="1400" b="0" dirty="0">
+                <a:solidFill>
+                  <a:srgbClr val="098658"/>
+                </a:solidFill>
+                <a:effectLst/>
+                <a:latin typeface="Consolas" panose="020B0609020204030204" pitchFamily="49" charset="0"/>
+              </a:rPr>
+              <a:t>0</a:t>
+            </a:r>
+            <a:r>
+              <a:rPr lang="pt-BR" sz="1400" b="0" dirty="0">
+                <a:solidFill>
+                  <a:srgbClr val="000000"/>
+                </a:solidFill>
+                <a:effectLst/>
+                <a:latin typeface="Consolas" panose="020B0609020204030204" pitchFamily="49" charset="0"/>
+              </a:rPr>
+              <a:t>){</a:t>
+            </a:r>
+          </a:p>
+          <a:p>
+            <a:pPr>
+              <a:lnSpc>
+                <a:spcPct val="150000"/>
+              </a:lnSpc>
+              <a:buNone/>
+            </a:pPr>
+            <a:r>
+              <a:rPr lang="pt-BR" sz="1400" b="0" dirty="0">
+                <a:solidFill>
+                  <a:srgbClr val="000000"/>
+                </a:solidFill>
+                <a:effectLst/>
+                <a:latin typeface="Consolas" panose="020B0609020204030204" pitchFamily="49" charset="0"/>
+              </a:rPr>
+              <a:t>        </a:t>
+            </a:r>
+            <a:r>
+              <a:rPr lang="pt-BR" sz="1400" b="0" dirty="0" err="1">
+                <a:solidFill>
+                  <a:srgbClr val="000000"/>
+                </a:solidFill>
+                <a:effectLst/>
+                <a:latin typeface="Consolas" panose="020B0609020204030204" pitchFamily="49" charset="0"/>
+              </a:rPr>
+              <a:t>removerNenhumProduto.style.display</a:t>
+            </a:r>
+            <a:r>
+              <a:rPr lang="pt-BR" sz="1400" b="0" dirty="0">
+                <a:solidFill>
+                  <a:srgbClr val="000000"/>
+                </a:solidFill>
+                <a:effectLst/>
+                <a:latin typeface="Consolas" panose="020B0609020204030204" pitchFamily="49" charset="0"/>
+              </a:rPr>
+              <a:t> = </a:t>
+            </a:r>
+            <a:r>
+              <a:rPr lang="pt-BR" sz="1400" b="0" dirty="0">
+                <a:solidFill>
+                  <a:srgbClr val="A31515"/>
+                </a:solidFill>
+                <a:effectLst/>
+                <a:latin typeface="Consolas" panose="020B0609020204030204" pitchFamily="49" charset="0"/>
+              </a:rPr>
+              <a:t>"</a:t>
+            </a:r>
+            <a:r>
+              <a:rPr lang="pt-BR" sz="1400" b="0" dirty="0" err="1">
+                <a:solidFill>
+                  <a:srgbClr val="A31515"/>
+                </a:solidFill>
+                <a:effectLst/>
+                <a:latin typeface="Consolas" panose="020B0609020204030204" pitchFamily="49" charset="0"/>
+              </a:rPr>
+              <a:t>none</a:t>
+            </a:r>
+            <a:r>
+              <a:rPr lang="pt-BR" sz="1400" b="0" dirty="0">
+                <a:solidFill>
+                  <a:srgbClr val="A31515"/>
+                </a:solidFill>
+                <a:effectLst/>
+                <a:latin typeface="Consolas" panose="020B0609020204030204" pitchFamily="49" charset="0"/>
+              </a:rPr>
+              <a:t>"</a:t>
+            </a:r>
+            <a:endParaRPr lang="pt-BR" sz="1400" b="0" dirty="0">
+              <a:solidFill>
+                <a:srgbClr val="000000"/>
+              </a:solidFill>
+              <a:effectLst/>
+              <a:latin typeface="Consolas" panose="020B0609020204030204" pitchFamily="49" charset="0"/>
+            </a:endParaRPr>
+          </a:p>
+          <a:p>
+            <a:pPr>
+              <a:lnSpc>
+                <a:spcPct val="150000"/>
+              </a:lnSpc>
+              <a:buNone/>
+            </a:pPr>
+            <a:r>
+              <a:rPr lang="pt-BR" sz="1400" b="0" dirty="0">
+                <a:solidFill>
+                  <a:srgbClr val="000000"/>
+                </a:solidFill>
+                <a:effectLst/>
+                <a:latin typeface="Consolas" panose="020B0609020204030204" pitchFamily="49" charset="0"/>
+              </a:rPr>
+              <a:t>    } </a:t>
+            </a:r>
+            <a:r>
+              <a:rPr lang="pt-BR" sz="1400" b="0" dirty="0" err="1">
+                <a:solidFill>
+                  <a:srgbClr val="0000FF"/>
+                </a:solidFill>
+                <a:effectLst/>
+                <a:latin typeface="Consolas" panose="020B0609020204030204" pitchFamily="49" charset="0"/>
+              </a:rPr>
+              <a:t>else</a:t>
+            </a:r>
+            <a:r>
+              <a:rPr lang="pt-BR" sz="1400" b="0" dirty="0">
+                <a:solidFill>
+                  <a:srgbClr val="000000"/>
+                </a:solidFill>
+                <a:effectLst/>
+                <a:latin typeface="Consolas" panose="020B0609020204030204" pitchFamily="49" charset="0"/>
+              </a:rPr>
+              <a:t> {</a:t>
+            </a:r>
+          </a:p>
+          <a:p>
+            <a:pPr>
+              <a:lnSpc>
+                <a:spcPct val="150000"/>
+              </a:lnSpc>
+              <a:buNone/>
+            </a:pPr>
+            <a:r>
+              <a:rPr lang="pt-BR" sz="1400" b="0" dirty="0">
+                <a:solidFill>
+                  <a:srgbClr val="000000"/>
+                </a:solidFill>
+                <a:effectLst/>
+                <a:latin typeface="Consolas" panose="020B0609020204030204" pitchFamily="49" charset="0"/>
+              </a:rPr>
+              <a:t>        </a:t>
+            </a:r>
+            <a:r>
+              <a:rPr lang="pt-BR" sz="1400" b="0" dirty="0" err="1">
+                <a:solidFill>
+                  <a:srgbClr val="000000"/>
+                </a:solidFill>
+                <a:effectLst/>
+                <a:latin typeface="Consolas" panose="020B0609020204030204" pitchFamily="49" charset="0"/>
+              </a:rPr>
+              <a:t>removerNenhumProduto.style.display</a:t>
+            </a:r>
+            <a:r>
+              <a:rPr lang="pt-BR" sz="1400" b="0" dirty="0">
+                <a:solidFill>
+                  <a:srgbClr val="000000"/>
+                </a:solidFill>
+                <a:effectLst/>
+                <a:latin typeface="Consolas" panose="020B0609020204030204" pitchFamily="49" charset="0"/>
+              </a:rPr>
+              <a:t> = </a:t>
+            </a:r>
+            <a:r>
+              <a:rPr lang="pt-BR" sz="1400" b="0" dirty="0">
+                <a:solidFill>
+                  <a:srgbClr val="A31515"/>
+                </a:solidFill>
+                <a:effectLst/>
+                <a:latin typeface="Consolas" panose="020B0609020204030204" pitchFamily="49" charset="0"/>
+              </a:rPr>
+              <a:t>"</a:t>
+            </a:r>
+            <a:r>
+              <a:rPr lang="pt-BR" sz="1400" b="0" dirty="0" err="1">
+                <a:solidFill>
+                  <a:srgbClr val="A31515"/>
+                </a:solidFill>
+                <a:effectLst/>
+                <a:latin typeface="Consolas" panose="020B0609020204030204" pitchFamily="49" charset="0"/>
+              </a:rPr>
+              <a:t>table-cell</a:t>
+            </a:r>
+            <a:r>
+              <a:rPr lang="pt-BR" sz="1400" b="0" dirty="0">
+                <a:solidFill>
+                  <a:srgbClr val="A31515"/>
+                </a:solidFill>
+                <a:effectLst/>
+                <a:latin typeface="Consolas" panose="020B0609020204030204" pitchFamily="49" charset="0"/>
+              </a:rPr>
+              <a:t>"</a:t>
+            </a:r>
+            <a:endParaRPr lang="pt-BR" sz="1400" b="0" dirty="0">
+              <a:solidFill>
+                <a:srgbClr val="000000"/>
+              </a:solidFill>
+              <a:effectLst/>
+              <a:latin typeface="Consolas" panose="020B0609020204030204" pitchFamily="49" charset="0"/>
+            </a:endParaRPr>
+          </a:p>
+          <a:p>
+            <a:pPr>
+              <a:lnSpc>
+                <a:spcPct val="150000"/>
+              </a:lnSpc>
+              <a:buNone/>
+            </a:pPr>
+            <a:r>
+              <a:rPr lang="pt-BR" sz="1400" b="0" dirty="0">
+                <a:solidFill>
+                  <a:srgbClr val="000000"/>
+                </a:solidFill>
+                <a:effectLst/>
+                <a:latin typeface="Consolas" panose="020B0609020204030204" pitchFamily="49" charset="0"/>
+              </a:rPr>
+              <a:t>    }</a:t>
+            </a:r>
+          </a:p>
+          <a:p>
+            <a:pPr>
+              <a:lnSpc>
+                <a:spcPct val="150000"/>
+              </a:lnSpc>
+              <a:buNone/>
+            </a:pPr>
+            <a:r>
+              <a:rPr lang="pt-BR" sz="1400" b="0" dirty="0">
+                <a:solidFill>
+                  <a:srgbClr val="000000"/>
+                </a:solidFill>
+                <a:effectLst/>
+                <a:latin typeface="Consolas" panose="020B0609020204030204" pitchFamily="49" charset="0"/>
+              </a:rPr>
+              <a:t>}</a:t>
+            </a:r>
           </a:p>
         </p:txBody>
       </p:sp>
@@ -9533,12 +10214,20 @@
             <p:ph type="title"/>
           </p:nvPr>
         </p:nvSpPr>
-        <p:spPr/>
+        <p:spPr>
+          <a:xfrm>
+            <a:off x="729917" y="868458"/>
+            <a:ext cx="9429250" cy="434535"/>
+          </a:xfrm>
+        </p:spPr>
         <p:txBody>
           <a:bodyPr/>
           <a:lstStyle/>
           <a:p>
-            <a:endParaRPr lang="pt-BR"/>
+            <a:r>
+              <a:rPr lang="pt-BR" dirty="0"/>
+              <a:t>Adicionar produtos a tabela</a:t>
+            </a:r>
           </a:p>
         </p:txBody>
       </p:sp>
@@ -9558,15 +10247,83 @@
             <p:ph idx="1"/>
           </p:nvPr>
         </p:nvSpPr>
-        <p:spPr/>
+        <p:spPr>
+          <a:xfrm>
+            <a:off x="592347" y="1844675"/>
+            <a:ext cx="11007306" cy="1123114"/>
+          </a:xfrm>
+        </p:spPr>
         <p:txBody>
           <a:bodyPr/>
           <a:lstStyle/>
           <a:p>
-            <a:endParaRPr lang="pt-BR"/>
+            <a:r>
+              <a:rPr lang="pt-BR" dirty="0"/>
+              <a:t>Agora que removemos a informação, quando não possuímos produtos cadastrados, agora iremos adicionar as linhas caso tenhamos algum produto cadastrado.</a:t>
+            </a:r>
           </a:p>
         </p:txBody>
       </p:sp>
+      <p:pic>
+        <p:nvPicPr>
+          <p:cNvPr id="5" name="Imagem 4">
+            <a:extLst>
+              <a:ext uri="{FF2B5EF4-FFF2-40B4-BE49-F238E27FC236}">
+                <a16:creationId xmlns:a16="http://schemas.microsoft.com/office/drawing/2014/main" id="{D464ED06-4896-18FA-F045-87617541CF61}"/>
+              </a:ext>
+            </a:extLst>
+          </p:cNvPr>
+          <p:cNvPicPr>
+            <a:picLocks noChangeAspect="1"/>
+          </p:cNvPicPr>
+          <p:nvPr/>
+        </p:nvPicPr>
+        <p:blipFill>
+          <a:blip r:embed="rId2"/>
+          <a:stretch>
+            <a:fillRect/>
+          </a:stretch>
+        </p:blipFill>
+        <p:spPr>
+          <a:xfrm>
+            <a:off x="1447073" y="3868917"/>
+            <a:ext cx="4170002" cy="2020362"/>
+          </a:xfrm>
+          <a:prstGeom prst="rect">
+            <a:avLst/>
+          </a:prstGeom>
+        </p:spPr>
+      </p:pic>
+      <p:pic>
+        <p:nvPicPr>
+          <p:cNvPr id="7" name="Imagem 6">
+            <a:extLst>
+              <a:ext uri="{FF2B5EF4-FFF2-40B4-BE49-F238E27FC236}">
+                <a16:creationId xmlns:a16="http://schemas.microsoft.com/office/drawing/2014/main" id="{B5E8D73C-DA34-0299-FF1D-8056AAA4FB40}"/>
+              </a:ext>
+            </a:extLst>
+          </p:cNvPr>
+          <p:cNvPicPr>
+            <a:picLocks noChangeAspect="1"/>
+          </p:cNvPicPr>
+          <p:nvPr/>
+        </p:nvPicPr>
+        <p:blipFill>
+          <a:blip r:embed="rId3"/>
+          <a:stretch>
+            <a:fillRect/>
+          </a:stretch>
+        </p:blipFill>
+        <p:spPr>
+          <a:xfrm>
+            <a:off x="7064148" y="3903654"/>
+            <a:ext cx="3680779" cy="1950889"/>
+          </a:xfrm>
+          <a:prstGeom prst="rect">
+            <a:avLst/>
+          </a:prstGeom>
+        </p:spPr>
+      </p:pic>
     </p:spTree>
     <p:extLst>
       <p:ext uri="{BB962C8B-B14F-4D97-AF65-F5344CB8AC3E}">
@@ -9602,7 +10359,7 @@
           <p:cNvPr id="2" name="Título 1">
             <a:extLst>
               <a:ext uri="{FF2B5EF4-FFF2-40B4-BE49-F238E27FC236}">
-                <a16:creationId xmlns:a16="http://schemas.microsoft.com/office/drawing/2014/main" id="{E3226649-2914-4E1D-8077-540D4B09C5E1}"/>
+                <a16:creationId xmlns:a16="http://schemas.microsoft.com/office/drawing/2014/main" id="{5AD14E3E-692E-B075-10DA-E9C8C39EDDD9}"/>
               </a:ext>
             </a:extLst>
           </p:cNvPr>
@@ -9613,21 +10370,14 @@
             <p:ph type="title"/>
           </p:nvPr>
         </p:nvSpPr>
-        <p:spPr>
-          <a:xfrm>
-            <a:off x="749185" y="854420"/>
-            <a:ext cx="9409981" cy="448573"/>
-          </a:xfrm>
-        </p:spPr>
+        <p:spPr/>
         <p:txBody>
-          <a:bodyPr>
-            <a:normAutofit/>
-          </a:bodyPr>
+          <a:bodyPr/>
           <a:lstStyle/>
           <a:p>
             <a:r>
-              <a:rPr lang="pt-BR" sz="2600"/>
-              <a:t>Por que uma API precisa retornar informações?</a:t>
+              <a:rPr lang="pt-BR" dirty="0"/>
+              <a:t>Criando a função Listar Produtos</a:t>
             </a:r>
           </a:p>
         </p:txBody>
@@ -9637,7 +10387,7 @@
           <p:cNvPr id="3" name="Espaço Reservado para Conteúdo 2">
             <a:extLst>
               <a:ext uri="{FF2B5EF4-FFF2-40B4-BE49-F238E27FC236}">
-                <a16:creationId xmlns:a16="http://schemas.microsoft.com/office/drawing/2014/main" id="{78C449FD-0CCF-46E0-B734-7980847A40B4}"/>
+                <a16:creationId xmlns:a16="http://schemas.microsoft.com/office/drawing/2014/main" id="{F7294703-9FB5-3055-0A97-326869832585}"/>
               </a:ext>
             </a:extLst>
           </p:cNvPr>
@@ -9650,291 +10400,27 @@
         </p:nvSpPr>
         <p:spPr>
           <a:xfrm>
-            <a:off x="592347" y="1825625"/>
-            <a:ext cx="5181600" cy="4370388"/>
+            <a:off x="592347" y="1844675"/>
+            <a:ext cx="11007306" cy="1074988"/>
           </a:xfrm>
         </p:spPr>
         <p:txBody>
-          <a:bodyPr>
-            <a:normAutofit/>
-          </a:bodyPr>
+          <a:bodyPr/>
           <a:lstStyle/>
           <a:p>
             <a:r>
-              <a:rPr lang="pt-BR" sz="1600" dirty="0"/>
-              <a:t>Quando uma aplicação realiza uma requisição, ela precisa saber </a:t>
-            </a:r>
-            <a:r>
-              <a:rPr lang="pt-BR" sz="1600" b="1" dirty="0"/>
-              <a:t>qual foi o resultado da operação</a:t>
-            </a:r>
-            <a:r>
-              <a:rPr lang="pt-BR" sz="1600" dirty="0"/>
-              <a:t>.</a:t>
-            </a:r>
-          </a:p>
-          <a:p>
-            <a:endParaRPr lang="pt-BR" sz="1600" dirty="0"/>
-          </a:p>
-          <a:p>
-            <a:r>
-              <a:rPr lang="pt-BR" sz="1600" dirty="0"/>
-              <a:t>Uma resposta adequada permite identificar:</a:t>
-            </a:r>
-          </a:p>
-          <a:p>
-            <a:pPr lvl="1"/>
-            <a:endParaRPr lang="pt-BR" dirty="0"/>
-          </a:p>
-          <a:p>
-            <a:pPr lvl="1"/>
-            <a:r>
               <a:rPr lang="pt-BR" dirty="0"/>
-              <a:t>✅ Se a operação foi realizada com sucesso</a:t>
-            </a:r>
-          </a:p>
-          <a:p>
-            <a:pPr lvl="1"/>
-            <a:r>
-              <a:rPr lang="pt-BR" dirty="0"/>
-              <a:t>❌ Se houve algum erro</a:t>
-            </a:r>
-          </a:p>
-          <a:p>
-            <a:pPr lvl="1"/>
-            <a:r>
-              <a:rPr lang="pt-BR" dirty="0"/>
-              <a:t>🔎 Se o recurso foi encontrado</a:t>
-            </a:r>
-          </a:p>
-          <a:p>
-            <a:pPr lvl="1"/>
-            <a:r>
-              <a:rPr lang="pt-BR" dirty="0"/>
-              <a:t>🆕 Se um novo recurso foi criado</a:t>
-            </a:r>
-          </a:p>
-          <a:p>
-            <a:pPr lvl="1"/>
-            <a:r>
-              <a:rPr lang="pt-BR" dirty="0"/>
-              <a:t>📭 Se não há conteúdo para retorna</a:t>
-            </a:r>
-          </a:p>
-          <a:p>
-            <a:endParaRPr lang="pt-BR" sz="1600" dirty="0"/>
+              <a:t>A primeira etapa é desenvolver uma função que será responsável por selecionar a tabela e depois recuperar seu conteúdo.</a:t>
+            </a:r>
           </a:p>
         </p:txBody>
       </p:sp>
-      <p:pic>
-        <p:nvPicPr>
-          <p:cNvPr id="6" name="Gráfico 5" descr="Monitor com preenchimento sólido">
+      <p:sp>
+        <p:nvSpPr>
+          <p:cNvPr id="5" name="CaixaDeTexto 4">
             <a:extLst>
               <a:ext uri="{FF2B5EF4-FFF2-40B4-BE49-F238E27FC236}">
-                <a16:creationId xmlns:a16="http://schemas.microsoft.com/office/drawing/2014/main" id="{B26DEF2A-BEBF-4541-6E07-02927D879BD5}"/>
-              </a:ext>
-            </a:extLst>
-          </p:cNvPr>
-          <p:cNvPicPr>
-            <a:picLocks noChangeAspect="1"/>
-          </p:cNvPicPr>
-          <p:nvPr/>
-        </p:nvPicPr>
-        <p:blipFill>
-          <a:blip r:embed="rId2">
-            <a:extLst>
-              <a:ext uri="{96DAC541-7B7A-43D3-8B79-37D633B846F1}">
-                <asvg:svgBlip xmlns:asvg="http://schemas.microsoft.com/office/drawing/2016/SVG/main" r:embed="rId3"/>
-              </a:ext>
-            </a:extLst>
-          </a:blip>
-          <a:stretch>
-            <a:fillRect/>
-          </a:stretch>
-        </p:blipFill>
-        <p:spPr>
-          <a:xfrm>
-            <a:off x="8894113" y="1825625"/>
-            <a:ext cx="1153102" cy="1153102"/>
-          </a:xfrm>
-          <a:prstGeom prst="rect">
-            <a:avLst/>
-          </a:prstGeom>
-        </p:spPr>
-      </p:pic>
-      <p:pic>
-        <p:nvPicPr>
-          <p:cNvPr id="7" name="Gráfico 6" descr="Monitor com preenchimento sólido">
-            <a:extLst>
-              <a:ext uri="{FF2B5EF4-FFF2-40B4-BE49-F238E27FC236}">
-                <a16:creationId xmlns:a16="http://schemas.microsoft.com/office/drawing/2014/main" id="{ADEE0CCC-935E-2912-DD49-F7599893F840}"/>
-              </a:ext>
-            </a:extLst>
-          </p:cNvPr>
-          <p:cNvPicPr>
-            <a:picLocks noChangeAspect="1"/>
-          </p:cNvPicPr>
-          <p:nvPr/>
-        </p:nvPicPr>
-        <p:blipFill>
-          <a:blip r:embed="rId2">
-            <a:extLst>
-              <a:ext uri="{96DAC541-7B7A-43D3-8B79-37D633B846F1}">
-                <asvg:svgBlip xmlns:asvg="http://schemas.microsoft.com/office/drawing/2016/SVG/main" r:embed="rId3"/>
-              </a:ext>
-            </a:extLst>
-          </a:blip>
-          <a:stretch>
-            <a:fillRect/>
-          </a:stretch>
-        </p:blipFill>
-        <p:spPr>
-          <a:xfrm>
-            <a:off x="8894113" y="5247698"/>
-            <a:ext cx="1153102" cy="1153102"/>
-          </a:xfrm>
-          <a:prstGeom prst="rect">
-            <a:avLst/>
-          </a:prstGeom>
-        </p:spPr>
-      </p:pic>
-      <p:pic>
-        <p:nvPicPr>
-          <p:cNvPr id="10" name="Gráfico 9" descr="Chefe feminina com preenchimento sólido">
-            <a:extLst>
-              <a:ext uri="{FF2B5EF4-FFF2-40B4-BE49-F238E27FC236}">
-                <a16:creationId xmlns:a16="http://schemas.microsoft.com/office/drawing/2014/main" id="{2F00A95B-DB73-7177-A58E-7B433DCA1694}"/>
-              </a:ext>
-            </a:extLst>
-          </p:cNvPr>
-          <p:cNvPicPr>
-            <a:picLocks noChangeAspect="1"/>
-          </p:cNvPicPr>
-          <p:nvPr/>
-        </p:nvPicPr>
-        <p:blipFill>
-          <a:blip r:embed="rId4">
-            <a:extLst>
-              <a:ext uri="{96DAC541-7B7A-43D3-8B79-37D633B846F1}">
-                <asvg:svgBlip xmlns:asvg="http://schemas.microsoft.com/office/drawing/2016/SVG/main" r:embed="rId5"/>
-              </a:ext>
-            </a:extLst>
-          </a:blip>
-          <a:stretch>
-            <a:fillRect/>
-          </a:stretch>
-        </p:blipFill>
-        <p:spPr>
-          <a:xfrm>
-            <a:off x="9013464" y="3656012"/>
-            <a:ext cx="914400" cy="914400"/>
-          </a:xfrm>
-          <a:prstGeom prst="rect">
-            <a:avLst/>
-          </a:prstGeom>
-        </p:spPr>
-      </p:pic>
-      <p:cxnSp>
-        <p:nvCxnSpPr>
-          <p:cNvPr id="12" name="Conector de Seta Reta 11">
-            <a:extLst>
-              <a:ext uri="{FF2B5EF4-FFF2-40B4-BE49-F238E27FC236}">
-                <a16:creationId xmlns:a16="http://schemas.microsoft.com/office/drawing/2014/main" id="{F6FA832B-B5EB-0CA5-A064-02CA52BED239}"/>
-              </a:ext>
-            </a:extLst>
-          </p:cNvPr>
-          <p:cNvCxnSpPr>
-            <a:cxnSpLocks/>
-            <a:endCxn id="10" idx="0"/>
-          </p:cNvCxnSpPr>
-          <p:nvPr/>
-        </p:nvCxnSpPr>
-        <p:spPr>
-          <a:xfrm>
-            <a:off x="9470664" y="2978727"/>
-            <a:ext cx="0" cy="677285"/>
-          </a:xfrm>
-          <a:prstGeom prst="straightConnector1">
-            <a:avLst/>
-          </a:prstGeom>
-          <a:ln w="38100">
-            <a:solidFill>
-              <a:schemeClr val="tx1">
-                <a:lumMod val="95000"/>
-                <a:lumOff val="5000"/>
-              </a:schemeClr>
-            </a:solidFill>
-            <a:tailEnd type="triangle"/>
-          </a:ln>
-        </p:spPr>
-        <p:style>
-          <a:lnRef idx="1">
-            <a:schemeClr val="accent1"/>
-          </a:lnRef>
-          <a:fillRef idx="0">
-            <a:schemeClr val="accent1"/>
-          </a:fillRef>
-          <a:effectRef idx="0">
-            <a:schemeClr val="accent1"/>
-          </a:effectRef>
-          <a:fontRef idx="minor">
-            <a:schemeClr val="tx1"/>
-          </a:fontRef>
-        </p:style>
-      </p:cxnSp>
-      <p:cxnSp>
-        <p:nvCxnSpPr>
-          <p:cNvPr id="15" name="Conector de Seta Reta 14">
-            <a:extLst>
-              <a:ext uri="{FF2B5EF4-FFF2-40B4-BE49-F238E27FC236}">
-                <a16:creationId xmlns:a16="http://schemas.microsoft.com/office/drawing/2014/main" id="{428E6CF2-2DBC-AABF-9CCE-77D187A28992}"/>
-              </a:ext>
-            </a:extLst>
-          </p:cNvPr>
-          <p:cNvCxnSpPr>
-            <a:endCxn id="7" idx="0"/>
-          </p:cNvCxnSpPr>
-          <p:nvPr/>
-        </p:nvCxnSpPr>
-        <p:spPr>
-          <a:xfrm>
-            <a:off x="9470664" y="4570412"/>
-            <a:ext cx="0" cy="677286"/>
-          </a:xfrm>
-          <a:prstGeom prst="straightConnector1">
-            <a:avLst/>
-          </a:prstGeom>
-          <a:ln w="38100">
-            <a:solidFill>
-              <a:schemeClr val="tx1">
-                <a:lumMod val="95000"/>
-                <a:lumOff val="5000"/>
-              </a:schemeClr>
-            </a:solidFill>
-            <a:tailEnd type="triangle"/>
-          </a:ln>
-        </p:spPr>
-        <p:style>
-          <a:lnRef idx="1">
-            <a:schemeClr val="accent1"/>
-          </a:lnRef>
-          <a:fillRef idx="0">
-            <a:schemeClr val="accent1"/>
-          </a:fillRef>
-          <a:effectRef idx="0">
-            <a:schemeClr val="accent1"/>
-          </a:effectRef>
-          <a:fontRef idx="minor">
-            <a:schemeClr val="tx1"/>
-          </a:fontRef>
-        </p:style>
-      </p:cxnSp>
-      <p:sp>
-        <p:nvSpPr>
-          <p:cNvPr id="16" name="CaixaDeTexto 15">
-            <a:extLst>
-              <a:ext uri="{FF2B5EF4-FFF2-40B4-BE49-F238E27FC236}">
-                <a16:creationId xmlns:a16="http://schemas.microsoft.com/office/drawing/2014/main" id="{5DD823C0-96D7-318E-999D-ED50B2765369}"/>
+                <a16:creationId xmlns:a16="http://schemas.microsoft.com/office/drawing/2014/main" id="{C8E13B48-9E35-4A8B-FB3E-66DFE51F15DC}"/>
               </a:ext>
             </a:extLst>
           </p:cNvPr>
@@ -9943,8 +10429,8 @@
         </p:nvSpPr>
         <p:spPr>
           <a:xfrm>
-            <a:off x="7044530" y="3148092"/>
-            <a:ext cx="1968934" cy="338554"/>
+            <a:off x="2103522" y="3603742"/>
+            <a:ext cx="7984957" cy="900246"/>
           </a:xfrm>
           <a:prstGeom prst="rect">
             <a:avLst/>
@@ -9952,104 +10438,172 @@
           <a:noFill/>
         </p:spPr>
         <p:txBody>
-          <a:bodyPr wrap="square" rtlCol="0">
+          <a:bodyPr wrap="square">
             <a:spAutoFit/>
           </a:bodyPr>
           <a:lstStyle/>
           <a:p>
-            <a:r>
-              <a:rPr lang="pt-BR" sz="1600" dirty="0">
-                <a:latin typeface="Times New Roman" panose="02020603050405020304" pitchFamily="18" charset="0"/>
-                <a:cs typeface="Times New Roman" panose="02020603050405020304" pitchFamily="18" charset="0"/>
+            <a:pPr>
+              <a:lnSpc>
+                <a:spcPts val="2100"/>
+              </a:lnSpc>
+              <a:buNone/>
+            </a:pPr>
+            <a:r>
+              <a:rPr lang="pt-BR" b="0" dirty="0" err="1">
+                <a:solidFill>
+                  <a:srgbClr val="0000FF"/>
+                </a:solidFill>
+                <a:effectLst/>
+                <a:latin typeface="Consolas" panose="020B0609020204030204" pitchFamily="49" charset="0"/>
               </a:rPr>
-              <a:t>DELETE /dentista/1</a:t>
+              <a:t>function</a:t>
+            </a:r>
+            <a:r>
+              <a:rPr lang="pt-BR" b="0" dirty="0">
+                <a:solidFill>
+                  <a:srgbClr val="000000"/>
+                </a:solidFill>
+                <a:effectLst/>
+                <a:latin typeface="Consolas" panose="020B0609020204030204" pitchFamily="49" charset="0"/>
+              </a:rPr>
+              <a:t> </a:t>
+            </a:r>
+            <a:r>
+              <a:rPr lang="pt-BR" b="0" dirty="0" err="1">
+                <a:solidFill>
+                  <a:srgbClr val="000000"/>
+                </a:solidFill>
+                <a:effectLst/>
+                <a:latin typeface="Consolas" panose="020B0609020204030204" pitchFamily="49" charset="0"/>
+              </a:rPr>
+              <a:t>listarProdutos</a:t>
+            </a:r>
+            <a:r>
+              <a:rPr lang="pt-BR" b="0" dirty="0">
+                <a:solidFill>
+                  <a:srgbClr val="000000"/>
+                </a:solidFill>
+                <a:effectLst/>
+                <a:latin typeface="Consolas" panose="020B0609020204030204" pitchFamily="49" charset="0"/>
+              </a:rPr>
+              <a:t>(produtos){</a:t>
             </a:r>
           </a:p>
-        </p:txBody>
-      </p:sp>
-      <p:sp>
-        <p:nvSpPr>
-          <p:cNvPr id="17" name="CaixaDeTexto 16">
-            <a:extLst>
-              <a:ext uri="{FF2B5EF4-FFF2-40B4-BE49-F238E27FC236}">
-                <a16:creationId xmlns:a16="http://schemas.microsoft.com/office/drawing/2014/main" id="{B5C479D0-7A90-99F0-65D3-3FAA83D20330}"/>
-              </a:ext>
-            </a:extLst>
-          </p:cNvPr>
-          <p:cNvSpPr txBox="1"/>
-          <p:nvPr/>
-        </p:nvSpPr>
-        <p:spPr>
-          <a:xfrm>
-            <a:off x="7044530" y="4739778"/>
-            <a:ext cx="1739252" cy="338554"/>
-          </a:xfrm>
-          <a:prstGeom prst="rect">
-            <a:avLst/>
-          </a:prstGeom>
-          <a:noFill/>
-        </p:spPr>
-        <p:txBody>
-          <a:bodyPr wrap="square" rtlCol="0">
-            <a:spAutoFit/>
-          </a:bodyPr>
-          <a:lstStyle/>
           <a:p>
-            <a:r>
-              <a:rPr lang="pt-BR" sz="1600" dirty="0">
-                <a:latin typeface="Times New Roman" panose="02020603050405020304" pitchFamily="18" charset="0"/>
-                <a:cs typeface="Times New Roman" panose="02020603050405020304" pitchFamily="18" charset="0"/>
+            <a:pPr>
+              <a:lnSpc>
+                <a:spcPts val="2100"/>
+              </a:lnSpc>
+              <a:buNone/>
+            </a:pPr>
+            <a:r>
+              <a:rPr lang="pt-BR" b="0" dirty="0">
+                <a:solidFill>
+                  <a:srgbClr val="000000"/>
+                </a:solidFill>
+                <a:effectLst/>
+                <a:latin typeface="Consolas" panose="020B0609020204030204" pitchFamily="49" charset="0"/>
               </a:rPr>
-              <a:t>204 No </a:t>
-            </a:r>
-            <a:r>
-              <a:rPr lang="pt-BR" sz="1600" dirty="0" err="1">
-                <a:latin typeface="Times New Roman" panose="02020603050405020304" pitchFamily="18" charset="0"/>
-                <a:cs typeface="Times New Roman" panose="02020603050405020304" pitchFamily="18" charset="0"/>
+              <a:t>    </a:t>
+            </a:r>
+            <a:r>
+              <a:rPr lang="pt-BR" b="0" dirty="0" err="1">
+                <a:solidFill>
+                  <a:srgbClr val="0000FF"/>
+                </a:solidFill>
+                <a:effectLst/>
+                <a:latin typeface="Consolas" panose="020B0609020204030204" pitchFamily="49" charset="0"/>
               </a:rPr>
-              <a:t>content</a:t>
-            </a:r>
-            <a:endParaRPr lang="pt-BR" sz="1600" dirty="0">
-              <a:latin typeface="Times New Roman" panose="02020603050405020304" pitchFamily="18" charset="0"/>
-              <a:cs typeface="Times New Roman" panose="02020603050405020304" pitchFamily="18" charset="0"/>
-            </a:endParaRPr>
+              <a:t>const</a:t>
+            </a:r>
+            <a:r>
+              <a:rPr lang="pt-BR" b="0" dirty="0">
+                <a:solidFill>
+                  <a:srgbClr val="000000"/>
+                </a:solidFill>
+                <a:effectLst/>
+                <a:latin typeface="Consolas" panose="020B0609020204030204" pitchFamily="49" charset="0"/>
+              </a:rPr>
+              <a:t> tabela = </a:t>
+            </a:r>
+            <a:r>
+              <a:rPr lang="pt-BR" b="0" dirty="0" err="1">
+                <a:solidFill>
+                  <a:srgbClr val="000000"/>
+                </a:solidFill>
+                <a:effectLst/>
+                <a:latin typeface="Consolas" panose="020B0609020204030204" pitchFamily="49" charset="0"/>
+              </a:rPr>
+              <a:t>document.querySelector</a:t>
+            </a:r>
+            <a:r>
+              <a:rPr lang="pt-BR" b="0" dirty="0">
+                <a:solidFill>
+                  <a:srgbClr val="000000"/>
+                </a:solidFill>
+                <a:effectLst/>
+                <a:latin typeface="Consolas" panose="020B0609020204030204" pitchFamily="49" charset="0"/>
+              </a:rPr>
+              <a:t>(</a:t>
+            </a:r>
+            <a:r>
+              <a:rPr lang="pt-BR" b="0" dirty="0">
+                <a:solidFill>
+                  <a:srgbClr val="A31515"/>
+                </a:solidFill>
+                <a:effectLst/>
+                <a:latin typeface="Consolas" panose="020B0609020204030204" pitchFamily="49" charset="0"/>
+              </a:rPr>
+              <a:t>"#</a:t>
+            </a:r>
+            <a:r>
+              <a:rPr lang="pt-BR" b="0" dirty="0" err="1">
+                <a:solidFill>
+                  <a:srgbClr val="A31515"/>
+                </a:solidFill>
+                <a:effectLst/>
+                <a:latin typeface="Consolas" panose="020B0609020204030204" pitchFamily="49" charset="0"/>
+              </a:rPr>
+              <a:t>mostrarProdutos</a:t>
+            </a:r>
+            <a:r>
+              <a:rPr lang="pt-BR" b="0" dirty="0">
+                <a:solidFill>
+                  <a:srgbClr val="A31515"/>
+                </a:solidFill>
+                <a:effectLst/>
+                <a:latin typeface="Consolas" panose="020B0609020204030204" pitchFamily="49" charset="0"/>
+              </a:rPr>
+              <a:t>"</a:t>
+            </a:r>
+            <a:r>
+              <a:rPr lang="pt-BR" b="0" dirty="0">
+                <a:solidFill>
+                  <a:srgbClr val="000000"/>
+                </a:solidFill>
+                <a:effectLst/>
+                <a:latin typeface="Consolas" panose="020B0609020204030204" pitchFamily="49" charset="0"/>
+              </a:rPr>
+              <a:t>)</a:t>
+            </a:r>
           </a:p>
-        </p:txBody>
-      </p:sp>
-      <p:sp>
-        <p:nvSpPr>
-          <p:cNvPr id="18" name="CaixaDeTexto 17">
-            <a:extLst>
-              <a:ext uri="{FF2B5EF4-FFF2-40B4-BE49-F238E27FC236}">
-                <a16:creationId xmlns:a16="http://schemas.microsoft.com/office/drawing/2014/main" id="{6CF21398-A554-377B-19F1-A11CA0A06C09}"/>
-              </a:ext>
-            </a:extLst>
-          </p:cNvPr>
-          <p:cNvSpPr txBox="1"/>
-          <p:nvPr/>
-        </p:nvSpPr>
-        <p:spPr>
-          <a:xfrm>
-            <a:off x="10157547" y="4739778"/>
-            <a:ext cx="1153102" cy="338554"/>
-          </a:xfrm>
-          <a:prstGeom prst="rect">
-            <a:avLst/>
-          </a:prstGeom>
-          <a:noFill/>
-        </p:spPr>
-        <p:txBody>
-          <a:bodyPr wrap="square" rtlCol="0">
-            <a:spAutoFit/>
-          </a:bodyPr>
-          <a:lstStyle/>
           <a:p>
-            <a:r>
-              <a:rPr lang="pt-BR" sz="1600" dirty="0">
-                <a:latin typeface="Times New Roman" panose="02020603050405020304" pitchFamily="18" charset="0"/>
-                <a:cs typeface="Times New Roman" panose="02020603050405020304" pitchFamily="18" charset="0"/>
+            <a:pPr>
+              <a:lnSpc>
+                <a:spcPts val="2100"/>
+              </a:lnSpc>
+              <a:buNone/>
+            </a:pPr>
+            <a:r>
+              <a:rPr lang="pt-BR" b="0" dirty="0">
+                <a:solidFill>
+                  <a:srgbClr val="000000"/>
+                </a:solidFill>
+                <a:effectLst/>
+                <a:latin typeface="Consolas" panose="020B0609020204030204" pitchFamily="49" charset="0"/>
               </a:rPr>
-              <a:t>200 ok</a:t>
+              <a:t>}</a:t>
             </a:r>
           </a:p>
         </p:txBody>
@@ -10057,7 +10611,7 @@
     </p:spTree>
     <p:extLst>
       <p:ext uri="{BB962C8B-B14F-4D97-AF65-F5344CB8AC3E}">
-        <p14:creationId xmlns:p14="http://schemas.microsoft.com/office/powerpoint/2010/main" val="397545359"/>
+        <p14:creationId xmlns:p14="http://schemas.microsoft.com/office/powerpoint/2010/main" val="3569307158"/>
       </p:ext>
     </p:extLst>
   </p:cSld>
@@ -10086,10 +10640,10 @@
       </p:grpSpPr>
       <p:sp>
         <p:nvSpPr>
-          <p:cNvPr id="5" name="Título 4">
+          <p:cNvPr id="2" name="Título 1">
             <a:extLst>
               <a:ext uri="{FF2B5EF4-FFF2-40B4-BE49-F238E27FC236}">
-                <a16:creationId xmlns:a16="http://schemas.microsoft.com/office/drawing/2014/main" id="{4C794F55-4CFD-3395-272F-56DD2DB1DAE9}"/>
+                <a16:creationId xmlns:a16="http://schemas.microsoft.com/office/drawing/2014/main" id="{D1EBE513-E8B6-17E0-77CE-CD6904CDD07E}"/>
               </a:ext>
             </a:extLst>
           </p:cNvPr>
@@ -10107,17 +10661,17 @@
           <a:p>
             <a:r>
               <a:rPr lang="pt-BR" dirty="0"/>
-              <a:t>Por que não retornar sempre 200?</a:t>
+              <a:t>Percorrendo a lista</a:t>
             </a:r>
           </a:p>
         </p:txBody>
       </p:sp>
       <p:sp>
         <p:nvSpPr>
-          <p:cNvPr id="6" name="Espaço Reservado para Conteúdo 5">
+          <p:cNvPr id="3" name="Espaço Reservado para Conteúdo 2">
             <a:extLst>
               <a:ext uri="{FF2B5EF4-FFF2-40B4-BE49-F238E27FC236}">
-                <a16:creationId xmlns:a16="http://schemas.microsoft.com/office/drawing/2014/main" id="{1B398AE6-87A0-5B75-09C1-38A6451BA438}"/>
+                <a16:creationId xmlns:a16="http://schemas.microsoft.com/office/drawing/2014/main" id="{E360001D-644E-4C78-11FF-57A117A33A20}"/>
               </a:ext>
             </a:extLst>
           </p:cNvPr>
@@ -10131,7 +10685,7 @@
         <p:spPr>
           <a:xfrm>
             <a:off x="592347" y="1844675"/>
-            <a:ext cx="3854962" cy="934299"/>
+            <a:ext cx="11007306" cy="1139157"/>
           </a:xfrm>
         </p:spPr>
         <p:txBody>
@@ -10139,25 +10693,395 @@
           <a:lstStyle/>
           <a:p>
             <a:r>
-              <a:rPr lang="pl-PL" dirty="0"/>
-              <a:t>O problema do 200 OK</a:t>
-            </a:r>
-            <a:endParaRPr lang="pt-BR" dirty="0"/>
+              <a:rPr lang="pt-BR" dirty="0"/>
+              <a:t>Agora devemos percorrer a lista para inserir cada linha que foi retornada do </a:t>
+            </a:r>
+            <a:r>
+              <a:rPr lang="pt-BR" dirty="0" err="1"/>
+              <a:t>array</a:t>
+            </a:r>
+            <a:r>
+              <a:rPr lang="pt-BR" dirty="0"/>
+              <a:t>, para isso usamos o </a:t>
+            </a:r>
+            <a:r>
+              <a:rPr lang="pt-BR" dirty="0" err="1"/>
+              <a:t>forEach</a:t>
+            </a:r>
+            <a:r>
+              <a:rPr lang="pt-BR" dirty="0"/>
+              <a:t>.</a:t>
+            </a:r>
           </a:p>
+        </p:txBody>
+      </p:sp>
+      <p:pic>
+        <p:nvPicPr>
+          <p:cNvPr id="7" name="Imagem 6">
+            <a:extLst>
+              <a:ext uri="{FF2B5EF4-FFF2-40B4-BE49-F238E27FC236}">
+                <a16:creationId xmlns:a16="http://schemas.microsoft.com/office/drawing/2014/main" id="{A029A5B4-EBF9-C928-1C27-7388D20171D0}"/>
+              </a:ext>
+            </a:extLst>
+          </p:cNvPr>
+          <p:cNvPicPr>
+            <a:picLocks noChangeAspect="1"/>
+          </p:cNvPicPr>
+          <p:nvPr/>
+        </p:nvPicPr>
+        <p:blipFill>
+          <a:blip r:embed="rId2"/>
+          <a:stretch>
+            <a:fillRect/>
+          </a:stretch>
+        </p:blipFill>
+        <p:spPr>
+          <a:xfrm>
+            <a:off x="1066364" y="2983832"/>
+            <a:ext cx="10059272" cy="3254022"/>
+          </a:xfrm>
+          <a:prstGeom prst="rect">
+            <a:avLst/>
+          </a:prstGeom>
+        </p:spPr>
+      </p:pic>
+    </p:spTree>
+    <p:extLst>
+      <p:ext uri="{BB962C8B-B14F-4D97-AF65-F5344CB8AC3E}">
+        <p14:creationId xmlns:p14="http://schemas.microsoft.com/office/powerpoint/2010/main" val="1276528435"/>
+      </p:ext>
+    </p:extLst>
+  </p:cSld>
+  <p:clrMapOvr>
+    <a:masterClrMapping/>
+  </p:clrMapOvr>
+</p:sld>
+</file>
+
+<file path=ppt/slides/slide25.xml><?xml version="1.0" encoding="utf-8"?>
+<p:sld xmlns:a="http://schemas.openxmlformats.org/drawingml/2006/main" xmlns:r="http://schemas.openxmlformats.org/officeDocument/2006/relationships" xmlns:p="http://schemas.openxmlformats.org/presentationml/2006/main">
+  <p:cSld>
+    <p:spTree>
+      <p:nvGrpSpPr>
+        <p:cNvPr id="1" name=""/>
+        <p:cNvGrpSpPr/>
+        <p:nvPr/>
+      </p:nvGrpSpPr>
+      <p:grpSpPr>
+        <a:xfrm>
+          <a:off x="0" y="0"/>
+          <a:ext cx="0" cy="0"/>
+          <a:chOff x="0" y="0"/>
+          <a:chExt cx="0" cy="0"/>
+        </a:xfrm>
+      </p:grpSpPr>
+      <p:sp>
+        <p:nvSpPr>
+          <p:cNvPr id="2" name="Título 1">
+            <a:extLst>
+              <a:ext uri="{FF2B5EF4-FFF2-40B4-BE49-F238E27FC236}">
+                <a16:creationId xmlns:a16="http://schemas.microsoft.com/office/drawing/2014/main" id="{51140470-2246-434A-0606-3C4B955BDF6F}"/>
+              </a:ext>
+            </a:extLst>
+          </p:cNvPr>
+          <p:cNvSpPr>
+            <a:spLocks noGrp="1"/>
+          </p:cNvSpPr>
+          <p:nvPr>
+            <p:ph type="title"/>
+          </p:nvPr>
+        </p:nvSpPr>
+        <p:spPr/>
+        <p:txBody>
+          <a:bodyPr/>
+          <a:lstStyle/>
           <a:p>
             <a:r>
               <a:rPr lang="pt-BR" dirty="0"/>
-              <a:t>Imagine que a API sempre retorne:</a:t>
+              <a:t>Criando os elementos na tabela</a:t>
+            </a:r>
+          </a:p>
+        </p:txBody>
+      </p:sp>
+      <p:sp>
+        <p:nvSpPr>
+          <p:cNvPr id="3" name="Espaço Reservado para Conteúdo 2">
+            <a:extLst>
+              <a:ext uri="{FF2B5EF4-FFF2-40B4-BE49-F238E27FC236}">
+                <a16:creationId xmlns:a16="http://schemas.microsoft.com/office/drawing/2014/main" id="{B6E609FD-81A0-4763-6A1B-7331D07D6084}"/>
+              </a:ext>
+            </a:extLst>
+          </p:cNvPr>
+          <p:cNvSpPr>
+            <a:spLocks noGrp="1"/>
+          </p:cNvSpPr>
+          <p:nvPr>
+            <p:ph idx="1"/>
+          </p:nvPr>
+        </p:nvSpPr>
+        <p:spPr>
+          <a:xfrm>
+            <a:off x="592347" y="1844675"/>
+            <a:ext cx="11007306" cy="1155199"/>
+          </a:xfrm>
+        </p:spPr>
+        <p:txBody>
+          <a:bodyPr/>
+          <a:lstStyle/>
+          <a:p>
+            <a:r>
+              <a:rPr lang="pt-BR" dirty="0"/>
+              <a:t>Para a criação dos elementos na tabela, devemos utilizar o </a:t>
+            </a:r>
+            <a:r>
+              <a:rPr lang="pt-BR" sz="1800" kern="0" spc="-19" dirty="0" err="1">
+                <a:solidFill>
+                  <a:srgbClr val="D73A49"/>
+                </a:solidFill>
+                <a:latin typeface="Consolas" pitchFamily="34" charset="0"/>
+              </a:rPr>
+              <a:t>createElement</a:t>
+            </a:r>
+            <a:r>
+              <a:rPr lang="pt-BR" sz="1800" kern="0" spc="-19" dirty="0">
+                <a:solidFill>
+                  <a:srgbClr val="D73A49"/>
+                </a:solidFill>
+                <a:latin typeface="Consolas" pitchFamily="34" charset="0"/>
+              </a:rPr>
+              <a:t>()</a:t>
+            </a:r>
+            <a:r>
+              <a:rPr lang="pt-BR" dirty="0"/>
+              <a:t>, ele é o responsável por criar todos as </a:t>
+            </a:r>
+            <a:r>
+              <a:rPr lang="pt-BR" dirty="0" err="1"/>
+              <a:t>tags</a:t>
+            </a:r>
+            <a:r>
+              <a:rPr lang="pt-BR" dirty="0"/>
+              <a:t> diretamente do </a:t>
+            </a:r>
+            <a:r>
+              <a:rPr lang="pt-BR" dirty="0" err="1"/>
+              <a:t>js</a:t>
+            </a:r>
+            <a:r>
+              <a:rPr lang="pt-BR" dirty="0"/>
+              <a:t>.</a:t>
+            </a:r>
+          </a:p>
+        </p:txBody>
+      </p:sp>
+      <p:sp>
+        <p:nvSpPr>
+          <p:cNvPr id="5" name="Espaço Reservado para Conteúdo 5">
+            <a:extLst>
+              <a:ext uri="{FF2B5EF4-FFF2-40B4-BE49-F238E27FC236}">
+                <a16:creationId xmlns:a16="http://schemas.microsoft.com/office/drawing/2014/main" id="{4A1E6A79-63C2-8596-900A-3141C0024F79}"/>
+              </a:ext>
+            </a:extLst>
+          </p:cNvPr>
+          <p:cNvSpPr txBox="1">
+            <a:spLocks/>
+          </p:cNvSpPr>
+          <p:nvPr/>
+        </p:nvSpPr>
+        <p:spPr>
+          <a:xfrm>
+            <a:off x="592347" y="4967376"/>
+            <a:ext cx="5359879" cy="366590"/>
+          </a:xfrm>
+          <a:prstGeom prst="rect">
+            <a:avLst/>
+          </a:prstGeom>
+        </p:spPr>
+        <p:txBody>
+          <a:bodyPr/>
+          <a:lstStyle>
+            <a:lvl1pPr marL="0" indent="0" algn="just" defTabSz="914400" rtl="0" eaLnBrk="1" latinLnBrk="0" hangingPunct="1">
+              <a:lnSpc>
+                <a:spcPct val="150000"/>
+              </a:lnSpc>
+              <a:spcBef>
+                <a:spcPts val="0"/>
+              </a:spcBef>
+              <a:buFont typeface="Arial" panose="020B0604020202020204" pitchFamily="34" charset="0"/>
+              <a:buNone/>
+              <a:defRPr sz="2000" kern="1200">
+                <a:solidFill>
+                  <a:schemeClr val="tx1"/>
+                </a:solidFill>
+                <a:latin typeface="Times New Roman" panose="02020603050405020304" pitchFamily="18" charset="0"/>
+                <a:ea typeface="+mn-ea"/>
+                <a:cs typeface="Times New Roman" panose="02020603050405020304" pitchFamily="18" charset="0"/>
+              </a:defRPr>
+            </a:lvl1pPr>
+            <a:lvl2pPr marL="457200" indent="0" algn="just" defTabSz="914400" rtl="0" eaLnBrk="1" latinLnBrk="0" hangingPunct="1">
+              <a:lnSpc>
+                <a:spcPct val="150000"/>
+              </a:lnSpc>
+              <a:spcBef>
+                <a:spcPts val="0"/>
+              </a:spcBef>
+              <a:buFont typeface="Arial" panose="020B0604020202020204" pitchFamily="34" charset="0"/>
+              <a:buNone/>
+              <a:defRPr sz="1600" kern="1200">
+                <a:solidFill>
+                  <a:schemeClr val="tx1"/>
+                </a:solidFill>
+                <a:latin typeface="Times New Roman" panose="02020603050405020304" pitchFamily="18" charset="0"/>
+                <a:ea typeface="+mn-ea"/>
+                <a:cs typeface="Times New Roman" panose="02020603050405020304" pitchFamily="18" charset="0"/>
+              </a:defRPr>
+            </a:lvl2pPr>
+            <a:lvl3pPr marL="914400" indent="0" algn="just" defTabSz="914400" rtl="0" eaLnBrk="1" latinLnBrk="0" hangingPunct="1">
+              <a:lnSpc>
+                <a:spcPct val="150000"/>
+              </a:lnSpc>
+              <a:spcBef>
+                <a:spcPts val="0"/>
+              </a:spcBef>
+              <a:buFont typeface="Arial" panose="020B0604020202020204" pitchFamily="34" charset="0"/>
+              <a:buNone/>
+              <a:defRPr sz="1400" kern="1200">
+                <a:solidFill>
+                  <a:schemeClr val="tx1"/>
+                </a:solidFill>
+                <a:latin typeface="Times New Roman" panose="02020603050405020304" pitchFamily="18" charset="0"/>
+                <a:ea typeface="+mn-ea"/>
+                <a:cs typeface="Times New Roman" panose="02020603050405020304" pitchFamily="18" charset="0"/>
+              </a:defRPr>
+            </a:lvl3pPr>
+            <a:lvl4pPr marL="1371600" indent="0" algn="just" defTabSz="914400" rtl="0" eaLnBrk="1" latinLnBrk="0" hangingPunct="1">
+              <a:lnSpc>
+                <a:spcPct val="150000"/>
+              </a:lnSpc>
+              <a:spcBef>
+                <a:spcPts val="0"/>
+              </a:spcBef>
+              <a:buFont typeface="Arial" panose="020B0604020202020204" pitchFamily="34" charset="0"/>
+              <a:buNone/>
+              <a:defRPr sz="1200" kern="1200">
+                <a:solidFill>
+                  <a:schemeClr val="tx1"/>
+                </a:solidFill>
+                <a:latin typeface="Times New Roman" panose="02020603050405020304" pitchFamily="18" charset="0"/>
+                <a:ea typeface="+mn-ea"/>
+                <a:cs typeface="Times New Roman" panose="02020603050405020304" pitchFamily="18" charset="0"/>
+              </a:defRPr>
+            </a:lvl4pPr>
+            <a:lvl5pPr marL="1828800" indent="0" algn="just" defTabSz="914400" rtl="0" eaLnBrk="1" latinLnBrk="0" hangingPunct="1">
+              <a:lnSpc>
+                <a:spcPct val="150000"/>
+              </a:lnSpc>
+              <a:spcBef>
+                <a:spcPts val="0"/>
+              </a:spcBef>
+              <a:buFont typeface="Arial" panose="020B0604020202020204" pitchFamily="34" charset="0"/>
+              <a:buNone/>
+              <a:defRPr sz="1000" kern="1200">
+                <a:solidFill>
+                  <a:schemeClr val="tx1"/>
+                </a:solidFill>
+                <a:latin typeface="Times New Roman" panose="02020603050405020304" pitchFamily="18" charset="0"/>
+                <a:ea typeface="+mn-ea"/>
+                <a:cs typeface="Times New Roman" panose="02020603050405020304" pitchFamily="18" charset="0"/>
+              </a:defRPr>
+            </a:lvl5pPr>
+            <a:lvl6pPr marL="2514600" indent="-228600" algn="l" defTabSz="914400" rtl="0" eaLnBrk="1" latinLnBrk="0" hangingPunct="1">
+              <a:lnSpc>
+                <a:spcPct val="90000"/>
+              </a:lnSpc>
+              <a:spcBef>
+                <a:spcPts val="500"/>
+              </a:spcBef>
+              <a:buFont typeface="Arial" panose="020B0604020202020204" pitchFamily="34" charset="0"/>
+              <a:buChar char="•"/>
+              <a:defRPr sz="1800" kern="1200">
+                <a:solidFill>
+                  <a:schemeClr val="tx1"/>
+                </a:solidFill>
+                <a:latin typeface="+mn-lt"/>
+                <a:ea typeface="+mn-ea"/>
+                <a:cs typeface="+mn-cs"/>
+              </a:defRPr>
+            </a:lvl6pPr>
+            <a:lvl7pPr marL="2971800" indent="-228600" algn="l" defTabSz="914400" rtl="0" eaLnBrk="1" latinLnBrk="0" hangingPunct="1">
+              <a:lnSpc>
+                <a:spcPct val="90000"/>
+              </a:lnSpc>
+              <a:spcBef>
+                <a:spcPts val="500"/>
+              </a:spcBef>
+              <a:buFont typeface="Arial" panose="020B0604020202020204" pitchFamily="34" charset="0"/>
+              <a:buChar char="•"/>
+              <a:defRPr sz="1800" kern="1200">
+                <a:solidFill>
+                  <a:schemeClr val="tx1"/>
+                </a:solidFill>
+                <a:latin typeface="+mn-lt"/>
+                <a:ea typeface="+mn-ea"/>
+                <a:cs typeface="+mn-cs"/>
+              </a:defRPr>
+            </a:lvl7pPr>
+            <a:lvl8pPr marL="3429000" indent="-228600" algn="l" defTabSz="914400" rtl="0" eaLnBrk="1" latinLnBrk="0" hangingPunct="1">
+              <a:lnSpc>
+                <a:spcPct val="90000"/>
+              </a:lnSpc>
+              <a:spcBef>
+                <a:spcPts val="500"/>
+              </a:spcBef>
+              <a:buFont typeface="Arial" panose="020B0604020202020204" pitchFamily="34" charset="0"/>
+              <a:buChar char="•"/>
+              <a:defRPr sz="1800" kern="1200">
+                <a:solidFill>
+                  <a:schemeClr val="tx1"/>
+                </a:solidFill>
+                <a:latin typeface="+mn-lt"/>
+                <a:ea typeface="+mn-ea"/>
+                <a:cs typeface="+mn-cs"/>
+              </a:defRPr>
+            </a:lvl8pPr>
+            <a:lvl9pPr marL="3886200" indent="-228600" algn="l" defTabSz="914400" rtl="0" eaLnBrk="1" latinLnBrk="0" hangingPunct="1">
+              <a:lnSpc>
+                <a:spcPct val="90000"/>
+              </a:lnSpc>
+              <a:spcBef>
+                <a:spcPts val="500"/>
+              </a:spcBef>
+              <a:buFont typeface="Arial" panose="020B0604020202020204" pitchFamily="34" charset="0"/>
+              <a:buChar char="•"/>
+              <a:defRPr sz="1800" kern="1200">
+                <a:solidFill>
+                  <a:schemeClr val="tx1"/>
+                </a:solidFill>
+                <a:latin typeface="+mn-lt"/>
+                <a:ea typeface="+mn-ea"/>
+                <a:cs typeface="+mn-cs"/>
+              </a:defRPr>
+            </a:lvl9pPr>
+          </a:lstStyle>
+          <a:p>
+            <a:pPr>
+              <a:lnSpc>
+                <a:spcPct val="100000"/>
+              </a:lnSpc>
+            </a:pPr>
+            <a:r>
+              <a:rPr lang="pt-BR" sz="1600" dirty="0"/>
+              <a:t>Exemplo:</a:t>
             </a:r>
           </a:p>
         </p:txBody>
       </p:sp>
       <p:grpSp>
         <p:nvGrpSpPr>
-          <p:cNvPr id="9" name="Agrupar 8">
+          <p:cNvPr id="6" name="Agrupar 5">
             <a:extLst>
               <a:ext uri="{FF2B5EF4-FFF2-40B4-BE49-F238E27FC236}">
-                <a16:creationId xmlns:a16="http://schemas.microsoft.com/office/drawing/2014/main" id="{D68E81AC-D157-BA7D-9D04-357F11166B7F}"/>
+                <a16:creationId xmlns:a16="http://schemas.microsoft.com/office/drawing/2014/main" id="{51696414-F518-1EE4-FAF7-626FC308E65A}"/>
               </a:ext>
             </a:extLst>
           </p:cNvPr>
@@ -10166,8 +11090,8 @@
         </p:nvGrpSpPr>
         <p:grpSpPr>
           <a:xfrm>
-            <a:off x="749185" y="2929003"/>
-            <a:ext cx="3744126" cy="638572"/>
+            <a:off x="749184" y="5654746"/>
+            <a:ext cx="8907433" cy="638572"/>
             <a:chOff x="749185" y="2527734"/>
             <a:chExt cx="5284556" cy="638572"/>
           </a:xfrm>
@@ -10177,7 +11101,7 @@
             <p:cNvPr id="7" name="Shape 20">
               <a:extLst>
                 <a:ext uri="{FF2B5EF4-FFF2-40B4-BE49-F238E27FC236}">
-                  <a16:creationId xmlns:a16="http://schemas.microsoft.com/office/drawing/2014/main" id="{099A7046-6B53-424C-9D65-D39D7084A6C8}"/>
+                  <a16:creationId xmlns:a16="http://schemas.microsoft.com/office/drawing/2014/main" id="{7EADE318-399D-5A94-5FCA-E984D943012A}"/>
                 </a:ext>
               </a:extLst>
             </p:cNvPr>
@@ -10212,7 +11136,7 @@
             <p:cNvPr id="8" name="Text 21">
               <a:extLst>
                 <a:ext uri="{FF2B5EF4-FFF2-40B4-BE49-F238E27FC236}">
-                  <a16:creationId xmlns:a16="http://schemas.microsoft.com/office/drawing/2014/main" id="{5F947C80-BA30-A56B-4289-9B84B915316C}"/>
+                  <a16:creationId xmlns:a16="http://schemas.microsoft.com/office/drawing/2014/main" id="{96033345-14B6-CD6B-2964-B4A5E56C4CAF}"/>
                 </a:ext>
               </a:extLst>
             </p:cNvPr>
@@ -10240,7 +11164,7 @@
                 <a:buNone/>
               </a:pPr>
               <a:r>
-                <a:rPr lang="en-US" sz="1600" kern="0" spc="-19" dirty="0">
+                <a:rPr lang="en-US" kern="0" spc="-19" dirty="0">
                   <a:solidFill>
                     <a:srgbClr val="D73A49"/>
                   </a:solidFill>
@@ -10248,57 +11172,243 @@
                   <a:ea typeface="Consolas" pitchFamily="34" charset="-122"/>
                   <a:cs typeface="Consolas" pitchFamily="34" charset="-120"/>
                 </a:rPr>
-                <a:t>200 ok</a:t>
-              </a:r>
-              <a:endParaRPr lang="en-US" sz="1600" dirty="0"/>
+                <a:t>const tr = </a:t>
+              </a:r>
+              <a:r>
+                <a:rPr lang="en-US" kern="0" spc="-19" dirty="0" err="1">
+                  <a:solidFill>
+                    <a:srgbClr val="D73A49"/>
+                  </a:solidFill>
+                  <a:latin typeface="Consolas" pitchFamily="34" charset="0"/>
+                  <a:ea typeface="Consolas" pitchFamily="34" charset="-122"/>
+                  <a:cs typeface="Consolas" pitchFamily="34" charset="-120"/>
+                </a:rPr>
+                <a:t>document.createElement</a:t>
+              </a:r>
+              <a:r>
+                <a:rPr lang="en-US" kern="0" spc="-19" dirty="0">
+                  <a:solidFill>
+                    <a:srgbClr val="D73A49"/>
+                  </a:solidFill>
+                  <a:latin typeface="Consolas" pitchFamily="34" charset="0"/>
+                  <a:ea typeface="Consolas" pitchFamily="34" charset="-122"/>
+                  <a:cs typeface="Consolas" pitchFamily="34" charset="-120"/>
+                </a:rPr>
+                <a:t>("tr")</a:t>
+              </a:r>
+              <a:endParaRPr lang="en-US" dirty="0"/>
             </a:p>
           </p:txBody>
         </p:sp>
       </p:grpSp>
       <p:sp>
         <p:nvSpPr>
-          <p:cNvPr id="11" name="CaixaDeTexto 10">
+          <p:cNvPr id="10" name="Espaço Reservado para Conteúdo 5">
             <a:extLst>
               <a:ext uri="{FF2B5EF4-FFF2-40B4-BE49-F238E27FC236}">
-                <a16:creationId xmlns:a16="http://schemas.microsoft.com/office/drawing/2014/main" id="{758A7394-E2A5-22A7-2C5E-BCC8E1135833}"/>
+                <a16:creationId xmlns:a16="http://schemas.microsoft.com/office/drawing/2014/main" id="{3B00C422-7545-2A33-6D79-2286B0980992}"/>
               </a:ext>
             </a:extLst>
           </p:cNvPr>
-          <p:cNvSpPr txBox="1"/>
+          <p:cNvSpPr txBox="1">
+            <a:spLocks/>
+          </p:cNvSpPr>
           <p:nvPr/>
         </p:nvSpPr>
         <p:spPr>
           <a:xfrm>
-            <a:off x="592347" y="3894361"/>
-            <a:ext cx="6109854" cy="400110"/>
+            <a:off x="592347" y="3320654"/>
+            <a:ext cx="8189344" cy="366590"/>
           </a:xfrm>
           <a:prstGeom prst="rect">
             <a:avLst/>
           </a:prstGeom>
-          <a:noFill/>
         </p:spPr>
         <p:txBody>
-          <a:bodyPr wrap="square">
-            <a:spAutoFit/>
-          </a:bodyPr>
-          <a:lstStyle/>
+          <a:bodyPr/>
+          <a:lstStyle>
+            <a:lvl1pPr marL="0" indent="0" algn="just" defTabSz="914400" rtl="0" eaLnBrk="1" latinLnBrk="0" hangingPunct="1">
+              <a:lnSpc>
+                <a:spcPct val="150000"/>
+              </a:lnSpc>
+              <a:spcBef>
+                <a:spcPts val="0"/>
+              </a:spcBef>
+              <a:buFont typeface="Arial" panose="020B0604020202020204" pitchFamily="34" charset="0"/>
+              <a:buNone/>
+              <a:defRPr sz="2000" kern="1200">
+                <a:solidFill>
+                  <a:schemeClr val="tx1"/>
+                </a:solidFill>
+                <a:latin typeface="Times New Roman" panose="02020603050405020304" pitchFamily="18" charset="0"/>
+                <a:ea typeface="+mn-ea"/>
+                <a:cs typeface="Times New Roman" panose="02020603050405020304" pitchFamily="18" charset="0"/>
+              </a:defRPr>
+            </a:lvl1pPr>
+            <a:lvl2pPr marL="457200" indent="0" algn="just" defTabSz="914400" rtl="0" eaLnBrk="1" latinLnBrk="0" hangingPunct="1">
+              <a:lnSpc>
+                <a:spcPct val="150000"/>
+              </a:lnSpc>
+              <a:spcBef>
+                <a:spcPts val="0"/>
+              </a:spcBef>
+              <a:buFont typeface="Arial" panose="020B0604020202020204" pitchFamily="34" charset="0"/>
+              <a:buNone/>
+              <a:defRPr sz="1600" kern="1200">
+                <a:solidFill>
+                  <a:schemeClr val="tx1"/>
+                </a:solidFill>
+                <a:latin typeface="Times New Roman" panose="02020603050405020304" pitchFamily="18" charset="0"/>
+                <a:ea typeface="+mn-ea"/>
+                <a:cs typeface="Times New Roman" panose="02020603050405020304" pitchFamily="18" charset="0"/>
+              </a:defRPr>
+            </a:lvl2pPr>
+            <a:lvl3pPr marL="914400" indent="0" algn="just" defTabSz="914400" rtl="0" eaLnBrk="1" latinLnBrk="0" hangingPunct="1">
+              <a:lnSpc>
+                <a:spcPct val="150000"/>
+              </a:lnSpc>
+              <a:spcBef>
+                <a:spcPts val="0"/>
+              </a:spcBef>
+              <a:buFont typeface="Arial" panose="020B0604020202020204" pitchFamily="34" charset="0"/>
+              <a:buNone/>
+              <a:defRPr sz="1400" kern="1200">
+                <a:solidFill>
+                  <a:schemeClr val="tx1"/>
+                </a:solidFill>
+                <a:latin typeface="Times New Roman" panose="02020603050405020304" pitchFamily="18" charset="0"/>
+                <a:ea typeface="+mn-ea"/>
+                <a:cs typeface="Times New Roman" panose="02020603050405020304" pitchFamily="18" charset="0"/>
+              </a:defRPr>
+            </a:lvl3pPr>
+            <a:lvl4pPr marL="1371600" indent="0" algn="just" defTabSz="914400" rtl="0" eaLnBrk="1" latinLnBrk="0" hangingPunct="1">
+              <a:lnSpc>
+                <a:spcPct val="150000"/>
+              </a:lnSpc>
+              <a:spcBef>
+                <a:spcPts val="0"/>
+              </a:spcBef>
+              <a:buFont typeface="Arial" panose="020B0604020202020204" pitchFamily="34" charset="0"/>
+              <a:buNone/>
+              <a:defRPr sz="1200" kern="1200">
+                <a:solidFill>
+                  <a:schemeClr val="tx1"/>
+                </a:solidFill>
+                <a:latin typeface="Times New Roman" panose="02020603050405020304" pitchFamily="18" charset="0"/>
+                <a:ea typeface="+mn-ea"/>
+                <a:cs typeface="Times New Roman" panose="02020603050405020304" pitchFamily="18" charset="0"/>
+              </a:defRPr>
+            </a:lvl4pPr>
+            <a:lvl5pPr marL="1828800" indent="0" algn="just" defTabSz="914400" rtl="0" eaLnBrk="1" latinLnBrk="0" hangingPunct="1">
+              <a:lnSpc>
+                <a:spcPct val="150000"/>
+              </a:lnSpc>
+              <a:spcBef>
+                <a:spcPts val="0"/>
+              </a:spcBef>
+              <a:buFont typeface="Arial" panose="020B0604020202020204" pitchFamily="34" charset="0"/>
+              <a:buNone/>
+              <a:defRPr sz="1000" kern="1200">
+                <a:solidFill>
+                  <a:schemeClr val="tx1"/>
+                </a:solidFill>
+                <a:latin typeface="Times New Roman" panose="02020603050405020304" pitchFamily="18" charset="0"/>
+                <a:ea typeface="+mn-ea"/>
+                <a:cs typeface="Times New Roman" panose="02020603050405020304" pitchFamily="18" charset="0"/>
+              </a:defRPr>
+            </a:lvl5pPr>
+            <a:lvl6pPr marL="2514600" indent="-228600" algn="l" defTabSz="914400" rtl="0" eaLnBrk="1" latinLnBrk="0" hangingPunct="1">
+              <a:lnSpc>
+                <a:spcPct val="90000"/>
+              </a:lnSpc>
+              <a:spcBef>
+                <a:spcPts val="500"/>
+              </a:spcBef>
+              <a:buFont typeface="Arial" panose="020B0604020202020204" pitchFamily="34" charset="0"/>
+              <a:buChar char="•"/>
+              <a:defRPr sz="1800" kern="1200">
+                <a:solidFill>
+                  <a:schemeClr val="tx1"/>
+                </a:solidFill>
+                <a:latin typeface="+mn-lt"/>
+                <a:ea typeface="+mn-ea"/>
+                <a:cs typeface="+mn-cs"/>
+              </a:defRPr>
+            </a:lvl6pPr>
+            <a:lvl7pPr marL="2971800" indent="-228600" algn="l" defTabSz="914400" rtl="0" eaLnBrk="1" latinLnBrk="0" hangingPunct="1">
+              <a:lnSpc>
+                <a:spcPct val="90000"/>
+              </a:lnSpc>
+              <a:spcBef>
+                <a:spcPts val="500"/>
+              </a:spcBef>
+              <a:buFont typeface="Arial" panose="020B0604020202020204" pitchFamily="34" charset="0"/>
+              <a:buChar char="•"/>
+              <a:defRPr sz="1800" kern="1200">
+                <a:solidFill>
+                  <a:schemeClr val="tx1"/>
+                </a:solidFill>
+                <a:latin typeface="+mn-lt"/>
+                <a:ea typeface="+mn-ea"/>
+                <a:cs typeface="+mn-cs"/>
+              </a:defRPr>
+            </a:lvl7pPr>
+            <a:lvl8pPr marL="3429000" indent="-228600" algn="l" defTabSz="914400" rtl="0" eaLnBrk="1" latinLnBrk="0" hangingPunct="1">
+              <a:lnSpc>
+                <a:spcPct val="90000"/>
+              </a:lnSpc>
+              <a:spcBef>
+                <a:spcPts val="500"/>
+              </a:spcBef>
+              <a:buFont typeface="Arial" panose="020B0604020202020204" pitchFamily="34" charset="0"/>
+              <a:buChar char="•"/>
+              <a:defRPr sz="1800" kern="1200">
+                <a:solidFill>
+                  <a:schemeClr val="tx1"/>
+                </a:solidFill>
+                <a:latin typeface="+mn-lt"/>
+                <a:ea typeface="+mn-ea"/>
+                <a:cs typeface="+mn-cs"/>
+              </a:defRPr>
+            </a:lvl8pPr>
+            <a:lvl9pPr marL="3886200" indent="-228600" algn="l" defTabSz="914400" rtl="0" eaLnBrk="1" latinLnBrk="0" hangingPunct="1">
+              <a:lnSpc>
+                <a:spcPct val="90000"/>
+              </a:lnSpc>
+              <a:spcBef>
+                <a:spcPts val="500"/>
+              </a:spcBef>
+              <a:buFont typeface="Arial" panose="020B0604020202020204" pitchFamily="34" charset="0"/>
+              <a:buChar char="•"/>
+              <a:defRPr sz="1800" kern="1200">
+                <a:solidFill>
+                  <a:schemeClr val="tx1"/>
+                </a:solidFill>
+                <a:latin typeface="+mn-lt"/>
+                <a:ea typeface="+mn-ea"/>
+                <a:cs typeface="+mn-cs"/>
+              </a:defRPr>
+            </a:lvl9pPr>
+          </a:lstStyle>
           <a:p>
-            <a:r>
-              <a:rPr lang="pt-BR" sz="2000" dirty="0">
-                <a:latin typeface="Times New Roman" panose="02020603050405020304" pitchFamily="18" charset="0"/>
-                <a:cs typeface="Times New Roman" panose="02020603050405020304" pitchFamily="18" charset="0"/>
-              </a:rPr>
-              <a:t>para qualquer situação.</a:t>
+            <a:pPr>
+              <a:lnSpc>
+                <a:spcPct val="100000"/>
+              </a:lnSpc>
+            </a:pPr>
+            <a:r>
+              <a:rPr lang="pt-BR" sz="1600" dirty="0"/>
+              <a:t>Sintaxe:</a:t>
             </a:r>
           </a:p>
         </p:txBody>
       </p:sp>
       <p:grpSp>
         <p:nvGrpSpPr>
-          <p:cNvPr id="12" name="Agrupar 11">
+          <p:cNvPr id="11" name="Agrupar 10">
             <a:extLst>
               <a:ext uri="{FF2B5EF4-FFF2-40B4-BE49-F238E27FC236}">
-                <a16:creationId xmlns:a16="http://schemas.microsoft.com/office/drawing/2014/main" id="{F54C0C7B-B09F-93CD-3DB5-29033A1F1068}"/>
+                <a16:creationId xmlns:a16="http://schemas.microsoft.com/office/drawing/2014/main" id="{35C40B54-B3A5-6ED0-79FD-DCB20D882BD4}"/>
               </a:ext>
             </a:extLst>
           </p:cNvPr>
@@ -10307,18 +11417,18 @@
         </p:nvGrpSpPr>
         <p:grpSpPr>
           <a:xfrm>
-            <a:off x="749185" y="4520405"/>
-            <a:ext cx="4418560" cy="1638537"/>
+            <a:off x="749184" y="4008024"/>
+            <a:ext cx="8907433" cy="638572"/>
             <a:chOff x="749185" y="2527734"/>
             <a:chExt cx="5284556" cy="638572"/>
           </a:xfrm>
         </p:grpSpPr>
         <p:sp>
           <p:nvSpPr>
-            <p:cNvPr id="13" name="Shape 20">
+            <p:cNvPr id="12" name="Shape 20">
               <a:extLst>
                 <a:ext uri="{FF2B5EF4-FFF2-40B4-BE49-F238E27FC236}">
-                  <a16:creationId xmlns:a16="http://schemas.microsoft.com/office/drawing/2014/main" id="{47F4AB36-CAFD-8FB7-7A48-BB1581BF6DD0}"/>
+                  <a16:creationId xmlns:a16="http://schemas.microsoft.com/office/drawing/2014/main" id="{503FDCF3-5F65-21F4-E3B8-5C0EC866BF2A}"/>
                 </a:ext>
               </a:extLst>
             </p:cNvPr>
@@ -10350,10 +11460,10 @@
         </p:sp>
         <p:sp>
           <p:nvSpPr>
-            <p:cNvPr id="14" name="Text 21">
+            <p:cNvPr id="13" name="Text 21">
               <a:extLst>
                 <a:ext uri="{FF2B5EF4-FFF2-40B4-BE49-F238E27FC236}">
-                  <a16:creationId xmlns:a16="http://schemas.microsoft.com/office/drawing/2014/main" id="{3152C665-A472-A659-55B7-500A11DD6A77}"/>
+                  <a16:creationId xmlns:a16="http://schemas.microsoft.com/office/drawing/2014/main" id="{9001C0AB-B6BE-8BD4-CAD0-1CFAB67C033C}"/>
                 </a:ext>
               </a:extLst>
             </p:cNvPr>
@@ -10362,8 +11472,8 @@
           </p:nvSpPr>
           <p:spPr>
             <a:xfrm>
-              <a:off x="896521" y="2583345"/>
-              <a:ext cx="4989884" cy="527350"/>
+              <a:off x="896521" y="2712610"/>
+              <a:ext cx="4989884" cy="268820"/>
             </a:xfrm>
             <a:prstGeom prst="rect">
               <a:avLst/>
@@ -10377,11 +11487,8 @@
             </a:bodyPr>
             <a:lstStyle/>
             <a:p>
-              <a:pPr marL="0" indent="0" algn="l">
-                <a:buNone/>
-              </a:pPr>
-              <a:r>
-                <a:rPr lang="en-US" sz="1600" kern="0" spc="-19" dirty="0">
+              <a:r>
+                <a:rPr lang="en-US" kern="0" spc="-19" dirty="0">
                   <a:solidFill>
                     <a:srgbClr val="D73A49"/>
                   </a:solidFill>
@@ -10389,10 +11496,10 @@
                   <a:ea typeface="Consolas" pitchFamily="34" charset="-122"/>
                   <a:cs typeface="Consolas" pitchFamily="34" charset="-120"/>
                 </a:rPr>
-                <a:t>DELETE /</a:t>
-              </a:r>
-              <a:r>
-                <a:rPr lang="en-US" sz="1600" kern="0" spc="-19" dirty="0" err="1">
+                <a:t>const tag = </a:t>
+              </a:r>
+              <a:r>
+                <a:rPr lang="en-US" kern="0" spc="-19" dirty="0" err="1">
                   <a:solidFill>
                     <a:srgbClr val="D73A49"/>
                   </a:solidFill>
@@ -10400,10 +11507,10 @@
                   <a:ea typeface="Consolas" pitchFamily="34" charset="-122"/>
                   <a:cs typeface="Consolas" pitchFamily="34" charset="-120"/>
                 </a:rPr>
-                <a:t>dentistas</a:t>
-              </a:r>
-              <a:r>
-                <a:rPr lang="en-US" sz="1600" kern="0" spc="-19" dirty="0">
+                <a:t>document.createElement</a:t>
+              </a:r>
+              <a:r>
+                <a:rPr lang="en-US" kern="0" spc="-19" dirty="0">
                   <a:solidFill>
                     <a:srgbClr val="D73A49"/>
                   </a:solidFill>
@@ -10411,1364 +11518,17 @@
                   <a:ea typeface="Consolas" pitchFamily="34" charset="-122"/>
                   <a:cs typeface="Consolas" pitchFamily="34" charset="-120"/>
                 </a:rPr>
-                <a:t>/10</a:t>
-              </a:r>
-            </a:p>
-            <a:p>
-              <a:pPr marL="0" indent="0" algn="l">
-                <a:buNone/>
-              </a:pPr>
-              <a:r>
-                <a:rPr lang="en-US" sz="1600" kern="0" spc="-19" dirty="0">
-                  <a:solidFill>
-                    <a:srgbClr val="D73A49"/>
-                  </a:solidFill>
-                  <a:latin typeface="Consolas" pitchFamily="34" charset="0"/>
-                  <a:ea typeface="Consolas" pitchFamily="34" charset="-122"/>
-                  <a:cs typeface="Consolas" pitchFamily="34" charset="-120"/>
-                </a:rPr>
-                <a:t>→ 200 OK</a:t>
-              </a:r>
-            </a:p>
-            <a:p>
-              <a:pPr marL="0" indent="0" algn="l">
-                <a:buNone/>
-              </a:pPr>
-              <a:endParaRPr lang="en-US" sz="1600" kern="0" spc="-19" dirty="0">
-                <a:solidFill>
-                  <a:srgbClr val="D73A49"/>
-                </a:solidFill>
-                <a:latin typeface="Consolas" pitchFamily="34" charset="0"/>
-                <a:ea typeface="Consolas" pitchFamily="34" charset="-122"/>
-                <a:cs typeface="Consolas" pitchFamily="34" charset="-120"/>
-              </a:endParaRPr>
-            </a:p>
-            <a:p>
-              <a:pPr marL="0" indent="0" algn="l">
-                <a:buNone/>
-              </a:pPr>
-              <a:r>
-                <a:rPr lang="en-US" sz="1600" kern="0" spc="-19" dirty="0">
-                  <a:solidFill>
-                    <a:srgbClr val="D73A49"/>
-                  </a:solidFill>
-                  <a:latin typeface="Consolas" pitchFamily="34" charset="0"/>
-                  <a:ea typeface="Consolas" pitchFamily="34" charset="-122"/>
-                  <a:cs typeface="Consolas" pitchFamily="34" charset="-120"/>
-                </a:rPr>
-                <a:t>POST /</a:t>
-              </a:r>
-              <a:r>
-                <a:rPr lang="en-US" sz="1600" kern="0" spc="-19" dirty="0" err="1">
-                  <a:solidFill>
-                    <a:srgbClr val="D73A49"/>
-                  </a:solidFill>
-                  <a:latin typeface="Consolas" pitchFamily="34" charset="0"/>
-                  <a:ea typeface="Consolas" pitchFamily="34" charset="-122"/>
-                  <a:cs typeface="Consolas" pitchFamily="34" charset="-120"/>
-                </a:rPr>
-                <a:t>dentistas</a:t>
-              </a:r>
-              <a:endParaRPr lang="en-US" sz="1600" kern="0" spc="-19" dirty="0">
-                <a:solidFill>
-                  <a:srgbClr val="D73A49"/>
-                </a:solidFill>
-                <a:latin typeface="Consolas" pitchFamily="34" charset="0"/>
-                <a:ea typeface="Consolas" pitchFamily="34" charset="-122"/>
-                <a:cs typeface="Consolas" pitchFamily="34" charset="-120"/>
-              </a:endParaRPr>
-            </a:p>
-            <a:p>
-              <a:pPr marL="0" indent="0" algn="l">
-                <a:buNone/>
-              </a:pPr>
-              <a:r>
-                <a:rPr lang="en-US" sz="1600" kern="0" spc="-19" dirty="0">
-                  <a:solidFill>
-                    <a:srgbClr val="D73A49"/>
-                  </a:solidFill>
-                  <a:latin typeface="Consolas" pitchFamily="34" charset="0"/>
-                  <a:ea typeface="Consolas" pitchFamily="34" charset="-122"/>
-                  <a:cs typeface="Consolas" pitchFamily="34" charset="-120"/>
-                </a:rPr>
-                <a:t>→ 200 OK</a:t>
-              </a:r>
-              <a:endParaRPr lang="en-US" sz="1600" dirty="0"/>
+                <a:t>("tag")</a:t>
+              </a:r>
+              <a:endParaRPr lang="en-US" dirty="0"/>
             </a:p>
           </p:txBody>
         </p:sp>
       </p:grpSp>
-      <p:sp>
-        <p:nvSpPr>
-          <p:cNvPr id="16" name="Shape 4">
-            <a:extLst>
-              <a:ext uri="{FF2B5EF4-FFF2-40B4-BE49-F238E27FC236}">
-                <a16:creationId xmlns:a16="http://schemas.microsoft.com/office/drawing/2014/main" id="{349BA34A-7609-7A9C-1F95-D40F3620CE79}"/>
-              </a:ext>
-            </a:extLst>
-          </p:cNvPr>
-          <p:cNvSpPr/>
-          <p:nvPr/>
-        </p:nvSpPr>
-        <p:spPr>
-          <a:xfrm>
-            <a:off x="6096000" y="1844675"/>
-            <a:ext cx="5503653" cy="4314267"/>
-          </a:xfrm>
-          <a:prstGeom prst="roundRect">
-            <a:avLst>
-              <a:gd name="adj" fmla="val 3224"/>
-            </a:avLst>
-          </a:prstGeom>
-          <a:solidFill>
-            <a:srgbClr val="DADBF1"/>
-          </a:solidFill>
-          <a:ln w="6350">
-            <a:solidFill>
-              <a:srgbClr val="C0C1D7"/>
-            </a:solidFill>
-            <a:prstDash val="solid"/>
-          </a:ln>
-        </p:spPr>
-        <p:txBody>
-          <a:bodyPr/>
-          <a:lstStyle/>
-          <a:p>
-            <a:endParaRPr lang="pt-BR"/>
-          </a:p>
-        </p:txBody>
-      </p:sp>
-      <p:sp>
-        <p:nvSpPr>
-          <p:cNvPr id="17" name="Shape 5">
-            <a:extLst>
-              <a:ext uri="{FF2B5EF4-FFF2-40B4-BE49-F238E27FC236}">
-                <a16:creationId xmlns:a16="http://schemas.microsoft.com/office/drawing/2014/main" id="{94C0EA91-E1E8-C87F-27C7-88A376B9674E}"/>
-              </a:ext>
-            </a:extLst>
-          </p:cNvPr>
-          <p:cNvSpPr/>
-          <p:nvPr/>
-        </p:nvSpPr>
-        <p:spPr>
-          <a:xfrm>
-            <a:off x="6291357" y="2040037"/>
-            <a:ext cx="567021" cy="567035"/>
-          </a:xfrm>
-          <a:prstGeom prst="ellipse">
-            <a:avLst/>
-          </a:prstGeom>
-          <a:solidFill>
-            <a:srgbClr val="4950BC"/>
-          </a:solidFill>
-          <a:ln/>
-        </p:spPr>
-        <p:txBody>
-          <a:bodyPr/>
-          <a:lstStyle/>
-          <a:p>
-            <a:endParaRPr lang="pt-BR"/>
-          </a:p>
-        </p:txBody>
-      </p:sp>
-      <p:sp>
-        <p:nvSpPr>
-          <p:cNvPr id="19" name="Text 7">
-            <a:extLst>
-              <a:ext uri="{FF2B5EF4-FFF2-40B4-BE49-F238E27FC236}">
-                <a16:creationId xmlns:a16="http://schemas.microsoft.com/office/drawing/2014/main" id="{0215E048-C979-F2A0-56E4-CA227D5EF056}"/>
-              </a:ext>
-            </a:extLst>
-          </p:cNvPr>
-          <p:cNvSpPr/>
-          <p:nvPr/>
-        </p:nvSpPr>
-        <p:spPr>
-          <a:xfrm>
-            <a:off x="6291357" y="2833005"/>
-            <a:ext cx="5151458" cy="3170575"/>
-          </a:xfrm>
-          <a:prstGeom prst="rect">
-            <a:avLst/>
-          </a:prstGeom>
-          <a:noFill/>
-          <a:ln/>
-        </p:spPr>
-        <p:txBody>
-          <a:bodyPr wrap="square" lIns="0" tIns="0" rIns="0" bIns="0" rtlCol="0" anchor="t">
-            <a:normAutofit/>
-          </a:bodyPr>
-          <a:lstStyle/>
-          <a:p>
-            <a:pPr algn="just"/>
-            <a:r>
-              <a:rPr lang="pt-BR" sz="2200" dirty="0">
-                <a:latin typeface="Times New Roman" panose="02020603050405020304" pitchFamily="18" charset="0"/>
-                <a:cs typeface="Times New Roman" panose="02020603050405020304" pitchFamily="18" charset="0"/>
-              </a:rPr>
-              <a:t>O cliente não consegue saber claramente o que aconteceu.</a:t>
-            </a:r>
-          </a:p>
-          <a:p>
-            <a:pPr algn="just"/>
-            <a:endParaRPr lang="pt-BR" sz="2200" dirty="0">
-              <a:latin typeface="Times New Roman" panose="02020603050405020304" pitchFamily="18" charset="0"/>
-              <a:cs typeface="Times New Roman" panose="02020603050405020304" pitchFamily="18" charset="0"/>
-            </a:endParaRPr>
-          </a:p>
-          <a:p>
-            <a:pPr algn="just"/>
-            <a:r>
-              <a:rPr lang="pt-BR" sz="2200" dirty="0">
-                <a:latin typeface="Times New Roman" panose="02020603050405020304" pitchFamily="18" charset="0"/>
-                <a:cs typeface="Times New Roman" panose="02020603050405020304" pitchFamily="18" charset="0"/>
-              </a:rPr>
-              <a:t>Por isso, utilizamos diferentes códigos HTTP para representar diferentes resultados.</a:t>
-            </a:r>
-          </a:p>
-          <a:p>
-            <a:pPr algn="just"/>
-            <a:endParaRPr lang="pt-BR" sz="2200" dirty="0">
-              <a:latin typeface="Times New Roman" panose="02020603050405020304" pitchFamily="18" charset="0"/>
-              <a:cs typeface="Times New Roman" panose="02020603050405020304" pitchFamily="18" charset="0"/>
-            </a:endParaRPr>
-          </a:p>
-          <a:p>
-            <a:pPr algn="just"/>
-            <a:r>
-              <a:rPr lang="pt-BR" sz="2200" dirty="0">
-                <a:latin typeface="Times New Roman" panose="02020603050405020304" pitchFamily="18" charset="0"/>
-                <a:cs typeface="Times New Roman" panose="02020603050405020304" pitchFamily="18" charset="0"/>
-              </a:rPr>
-              <a:t>O código HTTP faz parte do contrato da API</a:t>
-            </a:r>
-            <a:r>
-              <a:rPr lang="pt-BR" sz="2000" dirty="0">
-                <a:latin typeface="Times New Roman" panose="02020603050405020304" pitchFamily="18" charset="0"/>
-                <a:cs typeface="Times New Roman" panose="02020603050405020304" pitchFamily="18" charset="0"/>
-              </a:rPr>
-              <a:t>.</a:t>
-            </a:r>
-          </a:p>
-        </p:txBody>
-      </p:sp>
-      <p:pic>
-        <p:nvPicPr>
-          <p:cNvPr id="21" name="Gráfico 20" descr="Ponto de interrogação com preenchimento sólido">
-            <a:extLst>
-              <a:ext uri="{FF2B5EF4-FFF2-40B4-BE49-F238E27FC236}">
-                <a16:creationId xmlns:a16="http://schemas.microsoft.com/office/drawing/2014/main" id="{3129B824-0F4C-7D8D-915E-E7C2D83B7021}"/>
-              </a:ext>
-            </a:extLst>
-          </p:cNvPr>
-          <p:cNvPicPr>
-            <a:picLocks noChangeAspect="1"/>
-          </p:cNvPicPr>
-          <p:nvPr/>
-        </p:nvPicPr>
-        <p:blipFill>
-          <a:blip r:embed="rId2">
-            <a:extLst>
-              <a:ext uri="{96DAC541-7B7A-43D3-8B79-37D633B846F1}">
-                <asvg:svgBlip xmlns:asvg="http://schemas.microsoft.com/office/drawing/2016/SVG/main" r:embed="rId3"/>
-              </a:ext>
-            </a:extLst>
-          </a:blip>
-          <a:stretch>
-            <a:fillRect/>
-          </a:stretch>
-        </p:blipFill>
-        <p:spPr>
-          <a:xfrm>
-            <a:off x="6415554" y="2164241"/>
-            <a:ext cx="318625" cy="318625"/>
-          </a:xfrm>
-          <a:prstGeom prst="rect">
-            <a:avLst/>
-          </a:prstGeom>
-        </p:spPr>
-      </p:pic>
-      <p:sp>
-        <p:nvSpPr>
-          <p:cNvPr id="22" name="Título 4">
-            <a:extLst>
-              <a:ext uri="{FF2B5EF4-FFF2-40B4-BE49-F238E27FC236}">
-                <a16:creationId xmlns:a16="http://schemas.microsoft.com/office/drawing/2014/main" id="{505775BE-BC99-D44A-DEDD-FB4F58227DE5}"/>
-              </a:ext>
-            </a:extLst>
-          </p:cNvPr>
-          <p:cNvSpPr txBox="1">
-            <a:spLocks/>
-          </p:cNvSpPr>
-          <p:nvPr/>
-        </p:nvSpPr>
-        <p:spPr>
-          <a:xfrm>
-            <a:off x="7090020" y="2087537"/>
-            <a:ext cx="4352796" cy="519535"/>
-          </a:xfrm>
-          <a:prstGeom prst="rect">
-            <a:avLst/>
-          </a:prstGeom>
-        </p:spPr>
-        <p:txBody>
-          <a:bodyPr/>
-          <a:lstStyle>
-            <a:lvl1pPr algn="l" defTabSz="914400" rtl="0" eaLnBrk="1" latinLnBrk="0" hangingPunct="1">
-              <a:lnSpc>
-                <a:spcPct val="90000"/>
-              </a:lnSpc>
-              <a:spcBef>
-                <a:spcPct val="0"/>
-              </a:spcBef>
-              <a:buNone/>
-              <a:defRPr sz="2800" kern="1200">
-                <a:solidFill>
-                  <a:schemeClr val="tx1"/>
-                </a:solidFill>
-                <a:latin typeface="Times New Roman" panose="02020603050405020304" pitchFamily="18" charset="0"/>
-                <a:ea typeface="+mj-ea"/>
-                <a:cs typeface="Times New Roman" panose="02020603050405020304" pitchFamily="18" charset="0"/>
-              </a:defRPr>
-            </a:lvl1pPr>
-          </a:lstStyle>
-          <a:p>
-            <a:r>
-              <a:rPr lang="pt-BR" dirty="0"/>
-              <a:t>Será que deu certo ?</a:t>
-            </a:r>
-          </a:p>
-        </p:txBody>
-      </p:sp>
     </p:spTree>
     <p:extLst>
       <p:ext uri="{BB962C8B-B14F-4D97-AF65-F5344CB8AC3E}">
-        <p14:creationId xmlns:p14="http://schemas.microsoft.com/office/powerpoint/2010/main" val="1686215689"/>
-      </p:ext>
-    </p:extLst>
-  </p:cSld>
-  <p:clrMapOvr>
-    <a:masterClrMapping/>
-  </p:clrMapOvr>
-</p:sld>
-</file>
-
-<file path=ppt/slides/slide25.xml><?xml version="1.0" encoding="utf-8"?>
-<p:sld xmlns:a="http://schemas.openxmlformats.org/drawingml/2006/main" xmlns:r="http://schemas.openxmlformats.org/officeDocument/2006/relationships" xmlns:p="http://schemas.openxmlformats.org/presentationml/2006/main">
-  <p:cSld>
-    <p:spTree>
-      <p:nvGrpSpPr>
-        <p:cNvPr id="1" name=""/>
-        <p:cNvGrpSpPr/>
-        <p:nvPr/>
-      </p:nvGrpSpPr>
-      <p:grpSpPr>
-        <a:xfrm>
-          <a:off x="0" y="0"/>
-          <a:ext cx="0" cy="0"/>
-          <a:chOff x="0" y="0"/>
-          <a:chExt cx="0" cy="0"/>
-        </a:xfrm>
-      </p:grpSpPr>
-      <p:sp>
-        <p:nvSpPr>
-          <p:cNvPr id="2" name="Título 1">
-            <a:extLst>
-              <a:ext uri="{FF2B5EF4-FFF2-40B4-BE49-F238E27FC236}">
-                <a16:creationId xmlns:a16="http://schemas.microsoft.com/office/drawing/2014/main" id="{F9B4CEBC-29AA-0B64-6D86-B49A19BD51FC}"/>
-              </a:ext>
-            </a:extLst>
-          </p:cNvPr>
-          <p:cNvSpPr>
-            <a:spLocks noGrp="1"/>
-          </p:cNvSpPr>
-          <p:nvPr>
-            <p:ph type="title"/>
-          </p:nvPr>
-        </p:nvSpPr>
-        <p:spPr>
-          <a:xfrm>
-            <a:off x="749185" y="854420"/>
-            <a:ext cx="9409981" cy="448573"/>
-          </a:xfrm>
-        </p:spPr>
-        <p:txBody>
-          <a:bodyPr>
-            <a:normAutofit/>
-          </a:bodyPr>
-          <a:lstStyle/>
-          <a:p>
-            <a:r>
-              <a:rPr lang="pt-BR" sz="2600" b="1" dirty="0"/>
-              <a:t>Os principais métodos HTTP</a:t>
-            </a:r>
-          </a:p>
-        </p:txBody>
-      </p:sp>
-      <p:graphicFrame>
-        <p:nvGraphicFramePr>
-          <p:cNvPr id="4" name="Tabela 3">
-            <a:extLst>
-              <a:ext uri="{FF2B5EF4-FFF2-40B4-BE49-F238E27FC236}">
-                <a16:creationId xmlns:a16="http://schemas.microsoft.com/office/drawing/2014/main" id="{D5FD78D7-7ED8-1593-FC54-8D4E2A2ECF2C}"/>
-              </a:ext>
-            </a:extLst>
-          </p:cNvPr>
-          <p:cNvGraphicFramePr>
-            <a:graphicFrameLocks noGrp="1"/>
-          </p:cNvGraphicFramePr>
-          <p:nvPr>
-            <p:extLst>
-              <p:ext uri="{D42A27DB-BD31-4B8C-83A1-F6EECF244321}">
-                <p14:modId xmlns:p14="http://schemas.microsoft.com/office/powerpoint/2010/main" val="2534613956"/>
-              </p:ext>
-            </p:extLst>
-          </p:nvPr>
-        </p:nvGraphicFramePr>
-        <p:xfrm>
-          <a:off x="1795568" y="2176304"/>
-          <a:ext cx="8600865" cy="3688080"/>
-        </p:xfrm>
-        <a:graphic>
-          <a:graphicData uri="http://schemas.openxmlformats.org/drawingml/2006/table">
-            <a:tbl>
-              <a:tblPr/>
-              <a:tblGrid>
-                <a:gridCol w="2230544">
-                  <a:extLst>
-                    <a:ext uri="{9D8B030D-6E8A-4147-A177-3AD203B41FA5}">
-                      <a16:colId xmlns:a16="http://schemas.microsoft.com/office/drawing/2014/main" val="4025802244"/>
-                    </a:ext>
-                  </a:extLst>
-                </a:gridCol>
-                <a:gridCol w="2370244">
-                  <a:extLst>
-                    <a:ext uri="{9D8B030D-6E8A-4147-A177-3AD203B41FA5}">
-                      <a16:colId xmlns:a16="http://schemas.microsoft.com/office/drawing/2014/main" val="263985013"/>
-                    </a:ext>
-                  </a:extLst>
-                </a:gridCol>
-                <a:gridCol w="4000077">
-                  <a:extLst>
-                    <a:ext uri="{9D8B030D-6E8A-4147-A177-3AD203B41FA5}">
-                      <a16:colId xmlns:a16="http://schemas.microsoft.com/office/drawing/2014/main" val="1048547562"/>
-                    </a:ext>
-                  </a:extLst>
-                </a:gridCol>
-              </a:tblGrid>
-              <a:tr h="737616">
-                <a:tc>
-                  <a:txBody>
-                    <a:bodyPr/>
-                    <a:lstStyle/>
-                    <a:p>
-                      <a:pPr algn="ctr">
-                        <a:buNone/>
-                      </a:pPr>
-                      <a:r>
-                        <a:rPr lang="pt-BR" sz="3300" b="1" dirty="0">
-                          <a:solidFill>
-                            <a:schemeClr val="bg1"/>
-                          </a:solidFill>
-                          <a:latin typeface="Times New Roman" panose="02020603050405020304" pitchFamily="18" charset="0"/>
-                          <a:cs typeface="Times New Roman" panose="02020603050405020304" pitchFamily="18" charset="0"/>
-                        </a:rPr>
-                        <a:t>Método</a:t>
-                      </a:r>
-                    </a:p>
-                  </a:txBody>
-                  <a:tcPr marL="167640" marR="167640" marT="83820" marB="83820" anchor="ctr">
-                    <a:lnL w="12700" cap="flat" cmpd="sng" algn="ctr">
-                      <a:solidFill>
-                        <a:schemeClr val="tx1"/>
-                      </a:solidFill>
-                      <a:prstDash val="solid"/>
-                      <a:round/>
-                      <a:headEnd type="none" w="med" len="med"/>
-                      <a:tailEnd type="none" w="med" len="med"/>
-                    </a:lnL>
-                    <a:lnR w="12700" cap="flat" cmpd="sng" algn="ctr">
-                      <a:solidFill>
-                        <a:schemeClr val="tx1"/>
-                      </a:solidFill>
-                      <a:prstDash val="solid"/>
-                      <a:round/>
-                      <a:headEnd type="none" w="med" len="med"/>
-                      <a:tailEnd type="none" w="med" len="med"/>
-                    </a:lnR>
-                    <a:lnT w="12700" cap="flat" cmpd="sng" algn="ctr">
-                      <a:solidFill>
-                        <a:schemeClr val="tx1"/>
-                      </a:solidFill>
-                      <a:prstDash val="solid"/>
-                      <a:round/>
-                      <a:headEnd type="none" w="med" len="med"/>
-                      <a:tailEnd type="none" w="med" len="med"/>
-                    </a:lnT>
-                    <a:lnB w="12700" cap="flat" cmpd="sng" algn="ctr">
-                      <a:solidFill>
-                        <a:schemeClr val="tx1"/>
-                      </a:solidFill>
-                      <a:prstDash val="solid"/>
-                      <a:round/>
-                      <a:headEnd type="none" w="med" len="med"/>
-                      <a:tailEnd type="none" w="med" len="med"/>
-                    </a:lnB>
-                    <a:solidFill>
-                      <a:srgbClr val="292A86"/>
-                    </a:solidFill>
-                  </a:tcPr>
-                </a:tc>
-                <a:tc>
-                  <a:txBody>
-                    <a:bodyPr/>
-                    <a:lstStyle/>
-                    <a:p>
-                      <a:pPr algn="ctr">
-                        <a:buNone/>
-                      </a:pPr>
-                      <a:r>
-                        <a:rPr lang="pt-BR" sz="3300" b="1" dirty="0">
-                          <a:solidFill>
-                            <a:schemeClr val="bg1"/>
-                          </a:solidFill>
-                          <a:latin typeface="Times New Roman" panose="02020603050405020304" pitchFamily="18" charset="0"/>
-                          <a:cs typeface="Times New Roman" panose="02020603050405020304" pitchFamily="18" charset="0"/>
-                        </a:rPr>
-                        <a:t>Objetivo</a:t>
-                      </a:r>
-                    </a:p>
-                  </a:txBody>
-                  <a:tcPr marL="167640" marR="167640" marT="83820" marB="83820" anchor="ctr">
-                    <a:lnL w="12700" cap="flat" cmpd="sng" algn="ctr">
-                      <a:solidFill>
-                        <a:schemeClr val="tx1"/>
-                      </a:solidFill>
-                      <a:prstDash val="solid"/>
-                      <a:round/>
-                      <a:headEnd type="none" w="med" len="med"/>
-                      <a:tailEnd type="none" w="med" len="med"/>
-                    </a:lnL>
-                    <a:lnR w="12700" cap="flat" cmpd="sng" algn="ctr">
-                      <a:solidFill>
-                        <a:schemeClr val="tx1"/>
-                      </a:solidFill>
-                      <a:prstDash val="solid"/>
-                      <a:round/>
-                      <a:headEnd type="none" w="med" len="med"/>
-                      <a:tailEnd type="none" w="med" len="med"/>
-                    </a:lnR>
-                    <a:lnT w="12700" cap="flat" cmpd="sng" algn="ctr">
-                      <a:solidFill>
-                        <a:schemeClr val="tx1"/>
-                      </a:solidFill>
-                      <a:prstDash val="solid"/>
-                      <a:round/>
-                      <a:headEnd type="none" w="med" len="med"/>
-                      <a:tailEnd type="none" w="med" len="med"/>
-                    </a:lnT>
-                    <a:lnB w="12700" cap="flat" cmpd="sng" algn="ctr">
-                      <a:solidFill>
-                        <a:schemeClr val="tx1"/>
-                      </a:solidFill>
-                      <a:prstDash val="solid"/>
-                      <a:round/>
-                      <a:headEnd type="none" w="med" len="med"/>
-                      <a:tailEnd type="none" w="med" len="med"/>
-                    </a:lnB>
-                    <a:solidFill>
-                      <a:srgbClr val="292A86"/>
-                    </a:solidFill>
-                  </a:tcPr>
-                </a:tc>
-                <a:tc>
-                  <a:txBody>
-                    <a:bodyPr/>
-                    <a:lstStyle/>
-                    <a:p>
-                      <a:pPr algn="ctr">
-                        <a:buNone/>
-                      </a:pPr>
-                      <a:r>
-                        <a:rPr lang="pt-BR" sz="3300" b="1" dirty="0">
-                          <a:solidFill>
-                            <a:schemeClr val="bg1"/>
-                          </a:solidFill>
-                          <a:latin typeface="Times New Roman" panose="02020603050405020304" pitchFamily="18" charset="0"/>
-                          <a:cs typeface="Times New Roman" panose="02020603050405020304" pitchFamily="18" charset="0"/>
-                        </a:rPr>
-                        <a:t>Exemplo</a:t>
-                      </a:r>
-                    </a:p>
-                  </a:txBody>
-                  <a:tcPr marL="167640" marR="167640" marT="83820" marB="83820" anchor="ctr">
-                    <a:lnL w="12700" cap="flat" cmpd="sng" algn="ctr">
-                      <a:solidFill>
-                        <a:schemeClr val="tx1"/>
-                      </a:solidFill>
-                      <a:prstDash val="solid"/>
-                      <a:round/>
-                      <a:headEnd type="none" w="med" len="med"/>
-                      <a:tailEnd type="none" w="med" len="med"/>
-                    </a:lnL>
-                    <a:lnR w="12700" cap="flat" cmpd="sng" algn="ctr">
-                      <a:solidFill>
-                        <a:schemeClr val="tx1"/>
-                      </a:solidFill>
-                      <a:prstDash val="solid"/>
-                      <a:round/>
-                      <a:headEnd type="none" w="med" len="med"/>
-                      <a:tailEnd type="none" w="med" len="med"/>
-                    </a:lnR>
-                    <a:lnT w="12700" cap="flat" cmpd="sng" algn="ctr">
-                      <a:solidFill>
-                        <a:schemeClr val="tx1"/>
-                      </a:solidFill>
-                      <a:prstDash val="solid"/>
-                      <a:round/>
-                      <a:headEnd type="none" w="med" len="med"/>
-                      <a:tailEnd type="none" w="med" len="med"/>
-                    </a:lnT>
-                    <a:lnB w="12700" cap="flat" cmpd="sng" algn="ctr">
-                      <a:solidFill>
-                        <a:schemeClr val="tx1"/>
-                      </a:solidFill>
-                      <a:prstDash val="solid"/>
-                      <a:round/>
-                      <a:headEnd type="none" w="med" len="med"/>
-                      <a:tailEnd type="none" w="med" len="med"/>
-                    </a:lnB>
-                    <a:solidFill>
-                      <a:srgbClr val="292A86"/>
-                    </a:solidFill>
-                  </a:tcPr>
-                </a:tc>
-                <a:extLst>
-                  <a:ext uri="{0D108BD9-81ED-4DB2-BD59-A6C34878D82A}">
-                    <a16:rowId xmlns:a16="http://schemas.microsoft.com/office/drawing/2014/main" val="1323813336"/>
-                  </a:ext>
-                </a:extLst>
-              </a:tr>
-              <a:tr h="737616">
-                <a:tc>
-                  <a:txBody>
-                    <a:bodyPr/>
-                    <a:lstStyle/>
-                    <a:p>
-                      <a:pPr algn="ctr">
-                        <a:buNone/>
-                      </a:pPr>
-                      <a:r>
-                        <a:rPr lang="pt-BR" sz="2800" b="0" dirty="0">
-                          <a:latin typeface="Times New Roman" panose="02020603050405020304" pitchFamily="18" charset="0"/>
-                          <a:cs typeface="Times New Roman" panose="02020603050405020304" pitchFamily="18" charset="0"/>
-                        </a:rPr>
-                        <a:t>GET</a:t>
-                      </a:r>
-                    </a:p>
-                  </a:txBody>
-                  <a:tcPr marL="167640" marR="167640" marT="83820" marB="83820" anchor="ctr">
-                    <a:lnL w="12700" cap="flat" cmpd="sng" algn="ctr">
-                      <a:solidFill>
-                        <a:schemeClr val="tx1"/>
-                      </a:solidFill>
-                      <a:prstDash val="solid"/>
-                      <a:round/>
-                      <a:headEnd type="none" w="med" len="med"/>
-                      <a:tailEnd type="none" w="med" len="med"/>
-                    </a:lnL>
-                    <a:lnR w="12700" cap="flat" cmpd="sng" algn="ctr">
-                      <a:solidFill>
-                        <a:schemeClr val="tx1"/>
-                      </a:solidFill>
-                      <a:prstDash val="solid"/>
-                      <a:round/>
-                      <a:headEnd type="none" w="med" len="med"/>
-                      <a:tailEnd type="none" w="med" len="med"/>
-                    </a:lnR>
-                    <a:lnT w="12700" cap="flat" cmpd="sng" algn="ctr">
-                      <a:solidFill>
-                        <a:schemeClr val="tx1"/>
-                      </a:solidFill>
-                      <a:prstDash val="solid"/>
-                      <a:round/>
-                      <a:headEnd type="none" w="med" len="med"/>
-                      <a:tailEnd type="none" w="med" len="med"/>
-                    </a:lnT>
-                    <a:lnB w="12700" cap="flat" cmpd="sng" algn="ctr">
-                      <a:solidFill>
-                        <a:schemeClr val="tx1"/>
-                      </a:solidFill>
-                      <a:prstDash val="solid"/>
-                      <a:round/>
-                      <a:headEnd type="none" w="med" len="med"/>
-                      <a:tailEnd type="none" w="med" len="med"/>
-                    </a:lnB>
-                    <a:noFill/>
-                  </a:tcPr>
-                </a:tc>
-                <a:tc>
-                  <a:txBody>
-                    <a:bodyPr/>
-                    <a:lstStyle/>
-                    <a:p>
-                      <a:pPr algn="ctr">
-                        <a:buNone/>
-                      </a:pPr>
-                      <a:r>
-                        <a:rPr lang="pt-BR" sz="2800" dirty="0">
-                          <a:latin typeface="Times New Roman" panose="02020603050405020304" pitchFamily="18" charset="0"/>
-                          <a:cs typeface="Times New Roman" panose="02020603050405020304" pitchFamily="18" charset="0"/>
-                        </a:rPr>
-                        <a:t>Consultar</a:t>
-                      </a:r>
-                    </a:p>
-                  </a:txBody>
-                  <a:tcPr marL="167640" marR="167640" marT="83820" marB="83820" anchor="ctr">
-                    <a:lnL w="12700" cap="flat" cmpd="sng" algn="ctr">
-                      <a:solidFill>
-                        <a:schemeClr val="tx1"/>
-                      </a:solidFill>
-                      <a:prstDash val="solid"/>
-                      <a:round/>
-                      <a:headEnd type="none" w="med" len="med"/>
-                      <a:tailEnd type="none" w="med" len="med"/>
-                    </a:lnL>
-                    <a:lnR w="12700" cap="flat" cmpd="sng" algn="ctr">
-                      <a:solidFill>
-                        <a:schemeClr val="tx1"/>
-                      </a:solidFill>
-                      <a:prstDash val="solid"/>
-                      <a:round/>
-                      <a:headEnd type="none" w="med" len="med"/>
-                      <a:tailEnd type="none" w="med" len="med"/>
-                    </a:lnR>
-                    <a:lnT w="12700" cap="flat" cmpd="sng" algn="ctr">
-                      <a:solidFill>
-                        <a:schemeClr val="tx1"/>
-                      </a:solidFill>
-                      <a:prstDash val="solid"/>
-                      <a:round/>
-                      <a:headEnd type="none" w="med" len="med"/>
-                      <a:tailEnd type="none" w="med" len="med"/>
-                    </a:lnT>
-                    <a:lnB w="12700" cap="flat" cmpd="sng" algn="ctr">
-                      <a:solidFill>
-                        <a:schemeClr val="tx1"/>
-                      </a:solidFill>
-                      <a:prstDash val="solid"/>
-                      <a:round/>
-                      <a:headEnd type="none" w="med" len="med"/>
-                      <a:tailEnd type="none" w="med" len="med"/>
-                    </a:lnB>
-                    <a:noFill/>
-                  </a:tcPr>
-                </a:tc>
-                <a:tc>
-                  <a:txBody>
-                    <a:bodyPr/>
-                    <a:lstStyle/>
-                    <a:p>
-                      <a:pPr algn="ctr">
-                        <a:buNone/>
-                      </a:pPr>
-                      <a:r>
-                        <a:rPr lang="pt-BR" sz="2800" dirty="0">
-                          <a:latin typeface="Times New Roman" panose="02020603050405020304" pitchFamily="18" charset="0"/>
-                          <a:cs typeface="Times New Roman" panose="02020603050405020304" pitchFamily="18" charset="0"/>
-                        </a:rPr>
-                        <a:t>Buscar dentistas</a:t>
-                      </a:r>
-                    </a:p>
-                  </a:txBody>
-                  <a:tcPr marL="167640" marR="167640" marT="83820" marB="83820" anchor="ctr">
-                    <a:lnL w="12700" cap="flat" cmpd="sng" algn="ctr">
-                      <a:solidFill>
-                        <a:schemeClr val="tx1"/>
-                      </a:solidFill>
-                      <a:prstDash val="solid"/>
-                      <a:round/>
-                      <a:headEnd type="none" w="med" len="med"/>
-                      <a:tailEnd type="none" w="med" len="med"/>
-                    </a:lnL>
-                    <a:lnR w="12700" cap="flat" cmpd="sng" algn="ctr">
-                      <a:solidFill>
-                        <a:schemeClr val="tx1"/>
-                      </a:solidFill>
-                      <a:prstDash val="solid"/>
-                      <a:round/>
-                      <a:headEnd type="none" w="med" len="med"/>
-                      <a:tailEnd type="none" w="med" len="med"/>
-                    </a:lnR>
-                    <a:lnT w="12700" cap="flat" cmpd="sng" algn="ctr">
-                      <a:solidFill>
-                        <a:schemeClr val="tx1"/>
-                      </a:solidFill>
-                      <a:prstDash val="solid"/>
-                      <a:round/>
-                      <a:headEnd type="none" w="med" len="med"/>
-                      <a:tailEnd type="none" w="med" len="med"/>
-                    </a:lnT>
-                    <a:lnB w="12700" cap="flat" cmpd="sng" algn="ctr">
-                      <a:solidFill>
-                        <a:schemeClr val="tx1"/>
-                      </a:solidFill>
-                      <a:prstDash val="solid"/>
-                      <a:round/>
-                      <a:headEnd type="none" w="med" len="med"/>
-                      <a:tailEnd type="none" w="med" len="med"/>
-                    </a:lnB>
-                    <a:noFill/>
-                  </a:tcPr>
-                </a:tc>
-                <a:extLst>
-                  <a:ext uri="{0D108BD9-81ED-4DB2-BD59-A6C34878D82A}">
-                    <a16:rowId xmlns:a16="http://schemas.microsoft.com/office/drawing/2014/main" val="2322003081"/>
-                  </a:ext>
-                </a:extLst>
-              </a:tr>
-              <a:tr h="737616">
-                <a:tc>
-                  <a:txBody>
-                    <a:bodyPr/>
-                    <a:lstStyle/>
-                    <a:p>
-                      <a:pPr algn="ctr">
-                        <a:buNone/>
-                      </a:pPr>
-                      <a:r>
-                        <a:rPr lang="pt-BR" sz="2800" b="0" dirty="0">
-                          <a:latin typeface="Times New Roman" panose="02020603050405020304" pitchFamily="18" charset="0"/>
-                          <a:cs typeface="Times New Roman" panose="02020603050405020304" pitchFamily="18" charset="0"/>
-                        </a:rPr>
-                        <a:t>POST</a:t>
-                      </a:r>
-                    </a:p>
-                  </a:txBody>
-                  <a:tcPr marL="167640" marR="167640" marT="83820" marB="83820" anchor="ctr">
-                    <a:lnL w="12700" cap="flat" cmpd="sng" algn="ctr">
-                      <a:solidFill>
-                        <a:schemeClr val="tx1"/>
-                      </a:solidFill>
-                      <a:prstDash val="solid"/>
-                      <a:round/>
-                      <a:headEnd type="none" w="med" len="med"/>
-                      <a:tailEnd type="none" w="med" len="med"/>
-                    </a:lnL>
-                    <a:lnR w="12700" cap="flat" cmpd="sng" algn="ctr">
-                      <a:solidFill>
-                        <a:schemeClr val="tx1"/>
-                      </a:solidFill>
-                      <a:prstDash val="solid"/>
-                      <a:round/>
-                      <a:headEnd type="none" w="med" len="med"/>
-                      <a:tailEnd type="none" w="med" len="med"/>
-                    </a:lnR>
-                    <a:lnT w="12700" cap="flat" cmpd="sng" algn="ctr">
-                      <a:solidFill>
-                        <a:schemeClr val="tx1"/>
-                      </a:solidFill>
-                      <a:prstDash val="solid"/>
-                      <a:round/>
-                      <a:headEnd type="none" w="med" len="med"/>
-                      <a:tailEnd type="none" w="med" len="med"/>
-                    </a:lnT>
-                    <a:lnB w="12700" cap="flat" cmpd="sng" algn="ctr">
-                      <a:solidFill>
-                        <a:schemeClr val="tx1"/>
-                      </a:solidFill>
-                      <a:prstDash val="solid"/>
-                      <a:round/>
-                      <a:headEnd type="none" w="med" len="med"/>
-                      <a:tailEnd type="none" w="med" len="med"/>
-                    </a:lnB>
-                    <a:noFill/>
-                  </a:tcPr>
-                </a:tc>
-                <a:tc>
-                  <a:txBody>
-                    <a:bodyPr/>
-                    <a:lstStyle/>
-                    <a:p>
-                      <a:pPr algn="ctr">
-                        <a:buNone/>
-                      </a:pPr>
-                      <a:r>
-                        <a:rPr lang="pt-BR" sz="2800" dirty="0">
-                          <a:latin typeface="Times New Roman" panose="02020603050405020304" pitchFamily="18" charset="0"/>
-                          <a:cs typeface="Times New Roman" panose="02020603050405020304" pitchFamily="18" charset="0"/>
-                        </a:rPr>
-                        <a:t>Criar</a:t>
-                      </a:r>
-                    </a:p>
-                  </a:txBody>
-                  <a:tcPr marL="167640" marR="167640" marT="83820" marB="83820" anchor="ctr">
-                    <a:lnL w="12700" cap="flat" cmpd="sng" algn="ctr">
-                      <a:solidFill>
-                        <a:schemeClr val="tx1"/>
-                      </a:solidFill>
-                      <a:prstDash val="solid"/>
-                      <a:round/>
-                      <a:headEnd type="none" w="med" len="med"/>
-                      <a:tailEnd type="none" w="med" len="med"/>
-                    </a:lnL>
-                    <a:lnR w="12700" cap="flat" cmpd="sng" algn="ctr">
-                      <a:solidFill>
-                        <a:schemeClr val="tx1"/>
-                      </a:solidFill>
-                      <a:prstDash val="solid"/>
-                      <a:round/>
-                      <a:headEnd type="none" w="med" len="med"/>
-                      <a:tailEnd type="none" w="med" len="med"/>
-                    </a:lnR>
-                    <a:lnT w="12700" cap="flat" cmpd="sng" algn="ctr">
-                      <a:solidFill>
-                        <a:schemeClr val="tx1"/>
-                      </a:solidFill>
-                      <a:prstDash val="solid"/>
-                      <a:round/>
-                      <a:headEnd type="none" w="med" len="med"/>
-                      <a:tailEnd type="none" w="med" len="med"/>
-                    </a:lnT>
-                    <a:lnB w="12700" cap="flat" cmpd="sng" algn="ctr">
-                      <a:solidFill>
-                        <a:schemeClr val="tx1"/>
-                      </a:solidFill>
-                      <a:prstDash val="solid"/>
-                      <a:round/>
-                      <a:headEnd type="none" w="med" len="med"/>
-                      <a:tailEnd type="none" w="med" len="med"/>
-                    </a:lnB>
-                    <a:noFill/>
-                  </a:tcPr>
-                </a:tc>
-                <a:tc>
-                  <a:txBody>
-                    <a:bodyPr/>
-                    <a:lstStyle/>
-                    <a:p>
-                      <a:pPr algn="ctr">
-                        <a:buNone/>
-                      </a:pPr>
-                      <a:r>
-                        <a:rPr lang="pt-BR" sz="2800" dirty="0">
-                          <a:latin typeface="Times New Roman" panose="02020603050405020304" pitchFamily="18" charset="0"/>
-                          <a:cs typeface="Times New Roman" panose="02020603050405020304" pitchFamily="18" charset="0"/>
-                        </a:rPr>
-                        <a:t>Cadastrar dentista</a:t>
-                      </a:r>
-                    </a:p>
-                  </a:txBody>
-                  <a:tcPr marL="167640" marR="167640" marT="83820" marB="83820" anchor="ctr">
-                    <a:lnL w="12700" cap="flat" cmpd="sng" algn="ctr">
-                      <a:solidFill>
-                        <a:schemeClr val="tx1"/>
-                      </a:solidFill>
-                      <a:prstDash val="solid"/>
-                      <a:round/>
-                      <a:headEnd type="none" w="med" len="med"/>
-                      <a:tailEnd type="none" w="med" len="med"/>
-                    </a:lnL>
-                    <a:lnR w="12700" cap="flat" cmpd="sng" algn="ctr">
-                      <a:solidFill>
-                        <a:schemeClr val="tx1"/>
-                      </a:solidFill>
-                      <a:prstDash val="solid"/>
-                      <a:round/>
-                      <a:headEnd type="none" w="med" len="med"/>
-                      <a:tailEnd type="none" w="med" len="med"/>
-                    </a:lnR>
-                    <a:lnT w="12700" cap="flat" cmpd="sng" algn="ctr">
-                      <a:solidFill>
-                        <a:schemeClr val="tx1"/>
-                      </a:solidFill>
-                      <a:prstDash val="solid"/>
-                      <a:round/>
-                      <a:headEnd type="none" w="med" len="med"/>
-                      <a:tailEnd type="none" w="med" len="med"/>
-                    </a:lnT>
-                    <a:lnB w="12700" cap="flat" cmpd="sng" algn="ctr">
-                      <a:solidFill>
-                        <a:schemeClr val="tx1"/>
-                      </a:solidFill>
-                      <a:prstDash val="solid"/>
-                      <a:round/>
-                      <a:headEnd type="none" w="med" len="med"/>
-                      <a:tailEnd type="none" w="med" len="med"/>
-                    </a:lnB>
-                    <a:noFill/>
-                  </a:tcPr>
-                </a:tc>
-                <a:extLst>
-                  <a:ext uri="{0D108BD9-81ED-4DB2-BD59-A6C34878D82A}">
-                    <a16:rowId xmlns:a16="http://schemas.microsoft.com/office/drawing/2014/main" val="347996890"/>
-                  </a:ext>
-                </a:extLst>
-              </a:tr>
-              <a:tr h="737616">
-                <a:tc>
-                  <a:txBody>
-                    <a:bodyPr/>
-                    <a:lstStyle/>
-                    <a:p>
-                      <a:pPr algn="ctr">
-                        <a:buNone/>
-                      </a:pPr>
-                      <a:r>
-                        <a:rPr lang="pt-BR" sz="2800" b="0" dirty="0">
-                          <a:latin typeface="Times New Roman" panose="02020603050405020304" pitchFamily="18" charset="0"/>
-                          <a:cs typeface="Times New Roman" panose="02020603050405020304" pitchFamily="18" charset="0"/>
-                        </a:rPr>
-                        <a:t>PUT</a:t>
-                      </a:r>
-                    </a:p>
-                  </a:txBody>
-                  <a:tcPr marL="167640" marR="167640" marT="83820" marB="83820" anchor="ctr">
-                    <a:lnL w="12700" cap="flat" cmpd="sng" algn="ctr">
-                      <a:solidFill>
-                        <a:schemeClr val="tx1"/>
-                      </a:solidFill>
-                      <a:prstDash val="solid"/>
-                      <a:round/>
-                      <a:headEnd type="none" w="med" len="med"/>
-                      <a:tailEnd type="none" w="med" len="med"/>
-                    </a:lnL>
-                    <a:lnR w="12700" cap="flat" cmpd="sng" algn="ctr">
-                      <a:solidFill>
-                        <a:schemeClr val="tx1"/>
-                      </a:solidFill>
-                      <a:prstDash val="solid"/>
-                      <a:round/>
-                      <a:headEnd type="none" w="med" len="med"/>
-                      <a:tailEnd type="none" w="med" len="med"/>
-                    </a:lnR>
-                    <a:lnT w="12700" cap="flat" cmpd="sng" algn="ctr">
-                      <a:solidFill>
-                        <a:schemeClr val="tx1"/>
-                      </a:solidFill>
-                      <a:prstDash val="solid"/>
-                      <a:round/>
-                      <a:headEnd type="none" w="med" len="med"/>
-                      <a:tailEnd type="none" w="med" len="med"/>
-                    </a:lnT>
-                    <a:lnB w="12700" cap="flat" cmpd="sng" algn="ctr">
-                      <a:solidFill>
-                        <a:schemeClr val="tx1"/>
-                      </a:solidFill>
-                      <a:prstDash val="solid"/>
-                      <a:round/>
-                      <a:headEnd type="none" w="med" len="med"/>
-                      <a:tailEnd type="none" w="med" len="med"/>
-                    </a:lnB>
-                    <a:noFill/>
-                  </a:tcPr>
-                </a:tc>
-                <a:tc>
-                  <a:txBody>
-                    <a:bodyPr/>
-                    <a:lstStyle/>
-                    <a:p>
-                      <a:pPr algn="ctr">
-                        <a:buNone/>
-                      </a:pPr>
-                      <a:r>
-                        <a:rPr lang="pt-BR" sz="2800">
-                          <a:latin typeface="Times New Roman" panose="02020603050405020304" pitchFamily="18" charset="0"/>
-                          <a:cs typeface="Times New Roman" panose="02020603050405020304" pitchFamily="18" charset="0"/>
-                        </a:rPr>
-                        <a:t>Atualizar</a:t>
-                      </a:r>
-                    </a:p>
-                  </a:txBody>
-                  <a:tcPr marL="167640" marR="167640" marT="83820" marB="83820" anchor="ctr">
-                    <a:lnL w="12700" cap="flat" cmpd="sng" algn="ctr">
-                      <a:solidFill>
-                        <a:schemeClr val="tx1"/>
-                      </a:solidFill>
-                      <a:prstDash val="solid"/>
-                      <a:round/>
-                      <a:headEnd type="none" w="med" len="med"/>
-                      <a:tailEnd type="none" w="med" len="med"/>
-                    </a:lnL>
-                    <a:lnR w="12700" cap="flat" cmpd="sng" algn="ctr">
-                      <a:solidFill>
-                        <a:schemeClr val="tx1"/>
-                      </a:solidFill>
-                      <a:prstDash val="solid"/>
-                      <a:round/>
-                      <a:headEnd type="none" w="med" len="med"/>
-                      <a:tailEnd type="none" w="med" len="med"/>
-                    </a:lnR>
-                    <a:lnT w="12700" cap="flat" cmpd="sng" algn="ctr">
-                      <a:solidFill>
-                        <a:schemeClr val="tx1"/>
-                      </a:solidFill>
-                      <a:prstDash val="solid"/>
-                      <a:round/>
-                      <a:headEnd type="none" w="med" len="med"/>
-                      <a:tailEnd type="none" w="med" len="med"/>
-                    </a:lnT>
-                    <a:lnB w="12700" cap="flat" cmpd="sng" algn="ctr">
-                      <a:solidFill>
-                        <a:schemeClr val="tx1"/>
-                      </a:solidFill>
-                      <a:prstDash val="solid"/>
-                      <a:round/>
-                      <a:headEnd type="none" w="med" len="med"/>
-                      <a:tailEnd type="none" w="med" len="med"/>
-                    </a:lnB>
-                    <a:noFill/>
-                  </a:tcPr>
-                </a:tc>
-                <a:tc>
-                  <a:txBody>
-                    <a:bodyPr/>
-                    <a:lstStyle/>
-                    <a:p>
-                      <a:pPr algn="ctr">
-                        <a:buNone/>
-                      </a:pPr>
-                      <a:r>
-                        <a:rPr lang="pt-BR" sz="2800" dirty="0">
-                          <a:latin typeface="Times New Roman" panose="02020603050405020304" pitchFamily="18" charset="0"/>
-                          <a:cs typeface="Times New Roman" panose="02020603050405020304" pitchFamily="18" charset="0"/>
-                        </a:rPr>
-                        <a:t>Alterar dentista</a:t>
-                      </a:r>
-                    </a:p>
-                  </a:txBody>
-                  <a:tcPr marL="167640" marR="167640" marT="83820" marB="83820" anchor="ctr">
-                    <a:lnL w="12700" cap="flat" cmpd="sng" algn="ctr">
-                      <a:solidFill>
-                        <a:schemeClr val="tx1"/>
-                      </a:solidFill>
-                      <a:prstDash val="solid"/>
-                      <a:round/>
-                      <a:headEnd type="none" w="med" len="med"/>
-                      <a:tailEnd type="none" w="med" len="med"/>
-                    </a:lnL>
-                    <a:lnR w="12700" cap="flat" cmpd="sng" algn="ctr">
-                      <a:solidFill>
-                        <a:schemeClr val="tx1"/>
-                      </a:solidFill>
-                      <a:prstDash val="solid"/>
-                      <a:round/>
-                      <a:headEnd type="none" w="med" len="med"/>
-                      <a:tailEnd type="none" w="med" len="med"/>
-                    </a:lnR>
-                    <a:lnT w="12700" cap="flat" cmpd="sng" algn="ctr">
-                      <a:solidFill>
-                        <a:schemeClr val="tx1"/>
-                      </a:solidFill>
-                      <a:prstDash val="solid"/>
-                      <a:round/>
-                      <a:headEnd type="none" w="med" len="med"/>
-                      <a:tailEnd type="none" w="med" len="med"/>
-                    </a:lnT>
-                    <a:lnB w="12700" cap="flat" cmpd="sng" algn="ctr">
-                      <a:solidFill>
-                        <a:schemeClr val="tx1"/>
-                      </a:solidFill>
-                      <a:prstDash val="solid"/>
-                      <a:round/>
-                      <a:headEnd type="none" w="med" len="med"/>
-                      <a:tailEnd type="none" w="med" len="med"/>
-                    </a:lnB>
-                    <a:noFill/>
-                  </a:tcPr>
-                </a:tc>
-                <a:extLst>
-                  <a:ext uri="{0D108BD9-81ED-4DB2-BD59-A6C34878D82A}">
-                    <a16:rowId xmlns:a16="http://schemas.microsoft.com/office/drawing/2014/main" val="224629347"/>
-                  </a:ext>
-                </a:extLst>
-              </a:tr>
-              <a:tr h="737616">
-                <a:tc>
-                  <a:txBody>
-                    <a:bodyPr/>
-                    <a:lstStyle/>
-                    <a:p>
-                      <a:pPr algn="ctr">
-                        <a:buNone/>
-                      </a:pPr>
-                      <a:r>
-                        <a:rPr lang="pt-BR" sz="2800" b="0" dirty="0">
-                          <a:latin typeface="Times New Roman" panose="02020603050405020304" pitchFamily="18" charset="0"/>
-                          <a:cs typeface="Times New Roman" panose="02020603050405020304" pitchFamily="18" charset="0"/>
-                        </a:rPr>
-                        <a:t>DELETE</a:t>
-                      </a:r>
-                    </a:p>
-                  </a:txBody>
-                  <a:tcPr marL="167640" marR="167640" marT="83820" marB="83820" anchor="ctr">
-                    <a:lnL w="12700" cap="flat" cmpd="sng" algn="ctr">
-                      <a:solidFill>
-                        <a:schemeClr val="tx1"/>
-                      </a:solidFill>
-                      <a:prstDash val="solid"/>
-                      <a:round/>
-                      <a:headEnd type="none" w="med" len="med"/>
-                      <a:tailEnd type="none" w="med" len="med"/>
-                    </a:lnL>
-                    <a:lnR w="12700" cap="flat" cmpd="sng" algn="ctr">
-                      <a:solidFill>
-                        <a:schemeClr val="tx1"/>
-                      </a:solidFill>
-                      <a:prstDash val="solid"/>
-                      <a:round/>
-                      <a:headEnd type="none" w="med" len="med"/>
-                      <a:tailEnd type="none" w="med" len="med"/>
-                    </a:lnR>
-                    <a:lnT w="12700" cap="flat" cmpd="sng" algn="ctr">
-                      <a:solidFill>
-                        <a:schemeClr val="tx1"/>
-                      </a:solidFill>
-                      <a:prstDash val="solid"/>
-                      <a:round/>
-                      <a:headEnd type="none" w="med" len="med"/>
-                      <a:tailEnd type="none" w="med" len="med"/>
-                    </a:lnT>
-                    <a:lnB w="12700" cap="flat" cmpd="sng" algn="ctr">
-                      <a:solidFill>
-                        <a:schemeClr val="tx1"/>
-                      </a:solidFill>
-                      <a:prstDash val="solid"/>
-                      <a:round/>
-                      <a:headEnd type="none" w="med" len="med"/>
-                      <a:tailEnd type="none" w="med" len="med"/>
-                    </a:lnB>
-                    <a:noFill/>
-                  </a:tcPr>
-                </a:tc>
-                <a:tc>
-                  <a:txBody>
-                    <a:bodyPr/>
-                    <a:lstStyle/>
-                    <a:p>
-                      <a:pPr algn="ctr">
-                        <a:buNone/>
-                      </a:pPr>
-                      <a:r>
-                        <a:rPr lang="pt-BR" sz="2800">
-                          <a:latin typeface="Times New Roman" panose="02020603050405020304" pitchFamily="18" charset="0"/>
-                          <a:cs typeface="Times New Roman" panose="02020603050405020304" pitchFamily="18" charset="0"/>
-                        </a:rPr>
-                        <a:t>Excluir</a:t>
-                      </a:r>
-                    </a:p>
-                  </a:txBody>
-                  <a:tcPr marL="167640" marR="167640" marT="83820" marB="83820" anchor="ctr">
-                    <a:lnL w="12700" cap="flat" cmpd="sng" algn="ctr">
-                      <a:solidFill>
-                        <a:schemeClr val="tx1"/>
-                      </a:solidFill>
-                      <a:prstDash val="solid"/>
-                      <a:round/>
-                      <a:headEnd type="none" w="med" len="med"/>
-                      <a:tailEnd type="none" w="med" len="med"/>
-                    </a:lnL>
-                    <a:lnR w="12700" cap="flat" cmpd="sng" algn="ctr">
-                      <a:solidFill>
-                        <a:schemeClr val="tx1"/>
-                      </a:solidFill>
-                      <a:prstDash val="solid"/>
-                      <a:round/>
-                      <a:headEnd type="none" w="med" len="med"/>
-                      <a:tailEnd type="none" w="med" len="med"/>
-                    </a:lnR>
-                    <a:lnT w="12700" cap="flat" cmpd="sng" algn="ctr">
-                      <a:solidFill>
-                        <a:schemeClr val="tx1"/>
-                      </a:solidFill>
-                      <a:prstDash val="solid"/>
-                      <a:round/>
-                      <a:headEnd type="none" w="med" len="med"/>
-                      <a:tailEnd type="none" w="med" len="med"/>
-                    </a:lnT>
-                    <a:lnB w="12700" cap="flat" cmpd="sng" algn="ctr">
-                      <a:solidFill>
-                        <a:schemeClr val="tx1"/>
-                      </a:solidFill>
-                      <a:prstDash val="solid"/>
-                      <a:round/>
-                      <a:headEnd type="none" w="med" len="med"/>
-                      <a:tailEnd type="none" w="med" len="med"/>
-                    </a:lnB>
-                    <a:noFill/>
-                  </a:tcPr>
-                </a:tc>
-                <a:tc>
-                  <a:txBody>
-                    <a:bodyPr/>
-                    <a:lstStyle/>
-                    <a:p>
-                      <a:pPr algn="ctr">
-                        <a:buNone/>
-                      </a:pPr>
-                      <a:r>
-                        <a:rPr lang="pt-BR" sz="2800" dirty="0">
-                          <a:latin typeface="Times New Roman" panose="02020603050405020304" pitchFamily="18" charset="0"/>
-                          <a:cs typeface="Times New Roman" panose="02020603050405020304" pitchFamily="18" charset="0"/>
-                        </a:rPr>
-                        <a:t>Remover dentista</a:t>
-                      </a:r>
-                    </a:p>
-                  </a:txBody>
-                  <a:tcPr marL="167640" marR="167640" marT="83820" marB="83820" anchor="ctr">
-                    <a:lnL w="12700" cap="flat" cmpd="sng" algn="ctr">
-                      <a:solidFill>
-                        <a:schemeClr val="tx1"/>
-                      </a:solidFill>
-                      <a:prstDash val="solid"/>
-                      <a:round/>
-                      <a:headEnd type="none" w="med" len="med"/>
-                      <a:tailEnd type="none" w="med" len="med"/>
-                    </a:lnL>
-                    <a:lnR w="12700" cap="flat" cmpd="sng" algn="ctr">
-                      <a:solidFill>
-                        <a:schemeClr val="tx1"/>
-                      </a:solidFill>
-                      <a:prstDash val="solid"/>
-                      <a:round/>
-                      <a:headEnd type="none" w="med" len="med"/>
-                      <a:tailEnd type="none" w="med" len="med"/>
-                    </a:lnR>
-                    <a:lnT w="12700" cap="flat" cmpd="sng" algn="ctr">
-                      <a:solidFill>
-                        <a:schemeClr val="tx1"/>
-                      </a:solidFill>
-                      <a:prstDash val="solid"/>
-                      <a:round/>
-                      <a:headEnd type="none" w="med" len="med"/>
-                      <a:tailEnd type="none" w="med" len="med"/>
-                    </a:lnT>
-                    <a:lnB w="12700" cap="flat" cmpd="sng" algn="ctr">
-                      <a:solidFill>
-                        <a:schemeClr val="tx1"/>
-                      </a:solidFill>
-                      <a:prstDash val="solid"/>
-                      <a:round/>
-                      <a:headEnd type="none" w="med" len="med"/>
-                      <a:tailEnd type="none" w="med" len="med"/>
-                    </a:lnB>
-                    <a:noFill/>
-                  </a:tcPr>
-                </a:tc>
-                <a:extLst>
-                  <a:ext uri="{0D108BD9-81ED-4DB2-BD59-A6C34878D82A}">
-                    <a16:rowId xmlns:a16="http://schemas.microsoft.com/office/drawing/2014/main" val="1246206181"/>
-                  </a:ext>
-                </a:extLst>
-              </a:tr>
-            </a:tbl>
-          </a:graphicData>
-        </a:graphic>
-      </p:graphicFrame>
-    </p:spTree>
-    <p:extLst>
-      <p:ext uri="{BB962C8B-B14F-4D97-AF65-F5344CB8AC3E}">
-        <p14:creationId xmlns:p14="http://schemas.microsoft.com/office/powerpoint/2010/main" val="3091400304"/>
+        <p14:creationId xmlns:p14="http://schemas.microsoft.com/office/powerpoint/2010/main" val="2430739842"/>
       </p:ext>
     </p:extLst>
   </p:cSld>
@@ -11783,132 +11543,10 @@
   <p:cSld>
     <p:spTree>
       <p:nvGrpSpPr>
-        <p:cNvPr id="1" name=""/>
-        <p:cNvGrpSpPr/>
-        <p:nvPr/>
-      </p:nvGrpSpPr>
-      <p:grpSpPr>
-        <a:xfrm>
-          <a:off x="0" y="0"/>
-          <a:ext cx="0" cy="0"/>
-          <a:chOff x="0" y="0"/>
-          <a:chExt cx="0" cy="0"/>
-        </a:xfrm>
-      </p:grpSpPr>
-      <p:sp>
-        <p:nvSpPr>
-          <p:cNvPr id="2" name="Título 1">
-            <a:extLst>
-              <a:ext uri="{FF2B5EF4-FFF2-40B4-BE49-F238E27FC236}">
-                <a16:creationId xmlns:a16="http://schemas.microsoft.com/office/drawing/2014/main" id="{C3DA52F6-A789-393D-0223-A390957C841A}"/>
-              </a:ext>
-            </a:extLst>
-          </p:cNvPr>
-          <p:cNvSpPr>
-            <a:spLocks noGrp="1"/>
-          </p:cNvSpPr>
-          <p:nvPr>
-            <p:ph type="title"/>
-          </p:nvPr>
-        </p:nvSpPr>
-        <p:spPr/>
-        <p:txBody>
-          <a:bodyPr/>
-          <a:lstStyle/>
-          <a:p>
-            <a:r>
-              <a:rPr lang="pt-BR" dirty="0"/>
-              <a:t>Colocando </a:t>
-            </a:r>
-            <a:r>
-              <a:rPr lang="pt-BR"/>
-              <a:t>em prática</a:t>
-            </a:r>
-          </a:p>
-        </p:txBody>
-      </p:sp>
-      <p:pic>
-        <p:nvPicPr>
-          <p:cNvPr id="5" name="Imagem 4" descr="Tela de celular&#10;&#10;O conteúdo gerado por IA pode estar incorreto.">
-            <a:extLst>
-              <a:ext uri="{FF2B5EF4-FFF2-40B4-BE49-F238E27FC236}">
-                <a16:creationId xmlns:a16="http://schemas.microsoft.com/office/drawing/2014/main" id="{F5DDB60E-DFAD-AB23-8357-1FFC1BD44B15}"/>
-              </a:ext>
-            </a:extLst>
-          </p:cNvPr>
-          <p:cNvPicPr>
-            <a:picLocks noChangeAspect="1"/>
-          </p:cNvPicPr>
-          <p:nvPr/>
-        </p:nvPicPr>
-        <p:blipFill>
-          <a:blip r:embed="rId2"/>
-          <a:stretch>
-            <a:fillRect/>
-          </a:stretch>
-        </p:blipFill>
-        <p:spPr>
-          <a:xfrm>
-            <a:off x="2423600" y="2207910"/>
-            <a:ext cx="7344800" cy="1638529"/>
-          </a:xfrm>
-          <a:prstGeom prst="rect">
-            <a:avLst/>
-          </a:prstGeom>
-        </p:spPr>
-      </p:pic>
-      <p:pic>
-        <p:nvPicPr>
-          <p:cNvPr id="7" name="Imagem 6" descr="Texto&#10;&#10;O conteúdo gerado por IA pode estar incorreto.">
-            <a:extLst>
-              <a:ext uri="{FF2B5EF4-FFF2-40B4-BE49-F238E27FC236}">
-                <a16:creationId xmlns:a16="http://schemas.microsoft.com/office/drawing/2014/main" id="{73591627-856C-55F0-D6AE-196821AA1D63}"/>
-              </a:ext>
-            </a:extLst>
-          </p:cNvPr>
-          <p:cNvPicPr>
-            <a:picLocks noChangeAspect="1"/>
-          </p:cNvPicPr>
-          <p:nvPr/>
-        </p:nvPicPr>
-        <p:blipFill>
-          <a:blip r:embed="rId3"/>
-          <a:stretch>
-            <a:fillRect/>
-          </a:stretch>
-        </p:blipFill>
-        <p:spPr>
-          <a:xfrm>
-            <a:off x="3409448" y="4751356"/>
-            <a:ext cx="5373105" cy="1538607"/>
-          </a:xfrm>
-          <a:prstGeom prst="rect">
-            <a:avLst/>
-          </a:prstGeom>
-        </p:spPr>
-      </p:pic>
-    </p:spTree>
-    <p:extLst>
-      <p:ext uri="{BB962C8B-B14F-4D97-AF65-F5344CB8AC3E}">
-        <p14:creationId xmlns:p14="http://schemas.microsoft.com/office/powerpoint/2010/main" val="1400886347"/>
-      </p:ext>
-    </p:extLst>
-  </p:cSld>
-  <p:clrMapOvr>
-    <a:masterClrMapping/>
-  </p:clrMapOvr>
-</p:sld>
-</file>
-
-<file path=ppt/slides/slide27.xml><?xml version="1.0" encoding="utf-8"?>
-<p:sld xmlns:a="http://schemas.openxmlformats.org/drawingml/2006/main" xmlns:r="http://schemas.openxmlformats.org/officeDocument/2006/relationships" xmlns:p="http://schemas.openxmlformats.org/presentationml/2006/main">
-  <p:cSld>
-    <p:spTree>
-      <p:nvGrpSpPr>
         <p:cNvPr id="1" name="">
           <a:extLst>
             <a:ext uri="{FF2B5EF4-FFF2-40B4-BE49-F238E27FC236}">
-              <a16:creationId xmlns:a16="http://schemas.microsoft.com/office/drawing/2014/main" id="{59993DCA-E4E4-845E-D23E-82890D1A472E}"/>
+              <a16:creationId xmlns:a16="http://schemas.microsoft.com/office/drawing/2014/main" id="{69D9BDF4-D721-FB84-9856-A1346ABC2316}"/>
             </a:ext>
           </a:extLst>
         </p:cNvPr>
@@ -11928,7 +11566,7 @@
           <p:cNvPr id="2" name="Título 1">
             <a:extLst>
               <a:ext uri="{FF2B5EF4-FFF2-40B4-BE49-F238E27FC236}">
-                <a16:creationId xmlns:a16="http://schemas.microsoft.com/office/drawing/2014/main" id="{81EE5BB9-3715-B5EC-AC01-0CA2A2F577B4}"/>
+                <a16:creationId xmlns:a16="http://schemas.microsoft.com/office/drawing/2014/main" id="{44A3F8C8-8792-147B-447C-0F213A1D8BAE}"/>
               </a:ext>
             </a:extLst>
           </p:cNvPr>
@@ -11946,79 +11584,747 @@
           <a:p>
             <a:r>
               <a:rPr lang="pt-BR" dirty="0"/>
-              <a:t>Colocando </a:t>
-            </a:r>
-            <a:r>
-              <a:rPr lang="pt-BR"/>
-              <a:t>em prática</a:t>
+              <a:t>Adicionando valores nas células </a:t>
             </a:r>
           </a:p>
         </p:txBody>
       </p:sp>
-      <p:pic>
-        <p:nvPicPr>
-          <p:cNvPr id="4" name="Imagem 3" descr="Tela de celular&#10;&#10;O conteúdo gerado por IA pode estar incorreto.">
+      <p:sp>
+        <p:nvSpPr>
+          <p:cNvPr id="3" name="Espaço Reservado para Conteúdo 2">
             <a:extLst>
               <a:ext uri="{FF2B5EF4-FFF2-40B4-BE49-F238E27FC236}">
-                <a16:creationId xmlns:a16="http://schemas.microsoft.com/office/drawing/2014/main" id="{5866078B-6D83-5864-0345-F6E1F5BBE7D0}"/>
+                <a16:creationId xmlns:a16="http://schemas.microsoft.com/office/drawing/2014/main" id="{B8F81503-A5AA-5447-EEAA-83283C9FB05B}"/>
               </a:ext>
             </a:extLst>
           </p:cNvPr>
-          <p:cNvPicPr>
-            <a:picLocks noChangeAspect="1"/>
-          </p:cNvPicPr>
-          <p:nvPr/>
-        </p:nvPicPr>
-        <p:blipFill>
-          <a:blip r:embed="rId2"/>
-          <a:stretch>
-            <a:fillRect/>
-          </a:stretch>
-        </p:blipFill>
+          <p:cNvSpPr>
+            <a:spLocks noGrp="1"/>
+          </p:cNvSpPr>
+          <p:nvPr>
+            <p:ph idx="1"/>
+          </p:nvPr>
+        </p:nvSpPr>
         <p:spPr>
           <a:xfrm>
-            <a:off x="2256889" y="1849700"/>
-            <a:ext cx="7678222" cy="1676634"/>
+            <a:off x="592347" y="1844675"/>
+            <a:ext cx="11007306" cy="1155199"/>
+          </a:xfrm>
+        </p:spPr>
+        <p:txBody>
+          <a:bodyPr/>
+          <a:lstStyle/>
+          <a:p>
+            <a:r>
+              <a:rPr lang="pt-BR" dirty="0"/>
+              <a:t>Para adicionar os valores nos elementos </a:t>
+            </a:r>
+            <a:r>
+              <a:rPr lang="pt-BR" dirty="0" err="1"/>
+              <a:t>html</a:t>
+            </a:r>
+            <a:r>
+              <a:rPr lang="pt-BR" dirty="0"/>
+              <a:t>, devemos utilizar o </a:t>
+            </a:r>
+            <a:r>
+              <a:rPr lang="pt-BR" sz="1800" kern="0" spc="-19" dirty="0" err="1">
+                <a:solidFill>
+                  <a:srgbClr val="D73A49"/>
+                </a:solidFill>
+                <a:latin typeface="Consolas" pitchFamily="34" charset="0"/>
+              </a:rPr>
+              <a:t>textContent</a:t>
+            </a:r>
+            <a:r>
+              <a:rPr lang="pt-BR" dirty="0"/>
+              <a:t>, ele é o responsável por adicionar texto na </a:t>
+            </a:r>
+            <a:r>
+              <a:rPr lang="pt-BR" dirty="0" err="1"/>
+              <a:t>tag</a:t>
+            </a:r>
+            <a:r>
+              <a:rPr lang="pt-BR" dirty="0"/>
+              <a:t> diretamente do </a:t>
+            </a:r>
+            <a:r>
+              <a:rPr lang="pt-BR" dirty="0" err="1"/>
+              <a:t>js</a:t>
+            </a:r>
+            <a:r>
+              <a:rPr lang="pt-BR" dirty="0"/>
+              <a:t>.</a:t>
+            </a:r>
+          </a:p>
+        </p:txBody>
+      </p:sp>
+      <p:sp>
+        <p:nvSpPr>
+          <p:cNvPr id="5" name="Espaço Reservado para Conteúdo 5">
+            <a:extLst>
+              <a:ext uri="{FF2B5EF4-FFF2-40B4-BE49-F238E27FC236}">
+                <a16:creationId xmlns:a16="http://schemas.microsoft.com/office/drawing/2014/main" id="{E5D7D8E8-DCD9-B3CB-B2CF-6D4047B44A23}"/>
+              </a:ext>
+            </a:extLst>
+          </p:cNvPr>
+          <p:cNvSpPr txBox="1">
+            <a:spLocks/>
+          </p:cNvSpPr>
+          <p:nvPr/>
+        </p:nvSpPr>
+        <p:spPr>
+          <a:xfrm>
+            <a:off x="592347" y="4967376"/>
+            <a:ext cx="5359879" cy="366590"/>
           </a:xfrm>
           <a:prstGeom prst="rect">
             <a:avLst/>
           </a:prstGeom>
         </p:spPr>
-      </p:pic>
-      <p:pic>
-        <p:nvPicPr>
-          <p:cNvPr id="8" name="Imagem 7" descr="Texto&#10;&#10;O conteúdo gerado por IA pode estar incorreto.">
+        <p:txBody>
+          <a:bodyPr/>
+          <a:lstStyle>
+            <a:lvl1pPr marL="0" indent="0" algn="just" defTabSz="914400" rtl="0" eaLnBrk="1" latinLnBrk="0" hangingPunct="1">
+              <a:lnSpc>
+                <a:spcPct val="150000"/>
+              </a:lnSpc>
+              <a:spcBef>
+                <a:spcPts val="0"/>
+              </a:spcBef>
+              <a:buFont typeface="Arial" panose="020B0604020202020204" pitchFamily="34" charset="0"/>
+              <a:buNone/>
+              <a:defRPr sz="2000" kern="1200">
+                <a:solidFill>
+                  <a:schemeClr val="tx1"/>
+                </a:solidFill>
+                <a:latin typeface="Times New Roman" panose="02020603050405020304" pitchFamily="18" charset="0"/>
+                <a:ea typeface="+mn-ea"/>
+                <a:cs typeface="Times New Roman" panose="02020603050405020304" pitchFamily="18" charset="0"/>
+              </a:defRPr>
+            </a:lvl1pPr>
+            <a:lvl2pPr marL="457200" indent="0" algn="just" defTabSz="914400" rtl="0" eaLnBrk="1" latinLnBrk="0" hangingPunct="1">
+              <a:lnSpc>
+                <a:spcPct val="150000"/>
+              </a:lnSpc>
+              <a:spcBef>
+                <a:spcPts val="0"/>
+              </a:spcBef>
+              <a:buFont typeface="Arial" panose="020B0604020202020204" pitchFamily="34" charset="0"/>
+              <a:buNone/>
+              <a:defRPr sz="1600" kern="1200">
+                <a:solidFill>
+                  <a:schemeClr val="tx1"/>
+                </a:solidFill>
+                <a:latin typeface="Times New Roman" panose="02020603050405020304" pitchFamily="18" charset="0"/>
+                <a:ea typeface="+mn-ea"/>
+                <a:cs typeface="Times New Roman" panose="02020603050405020304" pitchFamily="18" charset="0"/>
+              </a:defRPr>
+            </a:lvl2pPr>
+            <a:lvl3pPr marL="914400" indent="0" algn="just" defTabSz="914400" rtl="0" eaLnBrk="1" latinLnBrk="0" hangingPunct="1">
+              <a:lnSpc>
+                <a:spcPct val="150000"/>
+              </a:lnSpc>
+              <a:spcBef>
+                <a:spcPts val="0"/>
+              </a:spcBef>
+              <a:buFont typeface="Arial" panose="020B0604020202020204" pitchFamily="34" charset="0"/>
+              <a:buNone/>
+              <a:defRPr sz="1400" kern="1200">
+                <a:solidFill>
+                  <a:schemeClr val="tx1"/>
+                </a:solidFill>
+                <a:latin typeface="Times New Roman" panose="02020603050405020304" pitchFamily="18" charset="0"/>
+                <a:ea typeface="+mn-ea"/>
+                <a:cs typeface="Times New Roman" panose="02020603050405020304" pitchFamily="18" charset="0"/>
+              </a:defRPr>
+            </a:lvl3pPr>
+            <a:lvl4pPr marL="1371600" indent="0" algn="just" defTabSz="914400" rtl="0" eaLnBrk="1" latinLnBrk="0" hangingPunct="1">
+              <a:lnSpc>
+                <a:spcPct val="150000"/>
+              </a:lnSpc>
+              <a:spcBef>
+                <a:spcPts val="0"/>
+              </a:spcBef>
+              <a:buFont typeface="Arial" panose="020B0604020202020204" pitchFamily="34" charset="0"/>
+              <a:buNone/>
+              <a:defRPr sz="1200" kern="1200">
+                <a:solidFill>
+                  <a:schemeClr val="tx1"/>
+                </a:solidFill>
+                <a:latin typeface="Times New Roman" panose="02020603050405020304" pitchFamily="18" charset="0"/>
+                <a:ea typeface="+mn-ea"/>
+                <a:cs typeface="Times New Roman" panose="02020603050405020304" pitchFamily="18" charset="0"/>
+              </a:defRPr>
+            </a:lvl4pPr>
+            <a:lvl5pPr marL="1828800" indent="0" algn="just" defTabSz="914400" rtl="0" eaLnBrk="1" latinLnBrk="0" hangingPunct="1">
+              <a:lnSpc>
+                <a:spcPct val="150000"/>
+              </a:lnSpc>
+              <a:spcBef>
+                <a:spcPts val="0"/>
+              </a:spcBef>
+              <a:buFont typeface="Arial" panose="020B0604020202020204" pitchFamily="34" charset="0"/>
+              <a:buNone/>
+              <a:defRPr sz="1000" kern="1200">
+                <a:solidFill>
+                  <a:schemeClr val="tx1"/>
+                </a:solidFill>
+                <a:latin typeface="Times New Roman" panose="02020603050405020304" pitchFamily="18" charset="0"/>
+                <a:ea typeface="+mn-ea"/>
+                <a:cs typeface="Times New Roman" panose="02020603050405020304" pitchFamily="18" charset="0"/>
+              </a:defRPr>
+            </a:lvl5pPr>
+            <a:lvl6pPr marL="2514600" indent="-228600" algn="l" defTabSz="914400" rtl="0" eaLnBrk="1" latinLnBrk="0" hangingPunct="1">
+              <a:lnSpc>
+                <a:spcPct val="90000"/>
+              </a:lnSpc>
+              <a:spcBef>
+                <a:spcPts val="500"/>
+              </a:spcBef>
+              <a:buFont typeface="Arial" panose="020B0604020202020204" pitchFamily="34" charset="0"/>
+              <a:buChar char="•"/>
+              <a:defRPr sz="1800" kern="1200">
+                <a:solidFill>
+                  <a:schemeClr val="tx1"/>
+                </a:solidFill>
+                <a:latin typeface="+mn-lt"/>
+                <a:ea typeface="+mn-ea"/>
+                <a:cs typeface="+mn-cs"/>
+              </a:defRPr>
+            </a:lvl6pPr>
+            <a:lvl7pPr marL="2971800" indent="-228600" algn="l" defTabSz="914400" rtl="0" eaLnBrk="1" latinLnBrk="0" hangingPunct="1">
+              <a:lnSpc>
+                <a:spcPct val="90000"/>
+              </a:lnSpc>
+              <a:spcBef>
+                <a:spcPts val="500"/>
+              </a:spcBef>
+              <a:buFont typeface="Arial" panose="020B0604020202020204" pitchFamily="34" charset="0"/>
+              <a:buChar char="•"/>
+              <a:defRPr sz="1800" kern="1200">
+                <a:solidFill>
+                  <a:schemeClr val="tx1"/>
+                </a:solidFill>
+                <a:latin typeface="+mn-lt"/>
+                <a:ea typeface="+mn-ea"/>
+                <a:cs typeface="+mn-cs"/>
+              </a:defRPr>
+            </a:lvl7pPr>
+            <a:lvl8pPr marL="3429000" indent="-228600" algn="l" defTabSz="914400" rtl="0" eaLnBrk="1" latinLnBrk="0" hangingPunct="1">
+              <a:lnSpc>
+                <a:spcPct val="90000"/>
+              </a:lnSpc>
+              <a:spcBef>
+                <a:spcPts val="500"/>
+              </a:spcBef>
+              <a:buFont typeface="Arial" panose="020B0604020202020204" pitchFamily="34" charset="0"/>
+              <a:buChar char="•"/>
+              <a:defRPr sz="1800" kern="1200">
+                <a:solidFill>
+                  <a:schemeClr val="tx1"/>
+                </a:solidFill>
+                <a:latin typeface="+mn-lt"/>
+                <a:ea typeface="+mn-ea"/>
+                <a:cs typeface="+mn-cs"/>
+              </a:defRPr>
+            </a:lvl8pPr>
+            <a:lvl9pPr marL="3886200" indent="-228600" algn="l" defTabSz="914400" rtl="0" eaLnBrk="1" latinLnBrk="0" hangingPunct="1">
+              <a:lnSpc>
+                <a:spcPct val="90000"/>
+              </a:lnSpc>
+              <a:spcBef>
+                <a:spcPts val="500"/>
+              </a:spcBef>
+              <a:buFont typeface="Arial" panose="020B0604020202020204" pitchFamily="34" charset="0"/>
+              <a:buChar char="•"/>
+              <a:defRPr sz="1800" kern="1200">
+                <a:solidFill>
+                  <a:schemeClr val="tx1"/>
+                </a:solidFill>
+                <a:latin typeface="+mn-lt"/>
+                <a:ea typeface="+mn-ea"/>
+                <a:cs typeface="+mn-cs"/>
+              </a:defRPr>
+            </a:lvl9pPr>
+          </a:lstStyle>
+          <a:p>
+            <a:pPr>
+              <a:lnSpc>
+                <a:spcPct val="100000"/>
+              </a:lnSpc>
+            </a:pPr>
+            <a:r>
+              <a:rPr lang="pt-BR" sz="1600" dirty="0"/>
+              <a:t>Exemplo:</a:t>
+            </a:r>
+          </a:p>
+        </p:txBody>
+      </p:sp>
+      <p:grpSp>
+        <p:nvGrpSpPr>
+          <p:cNvPr id="6" name="Agrupar 5">
             <a:extLst>
               <a:ext uri="{FF2B5EF4-FFF2-40B4-BE49-F238E27FC236}">
-                <a16:creationId xmlns:a16="http://schemas.microsoft.com/office/drawing/2014/main" id="{6E381689-411A-EF00-0497-0440A52E8EEC}"/>
+                <a16:creationId xmlns:a16="http://schemas.microsoft.com/office/drawing/2014/main" id="{EDCD73C5-8E46-76AB-4902-BE7560AEA881}"/>
               </a:ext>
             </a:extLst>
           </p:cNvPr>
-          <p:cNvPicPr>
-            <a:picLocks noChangeAspect="1"/>
-          </p:cNvPicPr>
+          <p:cNvGrpSpPr/>
           <p:nvPr/>
-        </p:nvPicPr>
-        <p:blipFill>
-          <a:blip r:embed="rId3"/>
-          <a:stretch>
-            <a:fillRect/>
-          </a:stretch>
-        </p:blipFill>
+        </p:nvGrpSpPr>
+        <p:grpSpPr>
+          <a:xfrm>
+            <a:off x="749184" y="5654746"/>
+            <a:ext cx="8907433" cy="638572"/>
+            <a:chOff x="749185" y="2527734"/>
+            <a:chExt cx="5284556" cy="638572"/>
+          </a:xfrm>
+        </p:grpSpPr>
+        <p:sp>
+          <p:nvSpPr>
+            <p:cNvPr id="7" name="Shape 20">
+              <a:extLst>
+                <a:ext uri="{FF2B5EF4-FFF2-40B4-BE49-F238E27FC236}">
+                  <a16:creationId xmlns:a16="http://schemas.microsoft.com/office/drawing/2014/main" id="{E15CF89C-C26D-BE59-052F-8EF6ABEC0446}"/>
+                </a:ext>
+              </a:extLst>
+            </p:cNvPr>
+            <p:cNvSpPr/>
+            <p:nvPr/>
+          </p:nvSpPr>
+          <p:spPr>
+            <a:xfrm>
+              <a:off x="749185" y="2527734"/>
+              <a:ext cx="5284556" cy="638572"/>
+            </a:xfrm>
+            <a:prstGeom prst="roundRect">
+              <a:avLst>
+                <a:gd name="adj" fmla="val 8081"/>
+              </a:avLst>
+            </a:prstGeom>
+            <a:solidFill>
+              <a:srgbClr val="F2F2F2"/>
+            </a:solidFill>
+            <a:ln/>
+          </p:spPr>
+          <p:txBody>
+            <a:bodyPr/>
+            <a:lstStyle/>
+            <a:p>
+              <a:endParaRPr lang="pt-BR"/>
+            </a:p>
+          </p:txBody>
+        </p:sp>
+        <p:sp>
+          <p:nvSpPr>
+            <p:cNvPr id="8" name="Text 21">
+              <a:extLst>
+                <a:ext uri="{FF2B5EF4-FFF2-40B4-BE49-F238E27FC236}">
+                  <a16:creationId xmlns:a16="http://schemas.microsoft.com/office/drawing/2014/main" id="{C4D1ED42-6724-DDDE-2A93-7147BF3F148F}"/>
+                </a:ext>
+              </a:extLst>
+            </p:cNvPr>
+            <p:cNvSpPr/>
+            <p:nvPr/>
+          </p:nvSpPr>
+          <p:spPr>
+            <a:xfrm>
+              <a:off x="896521" y="2712610"/>
+              <a:ext cx="4989884" cy="268820"/>
+            </a:xfrm>
+            <a:prstGeom prst="rect">
+              <a:avLst/>
+            </a:prstGeom>
+            <a:noFill/>
+            <a:ln/>
+          </p:spPr>
+          <p:txBody>
+            <a:bodyPr wrap="square" lIns="0" tIns="0" rIns="0" bIns="0" rtlCol="0" anchor="t">
+              <a:noAutofit/>
+            </a:bodyPr>
+            <a:lstStyle/>
+            <a:p>
+              <a:pPr marL="0" indent="0" algn="l">
+                <a:buNone/>
+              </a:pPr>
+              <a:r>
+                <a:rPr lang="en-US" kern="0" spc="-19" dirty="0" err="1">
+                  <a:solidFill>
+                    <a:srgbClr val="D73A49"/>
+                  </a:solidFill>
+                  <a:latin typeface="Consolas" pitchFamily="34" charset="0"/>
+                  <a:ea typeface="Consolas" pitchFamily="34" charset="-122"/>
+                  <a:cs typeface="Consolas" pitchFamily="34" charset="-120"/>
+                </a:rPr>
+                <a:t>tdNome.textContent</a:t>
+              </a:r>
+              <a:r>
+                <a:rPr lang="en-US" kern="0" spc="-19" dirty="0">
+                  <a:solidFill>
+                    <a:srgbClr val="D73A49"/>
+                  </a:solidFill>
+                  <a:latin typeface="Consolas" pitchFamily="34" charset="0"/>
+                  <a:ea typeface="Consolas" pitchFamily="34" charset="-122"/>
+                  <a:cs typeface="Consolas" pitchFamily="34" charset="-120"/>
+                </a:rPr>
+                <a:t> = </a:t>
+              </a:r>
+              <a:r>
+                <a:rPr lang="en-US" kern="0" spc="-19" dirty="0" err="1">
+                  <a:solidFill>
+                    <a:srgbClr val="D73A49"/>
+                  </a:solidFill>
+                  <a:latin typeface="Consolas" pitchFamily="34" charset="0"/>
+                  <a:ea typeface="Consolas" pitchFamily="34" charset="-122"/>
+                  <a:cs typeface="Consolas" pitchFamily="34" charset="-120"/>
+                </a:rPr>
+                <a:t>produto.nome</a:t>
+              </a:r>
+              <a:r>
+                <a:rPr lang="en-US" kern="0" spc="-19" dirty="0">
+                  <a:solidFill>
+                    <a:srgbClr val="D73A49"/>
+                  </a:solidFill>
+                  <a:latin typeface="Consolas" pitchFamily="34" charset="0"/>
+                  <a:ea typeface="Consolas" pitchFamily="34" charset="-122"/>
+                  <a:cs typeface="Consolas" pitchFamily="34" charset="-120"/>
+                </a:rPr>
+                <a:t>	</a:t>
+              </a:r>
+              <a:endParaRPr lang="en-US" dirty="0"/>
+            </a:p>
+          </p:txBody>
+        </p:sp>
+      </p:grpSp>
+      <p:sp>
+        <p:nvSpPr>
+          <p:cNvPr id="10" name="Espaço Reservado para Conteúdo 5">
+            <a:extLst>
+              <a:ext uri="{FF2B5EF4-FFF2-40B4-BE49-F238E27FC236}">
+                <a16:creationId xmlns:a16="http://schemas.microsoft.com/office/drawing/2014/main" id="{D7F8D6B8-02BF-737F-9D68-366A92142C61}"/>
+              </a:ext>
+            </a:extLst>
+          </p:cNvPr>
+          <p:cNvSpPr txBox="1">
+            <a:spLocks/>
+          </p:cNvSpPr>
+          <p:nvPr/>
+        </p:nvSpPr>
         <p:spPr>
           <a:xfrm>
-            <a:off x="2584165" y="4169983"/>
-            <a:ext cx="7023670" cy="1968245"/>
+            <a:off x="592347" y="3320654"/>
+            <a:ext cx="8189344" cy="366590"/>
           </a:xfrm>
           <a:prstGeom prst="rect">
             <a:avLst/>
           </a:prstGeom>
         </p:spPr>
-      </p:pic>
+        <p:txBody>
+          <a:bodyPr/>
+          <a:lstStyle>
+            <a:lvl1pPr marL="0" indent="0" algn="just" defTabSz="914400" rtl="0" eaLnBrk="1" latinLnBrk="0" hangingPunct="1">
+              <a:lnSpc>
+                <a:spcPct val="150000"/>
+              </a:lnSpc>
+              <a:spcBef>
+                <a:spcPts val="0"/>
+              </a:spcBef>
+              <a:buFont typeface="Arial" panose="020B0604020202020204" pitchFamily="34" charset="0"/>
+              <a:buNone/>
+              <a:defRPr sz="2000" kern="1200">
+                <a:solidFill>
+                  <a:schemeClr val="tx1"/>
+                </a:solidFill>
+                <a:latin typeface="Times New Roman" panose="02020603050405020304" pitchFamily="18" charset="0"/>
+                <a:ea typeface="+mn-ea"/>
+                <a:cs typeface="Times New Roman" panose="02020603050405020304" pitchFamily="18" charset="0"/>
+              </a:defRPr>
+            </a:lvl1pPr>
+            <a:lvl2pPr marL="457200" indent="0" algn="just" defTabSz="914400" rtl="0" eaLnBrk="1" latinLnBrk="0" hangingPunct="1">
+              <a:lnSpc>
+                <a:spcPct val="150000"/>
+              </a:lnSpc>
+              <a:spcBef>
+                <a:spcPts val="0"/>
+              </a:spcBef>
+              <a:buFont typeface="Arial" panose="020B0604020202020204" pitchFamily="34" charset="0"/>
+              <a:buNone/>
+              <a:defRPr sz="1600" kern="1200">
+                <a:solidFill>
+                  <a:schemeClr val="tx1"/>
+                </a:solidFill>
+                <a:latin typeface="Times New Roman" panose="02020603050405020304" pitchFamily="18" charset="0"/>
+                <a:ea typeface="+mn-ea"/>
+                <a:cs typeface="Times New Roman" panose="02020603050405020304" pitchFamily="18" charset="0"/>
+              </a:defRPr>
+            </a:lvl2pPr>
+            <a:lvl3pPr marL="914400" indent="0" algn="just" defTabSz="914400" rtl="0" eaLnBrk="1" latinLnBrk="0" hangingPunct="1">
+              <a:lnSpc>
+                <a:spcPct val="150000"/>
+              </a:lnSpc>
+              <a:spcBef>
+                <a:spcPts val="0"/>
+              </a:spcBef>
+              <a:buFont typeface="Arial" panose="020B0604020202020204" pitchFamily="34" charset="0"/>
+              <a:buNone/>
+              <a:defRPr sz="1400" kern="1200">
+                <a:solidFill>
+                  <a:schemeClr val="tx1"/>
+                </a:solidFill>
+                <a:latin typeface="Times New Roman" panose="02020603050405020304" pitchFamily="18" charset="0"/>
+                <a:ea typeface="+mn-ea"/>
+                <a:cs typeface="Times New Roman" panose="02020603050405020304" pitchFamily="18" charset="0"/>
+              </a:defRPr>
+            </a:lvl3pPr>
+            <a:lvl4pPr marL="1371600" indent="0" algn="just" defTabSz="914400" rtl="0" eaLnBrk="1" latinLnBrk="0" hangingPunct="1">
+              <a:lnSpc>
+                <a:spcPct val="150000"/>
+              </a:lnSpc>
+              <a:spcBef>
+                <a:spcPts val="0"/>
+              </a:spcBef>
+              <a:buFont typeface="Arial" panose="020B0604020202020204" pitchFamily="34" charset="0"/>
+              <a:buNone/>
+              <a:defRPr sz="1200" kern="1200">
+                <a:solidFill>
+                  <a:schemeClr val="tx1"/>
+                </a:solidFill>
+                <a:latin typeface="Times New Roman" panose="02020603050405020304" pitchFamily="18" charset="0"/>
+                <a:ea typeface="+mn-ea"/>
+                <a:cs typeface="Times New Roman" panose="02020603050405020304" pitchFamily="18" charset="0"/>
+              </a:defRPr>
+            </a:lvl4pPr>
+            <a:lvl5pPr marL="1828800" indent="0" algn="just" defTabSz="914400" rtl="0" eaLnBrk="1" latinLnBrk="0" hangingPunct="1">
+              <a:lnSpc>
+                <a:spcPct val="150000"/>
+              </a:lnSpc>
+              <a:spcBef>
+                <a:spcPts val="0"/>
+              </a:spcBef>
+              <a:buFont typeface="Arial" panose="020B0604020202020204" pitchFamily="34" charset="0"/>
+              <a:buNone/>
+              <a:defRPr sz="1000" kern="1200">
+                <a:solidFill>
+                  <a:schemeClr val="tx1"/>
+                </a:solidFill>
+                <a:latin typeface="Times New Roman" panose="02020603050405020304" pitchFamily="18" charset="0"/>
+                <a:ea typeface="+mn-ea"/>
+                <a:cs typeface="Times New Roman" panose="02020603050405020304" pitchFamily="18" charset="0"/>
+              </a:defRPr>
+            </a:lvl5pPr>
+            <a:lvl6pPr marL="2514600" indent="-228600" algn="l" defTabSz="914400" rtl="0" eaLnBrk="1" latinLnBrk="0" hangingPunct="1">
+              <a:lnSpc>
+                <a:spcPct val="90000"/>
+              </a:lnSpc>
+              <a:spcBef>
+                <a:spcPts val="500"/>
+              </a:spcBef>
+              <a:buFont typeface="Arial" panose="020B0604020202020204" pitchFamily="34" charset="0"/>
+              <a:buChar char="•"/>
+              <a:defRPr sz="1800" kern="1200">
+                <a:solidFill>
+                  <a:schemeClr val="tx1"/>
+                </a:solidFill>
+                <a:latin typeface="+mn-lt"/>
+                <a:ea typeface="+mn-ea"/>
+                <a:cs typeface="+mn-cs"/>
+              </a:defRPr>
+            </a:lvl6pPr>
+            <a:lvl7pPr marL="2971800" indent="-228600" algn="l" defTabSz="914400" rtl="0" eaLnBrk="1" latinLnBrk="0" hangingPunct="1">
+              <a:lnSpc>
+                <a:spcPct val="90000"/>
+              </a:lnSpc>
+              <a:spcBef>
+                <a:spcPts val="500"/>
+              </a:spcBef>
+              <a:buFont typeface="Arial" panose="020B0604020202020204" pitchFamily="34" charset="0"/>
+              <a:buChar char="•"/>
+              <a:defRPr sz="1800" kern="1200">
+                <a:solidFill>
+                  <a:schemeClr val="tx1"/>
+                </a:solidFill>
+                <a:latin typeface="+mn-lt"/>
+                <a:ea typeface="+mn-ea"/>
+                <a:cs typeface="+mn-cs"/>
+              </a:defRPr>
+            </a:lvl7pPr>
+            <a:lvl8pPr marL="3429000" indent="-228600" algn="l" defTabSz="914400" rtl="0" eaLnBrk="1" latinLnBrk="0" hangingPunct="1">
+              <a:lnSpc>
+                <a:spcPct val="90000"/>
+              </a:lnSpc>
+              <a:spcBef>
+                <a:spcPts val="500"/>
+              </a:spcBef>
+              <a:buFont typeface="Arial" panose="020B0604020202020204" pitchFamily="34" charset="0"/>
+              <a:buChar char="•"/>
+              <a:defRPr sz="1800" kern="1200">
+                <a:solidFill>
+                  <a:schemeClr val="tx1"/>
+                </a:solidFill>
+                <a:latin typeface="+mn-lt"/>
+                <a:ea typeface="+mn-ea"/>
+                <a:cs typeface="+mn-cs"/>
+              </a:defRPr>
+            </a:lvl8pPr>
+            <a:lvl9pPr marL="3886200" indent="-228600" algn="l" defTabSz="914400" rtl="0" eaLnBrk="1" latinLnBrk="0" hangingPunct="1">
+              <a:lnSpc>
+                <a:spcPct val="90000"/>
+              </a:lnSpc>
+              <a:spcBef>
+                <a:spcPts val="500"/>
+              </a:spcBef>
+              <a:buFont typeface="Arial" panose="020B0604020202020204" pitchFamily="34" charset="0"/>
+              <a:buChar char="•"/>
+              <a:defRPr sz="1800" kern="1200">
+                <a:solidFill>
+                  <a:schemeClr val="tx1"/>
+                </a:solidFill>
+                <a:latin typeface="+mn-lt"/>
+                <a:ea typeface="+mn-ea"/>
+                <a:cs typeface="+mn-cs"/>
+              </a:defRPr>
+            </a:lvl9pPr>
+          </a:lstStyle>
+          <a:p>
+            <a:pPr>
+              <a:lnSpc>
+                <a:spcPct val="100000"/>
+              </a:lnSpc>
+            </a:pPr>
+            <a:r>
+              <a:rPr lang="pt-BR" sz="1600" dirty="0"/>
+              <a:t>Sintaxe:</a:t>
+            </a:r>
+          </a:p>
+        </p:txBody>
+      </p:sp>
+      <p:grpSp>
+        <p:nvGrpSpPr>
+          <p:cNvPr id="11" name="Agrupar 10">
+            <a:extLst>
+              <a:ext uri="{FF2B5EF4-FFF2-40B4-BE49-F238E27FC236}">
+                <a16:creationId xmlns:a16="http://schemas.microsoft.com/office/drawing/2014/main" id="{062A48D2-A59A-8D22-9A25-98F163DF1C4D}"/>
+              </a:ext>
+            </a:extLst>
+          </p:cNvPr>
+          <p:cNvGrpSpPr/>
+          <p:nvPr/>
+        </p:nvGrpSpPr>
+        <p:grpSpPr>
+          <a:xfrm>
+            <a:off x="749184" y="4008024"/>
+            <a:ext cx="8907433" cy="638572"/>
+            <a:chOff x="749185" y="2527734"/>
+            <a:chExt cx="5284556" cy="638572"/>
+          </a:xfrm>
+        </p:grpSpPr>
+        <p:sp>
+          <p:nvSpPr>
+            <p:cNvPr id="12" name="Shape 20">
+              <a:extLst>
+                <a:ext uri="{FF2B5EF4-FFF2-40B4-BE49-F238E27FC236}">
+                  <a16:creationId xmlns:a16="http://schemas.microsoft.com/office/drawing/2014/main" id="{CE0132AC-6070-9186-0C54-9A2D76DCFAB6}"/>
+                </a:ext>
+              </a:extLst>
+            </p:cNvPr>
+            <p:cNvSpPr/>
+            <p:nvPr/>
+          </p:nvSpPr>
+          <p:spPr>
+            <a:xfrm>
+              <a:off x="749185" y="2527734"/>
+              <a:ext cx="5284556" cy="638572"/>
+            </a:xfrm>
+            <a:prstGeom prst="roundRect">
+              <a:avLst>
+                <a:gd name="adj" fmla="val 8081"/>
+              </a:avLst>
+            </a:prstGeom>
+            <a:solidFill>
+              <a:srgbClr val="F2F2F2"/>
+            </a:solidFill>
+            <a:ln/>
+          </p:spPr>
+          <p:txBody>
+            <a:bodyPr/>
+            <a:lstStyle/>
+            <a:p>
+              <a:endParaRPr lang="pt-BR"/>
+            </a:p>
+          </p:txBody>
+        </p:sp>
+        <p:sp>
+          <p:nvSpPr>
+            <p:cNvPr id="13" name="Text 21">
+              <a:extLst>
+                <a:ext uri="{FF2B5EF4-FFF2-40B4-BE49-F238E27FC236}">
+                  <a16:creationId xmlns:a16="http://schemas.microsoft.com/office/drawing/2014/main" id="{D40A0AAA-746D-A802-D5F4-5EDD767EBDF2}"/>
+                </a:ext>
+              </a:extLst>
+            </p:cNvPr>
+            <p:cNvSpPr/>
+            <p:nvPr/>
+          </p:nvSpPr>
+          <p:spPr>
+            <a:xfrm>
+              <a:off x="896521" y="2712610"/>
+              <a:ext cx="4989884" cy="268820"/>
+            </a:xfrm>
+            <a:prstGeom prst="rect">
+              <a:avLst/>
+            </a:prstGeom>
+            <a:noFill/>
+            <a:ln/>
+          </p:spPr>
+          <p:txBody>
+            <a:bodyPr wrap="square" lIns="0" tIns="0" rIns="0" bIns="0" rtlCol="0" anchor="t">
+              <a:noAutofit/>
+            </a:bodyPr>
+            <a:lstStyle/>
+            <a:p>
+              <a:r>
+                <a:rPr lang="en-US" kern="0" spc="-19" dirty="0" err="1">
+                  <a:solidFill>
+                    <a:srgbClr val="D73A49"/>
+                  </a:solidFill>
+                  <a:latin typeface="Consolas" pitchFamily="34" charset="0"/>
+                  <a:ea typeface="Consolas" pitchFamily="34" charset="-122"/>
+                  <a:cs typeface="Consolas" pitchFamily="34" charset="-120"/>
+                </a:rPr>
+                <a:t>variavel.textContent</a:t>
+              </a:r>
+              <a:r>
+                <a:rPr lang="en-US" kern="0" spc="-19" dirty="0">
+                  <a:solidFill>
+                    <a:srgbClr val="D73A49"/>
+                  </a:solidFill>
+                  <a:latin typeface="Consolas" pitchFamily="34" charset="0"/>
+                  <a:ea typeface="Consolas" pitchFamily="34" charset="-122"/>
+                  <a:cs typeface="Consolas" pitchFamily="34" charset="-120"/>
+                </a:rPr>
+                <a:t> = </a:t>
+              </a:r>
+              <a:r>
+                <a:rPr lang="en-US" kern="0" spc="-19" dirty="0" err="1">
+                  <a:solidFill>
+                    <a:srgbClr val="D73A49"/>
+                  </a:solidFill>
+                  <a:latin typeface="Consolas" pitchFamily="34" charset="0"/>
+                  <a:ea typeface="Consolas" pitchFamily="34" charset="-122"/>
+                  <a:cs typeface="Consolas" pitchFamily="34" charset="-120"/>
+                </a:rPr>
+                <a:t>produto.nome</a:t>
+              </a:r>
+              <a:endParaRPr lang="en-US" dirty="0"/>
+            </a:p>
+          </p:txBody>
+        </p:sp>
+      </p:grpSp>
     </p:spTree>
     <p:extLst>
       <p:ext uri="{BB962C8B-B14F-4D97-AF65-F5344CB8AC3E}">
-        <p14:creationId xmlns:p14="http://schemas.microsoft.com/office/powerpoint/2010/main" val="4094522608"/>
+        <p14:creationId xmlns:p14="http://schemas.microsoft.com/office/powerpoint/2010/main" val="362353029"/>
       </p:ext>
     </p:extLst>
   </p:cSld>
@@ -12028,12 +12334,18 @@
 </p:sld>
 </file>
 
-<file path=ppt/slides/slide28.xml><?xml version="1.0" encoding="utf-8"?>
+<file path=ppt/slides/slide27.xml><?xml version="1.0" encoding="utf-8"?>
 <p:sld xmlns:a="http://schemas.openxmlformats.org/drawingml/2006/main" xmlns:r="http://schemas.openxmlformats.org/officeDocument/2006/relationships" xmlns:p="http://schemas.openxmlformats.org/presentationml/2006/main">
   <p:cSld>
     <p:spTree>
       <p:nvGrpSpPr>
-        <p:cNvPr id="1" name=""/>
+        <p:cNvPr id="1" name="">
+          <a:extLst>
+            <a:ext uri="{FF2B5EF4-FFF2-40B4-BE49-F238E27FC236}">
+              <a16:creationId xmlns:a16="http://schemas.microsoft.com/office/drawing/2014/main" id="{09E59C8B-9B64-058A-DE34-061193F043D6}"/>
+            </a:ext>
+          </a:extLst>
+        </p:cNvPr>
         <p:cNvGrpSpPr/>
         <p:nvPr/>
       </p:nvGrpSpPr>
@@ -12050,7 +12362,7 @@
           <p:cNvPr id="2" name="Título 1">
             <a:extLst>
               <a:ext uri="{FF2B5EF4-FFF2-40B4-BE49-F238E27FC236}">
-                <a16:creationId xmlns:a16="http://schemas.microsoft.com/office/drawing/2014/main" id="{15A13988-3FAB-3D91-E08A-F445845AD8E5}"/>
+                <a16:creationId xmlns:a16="http://schemas.microsoft.com/office/drawing/2014/main" id="{B4C03748-B3FE-5A75-07F2-4B31CC896DE4}"/>
               </a:ext>
             </a:extLst>
           </p:cNvPr>
@@ -12066,7 +12378,10 @@
           <a:bodyPr/>
           <a:lstStyle/>
           <a:p>
-            <a:endParaRPr lang="pt-BR"/>
+            <a:r>
+              <a:rPr lang="pt-BR" dirty="0"/>
+              <a:t>Adicionando as células nas colunas</a:t>
+            </a:r>
           </a:p>
         </p:txBody>
       </p:sp>
@@ -12075,7 +12390,7 @@
           <p:cNvPr id="3" name="Espaço Reservado para Conteúdo 2">
             <a:extLst>
               <a:ext uri="{FF2B5EF4-FFF2-40B4-BE49-F238E27FC236}">
-                <a16:creationId xmlns:a16="http://schemas.microsoft.com/office/drawing/2014/main" id="{088F25C0-AA25-02FF-5D54-55E6DFA4A64C}"/>
+                <a16:creationId xmlns:a16="http://schemas.microsoft.com/office/drawing/2014/main" id="{2E1407A3-C4DA-6769-E2AC-5371461DD9EA}"/>
               </a:ext>
             </a:extLst>
           </p:cNvPr>
@@ -12086,19 +12401,784 @@
             <p:ph idx="1"/>
           </p:nvPr>
         </p:nvSpPr>
-        <p:spPr/>
+        <p:spPr>
+          <a:xfrm>
+            <a:off x="592347" y="1844675"/>
+            <a:ext cx="11007306" cy="1155199"/>
+          </a:xfrm>
+        </p:spPr>
         <p:txBody>
           <a:bodyPr/>
           <a:lstStyle/>
           <a:p>
-            <a:endParaRPr lang="pt-BR"/>
+            <a:r>
+              <a:rPr lang="pt-BR" dirty="0"/>
+              <a:t>Por fim devemos adicionar as </a:t>
+            </a:r>
+            <a:r>
+              <a:rPr lang="pt-BR" dirty="0" err="1"/>
+              <a:t>tag</a:t>
+            </a:r>
+            <a:r>
+              <a:rPr lang="pt-BR" dirty="0"/>
+              <a:t> filhas dentro das </a:t>
+            </a:r>
+            <a:r>
+              <a:rPr lang="pt-BR" dirty="0" err="1"/>
+              <a:t>tags</a:t>
+            </a:r>
+            <a:r>
+              <a:rPr lang="pt-BR" dirty="0"/>
+              <a:t> pais, </a:t>
+            </a:r>
+            <a:r>
+              <a:rPr lang="pt-BR" dirty="0" err="1"/>
+              <a:t>tbody</a:t>
+            </a:r>
+            <a:r>
+              <a:rPr lang="pt-BR" dirty="0"/>
+              <a:t> &gt; </a:t>
+            </a:r>
+            <a:r>
+              <a:rPr lang="pt-BR" dirty="0" err="1"/>
+              <a:t>tr</a:t>
+            </a:r>
+            <a:r>
+              <a:rPr lang="pt-BR" dirty="0"/>
+              <a:t> &gt; </a:t>
+            </a:r>
+            <a:r>
+              <a:rPr lang="pt-BR" dirty="0" err="1"/>
+              <a:t>td</a:t>
+            </a:r>
+            <a:r>
+              <a:rPr lang="pt-BR" dirty="0"/>
+              <a:t>, para isso devemos utilizar o </a:t>
+            </a:r>
+            <a:r>
+              <a:rPr lang="pt-BR" sz="1800" kern="0" spc="-19" dirty="0" err="1">
+                <a:solidFill>
+                  <a:srgbClr val="D73A49"/>
+                </a:solidFill>
+                <a:latin typeface="Consolas" pitchFamily="34" charset="0"/>
+              </a:rPr>
+              <a:t>appendChild</a:t>
+            </a:r>
+            <a:r>
+              <a:rPr lang="pt-BR" sz="1800" kern="0" spc="-19" dirty="0">
+                <a:solidFill>
+                  <a:srgbClr val="D73A49"/>
+                </a:solidFill>
+                <a:latin typeface="Consolas" pitchFamily="34" charset="0"/>
+              </a:rPr>
+              <a:t>()</a:t>
+            </a:r>
+            <a:r>
+              <a:rPr lang="pt-BR" dirty="0"/>
+              <a:t>.	</a:t>
+            </a:r>
           </a:p>
         </p:txBody>
       </p:sp>
+      <p:sp>
+        <p:nvSpPr>
+          <p:cNvPr id="5" name="Espaço Reservado para Conteúdo 5">
+            <a:extLst>
+              <a:ext uri="{FF2B5EF4-FFF2-40B4-BE49-F238E27FC236}">
+                <a16:creationId xmlns:a16="http://schemas.microsoft.com/office/drawing/2014/main" id="{8BC496D7-1D18-2864-B668-BE9FD7000371}"/>
+              </a:ext>
+            </a:extLst>
+          </p:cNvPr>
+          <p:cNvSpPr txBox="1">
+            <a:spLocks/>
+          </p:cNvSpPr>
+          <p:nvPr/>
+        </p:nvSpPr>
+        <p:spPr>
+          <a:xfrm>
+            <a:off x="592347" y="4967376"/>
+            <a:ext cx="5359879" cy="366590"/>
+          </a:xfrm>
+          <a:prstGeom prst="rect">
+            <a:avLst/>
+          </a:prstGeom>
+        </p:spPr>
+        <p:txBody>
+          <a:bodyPr/>
+          <a:lstStyle>
+            <a:lvl1pPr marL="0" indent="0" algn="just" defTabSz="914400" rtl="0" eaLnBrk="1" latinLnBrk="0" hangingPunct="1">
+              <a:lnSpc>
+                <a:spcPct val="150000"/>
+              </a:lnSpc>
+              <a:spcBef>
+                <a:spcPts val="0"/>
+              </a:spcBef>
+              <a:buFont typeface="Arial" panose="020B0604020202020204" pitchFamily="34" charset="0"/>
+              <a:buNone/>
+              <a:defRPr sz="2000" kern="1200">
+                <a:solidFill>
+                  <a:schemeClr val="tx1"/>
+                </a:solidFill>
+                <a:latin typeface="Times New Roman" panose="02020603050405020304" pitchFamily="18" charset="0"/>
+                <a:ea typeface="+mn-ea"/>
+                <a:cs typeface="Times New Roman" panose="02020603050405020304" pitchFamily="18" charset="0"/>
+              </a:defRPr>
+            </a:lvl1pPr>
+            <a:lvl2pPr marL="457200" indent="0" algn="just" defTabSz="914400" rtl="0" eaLnBrk="1" latinLnBrk="0" hangingPunct="1">
+              <a:lnSpc>
+                <a:spcPct val="150000"/>
+              </a:lnSpc>
+              <a:spcBef>
+                <a:spcPts val="0"/>
+              </a:spcBef>
+              <a:buFont typeface="Arial" panose="020B0604020202020204" pitchFamily="34" charset="0"/>
+              <a:buNone/>
+              <a:defRPr sz="1600" kern="1200">
+                <a:solidFill>
+                  <a:schemeClr val="tx1"/>
+                </a:solidFill>
+                <a:latin typeface="Times New Roman" panose="02020603050405020304" pitchFamily="18" charset="0"/>
+                <a:ea typeface="+mn-ea"/>
+                <a:cs typeface="Times New Roman" panose="02020603050405020304" pitchFamily="18" charset="0"/>
+              </a:defRPr>
+            </a:lvl2pPr>
+            <a:lvl3pPr marL="914400" indent="0" algn="just" defTabSz="914400" rtl="0" eaLnBrk="1" latinLnBrk="0" hangingPunct="1">
+              <a:lnSpc>
+                <a:spcPct val="150000"/>
+              </a:lnSpc>
+              <a:spcBef>
+                <a:spcPts val="0"/>
+              </a:spcBef>
+              <a:buFont typeface="Arial" panose="020B0604020202020204" pitchFamily="34" charset="0"/>
+              <a:buNone/>
+              <a:defRPr sz="1400" kern="1200">
+                <a:solidFill>
+                  <a:schemeClr val="tx1"/>
+                </a:solidFill>
+                <a:latin typeface="Times New Roman" panose="02020603050405020304" pitchFamily="18" charset="0"/>
+                <a:ea typeface="+mn-ea"/>
+                <a:cs typeface="Times New Roman" panose="02020603050405020304" pitchFamily="18" charset="0"/>
+              </a:defRPr>
+            </a:lvl3pPr>
+            <a:lvl4pPr marL="1371600" indent="0" algn="just" defTabSz="914400" rtl="0" eaLnBrk="1" latinLnBrk="0" hangingPunct="1">
+              <a:lnSpc>
+                <a:spcPct val="150000"/>
+              </a:lnSpc>
+              <a:spcBef>
+                <a:spcPts val="0"/>
+              </a:spcBef>
+              <a:buFont typeface="Arial" panose="020B0604020202020204" pitchFamily="34" charset="0"/>
+              <a:buNone/>
+              <a:defRPr sz="1200" kern="1200">
+                <a:solidFill>
+                  <a:schemeClr val="tx1"/>
+                </a:solidFill>
+                <a:latin typeface="Times New Roman" panose="02020603050405020304" pitchFamily="18" charset="0"/>
+                <a:ea typeface="+mn-ea"/>
+                <a:cs typeface="Times New Roman" panose="02020603050405020304" pitchFamily="18" charset="0"/>
+              </a:defRPr>
+            </a:lvl4pPr>
+            <a:lvl5pPr marL="1828800" indent="0" algn="just" defTabSz="914400" rtl="0" eaLnBrk="1" latinLnBrk="0" hangingPunct="1">
+              <a:lnSpc>
+                <a:spcPct val="150000"/>
+              </a:lnSpc>
+              <a:spcBef>
+                <a:spcPts val="0"/>
+              </a:spcBef>
+              <a:buFont typeface="Arial" panose="020B0604020202020204" pitchFamily="34" charset="0"/>
+              <a:buNone/>
+              <a:defRPr sz="1000" kern="1200">
+                <a:solidFill>
+                  <a:schemeClr val="tx1"/>
+                </a:solidFill>
+                <a:latin typeface="Times New Roman" panose="02020603050405020304" pitchFamily="18" charset="0"/>
+                <a:ea typeface="+mn-ea"/>
+                <a:cs typeface="Times New Roman" panose="02020603050405020304" pitchFamily="18" charset="0"/>
+              </a:defRPr>
+            </a:lvl5pPr>
+            <a:lvl6pPr marL="2514600" indent="-228600" algn="l" defTabSz="914400" rtl="0" eaLnBrk="1" latinLnBrk="0" hangingPunct="1">
+              <a:lnSpc>
+                <a:spcPct val="90000"/>
+              </a:lnSpc>
+              <a:spcBef>
+                <a:spcPts val="500"/>
+              </a:spcBef>
+              <a:buFont typeface="Arial" panose="020B0604020202020204" pitchFamily="34" charset="0"/>
+              <a:buChar char="•"/>
+              <a:defRPr sz="1800" kern="1200">
+                <a:solidFill>
+                  <a:schemeClr val="tx1"/>
+                </a:solidFill>
+                <a:latin typeface="+mn-lt"/>
+                <a:ea typeface="+mn-ea"/>
+                <a:cs typeface="+mn-cs"/>
+              </a:defRPr>
+            </a:lvl6pPr>
+            <a:lvl7pPr marL="2971800" indent="-228600" algn="l" defTabSz="914400" rtl="0" eaLnBrk="1" latinLnBrk="0" hangingPunct="1">
+              <a:lnSpc>
+                <a:spcPct val="90000"/>
+              </a:lnSpc>
+              <a:spcBef>
+                <a:spcPts val="500"/>
+              </a:spcBef>
+              <a:buFont typeface="Arial" panose="020B0604020202020204" pitchFamily="34" charset="0"/>
+              <a:buChar char="•"/>
+              <a:defRPr sz="1800" kern="1200">
+                <a:solidFill>
+                  <a:schemeClr val="tx1"/>
+                </a:solidFill>
+                <a:latin typeface="+mn-lt"/>
+                <a:ea typeface="+mn-ea"/>
+                <a:cs typeface="+mn-cs"/>
+              </a:defRPr>
+            </a:lvl7pPr>
+            <a:lvl8pPr marL="3429000" indent="-228600" algn="l" defTabSz="914400" rtl="0" eaLnBrk="1" latinLnBrk="0" hangingPunct="1">
+              <a:lnSpc>
+                <a:spcPct val="90000"/>
+              </a:lnSpc>
+              <a:spcBef>
+                <a:spcPts val="500"/>
+              </a:spcBef>
+              <a:buFont typeface="Arial" panose="020B0604020202020204" pitchFamily="34" charset="0"/>
+              <a:buChar char="•"/>
+              <a:defRPr sz="1800" kern="1200">
+                <a:solidFill>
+                  <a:schemeClr val="tx1"/>
+                </a:solidFill>
+                <a:latin typeface="+mn-lt"/>
+                <a:ea typeface="+mn-ea"/>
+                <a:cs typeface="+mn-cs"/>
+              </a:defRPr>
+            </a:lvl8pPr>
+            <a:lvl9pPr marL="3886200" indent="-228600" algn="l" defTabSz="914400" rtl="0" eaLnBrk="1" latinLnBrk="0" hangingPunct="1">
+              <a:lnSpc>
+                <a:spcPct val="90000"/>
+              </a:lnSpc>
+              <a:spcBef>
+                <a:spcPts val="500"/>
+              </a:spcBef>
+              <a:buFont typeface="Arial" panose="020B0604020202020204" pitchFamily="34" charset="0"/>
+              <a:buChar char="•"/>
+              <a:defRPr sz="1800" kern="1200">
+                <a:solidFill>
+                  <a:schemeClr val="tx1"/>
+                </a:solidFill>
+                <a:latin typeface="+mn-lt"/>
+                <a:ea typeface="+mn-ea"/>
+                <a:cs typeface="+mn-cs"/>
+              </a:defRPr>
+            </a:lvl9pPr>
+          </a:lstStyle>
+          <a:p>
+            <a:pPr>
+              <a:lnSpc>
+                <a:spcPct val="100000"/>
+              </a:lnSpc>
+            </a:pPr>
+            <a:r>
+              <a:rPr lang="pt-BR" sz="1600" dirty="0"/>
+              <a:t>Exemplo:</a:t>
+            </a:r>
+          </a:p>
+        </p:txBody>
+      </p:sp>
+      <p:grpSp>
+        <p:nvGrpSpPr>
+          <p:cNvPr id="6" name="Agrupar 5">
+            <a:extLst>
+              <a:ext uri="{FF2B5EF4-FFF2-40B4-BE49-F238E27FC236}">
+                <a16:creationId xmlns:a16="http://schemas.microsoft.com/office/drawing/2014/main" id="{9BC394B3-A903-B554-42B9-9C5B04B0237A}"/>
+              </a:ext>
+            </a:extLst>
+          </p:cNvPr>
+          <p:cNvGrpSpPr/>
+          <p:nvPr/>
+        </p:nvGrpSpPr>
+        <p:grpSpPr>
+          <a:xfrm>
+            <a:off x="749184" y="5654746"/>
+            <a:ext cx="8907433" cy="638572"/>
+            <a:chOff x="749185" y="2527734"/>
+            <a:chExt cx="5284556" cy="638572"/>
+          </a:xfrm>
+        </p:grpSpPr>
+        <p:sp>
+          <p:nvSpPr>
+            <p:cNvPr id="7" name="Shape 20">
+              <a:extLst>
+                <a:ext uri="{FF2B5EF4-FFF2-40B4-BE49-F238E27FC236}">
+                  <a16:creationId xmlns:a16="http://schemas.microsoft.com/office/drawing/2014/main" id="{CD72BC75-58AF-193F-C5B6-AAB608FD901A}"/>
+                </a:ext>
+              </a:extLst>
+            </p:cNvPr>
+            <p:cNvSpPr/>
+            <p:nvPr/>
+          </p:nvSpPr>
+          <p:spPr>
+            <a:xfrm>
+              <a:off x="749185" y="2527734"/>
+              <a:ext cx="5284556" cy="638572"/>
+            </a:xfrm>
+            <a:prstGeom prst="roundRect">
+              <a:avLst>
+                <a:gd name="adj" fmla="val 8081"/>
+              </a:avLst>
+            </a:prstGeom>
+            <a:solidFill>
+              <a:srgbClr val="F2F2F2"/>
+            </a:solidFill>
+            <a:ln/>
+          </p:spPr>
+          <p:txBody>
+            <a:bodyPr/>
+            <a:lstStyle/>
+            <a:p>
+              <a:endParaRPr lang="pt-BR"/>
+            </a:p>
+          </p:txBody>
+        </p:sp>
+        <p:sp>
+          <p:nvSpPr>
+            <p:cNvPr id="8" name="Text 21">
+              <a:extLst>
+                <a:ext uri="{FF2B5EF4-FFF2-40B4-BE49-F238E27FC236}">
+                  <a16:creationId xmlns:a16="http://schemas.microsoft.com/office/drawing/2014/main" id="{29FD1182-1F14-030B-73C1-48D8B70AB029}"/>
+                </a:ext>
+              </a:extLst>
+            </p:cNvPr>
+            <p:cNvSpPr/>
+            <p:nvPr/>
+          </p:nvSpPr>
+          <p:spPr>
+            <a:xfrm>
+              <a:off x="896521" y="2712610"/>
+              <a:ext cx="4989884" cy="268820"/>
+            </a:xfrm>
+            <a:prstGeom prst="rect">
+              <a:avLst/>
+            </a:prstGeom>
+            <a:noFill/>
+            <a:ln/>
+          </p:spPr>
+          <p:txBody>
+            <a:bodyPr wrap="square" lIns="0" tIns="0" rIns="0" bIns="0" rtlCol="0" anchor="t">
+              <a:noAutofit/>
+            </a:bodyPr>
+            <a:lstStyle/>
+            <a:p>
+              <a:pPr marL="0" indent="0" algn="l">
+                <a:buNone/>
+              </a:pPr>
+              <a:r>
+                <a:rPr lang="en-US" kern="0" spc="-19" dirty="0">
+                  <a:solidFill>
+                    <a:srgbClr val="D73A49"/>
+                  </a:solidFill>
+                  <a:latin typeface="Consolas" pitchFamily="34" charset="0"/>
+                  <a:ea typeface="Consolas" pitchFamily="34" charset="-122"/>
+                  <a:cs typeface="Consolas" pitchFamily="34" charset="-120"/>
+                </a:rPr>
+                <a:t> </a:t>
+              </a:r>
+              <a:r>
+                <a:rPr lang="en-US" kern="0" spc="-19" dirty="0" err="1">
+                  <a:solidFill>
+                    <a:srgbClr val="D73A49"/>
+                  </a:solidFill>
+                  <a:latin typeface="Consolas" pitchFamily="34" charset="0"/>
+                  <a:ea typeface="Consolas" pitchFamily="34" charset="-122"/>
+                  <a:cs typeface="Consolas" pitchFamily="34" charset="-120"/>
+                </a:rPr>
+                <a:t>tr.appendChild</a:t>
+              </a:r>
+              <a:r>
+                <a:rPr lang="en-US" kern="0" spc="-19" dirty="0">
+                  <a:solidFill>
+                    <a:srgbClr val="D73A49"/>
+                  </a:solidFill>
+                  <a:latin typeface="Consolas" pitchFamily="34" charset="0"/>
+                  <a:ea typeface="Consolas" pitchFamily="34" charset="-122"/>
+                  <a:cs typeface="Consolas" pitchFamily="34" charset="-120"/>
+                </a:rPr>
+                <a:t>(</a:t>
+              </a:r>
+              <a:r>
+                <a:rPr lang="en-US" kern="0" spc="-19" dirty="0" err="1">
+                  <a:solidFill>
+                    <a:srgbClr val="D73A49"/>
+                  </a:solidFill>
+                  <a:latin typeface="Consolas" pitchFamily="34" charset="0"/>
+                  <a:ea typeface="Consolas" pitchFamily="34" charset="-122"/>
+                  <a:cs typeface="Consolas" pitchFamily="34" charset="-120"/>
+                </a:rPr>
+                <a:t>tdAcoes</a:t>
+              </a:r>
+              <a:r>
+                <a:rPr lang="en-US" kern="0" spc="-19" dirty="0">
+                  <a:solidFill>
+                    <a:srgbClr val="D73A49"/>
+                  </a:solidFill>
+                  <a:latin typeface="Consolas" pitchFamily="34" charset="0"/>
+                  <a:ea typeface="Consolas" pitchFamily="34" charset="-122"/>
+                  <a:cs typeface="Consolas" pitchFamily="34" charset="-120"/>
+                </a:rPr>
+                <a:t>)</a:t>
+              </a:r>
+              <a:endParaRPr lang="en-US" dirty="0"/>
+            </a:p>
+          </p:txBody>
+        </p:sp>
+      </p:grpSp>
+      <p:sp>
+        <p:nvSpPr>
+          <p:cNvPr id="10" name="Espaço Reservado para Conteúdo 5">
+            <a:extLst>
+              <a:ext uri="{FF2B5EF4-FFF2-40B4-BE49-F238E27FC236}">
+                <a16:creationId xmlns:a16="http://schemas.microsoft.com/office/drawing/2014/main" id="{36AF3A33-C816-E8BB-1506-18EBF065D805}"/>
+              </a:ext>
+            </a:extLst>
+          </p:cNvPr>
+          <p:cNvSpPr txBox="1">
+            <a:spLocks/>
+          </p:cNvSpPr>
+          <p:nvPr/>
+        </p:nvSpPr>
+        <p:spPr>
+          <a:xfrm>
+            <a:off x="592347" y="3320654"/>
+            <a:ext cx="8189344" cy="366590"/>
+          </a:xfrm>
+          <a:prstGeom prst="rect">
+            <a:avLst/>
+          </a:prstGeom>
+        </p:spPr>
+        <p:txBody>
+          <a:bodyPr/>
+          <a:lstStyle>
+            <a:lvl1pPr marL="0" indent="0" algn="just" defTabSz="914400" rtl="0" eaLnBrk="1" latinLnBrk="0" hangingPunct="1">
+              <a:lnSpc>
+                <a:spcPct val="150000"/>
+              </a:lnSpc>
+              <a:spcBef>
+                <a:spcPts val="0"/>
+              </a:spcBef>
+              <a:buFont typeface="Arial" panose="020B0604020202020204" pitchFamily="34" charset="0"/>
+              <a:buNone/>
+              <a:defRPr sz="2000" kern="1200">
+                <a:solidFill>
+                  <a:schemeClr val="tx1"/>
+                </a:solidFill>
+                <a:latin typeface="Times New Roman" panose="02020603050405020304" pitchFamily="18" charset="0"/>
+                <a:ea typeface="+mn-ea"/>
+                <a:cs typeface="Times New Roman" panose="02020603050405020304" pitchFamily="18" charset="0"/>
+              </a:defRPr>
+            </a:lvl1pPr>
+            <a:lvl2pPr marL="457200" indent="0" algn="just" defTabSz="914400" rtl="0" eaLnBrk="1" latinLnBrk="0" hangingPunct="1">
+              <a:lnSpc>
+                <a:spcPct val="150000"/>
+              </a:lnSpc>
+              <a:spcBef>
+                <a:spcPts val="0"/>
+              </a:spcBef>
+              <a:buFont typeface="Arial" panose="020B0604020202020204" pitchFamily="34" charset="0"/>
+              <a:buNone/>
+              <a:defRPr sz="1600" kern="1200">
+                <a:solidFill>
+                  <a:schemeClr val="tx1"/>
+                </a:solidFill>
+                <a:latin typeface="Times New Roman" panose="02020603050405020304" pitchFamily="18" charset="0"/>
+                <a:ea typeface="+mn-ea"/>
+                <a:cs typeface="Times New Roman" panose="02020603050405020304" pitchFamily="18" charset="0"/>
+              </a:defRPr>
+            </a:lvl2pPr>
+            <a:lvl3pPr marL="914400" indent="0" algn="just" defTabSz="914400" rtl="0" eaLnBrk="1" latinLnBrk="0" hangingPunct="1">
+              <a:lnSpc>
+                <a:spcPct val="150000"/>
+              </a:lnSpc>
+              <a:spcBef>
+                <a:spcPts val="0"/>
+              </a:spcBef>
+              <a:buFont typeface="Arial" panose="020B0604020202020204" pitchFamily="34" charset="0"/>
+              <a:buNone/>
+              <a:defRPr sz="1400" kern="1200">
+                <a:solidFill>
+                  <a:schemeClr val="tx1"/>
+                </a:solidFill>
+                <a:latin typeface="Times New Roman" panose="02020603050405020304" pitchFamily="18" charset="0"/>
+                <a:ea typeface="+mn-ea"/>
+                <a:cs typeface="Times New Roman" panose="02020603050405020304" pitchFamily="18" charset="0"/>
+              </a:defRPr>
+            </a:lvl3pPr>
+            <a:lvl4pPr marL="1371600" indent="0" algn="just" defTabSz="914400" rtl="0" eaLnBrk="1" latinLnBrk="0" hangingPunct="1">
+              <a:lnSpc>
+                <a:spcPct val="150000"/>
+              </a:lnSpc>
+              <a:spcBef>
+                <a:spcPts val="0"/>
+              </a:spcBef>
+              <a:buFont typeface="Arial" panose="020B0604020202020204" pitchFamily="34" charset="0"/>
+              <a:buNone/>
+              <a:defRPr sz="1200" kern="1200">
+                <a:solidFill>
+                  <a:schemeClr val="tx1"/>
+                </a:solidFill>
+                <a:latin typeface="Times New Roman" panose="02020603050405020304" pitchFamily="18" charset="0"/>
+                <a:ea typeface="+mn-ea"/>
+                <a:cs typeface="Times New Roman" panose="02020603050405020304" pitchFamily="18" charset="0"/>
+              </a:defRPr>
+            </a:lvl4pPr>
+            <a:lvl5pPr marL="1828800" indent="0" algn="just" defTabSz="914400" rtl="0" eaLnBrk="1" latinLnBrk="0" hangingPunct="1">
+              <a:lnSpc>
+                <a:spcPct val="150000"/>
+              </a:lnSpc>
+              <a:spcBef>
+                <a:spcPts val="0"/>
+              </a:spcBef>
+              <a:buFont typeface="Arial" panose="020B0604020202020204" pitchFamily="34" charset="0"/>
+              <a:buNone/>
+              <a:defRPr sz="1000" kern="1200">
+                <a:solidFill>
+                  <a:schemeClr val="tx1"/>
+                </a:solidFill>
+                <a:latin typeface="Times New Roman" panose="02020603050405020304" pitchFamily="18" charset="0"/>
+                <a:ea typeface="+mn-ea"/>
+                <a:cs typeface="Times New Roman" panose="02020603050405020304" pitchFamily="18" charset="0"/>
+              </a:defRPr>
+            </a:lvl5pPr>
+            <a:lvl6pPr marL="2514600" indent="-228600" algn="l" defTabSz="914400" rtl="0" eaLnBrk="1" latinLnBrk="0" hangingPunct="1">
+              <a:lnSpc>
+                <a:spcPct val="90000"/>
+              </a:lnSpc>
+              <a:spcBef>
+                <a:spcPts val="500"/>
+              </a:spcBef>
+              <a:buFont typeface="Arial" panose="020B0604020202020204" pitchFamily="34" charset="0"/>
+              <a:buChar char="•"/>
+              <a:defRPr sz="1800" kern="1200">
+                <a:solidFill>
+                  <a:schemeClr val="tx1"/>
+                </a:solidFill>
+                <a:latin typeface="+mn-lt"/>
+                <a:ea typeface="+mn-ea"/>
+                <a:cs typeface="+mn-cs"/>
+              </a:defRPr>
+            </a:lvl6pPr>
+            <a:lvl7pPr marL="2971800" indent="-228600" algn="l" defTabSz="914400" rtl="0" eaLnBrk="1" latinLnBrk="0" hangingPunct="1">
+              <a:lnSpc>
+                <a:spcPct val="90000"/>
+              </a:lnSpc>
+              <a:spcBef>
+                <a:spcPts val="500"/>
+              </a:spcBef>
+              <a:buFont typeface="Arial" panose="020B0604020202020204" pitchFamily="34" charset="0"/>
+              <a:buChar char="•"/>
+              <a:defRPr sz="1800" kern="1200">
+                <a:solidFill>
+                  <a:schemeClr val="tx1"/>
+                </a:solidFill>
+                <a:latin typeface="+mn-lt"/>
+                <a:ea typeface="+mn-ea"/>
+                <a:cs typeface="+mn-cs"/>
+              </a:defRPr>
+            </a:lvl7pPr>
+            <a:lvl8pPr marL="3429000" indent="-228600" algn="l" defTabSz="914400" rtl="0" eaLnBrk="1" latinLnBrk="0" hangingPunct="1">
+              <a:lnSpc>
+                <a:spcPct val="90000"/>
+              </a:lnSpc>
+              <a:spcBef>
+                <a:spcPts val="500"/>
+              </a:spcBef>
+              <a:buFont typeface="Arial" panose="020B0604020202020204" pitchFamily="34" charset="0"/>
+              <a:buChar char="•"/>
+              <a:defRPr sz="1800" kern="1200">
+                <a:solidFill>
+                  <a:schemeClr val="tx1"/>
+                </a:solidFill>
+                <a:latin typeface="+mn-lt"/>
+                <a:ea typeface="+mn-ea"/>
+                <a:cs typeface="+mn-cs"/>
+              </a:defRPr>
+            </a:lvl8pPr>
+            <a:lvl9pPr marL="3886200" indent="-228600" algn="l" defTabSz="914400" rtl="0" eaLnBrk="1" latinLnBrk="0" hangingPunct="1">
+              <a:lnSpc>
+                <a:spcPct val="90000"/>
+              </a:lnSpc>
+              <a:spcBef>
+                <a:spcPts val="500"/>
+              </a:spcBef>
+              <a:buFont typeface="Arial" panose="020B0604020202020204" pitchFamily="34" charset="0"/>
+              <a:buChar char="•"/>
+              <a:defRPr sz="1800" kern="1200">
+                <a:solidFill>
+                  <a:schemeClr val="tx1"/>
+                </a:solidFill>
+                <a:latin typeface="+mn-lt"/>
+                <a:ea typeface="+mn-ea"/>
+                <a:cs typeface="+mn-cs"/>
+              </a:defRPr>
+            </a:lvl9pPr>
+          </a:lstStyle>
+          <a:p>
+            <a:pPr>
+              <a:lnSpc>
+                <a:spcPct val="100000"/>
+              </a:lnSpc>
+            </a:pPr>
+            <a:r>
+              <a:rPr lang="pt-BR" sz="1600" dirty="0"/>
+              <a:t>Sintaxe:</a:t>
+            </a:r>
+          </a:p>
+        </p:txBody>
+      </p:sp>
+      <p:grpSp>
+        <p:nvGrpSpPr>
+          <p:cNvPr id="11" name="Agrupar 10">
+            <a:extLst>
+              <a:ext uri="{FF2B5EF4-FFF2-40B4-BE49-F238E27FC236}">
+                <a16:creationId xmlns:a16="http://schemas.microsoft.com/office/drawing/2014/main" id="{8F07803E-551B-3418-319F-46D89A4488DD}"/>
+              </a:ext>
+            </a:extLst>
+          </p:cNvPr>
+          <p:cNvGrpSpPr/>
+          <p:nvPr/>
+        </p:nvGrpSpPr>
+        <p:grpSpPr>
+          <a:xfrm>
+            <a:off x="749184" y="4008024"/>
+            <a:ext cx="8907433" cy="638572"/>
+            <a:chOff x="749185" y="2527734"/>
+            <a:chExt cx="5284556" cy="638572"/>
+          </a:xfrm>
+        </p:grpSpPr>
+        <p:sp>
+          <p:nvSpPr>
+            <p:cNvPr id="12" name="Shape 20">
+              <a:extLst>
+                <a:ext uri="{FF2B5EF4-FFF2-40B4-BE49-F238E27FC236}">
+                  <a16:creationId xmlns:a16="http://schemas.microsoft.com/office/drawing/2014/main" id="{76866694-27FE-B835-FDB0-D569EF59E333}"/>
+                </a:ext>
+              </a:extLst>
+            </p:cNvPr>
+            <p:cNvSpPr/>
+            <p:nvPr/>
+          </p:nvSpPr>
+          <p:spPr>
+            <a:xfrm>
+              <a:off x="749185" y="2527734"/>
+              <a:ext cx="5284556" cy="638572"/>
+            </a:xfrm>
+            <a:prstGeom prst="roundRect">
+              <a:avLst>
+                <a:gd name="adj" fmla="val 8081"/>
+              </a:avLst>
+            </a:prstGeom>
+            <a:solidFill>
+              <a:srgbClr val="F2F2F2"/>
+            </a:solidFill>
+            <a:ln/>
+          </p:spPr>
+          <p:txBody>
+            <a:bodyPr/>
+            <a:lstStyle/>
+            <a:p>
+              <a:endParaRPr lang="pt-BR"/>
+            </a:p>
+          </p:txBody>
+        </p:sp>
+        <p:sp>
+          <p:nvSpPr>
+            <p:cNvPr id="13" name="Text 21">
+              <a:extLst>
+                <a:ext uri="{FF2B5EF4-FFF2-40B4-BE49-F238E27FC236}">
+                  <a16:creationId xmlns:a16="http://schemas.microsoft.com/office/drawing/2014/main" id="{BB61A435-1458-DF1D-EB02-83B84886875D}"/>
+                </a:ext>
+              </a:extLst>
+            </p:cNvPr>
+            <p:cNvSpPr/>
+            <p:nvPr/>
+          </p:nvSpPr>
+          <p:spPr>
+            <a:xfrm>
+              <a:off x="896521" y="2712610"/>
+              <a:ext cx="4989884" cy="268820"/>
+            </a:xfrm>
+            <a:prstGeom prst="rect">
+              <a:avLst/>
+            </a:prstGeom>
+            <a:noFill/>
+            <a:ln/>
+          </p:spPr>
+          <p:txBody>
+            <a:bodyPr wrap="square" lIns="0" tIns="0" rIns="0" bIns="0" rtlCol="0" anchor="t">
+              <a:noAutofit/>
+            </a:bodyPr>
+            <a:lstStyle/>
+            <a:p>
+              <a:r>
+                <a:rPr lang="en-US" kern="0" spc="-19" dirty="0">
+                  <a:solidFill>
+                    <a:srgbClr val="D73A49"/>
+                  </a:solidFill>
+                  <a:latin typeface="Consolas" pitchFamily="34" charset="0"/>
+                  <a:ea typeface="Consolas" pitchFamily="34" charset="-122"/>
+                  <a:cs typeface="Consolas" pitchFamily="34" charset="-120"/>
+                </a:rPr>
+                <a:t> </a:t>
+              </a:r>
+              <a:r>
+                <a:rPr lang="en-US" kern="0" spc="-19" dirty="0" err="1">
+                  <a:solidFill>
+                    <a:srgbClr val="D73A49"/>
+                  </a:solidFill>
+                  <a:latin typeface="Consolas" pitchFamily="34" charset="0"/>
+                  <a:ea typeface="Consolas" pitchFamily="34" charset="-122"/>
+                  <a:cs typeface="Consolas" pitchFamily="34" charset="-120"/>
+                </a:rPr>
+                <a:t>tagPai.appendChild</a:t>
+              </a:r>
+              <a:r>
+                <a:rPr lang="en-US" kern="0" spc="-19" dirty="0">
+                  <a:solidFill>
+                    <a:srgbClr val="D73A49"/>
+                  </a:solidFill>
+                  <a:latin typeface="Consolas" pitchFamily="34" charset="0"/>
+                  <a:ea typeface="Consolas" pitchFamily="34" charset="-122"/>
+                  <a:cs typeface="Consolas" pitchFamily="34" charset="-120"/>
+                </a:rPr>
+                <a:t>(</a:t>
+              </a:r>
+              <a:r>
+                <a:rPr lang="en-US" kern="0" spc="-19" dirty="0" err="1">
+                  <a:solidFill>
+                    <a:srgbClr val="D73A49"/>
+                  </a:solidFill>
+                  <a:latin typeface="Consolas" pitchFamily="34" charset="0"/>
+                  <a:ea typeface="Consolas" pitchFamily="34" charset="-122"/>
+                  <a:cs typeface="Consolas" pitchFamily="34" charset="-120"/>
+                </a:rPr>
+                <a:t>tagFilha</a:t>
+              </a:r>
+              <a:r>
+                <a:rPr lang="en-US" kern="0" spc="-19" dirty="0">
+                  <a:solidFill>
+                    <a:srgbClr val="D73A49"/>
+                  </a:solidFill>
+                  <a:latin typeface="Consolas" pitchFamily="34" charset="0"/>
+                  <a:ea typeface="Consolas" pitchFamily="34" charset="-122"/>
+                  <a:cs typeface="Consolas" pitchFamily="34" charset="-120"/>
+                </a:rPr>
+                <a:t>)</a:t>
+              </a:r>
+              <a:endParaRPr lang="en-US" dirty="0"/>
+            </a:p>
+          </p:txBody>
+        </p:sp>
+      </p:grpSp>
     </p:spTree>
     <p:extLst>
       <p:ext uri="{BB962C8B-B14F-4D97-AF65-F5344CB8AC3E}">
-        <p14:creationId xmlns:p14="http://schemas.microsoft.com/office/powerpoint/2010/main" val="1976832202"/>
+        <p14:creationId xmlns:p14="http://schemas.microsoft.com/office/powerpoint/2010/main" val="613354053"/>
       </p:ext>
     </p:extLst>
   </p:cSld>

--- a/SI/Programação para Internet/Módulo 2 - JavaScript/Aula03 - Implementado o CRUD/Implementando CRUD.pptx
+++ b/SI/Programação para Internet/Módulo 2 - JavaScript/Aula03 - Implementado o CRUD/Implementando CRUD.pptx
@@ -9387,15 +9387,7 @@
           <a:p>
             <a:r>
               <a:rPr lang="pt-BR" dirty="0"/>
-              <a:t>A primeira etapa do nosso programa é validar se existe algum produto no estoque, para removermos o </a:t>
-            </a:r>
-            <a:r>
-              <a:rPr lang="pt-BR" dirty="0" err="1"/>
-              <a:t>icone</a:t>
-            </a:r>
-            <a:r>
-              <a:rPr lang="pt-BR" dirty="0"/>
-              <a:t> e o texto </a:t>
+              <a:t>A primeira etapa do nosso programa é validar se existe algum produto no estoque, para removermos o ícone e o texto </a:t>
             </a:r>
             <a:r>
               <a:rPr lang="pt-BR" b="1" dirty="0"/>
@@ -9573,9 +9565,6 @@
               <a:t>, para isso devemos adicionar o seguinte comando.</a:t>
             </a:r>
           </a:p>
-          <a:p>
-            <a:endParaRPr lang="pt-BR" dirty="0"/>
-          </a:p>
         </p:txBody>
       </p:sp>
       <p:sp>
@@ -10259,7 +10248,7 @@
           <a:p>
             <a:r>
               <a:rPr lang="pt-BR" dirty="0"/>
-              <a:t>Agora que removemos a informação, quando não possuímos produtos cadastrados, agora iremos adicionar as linhas caso tenhamos algum produto cadastrado.</a:t>
+              <a:t>Agora que removemos a informação, quando não possuímos produtos cadastrados, iremos adicionar as linhas caso tenhamos algum produto cadastrado.</a:t>
             </a:r>
           </a:p>
         </p:txBody>
